--- a/Final/Figures/dipole.pptx
+++ b/Final/Figures/dipole.pptx
@@ -2,14 +2,14 @@
 <file path=ppt/presentation.xml><?xml version="1.0" encoding="utf-8"?>
 <p:presentation xmlns:a="http://schemas.openxmlformats.org/drawingml/2006/main" xmlns:r="http://schemas.openxmlformats.org/officeDocument/2006/relationships" xmlns:p="http://schemas.openxmlformats.org/presentationml/2006/main" saveSubsetFonts="1">
   <p:sldMasterIdLst>
-    <p:sldMasterId id="2147483708" r:id="rId1"/>
+    <p:sldMasterId id="2147483744" r:id="rId1"/>
   </p:sldMasterIdLst>
   <p:sldIdLst>
     <p:sldId id="256" r:id="rId2"/>
     <p:sldId id="257" r:id="rId3"/>
     <p:sldId id="258" r:id="rId4"/>
   </p:sldIdLst>
-  <p:sldSz cx="9359900" cy="6119813"/>
+  <p:sldSz cx="9906000" cy="5400675"/>
   <p:notesSz cx="6858000" cy="9144000"/>
   <p:defaultTextStyle>
     <a:defPPr>
@@ -143,15 +143,15 @@
         </p:nvSpPr>
         <p:spPr>
           <a:xfrm>
-            <a:off x="701993" y="1001553"/>
-            <a:ext cx="7955915" cy="2130602"/>
+            <a:off x="1238250" y="883861"/>
+            <a:ext cx="7429500" cy="1880235"/>
           </a:xfrm>
         </p:spPr>
         <p:txBody>
           <a:bodyPr anchor="b"/>
           <a:lstStyle>
             <a:lvl1pPr algn="ctr">
-              <a:defRPr sz="5354"/>
+              <a:defRPr sz="4725"/>
             </a:lvl1pPr>
           </a:lstStyle>
           <a:p>
@@ -175,8 +175,8 @@
         </p:nvSpPr>
         <p:spPr>
           <a:xfrm>
-            <a:off x="1169988" y="3214319"/>
-            <a:ext cx="7019925" cy="1477538"/>
+            <a:off x="1238250" y="2836605"/>
+            <a:ext cx="7429500" cy="1303913"/>
           </a:xfrm>
         </p:spPr>
         <p:txBody>
@@ -184,39 +184,39 @@
           <a:lstStyle>
             <a:lvl1pPr marL="0" indent="0" algn="ctr">
               <a:buNone/>
-              <a:defRPr sz="2142"/>
+              <a:defRPr sz="1890"/>
             </a:lvl1pPr>
-            <a:lvl2pPr marL="408005" indent="0" algn="ctr">
+            <a:lvl2pPr marL="360045" indent="0" algn="ctr">
               <a:buNone/>
-              <a:defRPr sz="1785"/>
+              <a:defRPr sz="1575"/>
             </a:lvl2pPr>
-            <a:lvl3pPr marL="816011" indent="0" algn="ctr">
+            <a:lvl3pPr marL="720090" indent="0" algn="ctr">
               <a:buNone/>
-              <a:defRPr sz="1606"/>
+              <a:defRPr sz="1418"/>
             </a:lvl3pPr>
-            <a:lvl4pPr marL="1224016" indent="0" algn="ctr">
+            <a:lvl4pPr marL="1080135" indent="0" algn="ctr">
               <a:buNone/>
-              <a:defRPr sz="1428"/>
+              <a:defRPr sz="1260"/>
             </a:lvl4pPr>
-            <a:lvl5pPr marL="1632021" indent="0" algn="ctr">
+            <a:lvl5pPr marL="1440180" indent="0" algn="ctr">
               <a:buNone/>
-              <a:defRPr sz="1428"/>
+              <a:defRPr sz="1260"/>
             </a:lvl5pPr>
-            <a:lvl6pPr marL="2040026" indent="0" algn="ctr">
+            <a:lvl6pPr marL="1800225" indent="0" algn="ctr">
               <a:buNone/>
-              <a:defRPr sz="1428"/>
+              <a:defRPr sz="1260"/>
             </a:lvl6pPr>
-            <a:lvl7pPr marL="2448032" indent="0" algn="ctr">
+            <a:lvl7pPr marL="2160270" indent="0" algn="ctr">
               <a:buNone/>
-              <a:defRPr sz="1428"/>
+              <a:defRPr sz="1260"/>
             </a:lvl7pPr>
-            <a:lvl8pPr marL="2856037" indent="0" algn="ctr">
+            <a:lvl8pPr marL="2520315" indent="0" algn="ctr">
               <a:buNone/>
-              <a:defRPr sz="1428"/>
+              <a:defRPr sz="1260"/>
             </a:lvl8pPr>
-            <a:lvl9pPr marL="3264042" indent="0" algn="ctr">
+            <a:lvl9pPr marL="2880360" indent="0" algn="ctr">
               <a:buNone/>
-              <a:defRPr sz="1428"/>
+              <a:defRPr sz="1260"/>
             </a:lvl9pPr>
           </a:lstStyle>
           <a:p>
@@ -245,7 +245,7 @@
           <a:p>
             <a:fld id="{306DA3B7-5B64-4C08-AEF8-96FFEFD7A1CA}" type="datetimeFigureOut">
               <a:rPr lang="zh-TW" altLang="en-US" smtClean="0"/>
-              <a:t>2026/4/28</a:t>
+              <a:t>2026/5/21</a:t>
             </a:fld>
             <a:endParaRPr lang="zh-TW" altLang="en-US"/>
           </a:p>
@@ -296,7 +296,7 @@
     </p:spTree>
     <p:extLst>
       <p:ext uri="{BB962C8B-B14F-4D97-AF65-F5344CB8AC3E}">
-        <p14:creationId xmlns:p14="http://schemas.microsoft.com/office/powerpoint/2010/main" val="4171348423"/>
+        <p14:creationId xmlns:p14="http://schemas.microsoft.com/office/powerpoint/2010/main" val="1455866177"/>
       </p:ext>
     </p:extLst>
   </p:cSld>
@@ -415,7 +415,7 @@
           <a:p>
             <a:fld id="{306DA3B7-5B64-4C08-AEF8-96FFEFD7A1CA}" type="datetimeFigureOut">
               <a:rPr lang="zh-TW" altLang="en-US" smtClean="0"/>
-              <a:t>2026/4/28</a:t>
+              <a:t>2026/5/21</a:t>
             </a:fld>
             <a:endParaRPr lang="zh-TW" altLang="en-US"/>
           </a:p>
@@ -466,7 +466,7 @@
     </p:spTree>
     <p:extLst>
       <p:ext uri="{BB962C8B-B14F-4D97-AF65-F5344CB8AC3E}">
-        <p14:creationId xmlns:p14="http://schemas.microsoft.com/office/powerpoint/2010/main" val="270104221"/>
+        <p14:creationId xmlns:p14="http://schemas.microsoft.com/office/powerpoint/2010/main" val="2197049621"/>
       </p:ext>
     </p:extLst>
   </p:cSld>
@@ -505,8 +505,8 @@
         </p:nvSpPr>
         <p:spPr>
           <a:xfrm>
-            <a:off x="6698179" y="325823"/>
-            <a:ext cx="2018228" cy="5186259"/>
+            <a:off x="7088981" y="287536"/>
+            <a:ext cx="2135981" cy="4576822"/>
           </a:xfrm>
         </p:spPr>
         <p:txBody>
@@ -533,8 +533,8 @@
         </p:nvSpPr>
         <p:spPr>
           <a:xfrm>
-            <a:off x="643493" y="325823"/>
-            <a:ext cx="5937687" cy="5186259"/>
+            <a:off x="681037" y="287536"/>
+            <a:ext cx="6284119" cy="4576822"/>
           </a:xfrm>
         </p:spPr>
         <p:txBody>
@@ -595,7 +595,7 @@
           <a:p>
             <a:fld id="{306DA3B7-5B64-4C08-AEF8-96FFEFD7A1CA}" type="datetimeFigureOut">
               <a:rPr lang="zh-TW" altLang="en-US" smtClean="0"/>
-              <a:t>2026/4/28</a:t>
+              <a:t>2026/5/21</a:t>
             </a:fld>
             <a:endParaRPr lang="zh-TW" altLang="en-US"/>
           </a:p>
@@ -646,7 +646,7 @@
     </p:spTree>
     <p:extLst>
       <p:ext uri="{BB962C8B-B14F-4D97-AF65-F5344CB8AC3E}">
-        <p14:creationId xmlns:p14="http://schemas.microsoft.com/office/powerpoint/2010/main" val="3189620692"/>
+        <p14:creationId xmlns:p14="http://schemas.microsoft.com/office/powerpoint/2010/main" val="2847984823"/>
       </p:ext>
     </p:extLst>
   </p:cSld>
@@ -765,7 +765,7 @@
           <a:p>
             <a:fld id="{306DA3B7-5B64-4C08-AEF8-96FFEFD7A1CA}" type="datetimeFigureOut">
               <a:rPr lang="zh-TW" altLang="en-US" smtClean="0"/>
-              <a:t>2026/4/28</a:t>
+              <a:t>2026/5/21</a:t>
             </a:fld>
             <a:endParaRPr lang="zh-TW" altLang="en-US"/>
           </a:p>
@@ -816,7 +816,7 @@
     </p:spTree>
     <p:extLst>
       <p:ext uri="{BB962C8B-B14F-4D97-AF65-F5344CB8AC3E}">
-        <p14:creationId xmlns:p14="http://schemas.microsoft.com/office/powerpoint/2010/main" val="2879090055"/>
+        <p14:creationId xmlns:p14="http://schemas.microsoft.com/office/powerpoint/2010/main" val="3881741055"/>
       </p:ext>
     </p:extLst>
   </p:cSld>
@@ -855,15 +855,15 @@
         </p:nvSpPr>
         <p:spPr>
           <a:xfrm>
-            <a:off x="638619" y="1525705"/>
-            <a:ext cx="8072914" cy="2545672"/>
+            <a:off x="675878" y="1346419"/>
+            <a:ext cx="8543925" cy="2246530"/>
           </a:xfrm>
         </p:spPr>
         <p:txBody>
           <a:bodyPr anchor="b"/>
           <a:lstStyle>
             <a:lvl1pPr>
-              <a:defRPr sz="5354"/>
+              <a:defRPr sz="4725"/>
             </a:lvl1pPr>
           </a:lstStyle>
           <a:p>
@@ -887,8 +887,8 @@
         </p:nvSpPr>
         <p:spPr>
           <a:xfrm>
-            <a:off x="638619" y="4095460"/>
-            <a:ext cx="8072914" cy="1338709"/>
+            <a:off x="675878" y="3614203"/>
+            <a:ext cx="8543925" cy="1181397"/>
           </a:xfrm>
         </p:spPr>
         <p:txBody>
@@ -896,15 +896,17 @@
           <a:lstStyle>
             <a:lvl1pPr marL="0" indent="0">
               <a:buNone/>
-              <a:defRPr sz="2142">
+              <a:defRPr sz="1890">
                 <a:solidFill>
-                  <a:schemeClr val="tx1"/>
+                  <a:schemeClr val="tx1">
+                    <a:tint val="75000"/>
+                  </a:schemeClr>
                 </a:solidFill>
               </a:defRPr>
             </a:lvl1pPr>
-            <a:lvl2pPr marL="408005" indent="0">
+            <a:lvl2pPr marL="360045" indent="0">
               <a:buNone/>
-              <a:defRPr sz="1785">
+              <a:defRPr sz="1575">
                 <a:solidFill>
                   <a:schemeClr val="tx1">
                     <a:tint val="75000"/>
@@ -912,9 +914,9 @@
                 </a:solidFill>
               </a:defRPr>
             </a:lvl2pPr>
-            <a:lvl3pPr marL="816011" indent="0">
+            <a:lvl3pPr marL="720090" indent="0">
               <a:buNone/>
-              <a:defRPr sz="1606">
+              <a:defRPr sz="1418">
                 <a:solidFill>
                   <a:schemeClr val="tx1">
                     <a:tint val="75000"/>
@@ -922,9 +924,9 @@
                 </a:solidFill>
               </a:defRPr>
             </a:lvl3pPr>
-            <a:lvl4pPr marL="1224016" indent="0">
+            <a:lvl4pPr marL="1080135" indent="0">
               <a:buNone/>
-              <a:defRPr sz="1428">
+              <a:defRPr sz="1260">
                 <a:solidFill>
                   <a:schemeClr val="tx1">
                     <a:tint val="75000"/>
@@ -932,9 +934,9 @@
                 </a:solidFill>
               </a:defRPr>
             </a:lvl4pPr>
-            <a:lvl5pPr marL="1632021" indent="0">
+            <a:lvl5pPr marL="1440180" indent="0">
               <a:buNone/>
-              <a:defRPr sz="1428">
+              <a:defRPr sz="1260">
                 <a:solidFill>
                   <a:schemeClr val="tx1">
                     <a:tint val="75000"/>
@@ -942,9 +944,9 @@
                 </a:solidFill>
               </a:defRPr>
             </a:lvl5pPr>
-            <a:lvl6pPr marL="2040026" indent="0">
+            <a:lvl6pPr marL="1800225" indent="0">
               <a:buNone/>
-              <a:defRPr sz="1428">
+              <a:defRPr sz="1260">
                 <a:solidFill>
                   <a:schemeClr val="tx1">
                     <a:tint val="75000"/>
@@ -952,9 +954,9 @@
                 </a:solidFill>
               </a:defRPr>
             </a:lvl6pPr>
-            <a:lvl7pPr marL="2448032" indent="0">
+            <a:lvl7pPr marL="2160270" indent="0">
               <a:buNone/>
-              <a:defRPr sz="1428">
+              <a:defRPr sz="1260">
                 <a:solidFill>
                   <a:schemeClr val="tx1">
                     <a:tint val="75000"/>
@@ -962,9 +964,9 @@
                 </a:solidFill>
               </a:defRPr>
             </a:lvl7pPr>
-            <a:lvl8pPr marL="2856037" indent="0">
+            <a:lvl8pPr marL="2520315" indent="0">
               <a:buNone/>
-              <a:defRPr sz="1428">
+              <a:defRPr sz="1260">
                 <a:solidFill>
                   <a:schemeClr val="tx1">
                     <a:tint val="75000"/>
@@ -972,9 +974,9 @@
                 </a:solidFill>
               </a:defRPr>
             </a:lvl8pPr>
-            <a:lvl9pPr marL="3264042" indent="0">
+            <a:lvl9pPr marL="2880360" indent="0">
               <a:buNone/>
-              <a:defRPr sz="1428">
+              <a:defRPr sz="1260">
                 <a:solidFill>
                   <a:schemeClr val="tx1">
                     <a:tint val="75000"/>
@@ -1009,7 +1011,7 @@
           <a:p>
             <a:fld id="{306DA3B7-5B64-4C08-AEF8-96FFEFD7A1CA}" type="datetimeFigureOut">
               <a:rPr lang="zh-TW" altLang="en-US" smtClean="0"/>
-              <a:t>2026/4/28</a:t>
+              <a:t>2026/5/21</a:t>
             </a:fld>
             <a:endParaRPr lang="zh-TW" altLang="en-US"/>
           </a:p>
@@ -1060,7 +1062,7 @@
     </p:spTree>
     <p:extLst>
       <p:ext uri="{BB962C8B-B14F-4D97-AF65-F5344CB8AC3E}">
-        <p14:creationId xmlns:p14="http://schemas.microsoft.com/office/powerpoint/2010/main" val="3790875195"/>
+        <p14:creationId xmlns:p14="http://schemas.microsoft.com/office/powerpoint/2010/main" val="2426752646"/>
       </p:ext>
     </p:extLst>
   </p:cSld>
@@ -1122,8 +1124,8 @@
         </p:nvSpPr>
         <p:spPr>
           <a:xfrm>
-            <a:off x="643493" y="1629117"/>
-            <a:ext cx="3977958" cy="3882965"/>
+            <a:off x="681038" y="1437680"/>
+            <a:ext cx="4210050" cy="3426679"/>
           </a:xfrm>
         </p:spPr>
         <p:txBody>
@@ -1179,8 +1181,8 @@
         </p:nvSpPr>
         <p:spPr>
           <a:xfrm>
-            <a:off x="4738449" y="1629117"/>
-            <a:ext cx="3977958" cy="3882965"/>
+            <a:off x="5014913" y="1437680"/>
+            <a:ext cx="4210050" cy="3426679"/>
           </a:xfrm>
         </p:spPr>
         <p:txBody>
@@ -1241,7 +1243,7 @@
           <a:p>
             <a:fld id="{306DA3B7-5B64-4C08-AEF8-96FFEFD7A1CA}" type="datetimeFigureOut">
               <a:rPr lang="zh-TW" altLang="en-US" smtClean="0"/>
-              <a:t>2026/4/28</a:t>
+              <a:t>2026/5/21</a:t>
             </a:fld>
             <a:endParaRPr lang="zh-TW" altLang="en-US"/>
           </a:p>
@@ -1292,7 +1294,7 @@
     </p:spTree>
     <p:extLst>
       <p:ext uri="{BB962C8B-B14F-4D97-AF65-F5344CB8AC3E}">
-        <p14:creationId xmlns:p14="http://schemas.microsoft.com/office/powerpoint/2010/main" val="1525599491"/>
+        <p14:creationId xmlns:p14="http://schemas.microsoft.com/office/powerpoint/2010/main" val="113065881"/>
       </p:ext>
     </p:extLst>
   </p:cSld>
@@ -1331,8 +1333,8 @@
         </p:nvSpPr>
         <p:spPr>
           <a:xfrm>
-            <a:off x="644712" y="325825"/>
-            <a:ext cx="8072914" cy="1182881"/>
+            <a:off x="682328" y="287536"/>
+            <a:ext cx="8543925" cy="1043881"/>
           </a:xfrm>
         </p:spPr>
         <p:txBody>
@@ -1359,8 +1361,8 @@
         </p:nvSpPr>
         <p:spPr>
           <a:xfrm>
-            <a:off x="644713" y="1500205"/>
-            <a:ext cx="3959676" cy="735227"/>
+            <a:off x="682328" y="1323916"/>
+            <a:ext cx="4190702" cy="648831"/>
           </a:xfrm>
         </p:spPr>
         <p:txBody>
@@ -1368,39 +1370,39 @@
           <a:lstStyle>
             <a:lvl1pPr marL="0" indent="0">
               <a:buNone/>
-              <a:defRPr sz="2142" b="1"/>
+              <a:defRPr sz="1890" b="1"/>
             </a:lvl1pPr>
-            <a:lvl2pPr marL="408005" indent="0">
+            <a:lvl2pPr marL="360045" indent="0">
               <a:buNone/>
-              <a:defRPr sz="1785" b="1"/>
+              <a:defRPr sz="1575" b="1"/>
             </a:lvl2pPr>
-            <a:lvl3pPr marL="816011" indent="0">
+            <a:lvl3pPr marL="720090" indent="0">
               <a:buNone/>
-              <a:defRPr sz="1606" b="1"/>
+              <a:defRPr sz="1418" b="1"/>
             </a:lvl3pPr>
-            <a:lvl4pPr marL="1224016" indent="0">
+            <a:lvl4pPr marL="1080135" indent="0">
               <a:buNone/>
-              <a:defRPr sz="1428" b="1"/>
+              <a:defRPr sz="1260" b="1"/>
             </a:lvl4pPr>
-            <a:lvl5pPr marL="1632021" indent="0">
+            <a:lvl5pPr marL="1440180" indent="0">
               <a:buNone/>
-              <a:defRPr sz="1428" b="1"/>
+              <a:defRPr sz="1260" b="1"/>
             </a:lvl5pPr>
-            <a:lvl6pPr marL="2040026" indent="0">
+            <a:lvl6pPr marL="1800225" indent="0">
               <a:buNone/>
-              <a:defRPr sz="1428" b="1"/>
+              <a:defRPr sz="1260" b="1"/>
             </a:lvl6pPr>
-            <a:lvl7pPr marL="2448032" indent="0">
+            <a:lvl7pPr marL="2160270" indent="0">
               <a:buNone/>
-              <a:defRPr sz="1428" b="1"/>
+              <a:defRPr sz="1260" b="1"/>
             </a:lvl7pPr>
-            <a:lvl8pPr marL="2856037" indent="0">
+            <a:lvl8pPr marL="2520315" indent="0">
               <a:buNone/>
-              <a:defRPr sz="1428" b="1"/>
+              <a:defRPr sz="1260" b="1"/>
             </a:lvl8pPr>
-            <a:lvl9pPr marL="3264042" indent="0">
+            <a:lvl9pPr marL="2880360" indent="0">
               <a:buNone/>
-              <a:defRPr sz="1428" b="1"/>
+              <a:defRPr sz="1260" b="1"/>
             </a:lvl9pPr>
           </a:lstStyle>
           <a:p>
@@ -1424,8 +1426,8 @@
         </p:nvSpPr>
         <p:spPr>
           <a:xfrm>
-            <a:off x="644713" y="2235432"/>
-            <a:ext cx="3959676" cy="3287983"/>
+            <a:off x="682328" y="1972747"/>
+            <a:ext cx="4190702" cy="2901613"/>
           </a:xfrm>
         </p:spPr>
         <p:txBody>
@@ -1481,8 +1483,8 @@
         </p:nvSpPr>
         <p:spPr>
           <a:xfrm>
-            <a:off x="4738450" y="1500205"/>
-            <a:ext cx="3979177" cy="735227"/>
+            <a:off x="5014913" y="1323916"/>
+            <a:ext cx="4211340" cy="648831"/>
           </a:xfrm>
         </p:spPr>
         <p:txBody>
@@ -1490,39 +1492,39 @@
           <a:lstStyle>
             <a:lvl1pPr marL="0" indent="0">
               <a:buNone/>
-              <a:defRPr sz="2142" b="1"/>
+              <a:defRPr sz="1890" b="1"/>
             </a:lvl1pPr>
-            <a:lvl2pPr marL="408005" indent="0">
+            <a:lvl2pPr marL="360045" indent="0">
               <a:buNone/>
-              <a:defRPr sz="1785" b="1"/>
+              <a:defRPr sz="1575" b="1"/>
             </a:lvl2pPr>
-            <a:lvl3pPr marL="816011" indent="0">
+            <a:lvl3pPr marL="720090" indent="0">
               <a:buNone/>
-              <a:defRPr sz="1606" b="1"/>
+              <a:defRPr sz="1418" b="1"/>
             </a:lvl3pPr>
-            <a:lvl4pPr marL="1224016" indent="0">
+            <a:lvl4pPr marL="1080135" indent="0">
               <a:buNone/>
-              <a:defRPr sz="1428" b="1"/>
+              <a:defRPr sz="1260" b="1"/>
             </a:lvl4pPr>
-            <a:lvl5pPr marL="1632021" indent="0">
+            <a:lvl5pPr marL="1440180" indent="0">
               <a:buNone/>
-              <a:defRPr sz="1428" b="1"/>
+              <a:defRPr sz="1260" b="1"/>
             </a:lvl5pPr>
-            <a:lvl6pPr marL="2040026" indent="0">
+            <a:lvl6pPr marL="1800225" indent="0">
               <a:buNone/>
-              <a:defRPr sz="1428" b="1"/>
+              <a:defRPr sz="1260" b="1"/>
             </a:lvl6pPr>
-            <a:lvl7pPr marL="2448032" indent="0">
+            <a:lvl7pPr marL="2160270" indent="0">
               <a:buNone/>
-              <a:defRPr sz="1428" b="1"/>
+              <a:defRPr sz="1260" b="1"/>
             </a:lvl7pPr>
-            <a:lvl8pPr marL="2856037" indent="0">
+            <a:lvl8pPr marL="2520315" indent="0">
               <a:buNone/>
-              <a:defRPr sz="1428" b="1"/>
+              <a:defRPr sz="1260" b="1"/>
             </a:lvl8pPr>
-            <a:lvl9pPr marL="3264042" indent="0">
+            <a:lvl9pPr marL="2880360" indent="0">
               <a:buNone/>
-              <a:defRPr sz="1428" b="1"/>
+              <a:defRPr sz="1260" b="1"/>
             </a:lvl9pPr>
           </a:lstStyle>
           <a:p>
@@ -1546,8 +1548,8 @@
         </p:nvSpPr>
         <p:spPr>
           <a:xfrm>
-            <a:off x="4738450" y="2235432"/>
-            <a:ext cx="3979177" cy="3287983"/>
+            <a:off x="5014913" y="1972747"/>
+            <a:ext cx="4211340" cy="2901613"/>
           </a:xfrm>
         </p:spPr>
         <p:txBody>
@@ -1608,7 +1610,7 @@
           <a:p>
             <a:fld id="{306DA3B7-5B64-4C08-AEF8-96FFEFD7A1CA}" type="datetimeFigureOut">
               <a:rPr lang="zh-TW" altLang="en-US" smtClean="0"/>
-              <a:t>2026/4/28</a:t>
+              <a:t>2026/5/21</a:t>
             </a:fld>
             <a:endParaRPr lang="zh-TW" altLang="en-US"/>
           </a:p>
@@ -1659,7 +1661,7 @@
     </p:spTree>
     <p:extLst>
       <p:ext uri="{BB962C8B-B14F-4D97-AF65-F5344CB8AC3E}">
-        <p14:creationId xmlns:p14="http://schemas.microsoft.com/office/powerpoint/2010/main" val="3505787061"/>
+        <p14:creationId xmlns:p14="http://schemas.microsoft.com/office/powerpoint/2010/main" val="1719056550"/>
       </p:ext>
     </p:extLst>
   </p:cSld>
@@ -1726,7 +1728,7 @@
           <a:p>
             <a:fld id="{306DA3B7-5B64-4C08-AEF8-96FFEFD7A1CA}" type="datetimeFigureOut">
               <a:rPr lang="zh-TW" altLang="en-US" smtClean="0"/>
-              <a:t>2026/4/28</a:t>
+              <a:t>2026/5/21</a:t>
             </a:fld>
             <a:endParaRPr lang="zh-TW" altLang="en-US"/>
           </a:p>
@@ -1777,7 +1779,7 @@
     </p:spTree>
     <p:extLst>
       <p:ext uri="{BB962C8B-B14F-4D97-AF65-F5344CB8AC3E}">
-        <p14:creationId xmlns:p14="http://schemas.microsoft.com/office/powerpoint/2010/main" val="4022701515"/>
+        <p14:creationId xmlns:p14="http://schemas.microsoft.com/office/powerpoint/2010/main" val="1120837913"/>
       </p:ext>
     </p:extLst>
   </p:cSld>
@@ -1821,7 +1823,7 @@
           <a:p>
             <a:fld id="{306DA3B7-5B64-4C08-AEF8-96FFEFD7A1CA}" type="datetimeFigureOut">
               <a:rPr lang="zh-TW" altLang="en-US" smtClean="0"/>
-              <a:t>2026/4/28</a:t>
+              <a:t>2026/5/21</a:t>
             </a:fld>
             <a:endParaRPr lang="zh-TW" altLang="en-US"/>
           </a:p>
@@ -1872,7 +1874,7 @@
     </p:spTree>
     <p:extLst>
       <p:ext uri="{BB962C8B-B14F-4D97-AF65-F5344CB8AC3E}">
-        <p14:creationId xmlns:p14="http://schemas.microsoft.com/office/powerpoint/2010/main" val="1044264100"/>
+        <p14:creationId xmlns:p14="http://schemas.microsoft.com/office/powerpoint/2010/main" val="1578995102"/>
       </p:ext>
     </p:extLst>
   </p:cSld>
@@ -1911,15 +1913,15 @@
         </p:nvSpPr>
         <p:spPr>
           <a:xfrm>
-            <a:off x="644712" y="407988"/>
-            <a:ext cx="3018811" cy="1427956"/>
+            <a:off x="682328" y="360045"/>
+            <a:ext cx="3194943" cy="1260158"/>
           </a:xfrm>
         </p:spPr>
         <p:txBody>
           <a:bodyPr anchor="b"/>
           <a:lstStyle>
             <a:lvl1pPr>
-              <a:defRPr sz="2856"/>
+              <a:defRPr sz="2520"/>
             </a:lvl1pPr>
           </a:lstStyle>
           <a:p>
@@ -1943,39 +1945,39 @@
         </p:nvSpPr>
         <p:spPr>
           <a:xfrm>
-            <a:off x="3979177" y="881141"/>
-            <a:ext cx="4738449" cy="4349034"/>
+            <a:off x="4211340" y="777597"/>
+            <a:ext cx="5014913" cy="3837980"/>
           </a:xfrm>
         </p:spPr>
         <p:txBody>
           <a:bodyPr/>
           <a:lstStyle>
             <a:lvl1pPr>
-              <a:defRPr sz="2856"/>
+              <a:defRPr sz="2520"/>
             </a:lvl1pPr>
             <a:lvl2pPr>
-              <a:defRPr sz="2499"/>
+              <a:defRPr sz="2205"/>
             </a:lvl2pPr>
             <a:lvl3pPr>
-              <a:defRPr sz="2142"/>
+              <a:defRPr sz="1890"/>
             </a:lvl3pPr>
             <a:lvl4pPr>
-              <a:defRPr sz="1785"/>
+              <a:defRPr sz="1575"/>
             </a:lvl4pPr>
             <a:lvl5pPr>
-              <a:defRPr sz="1785"/>
+              <a:defRPr sz="1575"/>
             </a:lvl5pPr>
             <a:lvl6pPr>
-              <a:defRPr sz="1785"/>
+              <a:defRPr sz="1575"/>
             </a:lvl6pPr>
             <a:lvl7pPr>
-              <a:defRPr sz="1785"/>
+              <a:defRPr sz="1575"/>
             </a:lvl7pPr>
             <a:lvl8pPr>
-              <a:defRPr sz="1785"/>
+              <a:defRPr sz="1575"/>
             </a:lvl8pPr>
             <a:lvl9pPr>
-              <a:defRPr sz="1785"/>
+              <a:defRPr sz="1575"/>
             </a:lvl9pPr>
           </a:lstStyle>
           <a:p>
@@ -2028,8 +2030,8 @@
         </p:nvSpPr>
         <p:spPr>
           <a:xfrm>
-            <a:off x="644712" y="1835944"/>
-            <a:ext cx="3018811" cy="3401313"/>
+            <a:off x="682328" y="1620202"/>
+            <a:ext cx="3194943" cy="3001626"/>
           </a:xfrm>
         </p:spPr>
         <p:txBody>
@@ -2037,39 +2039,39 @@
           <a:lstStyle>
             <a:lvl1pPr marL="0" indent="0">
               <a:buNone/>
-              <a:defRPr sz="1428"/>
+              <a:defRPr sz="1260"/>
             </a:lvl1pPr>
-            <a:lvl2pPr marL="408005" indent="0">
+            <a:lvl2pPr marL="360045" indent="0">
               <a:buNone/>
-              <a:defRPr sz="1249"/>
+              <a:defRPr sz="1103"/>
             </a:lvl2pPr>
-            <a:lvl3pPr marL="816011" indent="0">
+            <a:lvl3pPr marL="720090" indent="0">
               <a:buNone/>
-              <a:defRPr sz="1071"/>
+              <a:defRPr sz="945"/>
             </a:lvl3pPr>
-            <a:lvl4pPr marL="1224016" indent="0">
+            <a:lvl4pPr marL="1080135" indent="0">
               <a:buNone/>
-              <a:defRPr sz="892"/>
+              <a:defRPr sz="788"/>
             </a:lvl4pPr>
-            <a:lvl5pPr marL="1632021" indent="0">
+            <a:lvl5pPr marL="1440180" indent="0">
               <a:buNone/>
-              <a:defRPr sz="892"/>
+              <a:defRPr sz="788"/>
             </a:lvl5pPr>
-            <a:lvl6pPr marL="2040026" indent="0">
+            <a:lvl6pPr marL="1800225" indent="0">
               <a:buNone/>
-              <a:defRPr sz="892"/>
+              <a:defRPr sz="788"/>
             </a:lvl6pPr>
-            <a:lvl7pPr marL="2448032" indent="0">
+            <a:lvl7pPr marL="2160270" indent="0">
               <a:buNone/>
-              <a:defRPr sz="892"/>
+              <a:defRPr sz="788"/>
             </a:lvl7pPr>
-            <a:lvl8pPr marL="2856037" indent="0">
+            <a:lvl8pPr marL="2520315" indent="0">
               <a:buNone/>
-              <a:defRPr sz="892"/>
+              <a:defRPr sz="788"/>
             </a:lvl8pPr>
-            <a:lvl9pPr marL="3264042" indent="0">
+            <a:lvl9pPr marL="2880360" indent="0">
               <a:buNone/>
-              <a:defRPr sz="892"/>
+              <a:defRPr sz="788"/>
             </a:lvl9pPr>
           </a:lstStyle>
           <a:p>
@@ -2098,7 +2100,7 @@
           <a:p>
             <a:fld id="{306DA3B7-5B64-4C08-AEF8-96FFEFD7A1CA}" type="datetimeFigureOut">
               <a:rPr lang="zh-TW" altLang="en-US" smtClean="0"/>
-              <a:t>2026/4/28</a:t>
+              <a:t>2026/5/21</a:t>
             </a:fld>
             <a:endParaRPr lang="zh-TW" altLang="en-US"/>
           </a:p>
@@ -2149,7 +2151,7 @@
     </p:spTree>
     <p:extLst>
       <p:ext uri="{BB962C8B-B14F-4D97-AF65-F5344CB8AC3E}">
-        <p14:creationId xmlns:p14="http://schemas.microsoft.com/office/powerpoint/2010/main" val="3474278768"/>
+        <p14:creationId xmlns:p14="http://schemas.microsoft.com/office/powerpoint/2010/main" val="2677434993"/>
       </p:ext>
     </p:extLst>
   </p:cSld>
@@ -2188,15 +2190,15 @@
         </p:nvSpPr>
         <p:spPr>
           <a:xfrm>
-            <a:off x="644712" y="407988"/>
-            <a:ext cx="3018811" cy="1427956"/>
+            <a:off x="682328" y="360045"/>
+            <a:ext cx="3194943" cy="1260158"/>
           </a:xfrm>
         </p:spPr>
         <p:txBody>
           <a:bodyPr anchor="b"/>
           <a:lstStyle>
             <a:lvl1pPr>
-              <a:defRPr sz="2856"/>
+              <a:defRPr sz="2520"/>
             </a:lvl1pPr>
           </a:lstStyle>
           <a:p>
@@ -2220,8 +2222,8 @@
         </p:nvSpPr>
         <p:spPr>
           <a:xfrm>
-            <a:off x="3979177" y="881141"/>
-            <a:ext cx="4738449" cy="4349034"/>
+            <a:off x="4211340" y="777597"/>
+            <a:ext cx="5014913" cy="3837980"/>
           </a:xfrm>
         </p:spPr>
         <p:txBody>
@@ -2229,39 +2231,39 @@
           <a:lstStyle>
             <a:lvl1pPr marL="0" indent="0">
               <a:buNone/>
-              <a:defRPr sz="2856"/>
+              <a:defRPr sz="2520"/>
             </a:lvl1pPr>
-            <a:lvl2pPr marL="408005" indent="0">
+            <a:lvl2pPr marL="360045" indent="0">
               <a:buNone/>
-              <a:defRPr sz="2499"/>
+              <a:defRPr sz="2205"/>
             </a:lvl2pPr>
-            <a:lvl3pPr marL="816011" indent="0">
+            <a:lvl3pPr marL="720090" indent="0">
               <a:buNone/>
-              <a:defRPr sz="2142"/>
+              <a:defRPr sz="1890"/>
             </a:lvl3pPr>
-            <a:lvl4pPr marL="1224016" indent="0">
+            <a:lvl4pPr marL="1080135" indent="0">
               <a:buNone/>
-              <a:defRPr sz="1785"/>
+              <a:defRPr sz="1575"/>
             </a:lvl4pPr>
-            <a:lvl5pPr marL="1632021" indent="0">
+            <a:lvl5pPr marL="1440180" indent="0">
               <a:buNone/>
-              <a:defRPr sz="1785"/>
+              <a:defRPr sz="1575"/>
             </a:lvl5pPr>
-            <a:lvl6pPr marL="2040026" indent="0">
+            <a:lvl6pPr marL="1800225" indent="0">
               <a:buNone/>
-              <a:defRPr sz="1785"/>
+              <a:defRPr sz="1575"/>
             </a:lvl6pPr>
-            <a:lvl7pPr marL="2448032" indent="0">
+            <a:lvl7pPr marL="2160270" indent="0">
               <a:buNone/>
-              <a:defRPr sz="1785"/>
+              <a:defRPr sz="1575"/>
             </a:lvl7pPr>
-            <a:lvl8pPr marL="2856037" indent="0">
+            <a:lvl8pPr marL="2520315" indent="0">
               <a:buNone/>
-              <a:defRPr sz="1785"/>
+              <a:defRPr sz="1575"/>
             </a:lvl8pPr>
-            <a:lvl9pPr marL="3264042" indent="0">
+            <a:lvl9pPr marL="2880360" indent="0">
               <a:buNone/>
-              <a:defRPr sz="1785"/>
+              <a:defRPr sz="1575"/>
             </a:lvl9pPr>
           </a:lstStyle>
           <a:p>
@@ -2285,8 +2287,8 @@
         </p:nvSpPr>
         <p:spPr>
           <a:xfrm>
-            <a:off x="644712" y="1835944"/>
-            <a:ext cx="3018811" cy="3401313"/>
+            <a:off x="682328" y="1620202"/>
+            <a:ext cx="3194943" cy="3001626"/>
           </a:xfrm>
         </p:spPr>
         <p:txBody>
@@ -2294,39 +2296,39 @@
           <a:lstStyle>
             <a:lvl1pPr marL="0" indent="0">
               <a:buNone/>
-              <a:defRPr sz="1428"/>
+              <a:defRPr sz="1260"/>
             </a:lvl1pPr>
-            <a:lvl2pPr marL="408005" indent="0">
+            <a:lvl2pPr marL="360045" indent="0">
               <a:buNone/>
-              <a:defRPr sz="1249"/>
+              <a:defRPr sz="1103"/>
             </a:lvl2pPr>
-            <a:lvl3pPr marL="816011" indent="0">
+            <a:lvl3pPr marL="720090" indent="0">
               <a:buNone/>
-              <a:defRPr sz="1071"/>
+              <a:defRPr sz="945"/>
             </a:lvl3pPr>
-            <a:lvl4pPr marL="1224016" indent="0">
+            <a:lvl4pPr marL="1080135" indent="0">
               <a:buNone/>
-              <a:defRPr sz="892"/>
+              <a:defRPr sz="788"/>
             </a:lvl4pPr>
-            <a:lvl5pPr marL="1632021" indent="0">
+            <a:lvl5pPr marL="1440180" indent="0">
               <a:buNone/>
-              <a:defRPr sz="892"/>
+              <a:defRPr sz="788"/>
             </a:lvl5pPr>
-            <a:lvl6pPr marL="2040026" indent="0">
+            <a:lvl6pPr marL="1800225" indent="0">
               <a:buNone/>
-              <a:defRPr sz="892"/>
+              <a:defRPr sz="788"/>
             </a:lvl6pPr>
-            <a:lvl7pPr marL="2448032" indent="0">
+            <a:lvl7pPr marL="2160270" indent="0">
               <a:buNone/>
-              <a:defRPr sz="892"/>
+              <a:defRPr sz="788"/>
             </a:lvl7pPr>
-            <a:lvl8pPr marL="2856037" indent="0">
+            <a:lvl8pPr marL="2520315" indent="0">
               <a:buNone/>
-              <a:defRPr sz="892"/>
+              <a:defRPr sz="788"/>
             </a:lvl8pPr>
-            <a:lvl9pPr marL="3264042" indent="0">
+            <a:lvl9pPr marL="2880360" indent="0">
               <a:buNone/>
-              <a:defRPr sz="892"/>
+              <a:defRPr sz="788"/>
             </a:lvl9pPr>
           </a:lstStyle>
           <a:p>
@@ -2355,7 +2357,7 @@
           <a:p>
             <a:fld id="{306DA3B7-5B64-4C08-AEF8-96FFEFD7A1CA}" type="datetimeFigureOut">
               <a:rPr lang="zh-TW" altLang="en-US" smtClean="0"/>
-              <a:t>2026/4/28</a:t>
+              <a:t>2026/5/21</a:t>
             </a:fld>
             <a:endParaRPr lang="zh-TW" altLang="en-US"/>
           </a:p>
@@ -2406,7 +2408,7 @@
     </p:spTree>
     <p:extLst>
       <p:ext uri="{BB962C8B-B14F-4D97-AF65-F5344CB8AC3E}">
-        <p14:creationId xmlns:p14="http://schemas.microsoft.com/office/powerpoint/2010/main" val="2109300859"/>
+        <p14:creationId xmlns:p14="http://schemas.microsoft.com/office/powerpoint/2010/main" val="660656462"/>
       </p:ext>
     </p:extLst>
   </p:cSld>
@@ -2450,8 +2452,8 @@
         </p:nvSpPr>
         <p:spPr>
           <a:xfrm>
-            <a:off x="643493" y="325825"/>
-            <a:ext cx="8072914" cy="1182881"/>
+            <a:off x="681038" y="287536"/>
+            <a:ext cx="8543925" cy="1043881"/>
           </a:xfrm>
           <a:prstGeom prst="rect">
             <a:avLst/>
@@ -2483,8 +2485,8 @@
         </p:nvSpPr>
         <p:spPr>
           <a:xfrm>
-            <a:off x="643493" y="1629117"/>
-            <a:ext cx="8072914" cy="3882965"/>
+            <a:off x="681038" y="1437680"/>
+            <a:ext cx="8543925" cy="3426679"/>
           </a:xfrm>
           <a:prstGeom prst="rect">
             <a:avLst/>
@@ -2545,8 +2547,8 @@
         </p:nvSpPr>
         <p:spPr>
           <a:xfrm>
-            <a:off x="643493" y="5672162"/>
-            <a:ext cx="2105978" cy="325823"/>
+            <a:off x="681038" y="5005626"/>
+            <a:ext cx="2228850" cy="287536"/>
           </a:xfrm>
           <a:prstGeom prst="rect">
             <a:avLst/>
@@ -2556,7 +2558,7 @@
           <a:bodyPr vert="horz" lIns="91440" tIns="45720" rIns="91440" bIns="45720" rtlCol="0" anchor="ctr"/>
           <a:lstStyle>
             <a:lvl1pPr algn="l">
-              <a:defRPr sz="1071">
+              <a:defRPr sz="945">
                 <a:solidFill>
                   <a:schemeClr val="tx1">
                     <a:tint val="75000"/>
@@ -2568,7 +2570,7 @@
           <a:p>
             <a:fld id="{306DA3B7-5B64-4C08-AEF8-96FFEFD7A1CA}" type="datetimeFigureOut">
               <a:rPr lang="zh-TW" altLang="en-US" smtClean="0"/>
-              <a:t>2026/4/28</a:t>
+              <a:t>2026/5/21</a:t>
             </a:fld>
             <a:endParaRPr lang="zh-TW" altLang="en-US"/>
           </a:p>
@@ -2586,8 +2588,8 @@
         </p:nvSpPr>
         <p:spPr>
           <a:xfrm>
-            <a:off x="3100467" y="5672162"/>
-            <a:ext cx="3158966" cy="325823"/>
+            <a:off x="3281363" y="5005626"/>
+            <a:ext cx="3343275" cy="287536"/>
           </a:xfrm>
           <a:prstGeom prst="rect">
             <a:avLst/>
@@ -2597,7 +2599,7 @@
           <a:bodyPr vert="horz" lIns="91440" tIns="45720" rIns="91440" bIns="45720" rtlCol="0" anchor="ctr"/>
           <a:lstStyle>
             <a:lvl1pPr algn="ctr">
-              <a:defRPr sz="1071">
+              <a:defRPr sz="945">
                 <a:solidFill>
                   <a:schemeClr val="tx1">
                     <a:tint val="75000"/>
@@ -2623,8 +2625,8 @@
         </p:nvSpPr>
         <p:spPr>
           <a:xfrm>
-            <a:off x="6610429" y="5672162"/>
-            <a:ext cx="2105978" cy="325823"/>
+            <a:off x="6996113" y="5005626"/>
+            <a:ext cx="2228850" cy="287536"/>
           </a:xfrm>
           <a:prstGeom prst="rect">
             <a:avLst/>
@@ -2634,7 +2636,7 @@
           <a:bodyPr vert="horz" lIns="91440" tIns="45720" rIns="91440" bIns="45720" rtlCol="0" anchor="ctr"/>
           <a:lstStyle>
             <a:lvl1pPr algn="r">
-              <a:defRPr sz="1071">
+              <a:defRPr sz="945">
                 <a:solidFill>
                   <a:schemeClr val="tx1">
                     <a:tint val="75000"/>
@@ -2655,27 +2657,27 @@
     </p:spTree>
     <p:extLst>
       <p:ext uri="{BB962C8B-B14F-4D97-AF65-F5344CB8AC3E}">
-        <p14:creationId xmlns:p14="http://schemas.microsoft.com/office/powerpoint/2010/main" val="3518296393"/>
+        <p14:creationId xmlns:p14="http://schemas.microsoft.com/office/powerpoint/2010/main" val="1264179763"/>
       </p:ext>
     </p:extLst>
   </p:cSld>
   <p:clrMap bg1="lt1" tx1="dk1" bg2="lt2" tx2="dk2" accent1="accent1" accent2="accent2" accent3="accent3" accent4="accent4" accent5="accent5" accent6="accent6" hlink="hlink" folHlink="folHlink"/>
   <p:sldLayoutIdLst>
-    <p:sldLayoutId id="2147483709" r:id="rId1"/>
-    <p:sldLayoutId id="2147483710" r:id="rId2"/>
-    <p:sldLayoutId id="2147483711" r:id="rId3"/>
-    <p:sldLayoutId id="2147483712" r:id="rId4"/>
-    <p:sldLayoutId id="2147483713" r:id="rId5"/>
-    <p:sldLayoutId id="2147483714" r:id="rId6"/>
-    <p:sldLayoutId id="2147483715" r:id="rId7"/>
-    <p:sldLayoutId id="2147483716" r:id="rId8"/>
-    <p:sldLayoutId id="2147483717" r:id="rId9"/>
-    <p:sldLayoutId id="2147483718" r:id="rId10"/>
-    <p:sldLayoutId id="2147483719" r:id="rId11"/>
+    <p:sldLayoutId id="2147483745" r:id="rId1"/>
+    <p:sldLayoutId id="2147483746" r:id="rId2"/>
+    <p:sldLayoutId id="2147483747" r:id="rId3"/>
+    <p:sldLayoutId id="2147483748" r:id="rId4"/>
+    <p:sldLayoutId id="2147483749" r:id="rId5"/>
+    <p:sldLayoutId id="2147483750" r:id="rId6"/>
+    <p:sldLayoutId id="2147483751" r:id="rId7"/>
+    <p:sldLayoutId id="2147483752" r:id="rId8"/>
+    <p:sldLayoutId id="2147483753" r:id="rId9"/>
+    <p:sldLayoutId id="2147483754" r:id="rId10"/>
+    <p:sldLayoutId id="2147483755" r:id="rId11"/>
   </p:sldLayoutIdLst>
   <p:txStyles>
     <p:titleStyle>
-      <a:lvl1pPr algn="l" defTabSz="816011" rtl="0" eaLnBrk="1" latinLnBrk="0" hangingPunct="1">
+      <a:lvl1pPr algn="l" defTabSz="720090" rtl="0" eaLnBrk="1" latinLnBrk="0" hangingPunct="1">
         <a:lnSpc>
           <a:spcPct val="90000"/>
         </a:lnSpc>
@@ -2683,7 +2685,7 @@
           <a:spcPct val="0"/>
         </a:spcBef>
         <a:buNone/>
-        <a:defRPr sz="3927" kern="1200">
+        <a:defRPr sz="3465" kern="1200">
           <a:solidFill>
             <a:schemeClr val="tx1"/>
           </a:solidFill>
@@ -2694,16 +2696,16 @@
       </a:lvl1pPr>
     </p:titleStyle>
     <p:bodyStyle>
-      <a:lvl1pPr marL="204003" indent="-204003" algn="l" defTabSz="816011" rtl="0" eaLnBrk="1" latinLnBrk="0" hangingPunct="1">
+      <a:lvl1pPr marL="180023" indent="-180023" algn="l" defTabSz="720090" rtl="0" eaLnBrk="1" latinLnBrk="0" hangingPunct="1">
         <a:lnSpc>
           <a:spcPct val="90000"/>
         </a:lnSpc>
         <a:spcBef>
-          <a:spcPts val="892"/>
+          <a:spcPts val="788"/>
         </a:spcBef>
         <a:buFont typeface="Arial" panose="020B0604020202020204" pitchFamily="34" charset="0"/>
         <a:buChar char="•"/>
-        <a:defRPr sz="2499" kern="1200">
+        <a:defRPr sz="2205" kern="1200">
           <a:solidFill>
             <a:schemeClr val="tx1"/>
           </a:solidFill>
@@ -2712,16 +2714,16 @@
           <a:cs typeface="+mn-cs"/>
         </a:defRPr>
       </a:lvl1pPr>
-      <a:lvl2pPr marL="612008" indent="-204003" algn="l" defTabSz="816011" rtl="0" eaLnBrk="1" latinLnBrk="0" hangingPunct="1">
+      <a:lvl2pPr marL="540068" indent="-180023" algn="l" defTabSz="720090" rtl="0" eaLnBrk="1" latinLnBrk="0" hangingPunct="1">
         <a:lnSpc>
           <a:spcPct val="90000"/>
         </a:lnSpc>
         <a:spcBef>
-          <a:spcPts val="446"/>
+          <a:spcPts val="394"/>
         </a:spcBef>
         <a:buFont typeface="Arial" panose="020B0604020202020204" pitchFamily="34" charset="0"/>
         <a:buChar char="•"/>
-        <a:defRPr sz="2142" kern="1200">
+        <a:defRPr sz="1890" kern="1200">
           <a:solidFill>
             <a:schemeClr val="tx1"/>
           </a:solidFill>
@@ -2730,16 +2732,16 @@
           <a:cs typeface="+mn-cs"/>
         </a:defRPr>
       </a:lvl2pPr>
-      <a:lvl3pPr marL="1020013" indent="-204003" algn="l" defTabSz="816011" rtl="0" eaLnBrk="1" latinLnBrk="0" hangingPunct="1">
+      <a:lvl3pPr marL="900113" indent="-180023" algn="l" defTabSz="720090" rtl="0" eaLnBrk="1" latinLnBrk="0" hangingPunct="1">
         <a:lnSpc>
           <a:spcPct val="90000"/>
         </a:lnSpc>
         <a:spcBef>
-          <a:spcPts val="446"/>
+          <a:spcPts val="394"/>
         </a:spcBef>
         <a:buFont typeface="Arial" panose="020B0604020202020204" pitchFamily="34" charset="0"/>
         <a:buChar char="•"/>
-        <a:defRPr sz="1785" kern="1200">
+        <a:defRPr sz="1575" kern="1200">
           <a:solidFill>
             <a:schemeClr val="tx1"/>
           </a:solidFill>
@@ -2748,16 +2750,16 @@
           <a:cs typeface="+mn-cs"/>
         </a:defRPr>
       </a:lvl3pPr>
-      <a:lvl4pPr marL="1428018" indent="-204003" algn="l" defTabSz="816011" rtl="0" eaLnBrk="1" latinLnBrk="0" hangingPunct="1">
+      <a:lvl4pPr marL="1260158" indent="-180023" algn="l" defTabSz="720090" rtl="0" eaLnBrk="1" latinLnBrk="0" hangingPunct="1">
         <a:lnSpc>
           <a:spcPct val="90000"/>
         </a:lnSpc>
         <a:spcBef>
-          <a:spcPts val="446"/>
+          <a:spcPts val="394"/>
         </a:spcBef>
         <a:buFont typeface="Arial" panose="020B0604020202020204" pitchFamily="34" charset="0"/>
         <a:buChar char="•"/>
-        <a:defRPr sz="1606" kern="1200">
+        <a:defRPr sz="1418" kern="1200">
           <a:solidFill>
             <a:schemeClr val="tx1"/>
           </a:solidFill>
@@ -2766,16 +2768,16 @@
           <a:cs typeface="+mn-cs"/>
         </a:defRPr>
       </a:lvl4pPr>
-      <a:lvl5pPr marL="1836024" indent="-204003" algn="l" defTabSz="816011" rtl="0" eaLnBrk="1" latinLnBrk="0" hangingPunct="1">
+      <a:lvl5pPr marL="1620203" indent="-180023" algn="l" defTabSz="720090" rtl="0" eaLnBrk="1" latinLnBrk="0" hangingPunct="1">
         <a:lnSpc>
           <a:spcPct val="90000"/>
         </a:lnSpc>
         <a:spcBef>
-          <a:spcPts val="446"/>
+          <a:spcPts val="394"/>
         </a:spcBef>
         <a:buFont typeface="Arial" panose="020B0604020202020204" pitchFamily="34" charset="0"/>
         <a:buChar char="•"/>
-        <a:defRPr sz="1606" kern="1200">
+        <a:defRPr sz="1418" kern="1200">
           <a:solidFill>
             <a:schemeClr val="tx1"/>
           </a:solidFill>
@@ -2784,16 +2786,16 @@
           <a:cs typeface="+mn-cs"/>
         </a:defRPr>
       </a:lvl5pPr>
-      <a:lvl6pPr marL="2244029" indent="-204003" algn="l" defTabSz="816011" rtl="0" eaLnBrk="1" latinLnBrk="0" hangingPunct="1">
+      <a:lvl6pPr marL="1980248" indent="-180023" algn="l" defTabSz="720090" rtl="0" eaLnBrk="1" latinLnBrk="0" hangingPunct="1">
         <a:lnSpc>
           <a:spcPct val="90000"/>
         </a:lnSpc>
         <a:spcBef>
-          <a:spcPts val="446"/>
+          <a:spcPts val="394"/>
         </a:spcBef>
         <a:buFont typeface="Arial" panose="020B0604020202020204" pitchFamily="34" charset="0"/>
         <a:buChar char="•"/>
-        <a:defRPr sz="1606" kern="1200">
+        <a:defRPr sz="1418" kern="1200">
           <a:solidFill>
             <a:schemeClr val="tx1"/>
           </a:solidFill>
@@ -2802,16 +2804,16 @@
           <a:cs typeface="+mn-cs"/>
         </a:defRPr>
       </a:lvl6pPr>
-      <a:lvl7pPr marL="2652034" indent="-204003" algn="l" defTabSz="816011" rtl="0" eaLnBrk="1" latinLnBrk="0" hangingPunct="1">
+      <a:lvl7pPr marL="2340293" indent="-180023" algn="l" defTabSz="720090" rtl="0" eaLnBrk="1" latinLnBrk="0" hangingPunct="1">
         <a:lnSpc>
           <a:spcPct val="90000"/>
         </a:lnSpc>
         <a:spcBef>
-          <a:spcPts val="446"/>
+          <a:spcPts val="394"/>
         </a:spcBef>
         <a:buFont typeface="Arial" panose="020B0604020202020204" pitchFamily="34" charset="0"/>
         <a:buChar char="•"/>
-        <a:defRPr sz="1606" kern="1200">
+        <a:defRPr sz="1418" kern="1200">
           <a:solidFill>
             <a:schemeClr val="tx1"/>
           </a:solidFill>
@@ -2820,16 +2822,16 @@
           <a:cs typeface="+mn-cs"/>
         </a:defRPr>
       </a:lvl7pPr>
-      <a:lvl8pPr marL="3060040" indent="-204003" algn="l" defTabSz="816011" rtl="0" eaLnBrk="1" latinLnBrk="0" hangingPunct="1">
+      <a:lvl8pPr marL="2700338" indent="-180023" algn="l" defTabSz="720090" rtl="0" eaLnBrk="1" latinLnBrk="0" hangingPunct="1">
         <a:lnSpc>
           <a:spcPct val="90000"/>
         </a:lnSpc>
         <a:spcBef>
-          <a:spcPts val="446"/>
+          <a:spcPts val="394"/>
         </a:spcBef>
         <a:buFont typeface="Arial" panose="020B0604020202020204" pitchFamily="34" charset="0"/>
         <a:buChar char="•"/>
-        <a:defRPr sz="1606" kern="1200">
+        <a:defRPr sz="1418" kern="1200">
           <a:solidFill>
             <a:schemeClr val="tx1"/>
           </a:solidFill>
@@ -2838,16 +2840,16 @@
           <a:cs typeface="+mn-cs"/>
         </a:defRPr>
       </a:lvl8pPr>
-      <a:lvl9pPr marL="3468045" indent="-204003" algn="l" defTabSz="816011" rtl="0" eaLnBrk="1" latinLnBrk="0" hangingPunct="1">
+      <a:lvl9pPr marL="3060383" indent="-180023" algn="l" defTabSz="720090" rtl="0" eaLnBrk="1" latinLnBrk="0" hangingPunct="1">
         <a:lnSpc>
           <a:spcPct val="90000"/>
         </a:lnSpc>
         <a:spcBef>
-          <a:spcPts val="446"/>
+          <a:spcPts val="394"/>
         </a:spcBef>
         <a:buFont typeface="Arial" panose="020B0604020202020204" pitchFamily="34" charset="0"/>
         <a:buChar char="•"/>
-        <a:defRPr sz="1606" kern="1200">
+        <a:defRPr sz="1418" kern="1200">
           <a:solidFill>
             <a:schemeClr val="tx1"/>
           </a:solidFill>
@@ -2861,8 +2863,8 @@
       <a:defPPr>
         <a:defRPr lang="en-US"/>
       </a:defPPr>
-      <a:lvl1pPr marL="0" algn="l" defTabSz="816011" rtl="0" eaLnBrk="1" latinLnBrk="0" hangingPunct="1">
-        <a:defRPr sz="1606" kern="1200">
+      <a:lvl1pPr marL="0" algn="l" defTabSz="720090" rtl="0" eaLnBrk="1" latinLnBrk="0" hangingPunct="1">
+        <a:defRPr sz="1418" kern="1200">
           <a:solidFill>
             <a:schemeClr val="tx1"/>
           </a:solidFill>
@@ -2871,8 +2873,8 @@
           <a:cs typeface="+mn-cs"/>
         </a:defRPr>
       </a:lvl1pPr>
-      <a:lvl2pPr marL="408005" algn="l" defTabSz="816011" rtl="0" eaLnBrk="1" latinLnBrk="0" hangingPunct="1">
-        <a:defRPr sz="1606" kern="1200">
+      <a:lvl2pPr marL="360045" algn="l" defTabSz="720090" rtl="0" eaLnBrk="1" latinLnBrk="0" hangingPunct="1">
+        <a:defRPr sz="1418" kern="1200">
           <a:solidFill>
             <a:schemeClr val="tx1"/>
           </a:solidFill>
@@ -2881,8 +2883,8 @@
           <a:cs typeface="+mn-cs"/>
         </a:defRPr>
       </a:lvl2pPr>
-      <a:lvl3pPr marL="816011" algn="l" defTabSz="816011" rtl="0" eaLnBrk="1" latinLnBrk="0" hangingPunct="1">
-        <a:defRPr sz="1606" kern="1200">
+      <a:lvl3pPr marL="720090" algn="l" defTabSz="720090" rtl="0" eaLnBrk="1" latinLnBrk="0" hangingPunct="1">
+        <a:defRPr sz="1418" kern="1200">
           <a:solidFill>
             <a:schemeClr val="tx1"/>
           </a:solidFill>
@@ -2891,8 +2893,8 @@
           <a:cs typeface="+mn-cs"/>
         </a:defRPr>
       </a:lvl3pPr>
-      <a:lvl4pPr marL="1224016" algn="l" defTabSz="816011" rtl="0" eaLnBrk="1" latinLnBrk="0" hangingPunct="1">
-        <a:defRPr sz="1606" kern="1200">
+      <a:lvl4pPr marL="1080135" algn="l" defTabSz="720090" rtl="0" eaLnBrk="1" latinLnBrk="0" hangingPunct="1">
+        <a:defRPr sz="1418" kern="1200">
           <a:solidFill>
             <a:schemeClr val="tx1"/>
           </a:solidFill>
@@ -2901,8 +2903,8 @@
           <a:cs typeface="+mn-cs"/>
         </a:defRPr>
       </a:lvl4pPr>
-      <a:lvl5pPr marL="1632021" algn="l" defTabSz="816011" rtl="0" eaLnBrk="1" latinLnBrk="0" hangingPunct="1">
-        <a:defRPr sz="1606" kern="1200">
+      <a:lvl5pPr marL="1440180" algn="l" defTabSz="720090" rtl="0" eaLnBrk="1" latinLnBrk="0" hangingPunct="1">
+        <a:defRPr sz="1418" kern="1200">
           <a:solidFill>
             <a:schemeClr val="tx1"/>
           </a:solidFill>
@@ -2911,8 +2913,8 @@
           <a:cs typeface="+mn-cs"/>
         </a:defRPr>
       </a:lvl5pPr>
-      <a:lvl6pPr marL="2040026" algn="l" defTabSz="816011" rtl="0" eaLnBrk="1" latinLnBrk="0" hangingPunct="1">
-        <a:defRPr sz="1606" kern="1200">
+      <a:lvl6pPr marL="1800225" algn="l" defTabSz="720090" rtl="0" eaLnBrk="1" latinLnBrk="0" hangingPunct="1">
+        <a:defRPr sz="1418" kern="1200">
           <a:solidFill>
             <a:schemeClr val="tx1"/>
           </a:solidFill>
@@ -2921,8 +2923,8 @@
           <a:cs typeface="+mn-cs"/>
         </a:defRPr>
       </a:lvl6pPr>
-      <a:lvl7pPr marL="2448032" algn="l" defTabSz="816011" rtl="0" eaLnBrk="1" latinLnBrk="0" hangingPunct="1">
-        <a:defRPr sz="1606" kern="1200">
+      <a:lvl7pPr marL="2160270" algn="l" defTabSz="720090" rtl="0" eaLnBrk="1" latinLnBrk="0" hangingPunct="1">
+        <a:defRPr sz="1418" kern="1200">
           <a:solidFill>
             <a:schemeClr val="tx1"/>
           </a:solidFill>
@@ -2931,8 +2933,8 @@
           <a:cs typeface="+mn-cs"/>
         </a:defRPr>
       </a:lvl7pPr>
-      <a:lvl8pPr marL="2856037" algn="l" defTabSz="816011" rtl="0" eaLnBrk="1" latinLnBrk="0" hangingPunct="1">
-        <a:defRPr sz="1606" kern="1200">
+      <a:lvl8pPr marL="2520315" algn="l" defTabSz="720090" rtl="0" eaLnBrk="1" latinLnBrk="0" hangingPunct="1">
+        <a:defRPr sz="1418" kern="1200">
           <a:solidFill>
             <a:schemeClr val="tx1"/>
           </a:solidFill>
@@ -2941,8 +2943,8 @@
           <a:cs typeface="+mn-cs"/>
         </a:defRPr>
       </a:lvl8pPr>
-      <a:lvl9pPr marL="3264042" algn="l" defTabSz="816011" rtl="0" eaLnBrk="1" latinLnBrk="0" hangingPunct="1">
-        <a:defRPr sz="1606" kern="1200">
+      <a:lvl9pPr marL="2880360" algn="l" defTabSz="720090" rtl="0" eaLnBrk="1" latinLnBrk="0" hangingPunct="1">
+        <a:defRPr sz="1418" kern="1200">
           <a:solidFill>
             <a:schemeClr val="tx1"/>
           </a:solidFill>
@@ -3000,8 +3002,8 @@
         </p:blipFill>
         <p:spPr>
           <a:xfrm>
-            <a:off x="-695138" y="-2890455"/>
-            <a:ext cx="10716867" cy="924560"/>
+            <a:off x="-735695" y="-3059097"/>
+            <a:ext cx="11342139" cy="978503"/>
           </a:xfrm>
           <a:prstGeom prst="rect">
             <a:avLst/>
@@ -3022,8 +3024,8 @@
         </p:nvGrpSpPr>
         <p:grpSpPr>
           <a:xfrm>
-            <a:off x="-1095741" y="-2170481"/>
-            <a:ext cx="10716867" cy="5091267"/>
+            <a:off x="-1159671" y="-2835214"/>
+            <a:ext cx="11342139" cy="5388315"/>
             <a:chOff x="1170223" y="1467294"/>
             <a:chExt cx="10716867" cy="5091267"/>
           </a:xfrm>
@@ -3111,7 +3113,7 @@
             <a:lstStyle/>
             <a:p>
               <a:pPr algn="ctr"/>
-              <a:endParaRPr lang="zh-TW" altLang="en-US" sz="900"/>
+              <a:endParaRPr lang="zh-TW" altLang="en-US" sz="952"/>
             </a:p>
           </p:txBody>
         </p:sp>
@@ -3130,8 +3132,8 @@
         </p:nvGrpSpPr>
         <p:grpSpPr>
           <a:xfrm>
-            <a:off x="-427327" y="3979947"/>
-            <a:ext cx="2336078" cy="2332337"/>
+            <a:off x="-452259" y="3674058"/>
+            <a:ext cx="2472376" cy="2468416"/>
             <a:chOff x="1685309" y="1218891"/>
             <a:chExt cx="4427304" cy="4420217"/>
           </a:xfrm>
@@ -3209,7 +3211,7 @@
             </a:fontRef>
           </p:style>
           <p:txBody>
-            <a:bodyPr rot="0" spcFirstLastPara="0" vertOverflow="overflow" horzOverflow="overflow" vert="horz" wrap="square" lIns="91440" tIns="45719" rIns="91440" bIns="45719" numCol="1" spcCol="0" rtlCol="0" fromWordArt="0" anchor="ctr" anchorCtr="0" forceAA="0" compatLnSpc="1">
+            <a:bodyPr rot="0" spcFirstLastPara="0" vertOverflow="overflow" horzOverflow="overflow" vert="horz" wrap="square" lIns="96775" tIns="48386" rIns="96775" bIns="48386" numCol="1" spcCol="0" rtlCol="0" fromWordArt="0" anchor="ctr" anchorCtr="0" forceAA="0" compatLnSpc="1">
               <a:prstTxWarp prst="textNoShape">
                 <a:avLst/>
               </a:prstTxWarp>
@@ -3218,7 +3220,7 @@
             <a:lstStyle/>
             <a:p>
               <a:pPr algn="ctr"/>
-              <a:endParaRPr lang="zh-TW" altLang="en-US" sz="900"/>
+              <a:endParaRPr lang="zh-TW" altLang="en-US" sz="952"/>
             </a:p>
           </p:txBody>
         </p:sp>
@@ -3237,8 +3239,8 @@
         </p:nvGrpSpPr>
         <p:grpSpPr>
           <a:xfrm>
-            <a:off x="2260906" y="3979950"/>
-            <a:ext cx="2419051" cy="2332337"/>
+            <a:off x="2392818" y="3674061"/>
+            <a:ext cx="2560190" cy="2468416"/>
             <a:chOff x="5922135" y="1218891"/>
             <a:chExt cx="4584555" cy="4420217"/>
           </a:xfrm>
@@ -3316,7 +3318,7 @@
             </a:fontRef>
           </p:style>
           <p:txBody>
-            <a:bodyPr rot="0" spcFirstLastPara="0" vertOverflow="overflow" horzOverflow="overflow" vert="horz" wrap="square" lIns="91440" tIns="45719" rIns="91440" bIns="45719" numCol="1" spcCol="0" rtlCol="0" fromWordArt="0" anchor="ctr" anchorCtr="0" forceAA="0" compatLnSpc="1">
+            <a:bodyPr rot="0" spcFirstLastPara="0" vertOverflow="overflow" horzOverflow="overflow" vert="horz" wrap="square" lIns="96775" tIns="48386" rIns="96775" bIns="48386" numCol="1" spcCol="0" rtlCol="0" fromWordArt="0" anchor="ctr" anchorCtr="0" forceAA="0" compatLnSpc="1">
               <a:prstTxWarp prst="textNoShape">
                 <a:avLst/>
               </a:prstTxWarp>
@@ -3325,7 +3327,7 @@
             <a:lstStyle/>
             <a:p>
               <a:pPr algn="ctr"/>
-              <a:endParaRPr lang="zh-TW" altLang="en-US" sz="900"/>
+              <a:endParaRPr lang="zh-TW" altLang="en-US" sz="952"/>
             </a:p>
           </p:txBody>
         </p:sp>
@@ -3374,8 +3376,8 @@
         </p:nvGrpSpPr>
         <p:grpSpPr>
           <a:xfrm>
-            <a:off x="-4037170" y="-749300"/>
-            <a:ext cx="11218115" cy="8924392"/>
+            <a:off x="-4272717" y="-1331116"/>
+            <a:ext cx="11872632" cy="9445082"/>
             <a:chOff x="283210" y="3390900"/>
             <a:chExt cx="11218114" cy="8924391"/>
           </a:xfrm>
@@ -3418,7 +3420,7 @@
             </a:fontRef>
           </p:style>
           <p:txBody>
-            <a:bodyPr rot="0" spcFirstLastPara="0" vertOverflow="overflow" horzOverflow="overflow" vert="horz" wrap="square" lIns="58066" tIns="29033" rIns="58066" bIns="29033" numCol="1" spcCol="0" rtlCol="0" fromWordArt="0" anchor="ctr" anchorCtr="0" forceAA="0" compatLnSpc="1">
+            <a:bodyPr rot="0" spcFirstLastPara="0" vertOverflow="overflow" horzOverflow="overflow" vert="horz" wrap="square" lIns="61454" tIns="30727" rIns="61454" bIns="30727" numCol="1" spcCol="0" rtlCol="0" fromWordArt="0" anchor="ctr" anchorCtr="0" forceAA="0" compatLnSpc="1">
               <a:prstTxWarp prst="textNoShape">
                 <a:avLst/>
               </a:prstTxWarp>
@@ -3427,7 +3429,7 @@
             <a:lstStyle/>
             <a:p>
               <a:pPr algn="ctr"/>
-              <a:endParaRPr lang="zh-TW" altLang="en-US" sz="1142" dirty="0"/>
+              <a:endParaRPr lang="zh-TW" altLang="en-US" sz="1209" dirty="0"/>
             </a:p>
           </p:txBody>
         </p:sp>
@@ -3518,7 +3520,7 @@
               <p:spPr>
                 <a:xfrm>
                   <a:off x="5448265" y="9802816"/>
-                  <a:ext cx="938079" cy="230832"/>
+                  <a:ext cx="938079" cy="225681"/>
                 </a:xfrm>
                 <a:prstGeom prst="rect">
                   <a:avLst/>
@@ -3539,7 +3541,7 @@
                       </m:oMathParaPr>
                       <m:oMath xmlns:m="http://schemas.openxmlformats.org/officeDocument/2006/math">
                         <m:r>
-                          <a:rPr lang="en-US" altLang="zh-TW" sz="900" i="1">
+                          <a:rPr lang="en-US" altLang="zh-TW" sz="952" i="1">
                             <a:latin typeface="Cambria Math" panose="02040503050406030204" pitchFamily="18" charset="0"/>
                           </a:rPr>
                           <m:t>|</m:t>
@@ -3549,14 +3551,14 @@
                             <m:begChr m:val=""/>
                             <m:endChr m:val="⟩"/>
                             <m:ctrlPr>
-                              <a:rPr lang="en-US" altLang="zh-TW" sz="900" i="1">
+                              <a:rPr lang="en-US" altLang="zh-TW" sz="952" i="1">
                                 <a:latin typeface="Cambria Math" panose="02040503050406030204" pitchFamily="18" charset="0"/>
                               </a:rPr>
                             </m:ctrlPr>
                           </m:dPr>
                           <m:e>
                             <m:r>
-                              <a:rPr lang="en-US" altLang="zh-TW" sz="900" i="1">
+                              <a:rPr lang="en-US" altLang="zh-TW" sz="952" i="1">
                                 <a:latin typeface="Cambria Math" panose="02040503050406030204" pitchFamily="18" charset="0"/>
                               </a:rPr>
                               <m:t>−1, 1</m:t>
@@ -3566,7 +3568,7 @@
                       </m:oMath>
                     </m:oMathPara>
                   </a14:m>
-                  <a:endParaRPr lang="zh-TW" altLang="en-US" sz="900" dirty="0"/>
+                  <a:endParaRPr lang="zh-TW" altLang="en-US" sz="952" dirty="0"/>
                 </a:p>
               </p:txBody>
             </p:sp>
@@ -3589,7 +3591,7 @@
               <p:spPr>
                 <a:xfrm>
                   <a:off x="5448265" y="9802816"/>
-                  <a:ext cx="938079" cy="230832"/>
+                  <a:ext cx="938079" cy="225681"/>
                 </a:xfrm>
                 <a:prstGeom prst="rect">
                   <a:avLst/>
@@ -3597,7 +3599,7 @@
                 <a:blipFill>
                   <a:blip r:embed="rId3"/>
                   <a:stretch>
-                    <a:fillRect t="-81579" b="-134211"/>
+                    <a:fillRect t="-87179" b="-138462"/>
                   </a:stretch>
                 </a:blipFill>
               </p:spPr>
@@ -3633,7 +3635,7 @@
               <p:spPr>
                 <a:xfrm>
                   <a:off x="5448265" y="6374557"/>
-                  <a:ext cx="938079" cy="230832"/>
+                  <a:ext cx="938079" cy="225681"/>
                 </a:xfrm>
                 <a:prstGeom prst="rect">
                   <a:avLst/>
@@ -3654,7 +3656,7 @@
                       </m:oMathParaPr>
                       <m:oMath xmlns:m="http://schemas.openxmlformats.org/officeDocument/2006/math">
                         <m:r>
-                          <a:rPr lang="en-US" altLang="zh-TW" sz="900" i="1">
+                          <a:rPr lang="en-US" altLang="zh-TW" sz="952" i="1">
                             <a:latin typeface="Cambria Math" panose="02040503050406030204" pitchFamily="18" charset="0"/>
                           </a:rPr>
                           <m:t>|</m:t>
@@ -3664,14 +3666,14 @@
                             <m:begChr m:val=""/>
                             <m:endChr m:val="⟩"/>
                             <m:ctrlPr>
-                              <a:rPr lang="en-US" altLang="zh-TW" sz="900" i="1">
+                              <a:rPr lang="en-US" altLang="zh-TW" sz="952" i="1">
                                 <a:latin typeface="Cambria Math" panose="02040503050406030204" pitchFamily="18" charset="0"/>
                               </a:rPr>
                             </m:ctrlPr>
                           </m:dPr>
                           <m:e>
                             <m:r>
-                              <a:rPr lang="en-US" altLang="zh-TW" sz="900" i="1">
+                              <a:rPr lang="en-US" altLang="zh-TW" sz="952" i="1">
                                 <a:latin typeface="Cambria Math" panose="02040503050406030204" pitchFamily="18" charset="0"/>
                               </a:rPr>
                               <m:t>1, −1</m:t>
@@ -3681,7 +3683,7 @@
                       </m:oMath>
                     </m:oMathPara>
                   </a14:m>
-                  <a:endParaRPr lang="zh-TW" altLang="en-US" sz="900" dirty="0"/>
+                  <a:endParaRPr lang="zh-TW" altLang="en-US" sz="952" dirty="0"/>
                 </a:p>
               </p:txBody>
             </p:sp>
@@ -3704,7 +3706,7 @@
               <p:spPr>
                 <a:xfrm>
                   <a:off x="5448265" y="6374557"/>
-                  <a:ext cx="938079" cy="230832"/>
+                  <a:ext cx="938079" cy="225681"/>
                 </a:xfrm>
                 <a:prstGeom prst="rect">
                   <a:avLst/>
@@ -3712,7 +3714,7 @@
                 <a:blipFill>
                   <a:blip r:embed="rId4"/>
                   <a:stretch>
-                    <a:fillRect t="-83784" b="-140541"/>
+                    <a:fillRect t="-87179" b="-138462"/>
                   </a:stretch>
                 </a:blipFill>
               </p:spPr>
@@ -3958,7 +3960,7 @@
               <p:spPr>
                 <a:xfrm>
                   <a:off x="4532472" y="4371346"/>
-                  <a:ext cx="2693489" cy="230832"/>
+                  <a:ext cx="2693489" cy="225681"/>
                 </a:xfrm>
                 <a:prstGeom prst="rect">
                   <a:avLst/>
@@ -3981,26 +3983,26 @@
                         <m:d>
                           <m:dPr>
                             <m:ctrlPr>
-                              <a:rPr lang="en-US" altLang="zh-TW" sz="900" i="1">
+                              <a:rPr lang="en-US" altLang="zh-TW" sz="952" i="1">
                                 <a:latin typeface="Cambria Math" panose="02040503050406030204" pitchFamily="18" charset="0"/>
                               </a:rPr>
                             </m:ctrlPr>
                           </m:dPr>
                           <m:e>
                             <m:r>
-                              <a:rPr lang="en-US" altLang="zh-TW" sz="900" i="1">
+                              <a:rPr lang="en-US" altLang="zh-TW" sz="952" i="1">
                                 <a:latin typeface="Cambria Math" panose="02040503050406030204" pitchFamily="18" charset="0"/>
                               </a:rPr>
                               <m:t>𝛼</m:t>
                             </m:r>
                             <m:r>
-                              <a:rPr lang="en-US" altLang="zh-TW" sz="900" i="1">
+                              <a:rPr lang="en-US" altLang="zh-TW" sz="952" i="1">
                                 <a:latin typeface="Cambria Math" panose="02040503050406030204" pitchFamily="18" charset="0"/>
                               </a:rPr>
                               <m:t>, </m:t>
                             </m:r>
                             <m:r>
-                              <a:rPr lang="en-US" altLang="zh-TW" sz="900" i="1">
+                              <a:rPr lang="en-US" altLang="zh-TW" sz="952" i="1">
                                 <a:latin typeface="Cambria Math" panose="02040503050406030204" pitchFamily="18" charset="0"/>
                               </a:rPr>
                               <m:t>𝛽</m:t>
@@ -4008,7 +4010,7 @@
                           </m:e>
                         </m:d>
                         <m:r>
-                          <a:rPr lang="en-US" altLang="zh-TW" sz="900" i="1">
+                          <a:rPr lang="en-US" altLang="zh-TW" sz="952" i="1">
                             <a:latin typeface="Cambria Math" panose="02040503050406030204" pitchFamily="18" charset="0"/>
                           </a:rPr>
                           <m:t>=</m:t>
@@ -4016,14 +4018,14 @@
                         <m:d>
                           <m:dPr>
                             <m:ctrlPr>
-                              <a:rPr lang="en-US" altLang="zh-TW" sz="900" i="1">
+                              <a:rPr lang="en-US" altLang="zh-TW" sz="952" i="1">
                                 <a:latin typeface="Cambria Math" panose="02040503050406030204" pitchFamily="18" charset="0"/>
                               </a:rPr>
                             </m:ctrlPr>
                           </m:dPr>
                           <m:e>
                             <m:r>
-                              <a:rPr lang="en-US" altLang="zh-TW" sz="900" i="1">
+                              <a:rPr lang="en-US" altLang="zh-TW" sz="952" i="1">
                                 <a:latin typeface="Cambria Math" panose="02040503050406030204" pitchFamily="18" charset="0"/>
                               </a:rPr>
                               <m:t>0, </m:t>
@@ -4032,7 +4034,7 @@
                               <m:rPr>
                                 <m:nor/>
                               </m:rPr>
-                              <a:rPr lang="en-US" altLang="zh-TW" sz="900">
+                              <a:rPr lang="en-US" altLang="zh-TW" sz="952">
                                 <a:latin typeface="Cambria Math" panose="02040503050406030204" pitchFamily="18" charset="0"/>
                               </a:rPr>
                               <m:t>0</m:t>
@@ -4042,7 +4044,7 @@
                       </m:oMath>
                     </m:oMathPara>
                   </a14:m>
-                  <a:endParaRPr lang="zh-TW" altLang="en-US" sz="900" dirty="0"/>
+                  <a:endParaRPr lang="zh-TW" altLang="en-US" sz="952" dirty="0"/>
                 </a:p>
               </p:txBody>
             </p:sp>
@@ -4065,7 +4067,7 @@
               <p:spPr>
                 <a:xfrm>
                   <a:off x="4532472" y="4371346"/>
-                  <a:ext cx="2693489" cy="230832"/>
+                  <a:ext cx="2693489" cy="225681"/>
                 </a:xfrm>
                 <a:prstGeom prst="rect">
                   <a:avLst/>
@@ -4073,7 +4075,7 @@
                 <a:blipFill>
                   <a:blip r:embed="rId5"/>
                   <a:stretch>
-                    <a:fillRect/>
+                    <a:fillRect b="-2564"/>
                   </a:stretch>
                 </a:blipFill>
               </p:spPr>
@@ -4109,7 +4111,7 @@
               <p:spPr>
                 <a:xfrm>
                   <a:off x="2005886" y="7220158"/>
-                  <a:ext cx="1327214" cy="230832"/>
+                  <a:ext cx="1327214" cy="225681"/>
                 </a:xfrm>
                 <a:prstGeom prst="rect">
                   <a:avLst/>
@@ -4132,26 +4134,26 @@
                         <m:d>
                           <m:dPr>
                             <m:ctrlPr>
-                              <a:rPr lang="en-US" altLang="zh-TW" sz="900" i="1">
+                              <a:rPr lang="en-US" altLang="zh-TW" sz="952" i="1">
                                 <a:latin typeface="Cambria Math" panose="02040503050406030204" pitchFamily="18" charset="0"/>
                               </a:rPr>
                             </m:ctrlPr>
                           </m:dPr>
                           <m:e>
                             <m:r>
-                              <a:rPr lang="en-US" altLang="zh-TW" sz="900" i="1">
+                              <a:rPr lang="en-US" altLang="zh-TW" sz="952" i="1">
                                 <a:latin typeface="Cambria Math" panose="02040503050406030204" pitchFamily="18" charset="0"/>
                               </a:rPr>
                               <m:t>0, </m:t>
                             </m:r>
                             <m:r>
-                              <a:rPr lang="en-US" altLang="zh-TW" sz="900" i="1">
+                              <a:rPr lang="en-US" altLang="zh-TW" sz="952" i="1">
                                 <a:latin typeface="Cambria Math" panose="02040503050406030204" pitchFamily="18" charset="0"/>
                               </a:rPr>
                               <m:t>𝜋</m:t>
                             </m:r>
                             <m:r>
-                              <a:rPr lang="en-US" altLang="zh-TW" sz="900" i="1">
+                              <a:rPr lang="en-US" altLang="zh-TW" sz="952" i="1">
                                 <a:latin typeface="Cambria Math" panose="02040503050406030204" pitchFamily="18" charset="0"/>
                               </a:rPr>
                               <m:t>/2</m:t>
@@ -4161,7 +4163,7 @@
                       </m:oMath>
                     </m:oMathPara>
                   </a14:m>
-                  <a:endParaRPr lang="zh-TW" altLang="en-US" sz="900" dirty="0"/>
+                  <a:endParaRPr lang="zh-TW" altLang="en-US" sz="952" dirty="0"/>
                 </a:p>
               </p:txBody>
             </p:sp>
@@ -4184,7 +4186,7 @@
               <p:spPr>
                 <a:xfrm>
                   <a:off x="2005886" y="7220158"/>
-                  <a:ext cx="1327214" cy="230832"/>
+                  <a:ext cx="1327214" cy="225681"/>
                 </a:xfrm>
                 <a:prstGeom prst="rect">
                   <a:avLst/>
@@ -4192,7 +4194,7 @@
                 <a:blipFill>
                   <a:blip r:embed="rId6"/>
                   <a:stretch>
-                    <a:fillRect b="-2632"/>
+                    <a:fillRect/>
                   </a:stretch>
                 </a:blipFill>
               </p:spPr>
@@ -4228,7 +4230,7 @@
               <p:spPr>
                 <a:xfrm>
                   <a:off x="8448588" y="7250749"/>
-                  <a:ext cx="1327214" cy="230832"/>
+                  <a:ext cx="1327214" cy="225681"/>
                 </a:xfrm>
                 <a:prstGeom prst="rect">
                   <a:avLst/>
@@ -4251,32 +4253,32 @@
                         <m:d>
                           <m:dPr>
                             <m:ctrlPr>
-                              <a:rPr lang="en-US" altLang="zh-TW" sz="900" i="1">
+                              <a:rPr lang="en-US" altLang="zh-TW" sz="952" i="1">
                                 <a:latin typeface="Cambria Math" panose="02040503050406030204" pitchFamily="18" charset="0"/>
                               </a:rPr>
                             </m:ctrlPr>
                           </m:dPr>
                           <m:e>
                             <m:r>
-                              <a:rPr lang="en-US" altLang="zh-TW" sz="900" i="1">
+                              <a:rPr lang="en-US" altLang="zh-TW" sz="952" i="1">
                                 <a:latin typeface="Cambria Math" panose="02040503050406030204" pitchFamily="18" charset="0"/>
                               </a:rPr>
                               <m:t>𝜋</m:t>
                             </m:r>
                             <m:r>
-                              <a:rPr lang="en-US" altLang="zh-TW" sz="900" i="1">
+                              <a:rPr lang="en-US" altLang="zh-TW" sz="952" i="1">
                                 <a:latin typeface="Cambria Math" panose="02040503050406030204" pitchFamily="18" charset="0"/>
                               </a:rPr>
                               <m:t>,</m:t>
                             </m:r>
                             <m:r>
-                              <a:rPr lang="en-US" altLang="zh-TW" sz="900" i="1">
+                              <a:rPr lang="en-US" altLang="zh-TW" sz="952" i="1">
                                 <a:latin typeface="Cambria Math" panose="02040503050406030204" pitchFamily="18" charset="0"/>
                               </a:rPr>
                               <m:t>𝜋</m:t>
                             </m:r>
                             <m:r>
-                              <a:rPr lang="en-US" altLang="zh-TW" sz="900" i="1">
+                              <a:rPr lang="en-US" altLang="zh-TW" sz="952" i="1">
                                 <a:latin typeface="Cambria Math" panose="02040503050406030204" pitchFamily="18" charset="0"/>
                               </a:rPr>
                               <m:t>/2</m:t>
@@ -4286,7 +4288,7 @@
                       </m:oMath>
                     </m:oMathPara>
                   </a14:m>
-                  <a:endParaRPr lang="zh-TW" altLang="en-US" sz="900" dirty="0"/>
+                  <a:endParaRPr lang="zh-TW" altLang="en-US" sz="952" dirty="0"/>
                 </a:p>
               </p:txBody>
             </p:sp>
@@ -4309,7 +4311,7 @@
               <p:spPr>
                 <a:xfrm>
                   <a:off x="8448588" y="7250749"/>
-                  <a:ext cx="1327214" cy="230832"/>
+                  <a:ext cx="1327214" cy="225681"/>
                 </a:xfrm>
                 <a:prstGeom prst="rect">
                   <a:avLst/>
@@ -4317,7 +4319,7 @@
                 <a:blipFill>
                   <a:blip r:embed="rId7"/>
                   <a:stretch>
-                    <a:fillRect b="-2632"/>
+                    <a:fillRect b="-2564"/>
                   </a:stretch>
                 </a:blipFill>
               </p:spPr>
@@ -4353,7 +4355,7 @@
               <p:spPr>
                 <a:xfrm>
                   <a:off x="5276820" y="10231788"/>
-                  <a:ext cx="1327214" cy="230832"/>
+                  <a:ext cx="1327214" cy="225681"/>
                 </a:xfrm>
                 <a:prstGeom prst="rect">
                   <a:avLst/>
@@ -4376,20 +4378,20 @@
                         <m:d>
                           <m:dPr>
                             <m:ctrlPr>
-                              <a:rPr lang="en-US" altLang="zh-TW" sz="900" i="1">
+                              <a:rPr lang="en-US" altLang="zh-TW" sz="952" i="1">
                                 <a:latin typeface="Cambria Math" panose="02040503050406030204" pitchFamily="18" charset="0"/>
                               </a:rPr>
                             </m:ctrlPr>
                           </m:dPr>
                           <m:e>
                             <m:r>
-                              <a:rPr lang="en-US" altLang="zh-TW" sz="900" i="1">
+                              <a:rPr lang="en-US" altLang="zh-TW" sz="952" i="1">
                                 <a:latin typeface="Cambria Math" panose="02040503050406030204" pitchFamily="18" charset="0"/>
                               </a:rPr>
                               <m:t>0, </m:t>
                             </m:r>
                             <m:r>
-                              <a:rPr lang="en-US" altLang="zh-TW" sz="900" i="1">
+                              <a:rPr lang="en-US" altLang="zh-TW" sz="952" i="1">
                                 <a:latin typeface="Cambria Math" panose="02040503050406030204" pitchFamily="18" charset="0"/>
                               </a:rPr>
                               <m:t>𝜋</m:t>
@@ -4399,7 +4401,7 @@
                       </m:oMath>
                     </m:oMathPara>
                   </a14:m>
-                  <a:endParaRPr lang="zh-TW" altLang="en-US" sz="900" dirty="0"/>
+                  <a:endParaRPr lang="zh-TW" altLang="en-US" sz="952" dirty="0"/>
                 </a:p>
               </p:txBody>
             </p:sp>
@@ -4422,7 +4424,7 @@
               <p:spPr>
                 <a:xfrm>
                   <a:off x="5276820" y="10231788"/>
-                  <a:ext cx="1327214" cy="230832"/>
+                  <a:ext cx="1327214" cy="225681"/>
                 </a:xfrm>
                 <a:prstGeom prst="rect">
                   <a:avLst/>
@@ -4464,7 +4466,7 @@
           <p:spPr>
             <a:xfrm>
               <a:off x="3105043" y="3526257"/>
-              <a:ext cx="5764953" cy="519661"/>
+              <a:ext cx="5764953" cy="518066"/>
             </a:xfrm>
             <a:prstGeom prst="rect">
               <a:avLst/>
@@ -4478,13 +4480,13 @@
             <a:lstStyle/>
             <a:p>
               <a:r>
-                <a:rPr lang="en-US" altLang="zh-TW" sz="2800" dirty="0">
+                <a:rPr lang="en-US" altLang="zh-TW" sz="2963" dirty="0">
                   <a:latin typeface="Times New Roman" panose="02020603050405020304" pitchFamily="18" charset="0"/>
                   <a:cs typeface="Times New Roman" panose="02020603050405020304" pitchFamily="18" charset="0"/>
                 </a:rPr>
                 <a:t>Valley-mixed excitons transition rate</a:t>
               </a:r>
-              <a:endParaRPr lang="zh-TW" altLang="en-US" sz="2800" dirty="0">
+              <a:endParaRPr lang="zh-TW" altLang="en-US" sz="2963" dirty="0">
                 <a:latin typeface="Times New Roman" panose="02020603050405020304" pitchFamily="18" charset="0"/>
                 <a:cs typeface="Times New Roman" panose="02020603050405020304" pitchFamily="18" charset="0"/>
               </a:endParaRPr>
@@ -4548,7 +4550,7 @@
               <p:spPr>
                 <a:xfrm>
                   <a:off x="6993803" y="6083073"/>
-                  <a:ext cx="339653" cy="248658"/>
+                  <a:ext cx="339653" cy="243553"/>
                 </a:xfrm>
                 <a:prstGeom prst="rect">
                   <a:avLst/>
@@ -4571,7 +4573,7 @@
                         <m:sSub>
                           <m:sSubPr>
                             <m:ctrlPr>
-                              <a:rPr lang="en-US" altLang="zh-TW" sz="1016" i="1">
+                              <a:rPr lang="en-US" altLang="zh-TW" sz="1075" i="1">
                                 <a:solidFill>
                                   <a:schemeClr val="bg1"/>
                                 </a:solidFill>
@@ -4581,7 +4583,7 @@
                           </m:sSubPr>
                           <m:e>
                             <m:r>
-                              <a:rPr lang="en-US" altLang="zh-TW" sz="1016" i="1">
+                              <a:rPr lang="en-US" altLang="zh-TW" sz="1075" i="1">
                                 <a:solidFill>
                                   <a:schemeClr val="bg1"/>
                                 </a:solidFill>
@@ -4592,7 +4594,7 @@
                           </m:e>
                           <m:sub>
                             <m:r>
-                              <a:rPr lang="en-US" altLang="zh-TW" sz="1016" i="1">
+                              <a:rPr lang="en-US" altLang="zh-TW" sz="1075" i="1">
                                 <a:solidFill>
                                   <a:schemeClr val="bg1"/>
                                 </a:solidFill>
@@ -4605,7 +4607,7 @@
                       </m:oMath>
                     </m:oMathPara>
                   </a14:m>
-                  <a:endParaRPr lang="en-US" altLang="zh-TW" sz="1016" dirty="0"/>
+                  <a:endParaRPr lang="en-US" altLang="zh-TW" sz="1075" dirty="0"/>
                 </a:p>
               </p:txBody>
             </p:sp>
@@ -4628,7 +4630,7 @@
               <p:spPr>
                 <a:xfrm>
                   <a:off x="6993803" y="6083073"/>
-                  <a:ext cx="339653" cy="248658"/>
+                  <a:ext cx="339653" cy="243553"/>
                 </a:xfrm>
                 <a:prstGeom prst="rect">
                   <a:avLst/>
@@ -4636,7 +4638,7 @@
                 <a:blipFill>
                   <a:blip r:embed="rId10"/>
                   <a:stretch>
-                    <a:fillRect/>
+                    <a:fillRect b="-2381"/>
                   </a:stretch>
                 </a:blipFill>
               </p:spPr>
@@ -4712,7 +4714,7 @@
               <p:spPr>
                 <a:xfrm>
                   <a:off x="5342865" y="6083073"/>
-                  <a:ext cx="339653" cy="248658"/>
+                  <a:ext cx="339653" cy="243553"/>
                 </a:xfrm>
                 <a:prstGeom prst="rect">
                   <a:avLst/>
@@ -4735,7 +4737,7 @@
                         <m:sSub>
                           <m:sSubPr>
                             <m:ctrlPr>
-                              <a:rPr lang="en-US" altLang="zh-TW" sz="1016" i="1">
+                              <a:rPr lang="en-US" altLang="zh-TW" sz="1075" i="1">
                                 <a:solidFill>
                                   <a:schemeClr val="bg1"/>
                                 </a:solidFill>
@@ -4745,7 +4747,7 @@
                           </m:sSubPr>
                           <m:e>
                             <m:r>
-                              <a:rPr lang="en-US" altLang="zh-TW" sz="1016" i="1">
+                              <a:rPr lang="en-US" altLang="zh-TW" sz="1075" i="1">
                                 <a:solidFill>
                                   <a:schemeClr val="bg1"/>
                                 </a:solidFill>
@@ -4756,7 +4758,7 @@
                           </m:e>
                           <m:sub>
                             <m:r>
-                              <a:rPr lang="en-US" altLang="zh-TW" sz="1016" i="1">
+                              <a:rPr lang="en-US" altLang="zh-TW" sz="1075" i="1">
                                 <a:solidFill>
                                   <a:schemeClr val="bg1"/>
                                 </a:solidFill>
@@ -4769,7 +4771,7 @@
                       </m:oMath>
                     </m:oMathPara>
                   </a14:m>
-                  <a:endParaRPr lang="en-US" altLang="zh-TW" sz="1016" dirty="0"/>
+                  <a:endParaRPr lang="en-US" altLang="zh-TW" sz="1075" dirty="0"/>
                 </a:p>
               </p:txBody>
             </p:sp>
@@ -4792,15 +4794,15 @@
               <p:spPr>
                 <a:xfrm>
                   <a:off x="5342865" y="6083073"/>
-                  <a:ext cx="339653" cy="248658"/>
+                  <a:ext cx="339653" cy="243553"/>
                 </a:xfrm>
                 <a:prstGeom prst="rect">
                   <a:avLst/>
                 </a:prstGeom>
                 <a:blipFill>
-                  <a:blip r:embed="rId10"/>
+                  <a:blip r:embed="rId11"/>
                   <a:stretch>
-                    <a:fillRect/>
+                    <a:fillRect b="-2381"/>
                   </a:stretch>
                 </a:blipFill>
               </p:spPr>
@@ -4912,7 +4914,7 @@
               <a:lstStyle/>
               <a:p>
                 <a:pPr algn="ctr"/>
-                <a:endParaRPr lang="en-US" sz="900" dirty="0"/>
+                <a:endParaRPr lang="en-US" sz="952" dirty="0"/>
               </a:p>
             </p:txBody>
           </p:sp>
@@ -4990,7 +4992,7 @@
               <a:lstStyle/>
               <a:p>
                 <a:pPr algn="ctr"/>
-                <a:endParaRPr lang="en-US" sz="900" dirty="0"/>
+                <a:endParaRPr lang="en-US" sz="952" dirty="0"/>
               </a:p>
             </p:txBody>
           </p:sp>
@@ -5067,7 +5069,7 @@
               <a:lstStyle/>
               <a:p>
                 <a:pPr algn="ctr"/>
-                <a:endParaRPr lang="en-US" sz="900" dirty="0"/>
+                <a:endParaRPr lang="en-US" sz="952" dirty="0"/>
               </a:p>
             </p:txBody>
           </p:sp>
@@ -5138,7 +5140,7 @@
               <a:lstStyle/>
               <a:p>
                 <a:pPr algn="ctr"/>
-                <a:endParaRPr lang="en-US" sz="900" dirty="0"/>
+                <a:endParaRPr lang="en-US" sz="952" dirty="0"/>
               </a:p>
             </p:txBody>
           </p:sp>
@@ -5193,7 +5195,7 @@
               <a:lstStyle/>
               <a:p>
                 <a:pPr algn="ctr"/>
-                <a:endParaRPr lang="en-US" sz="900"/>
+                <a:endParaRPr lang="en-US" sz="952"/>
               </a:p>
             </p:txBody>
           </p:sp>
@@ -5248,7 +5250,7 @@
               <a:lstStyle/>
               <a:p>
                 <a:pPr algn="ctr"/>
-                <a:endParaRPr lang="en-US" sz="900" dirty="0"/>
+                <a:endParaRPr lang="en-US" sz="952" dirty="0"/>
               </a:p>
             </p:txBody>
           </p:sp>
@@ -5323,7 +5325,7 @@
               <a:lstStyle/>
               <a:p>
                 <a:pPr algn="ctr"/>
-                <a:endParaRPr lang="en-US" sz="900" dirty="0">
+                <a:endParaRPr lang="en-US" sz="952" dirty="0">
                   <a:solidFill>
                     <a:schemeClr val="tx1"/>
                   </a:solidFill>
@@ -5348,7 +5350,7 @@
                 <p:spPr>
                   <a:xfrm>
                     <a:off x="4690465" y="3556135"/>
-                    <a:ext cx="321503" cy="519661"/>
+                    <a:ext cx="321503" cy="518066"/>
                   </a:xfrm>
                   <a:prstGeom prst="rect">
                     <a:avLst/>
@@ -5369,7 +5371,7 @@
                         </m:oMathParaPr>
                         <m:oMath xmlns:m="http://schemas.openxmlformats.org/officeDocument/2006/math">
                           <m:r>
-                            <a:rPr lang="en-US" sz="2800" i="1">
+                            <a:rPr lang="en-US" sz="2963" i="1">
                               <a:solidFill>
                                 <a:schemeClr val="accent6">
                                   <a:lumMod val="60000"/>
@@ -5383,7 +5385,7 @@
                         </m:oMath>
                       </m:oMathPara>
                     </a14:m>
-                    <a:endParaRPr lang="en-US" sz="2800" dirty="0">
+                    <a:endParaRPr lang="en-US" sz="2963" dirty="0">
                       <a:solidFill>
                         <a:schemeClr val="accent6">
                           <a:lumMod val="60000"/>
@@ -5413,13 +5415,13 @@
                 <p:spPr>
                   <a:xfrm>
                     <a:off x="4690465" y="3556135"/>
-                    <a:ext cx="321503" cy="519661"/>
+                    <a:ext cx="321503" cy="518066"/>
                   </a:xfrm>
                   <a:prstGeom prst="rect">
                     <a:avLst/>
                   </a:prstGeom>
                   <a:blipFill>
-                    <a:blip r:embed="rId11"/>
+                    <a:blip r:embed="rId12"/>
                     <a:stretch>
                       <a:fillRect/>
                     </a:stretch>
@@ -5457,7 +5459,7 @@
                 <p:spPr>
                   <a:xfrm>
                     <a:off x="4440285" y="3358991"/>
-                    <a:ext cx="321505" cy="519661"/>
+                    <a:ext cx="321505" cy="518066"/>
                   </a:xfrm>
                   <a:prstGeom prst="rect">
                     <a:avLst/>
@@ -5478,7 +5480,7 @@
                         </m:oMathParaPr>
                         <m:oMath xmlns:m="http://schemas.openxmlformats.org/officeDocument/2006/math">
                           <m:r>
-                            <a:rPr lang="en-US" sz="2800" i="1">
+                            <a:rPr lang="en-US" sz="2963" i="1">
                               <a:latin typeface="Cambria Math" panose="02040503050406030204" pitchFamily="18" charset="0"/>
                             </a:rPr>
                             <m:t>𝑥</m:t>
@@ -5486,7 +5488,7 @@
                         </m:oMath>
                       </m:oMathPara>
                     </a14:m>
-                    <a:endParaRPr lang="en-US" sz="2800" dirty="0"/>
+                    <a:endParaRPr lang="en-US" sz="2963" dirty="0"/>
                   </a:p>
                 </p:txBody>
               </p:sp>
@@ -5509,13 +5511,13 @@
                 <p:spPr>
                   <a:xfrm>
                     <a:off x="4440285" y="3358991"/>
-                    <a:ext cx="321505" cy="519661"/>
+                    <a:ext cx="321505" cy="518066"/>
                   </a:xfrm>
                   <a:prstGeom prst="rect">
                     <a:avLst/>
                   </a:prstGeom>
                   <a:blipFill>
-                    <a:blip r:embed="rId12"/>
+                    <a:blip r:embed="rId13"/>
                     <a:stretch>
                       <a:fillRect/>
                     </a:stretch>
@@ -5615,7 +5617,7 @@
               <a:lstStyle/>
               <a:p>
                 <a:pPr algn="ctr"/>
-                <a:endParaRPr lang="en-US" sz="900" dirty="0"/>
+                <a:endParaRPr lang="en-US" sz="952" dirty="0"/>
               </a:p>
             </p:txBody>
           </p:sp>
@@ -5636,7 +5638,7 @@
                 <p:spPr>
                   <a:xfrm>
                     <a:off x="5682304" y="3497724"/>
-                    <a:ext cx="321505" cy="519661"/>
+                    <a:ext cx="321505" cy="518066"/>
                   </a:xfrm>
                   <a:prstGeom prst="rect">
                     <a:avLst/>
@@ -5657,7 +5659,7 @@
                         </m:oMathParaPr>
                         <m:oMath xmlns:m="http://schemas.openxmlformats.org/officeDocument/2006/math">
                           <m:r>
-                            <a:rPr lang="en-US" sz="2800" i="1">
+                            <a:rPr lang="en-US" sz="2963" i="1">
                               <a:latin typeface="Cambria Math" panose="02040503050406030204" pitchFamily="18" charset="0"/>
                             </a:rPr>
                             <m:t>𝑦</m:t>
@@ -5665,7 +5667,7 @@
                         </m:oMath>
                       </m:oMathPara>
                     </a14:m>
-                    <a:endParaRPr lang="en-US" sz="2800" dirty="0"/>
+                    <a:endParaRPr lang="en-US" sz="2963" dirty="0"/>
                   </a:p>
                 </p:txBody>
               </p:sp>
@@ -5688,13 +5690,13 @@
                 <p:spPr>
                   <a:xfrm>
                     <a:off x="5682304" y="3497724"/>
-                    <a:ext cx="321505" cy="519661"/>
+                    <a:ext cx="321505" cy="518066"/>
                   </a:xfrm>
                   <a:prstGeom prst="rect">
                     <a:avLst/>
                   </a:prstGeom>
                   <a:blipFill>
-                    <a:blip r:embed="rId13"/>
+                    <a:blip r:embed="rId14"/>
                     <a:stretch>
                       <a:fillRect/>
                     </a:stretch>
@@ -5732,7 +5734,7 @@
                 <p:spPr>
                   <a:xfrm>
                     <a:off x="5200615" y="2429547"/>
-                    <a:ext cx="321505" cy="519661"/>
+                    <a:ext cx="321505" cy="518066"/>
                   </a:xfrm>
                   <a:prstGeom prst="rect">
                     <a:avLst/>
@@ -5753,7 +5755,7 @@
                         </m:oMathParaPr>
                         <m:oMath xmlns:m="http://schemas.openxmlformats.org/officeDocument/2006/math">
                           <m:r>
-                            <a:rPr lang="en-US" sz="2800" i="1">
+                            <a:rPr lang="en-US" sz="2963" i="1">
                               <a:latin typeface="Cambria Math" panose="02040503050406030204" pitchFamily="18" charset="0"/>
                             </a:rPr>
                             <m:t>𝑧</m:t>
@@ -5761,7 +5763,7 @@
                         </m:oMath>
                       </m:oMathPara>
                     </a14:m>
-                    <a:endParaRPr lang="en-US" sz="2800" dirty="0"/>
+                    <a:endParaRPr lang="en-US" sz="2963" dirty="0"/>
                   </a:p>
                 </p:txBody>
               </p:sp>
@@ -5784,13 +5786,13 @@
                 <p:spPr>
                   <a:xfrm>
                     <a:off x="5200615" y="2429547"/>
-                    <a:ext cx="321505" cy="519661"/>
+                    <a:ext cx="321505" cy="518066"/>
                   </a:xfrm>
                   <a:prstGeom prst="rect">
                     <a:avLst/>
                   </a:prstGeom>
                   <a:blipFill>
-                    <a:blip r:embed="rId14"/>
+                    <a:blip r:embed="rId15"/>
                     <a:stretch>
                       <a:fillRect/>
                     </a:stretch>
@@ -5861,7 +5863,7 @@
               <a:lstStyle/>
               <a:p>
                 <a:pPr algn="ctr"/>
-                <a:endParaRPr lang="en-US" sz="900" dirty="0"/>
+                <a:endParaRPr lang="en-US" sz="952" dirty="0"/>
               </a:p>
             </p:txBody>
           </p:sp>
@@ -5988,7 +5990,7 @@
               <a:lstStyle/>
               <a:p>
                 <a:pPr algn="ctr"/>
-                <a:endParaRPr lang="en-US" sz="900" dirty="0"/>
+                <a:endParaRPr lang="en-US" sz="952" dirty="0"/>
               </a:p>
             </p:txBody>
           </p:sp>
@@ -6074,7 +6076,7 @@
               <a:lstStyle/>
               <a:p>
                 <a:pPr algn="ctr"/>
-                <a:endParaRPr lang="en-US" sz="900" dirty="0">
+                <a:endParaRPr lang="en-US" sz="952" dirty="0">
                   <a:solidFill>
                     <a:schemeClr val="tx1"/>
                   </a:solidFill>
@@ -6143,7 +6145,7 @@
                 <p:spPr>
                   <a:xfrm>
                     <a:off x="5379379" y="3022370"/>
-                    <a:ext cx="321503" cy="519661"/>
+                    <a:ext cx="321503" cy="518066"/>
                   </a:xfrm>
                   <a:prstGeom prst="rect">
                     <a:avLst/>
@@ -6164,7 +6166,7 @@
                         </m:oMathParaPr>
                         <m:oMath xmlns:m="http://schemas.openxmlformats.org/officeDocument/2006/math">
                           <m:r>
-                            <a:rPr lang="en-US" sz="2800" i="1">
+                            <a:rPr lang="en-US" sz="2963" i="1">
                               <a:solidFill>
                                 <a:schemeClr val="accent1">
                                   <a:lumMod val="40000"/>
@@ -6178,7 +6180,7 @@
                         </m:oMath>
                       </m:oMathPara>
                     </a14:m>
-                    <a:endParaRPr lang="en-US" sz="2800" dirty="0">
+                    <a:endParaRPr lang="en-US" sz="2963" dirty="0">
                       <a:solidFill>
                         <a:schemeClr val="accent1">
                           <a:lumMod val="40000"/>
@@ -6208,13 +6210,13 @@
                 <p:spPr>
                   <a:xfrm>
                     <a:off x="5379379" y="3022370"/>
-                    <a:ext cx="321503" cy="519661"/>
+                    <a:ext cx="321503" cy="518066"/>
                   </a:xfrm>
                   <a:prstGeom prst="rect">
                     <a:avLst/>
                   </a:prstGeom>
                   <a:blipFill>
-                    <a:blip r:embed="rId15"/>
+                    <a:blip r:embed="rId16"/>
                     <a:stretch>
                       <a:fillRect/>
                     </a:stretch>
@@ -6448,7 +6450,7 @@
               <a:lstStyle/>
               <a:p>
                 <a:pPr algn="ctr"/>
-                <a:endParaRPr lang="en-US" sz="900"/>
+                <a:endParaRPr lang="en-US" sz="952"/>
               </a:p>
             </p:txBody>
           </p:sp>
@@ -6531,7 +6533,7 @@
               <a:lstStyle/>
               <a:p>
                 <a:pPr algn="ctr"/>
-                <a:endParaRPr lang="en-US" sz="900" dirty="0"/>
+                <a:endParaRPr lang="en-US" sz="952" dirty="0"/>
               </a:p>
             </p:txBody>
           </p:sp>
@@ -6551,9 +6553,9 @@
           <p:grpSpPr>
             <a:xfrm>
               <a:off x="4973729" y="5067527"/>
-              <a:ext cx="609103" cy="503890"/>
+              <a:ext cx="609103" cy="498739"/>
               <a:chOff x="6583394" y="1501875"/>
-              <a:chExt cx="1650681" cy="1365553"/>
+              <a:chExt cx="1650681" cy="1351594"/>
             </a:xfrm>
           </p:grpSpPr>
           <p:grpSp>
@@ -6629,7 +6631,7 @@
                 <a:lstStyle/>
                 <a:p>
                   <a:pPr algn="ctr"/>
-                  <a:endParaRPr lang="zh-TW" altLang="en-US" sz="1142">
+                  <a:endParaRPr lang="zh-TW" altLang="en-US" sz="1209">
                     <a:solidFill>
                       <a:schemeClr val="bg1"/>
                     </a:solidFill>
@@ -6690,7 +6692,7 @@
                 <a:lstStyle/>
                 <a:p>
                   <a:pPr algn="ctr"/>
-                  <a:endParaRPr lang="zh-TW" altLang="en-US" sz="1142" dirty="0">
+                  <a:endParaRPr lang="zh-TW" altLang="en-US" sz="1209" dirty="0">
                     <a:solidFill>
                       <a:schemeClr val="bg1"/>
                     </a:solidFill>
@@ -6716,7 +6718,7 @@
                 <p:spPr>
                   <a:xfrm>
                     <a:off x="6583394" y="1501875"/>
-                    <a:ext cx="416137" cy="655101"/>
+                    <a:ext cx="416137" cy="640330"/>
                   </a:xfrm>
                   <a:prstGeom prst="rect">
                     <a:avLst/>
@@ -6739,7 +6741,7 @@
                           <m:sSub>
                             <m:sSubPr>
                               <m:ctrlPr>
-                                <a:rPr lang="en-US" altLang="zh-TW" sz="900" i="1">
+                                <a:rPr lang="en-US" altLang="zh-TW" sz="952" i="1">
                                   <a:solidFill>
                                     <a:schemeClr val="bg1"/>
                                   </a:solidFill>
@@ -6749,7 +6751,7 @@
                             </m:sSubPr>
                             <m:e>
                               <m:r>
-                                <a:rPr lang="en-US" altLang="zh-TW" sz="900" i="1">
+                                <a:rPr lang="en-US" altLang="zh-TW" sz="952" i="1">
                                   <a:solidFill>
                                     <a:schemeClr val="bg1"/>
                                   </a:solidFill>
@@ -6760,7 +6762,7 @@
                             </m:e>
                             <m:sub>
                               <m:r>
-                                <a:rPr lang="en-US" altLang="zh-TW" sz="900" i="1">
+                                <a:rPr lang="en-US" altLang="zh-TW" sz="952" i="1">
                                   <a:solidFill>
                                     <a:schemeClr val="bg1"/>
                                   </a:solidFill>
@@ -6773,7 +6775,7 @@
                         </m:oMath>
                       </m:oMathPara>
                     </a14:m>
-                    <a:endParaRPr lang="en-US" altLang="zh-TW" sz="900" dirty="0">
+                    <a:endParaRPr lang="en-US" altLang="zh-TW" sz="952" dirty="0">
                       <a:solidFill>
                         <a:schemeClr val="bg1"/>
                       </a:solidFill>
@@ -6800,15 +6802,15 @@
                 <p:spPr>
                   <a:xfrm>
                     <a:off x="6583394" y="1501875"/>
-                    <a:ext cx="416137" cy="655101"/>
+                    <a:ext cx="416137" cy="640330"/>
                   </a:xfrm>
                   <a:prstGeom prst="rect">
                     <a:avLst/>
                   </a:prstGeom>
                   <a:blipFill>
-                    <a:blip r:embed="rId16"/>
+                    <a:blip r:embed="rId17"/>
                     <a:stretch>
-                      <a:fillRect r="-56000"/>
+                      <a:fillRect r="-55556"/>
                     </a:stretch>
                   </a:blipFill>
                 </p:spPr>
@@ -6843,8 +6845,8 @@
                 </p:nvSpPr>
                 <p:spPr>
                   <a:xfrm>
-                    <a:off x="7165989" y="2241868"/>
-                    <a:ext cx="1068086" cy="625560"/>
+                    <a:off x="7165989" y="2241869"/>
+                    <a:ext cx="1068086" cy="611600"/>
                   </a:xfrm>
                   <a:prstGeom prst="rect">
                     <a:avLst/>
@@ -6867,7 +6869,7 @@
                           <m:sSub>
                             <m:sSubPr>
                               <m:ctrlPr>
-                                <a:rPr lang="en-US" altLang="zh-TW" sz="900" i="1">
+                                <a:rPr lang="en-US" altLang="zh-TW" sz="952" i="1">
                                   <a:solidFill>
                                     <a:schemeClr val="bg1"/>
                                   </a:solidFill>
@@ -6877,7 +6879,7 @@
                             </m:sSubPr>
                             <m:e>
                               <m:r>
-                                <a:rPr lang="en-US" altLang="zh-TW" sz="900" i="1">
+                                <a:rPr lang="en-US" altLang="zh-TW" sz="952" i="1">
                                   <a:solidFill>
                                     <a:schemeClr val="bg1"/>
                                   </a:solidFill>
@@ -6888,7 +6890,7 @@
                             </m:e>
                             <m:sub>
                               <m:r>
-                                <a:rPr lang="en-US" altLang="zh-TW" sz="900" i="1">
+                                <a:rPr lang="en-US" altLang="zh-TW" sz="952" i="1">
                                   <a:solidFill>
                                     <a:schemeClr val="bg1"/>
                                   </a:solidFill>
@@ -6901,7 +6903,7 @@
                         </m:oMath>
                       </m:oMathPara>
                     </a14:m>
-                    <a:endParaRPr lang="en-US" altLang="zh-TW" sz="900" dirty="0">
+                    <a:endParaRPr lang="en-US" altLang="zh-TW" sz="952" dirty="0">
                       <a:solidFill>
                         <a:schemeClr val="bg1"/>
                       </a:solidFill>
@@ -6927,16 +6929,16 @@
                 </p:nvSpPr>
                 <p:spPr>
                   <a:xfrm>
-                    <a:off x="7165989" y="2241868"/>
-                    <a:ext cx="1068086" cy="625560"/>
+                    <a:off x="7165989" y="2241869"/>
+                    <a:ext cx="1068086" cy="611600"/>
                   </a:xfrm>
                   <a:prstGeom prst="rect">
                     <a:avLst/>
                   </a:prstGeom>
                   <a:blipFill>
-                    <a:blip r:embed="rId17"/>
+                    <a:blip r:embed="rId18"/>
                     <a:stretch>
-                      <a:fillRect/>
+                      <a:fillRect b="-2564"/>
                     </a:stretch>
                   </a:blipFill>
                 </p:spPr>
@@ -6971,9 +6973,9 @@
           <p:grpSpPr>
             <a:xfrm>
               <a:off x="6621554" y="5067527"/>
-              <a:ext cx="609103" cy="503890"/>
+              <a:ext cx="609103" cy="498739"/>
               <a:chOff x="6583394" y="1501875"/>
-              <a:chExt cx="1650681" cy="1365553"/>
+              <a:chExt cx="1650681" cy="1351594"/>
             </a:xfrm>
           </p:grpSpPr>
           <p:grpSp>
@@ -7049,7 +7051,7 @@
                 <a:lstStyle/>
                 <a:p>
                   <a:pPr algn="ctr"/>
-                  <a:endParaRPr lang="zh-TW" altLang="en-US" sz="1142">
+                  <a:endParaRPr lang="zh-TW" altLang="en-US" sz="1209">
                     <a:solidFill>
                       <a:schemeClr val="bg1"/>
                     </a:solidFill>
@@ -7110,7 +7112,7 @@
                 <a:lstStyle/>
                 <a:p>
                   <a:pPr algn="ctr"/>
-                  <a:endParaRPr lang="zh-TW" altLang="en-US" sz="1142" dirty="0">
+                  <a:endParaRPr lang="zh-TW" altLang="en-US" sz="1209" dirty="0">
                     <a:solidFill>
                       <a:schemeClr val="bg1"/>
                     </a:solidFill>
@@ -7136,7 +7138,7 @@
                 <p:spPr>
                   <a:xfrm>
                     <a:off x="6583394" y="1501875"/>
-                    <a:ext cx="416137" cy="655101"/>
+                    <a:ext cx="416137" cy="640330"/>
                   </a:xfrm>
                   <a:prstGeom prst="rect">
                     <a:avLst/>
@@ -7159,7 +7161,7 @@
                           <m:sSub>
                             <m:sSubPr>
                               <m:ctrlPr>
-                                <a:rPr lang="en-US" altLang="zh-TW" sz="900" i="1">
+                                <a:rPr lang="en-US" altLang="zh-TW" sz="952" i="1">
                                   <a:solidFill>
                                     <a:schemeClr val="bg1"/>
                                   </a:solidFill>
@@ -7169,7 +7171,7 @@
                             </m:sSubPr>
                             <m:e>
                               <m:r>
-                                <a:rPr lang="en-US" altLang="zh-TW" sz="900" i="1">
+                                <a:rPr lang="en-US" altLang="zh-TW" sz="952" i="1">
                                   <a:solidFill>
                                     <a:schemeClr val="bg1"/>
                                   </a:solidFill>
@@ -7180,7 +7182,7 @@
                             </m:e>
                             <m:sub>
                               <m:r>
-                                <a:rPr lang="en-US" altLang="zh-TW" sz="900" i="1">
+                                <a:rPr lang="en-US" altLang="zh-TW" sz="952" i="1">
                                   <a:solidFill>
                                     <a:schemeClr val="bg1"/>
                                   </a:solidFill>
@@ -7193,7 +7195,7 @@
                         </m:oMath>
                       </m:oMathPara>
                     </a14:m>
-                    <a:endParaRPr lang="en-US" altLang="zh-TW" sz="900" dirty="0">
+                    <a:endParaRPr lang="en-US" altLang="zh-TW" sz="952" dirty="0">
                       <a:solidFill>
                         <a:schemeClr val="bg1"/>
                       </a:solidFill>
@@ -7220,15 +7222,15 @@
                 <p:spPr>
                   <a:xfrm>
                     <a:off x="6583394" y="1501875"/>
-                    <a:ext cx="416137" cy="655101"/>
+                    <a:ext cx="416137" cy="640330"/>
                   </a:xfrm>
                   <a:prstGeom prst="rect">
                     <a:avLst/>
                   </a:prstGeom>
                   <a:blipFill>
-                    <a:blip r:embed="rId18"/>
+                    <a:blip r:embed="rId19"/>
                     <a:stretch>
-                      <a:fillRect r="-53846"/>
+                      <a:fillRect r="-57692"/>
                     </a:stretch>
                   </a:blipFill>
                 </p:spPr>
@@ -7263,8 +7265,8 @@
                 </p:nvSpPr>
                 <p:spPr>
                   <a:xfrm>
-                    <a:off x="7165989" y="2241868"/>
-                    <a:ext cx="1068086" cy="625560"/>
+                    <a:off x="7165989" y="2241869"/>
+                    <a:ext cx="1068086" cy="611600"/>
                   </a:xfrm>
                   <a:prstGeom prst="rect">
                     <a:avLst/>
@@ -7287,7 +7289,7 @@
                           <m:sSub>
                             <m:sSubPr>
                               <m:ctrlPr>
-                                <a:rPr lang="en-US" altLang="zh-TW" sz="900" i="1">
+                                <a:rPr lang="en-US" altLang="zh-TW" sz="952" i="1">
                                   <a:solidFill>
                                     <a:schemeClr val="bg1"/>
                                   </a:solidFill>
@@ -7297,7 +7299,7 @@
                             </m:sSubPr>
                             <m:e>
                               <m:r>
-                                <a:rPr lang="en-US" altLang="zh-TW" sz="900" i="1">
+                                <a:rPr lang="en-US" altLang="zh-TW" sz="952" i="1">
                                   <a:solidFill>
                                     <a:schemeClr val="bg1"/>
                                   </a:solidFill>
@@ -7308,7 +7310,7 @@
                             </m:e>
                             <m:sub>
                               <m:r>
-                                <a:rPr lang="en-US" altLang="zh-TW" sz="900" i="1">
+                                <a:rPr lang="en-US" altLang="zh-TW" sz="952" i="1">
                                   <a:solidFill>
                                     <a:schemeClr val="bg1"/>
                                   </a:solidFill>
@@ -7321,7 +7323,7 @@
                         </m:oMath>
                       </m:oMathPara>
                     </a14:m>
-                    <a:endParaRPr lang="en-US" altLang="zh-TW" sz="900" dirty="0">
+                    <a:endParaRPr lang="en-US" altLang="zh-TW" sz="952" dirty="0">
                       <a:solidFill>
                         <a:schemeClr val="bg1"/>
                       </a:solidFill>
@@ -7347,16 +7349,16 @@
                 </p:nvSpPr>
                 <p:spPr>
                   <a:xfrm>
-                    <a:off x="7165989" y="2241868"/>
-                    <a:ext cx="1068086" cy="625560"/>
+                    <a:off x="7165989" y="2241869"/>
+                    <a:ext cx="1068086" cy="611600"/>
                   </a:xfrm>
                   <a:prstGeom prst="rect">
                     <a:avLst/>
                   </a:prstGeom>
                   <a:blipFill>
-                    <a:blip r:embed="rId19"/>
+                    <a:blip r:embed="rId18"/>
                     <a:stretch>
-                      <a:fillRect/>
+                      <a:fillRect b="-2564"/>
                     </a:stretch>
                   </a:blipFill>
                 </p:spPr>
@@ -7391,8 +7393,8 @@
         </p:nvGrpSpPr>
         <p:grpSpPr>
           <a:xfrm>
-            <a:off x="7717621" y="600479"/>
-            <a:ext cx="9087668" cy="6000750"/>
+            <a:off x="8167909" y="97415"/>
+            <a:ext cx="9617885" cy="6350862"/>
             <a:chOff x="4037782" y="3448050"/>
             <a:chExt cx="9087668" cy="6000750"/>
           </a:xfrm>
@@ -7435,7 +7437,7 @@
             </a:fontRef>
           </p:style>
           <p:txBody>
-            <a:bodyPr rot="0" spcFirstLastPara="0" vertOverflow="overflow" horzOverflow="overflow" vert="horz" wrap="square" lIns="58066" tIns="29033" rIns="58066" bIns="29033" numCol="1" spcCol="0" rtlCol="0" fromWordArt="0" anchor="ctr" anchorCtr="0" forceAA="0" compatLnSpc="1">
+            <a:bodyPr rot="0" spcFirstLastPara="0" vertOverflow="overflow" horzOverflow="overflow" vert="horz" wrap="square" lIns="61454" tIns="30727" rIns="61454" bIns="30727" numCol="1" spcCol="0" rtlCol="0" fromWordArt="0" anchor="ctr" anchorCtr="0" forceAA="0" compatLnSpc="1">
               <a:prstTxWarp prst="textNoShape">
                 <a:avLst/>
               </a:prstTxWarp>
@@ -7444,7 +7446,7 @@
             <a:lstStyle/>
             <a:p>
               <a:pPr algn="ctr"/>
-              <a:endParaRPr lang="zh-TW" altLang="en-US" sz="1142" dirty="0"/>
+              <a:endParaRPr lang="zh-TW" altLang="en-US" sz="1209" dirty="0"/>
             </a:p>
           </p:txBody>
         </p:sp>
@@ -7510,7 +7512,7 @@
               </a:fontRef>
             </p:style>
             <p:txBody>
-              <a:bodyPr rot="0" spcFirstLastPara="0" vertOverflow="overflow" horzOverflow="overflow" vert="horz" wrap="square" lIns="91440" tIns="45719" rIns="91440" bIns="45719" numCol="1" spcCol="0" rtlCol="0" fromWordArt="0" anchor="ctr" anchorCtr="0" forceAA="0" compatLnSpc="1">
+              <a:bodyPr rot="0" spcFirstLastPara="0" vertOverflow="overflow" horzOverflow="overflow" vert="horz" wrap="square" lIns="96775" tIns="48386" rIns="96775" bIns="48386" numCol="1" spcCol="0" rtlCol="0" fromWordArt="0" anchor="ctr" anchorCtr="0" forceAA="0" compatLnSpc="1">
                 <a:prstTxWarp prst="textNoShape">
                   <a:avLst/>
                 </a:prstTxWarp>
@@ -7519,7 +7521,7 @@
               <a:lstStyle/>
               <a:p>
                 <a:pPr algn="ctr"/>
-                <a:endParaRPr lang="zh-TW" altLang="en-US" sz="900" dirty="0"/>
+                <a:endParaRPr lang="zh-TW" altLang="en-US" sz="952" dirty="0"/>
               </a:p>
             </p:txBody>
           </p:sp>
@@ -7562,7 +7564,7 @@
               </a:fontRef>
             </p:style>
             <p:txBody>
-              <a:bodyPr rot="0" spcFirstLastPara="0" vertOverflow="overflow" horzOverflow="overflow" vert="horz" wrap="square" lIns="91440" tIns="45719" rIns="91440" bIns="45719" numCol="1" spcCol="0" rtlCol="0" fromWordArt="0" anchor="ctr" anchorCtr="0" forceAA="0" compatLnSpc="1">
+              <a:bodyPr rot="0" spcFirstLastPara="0" vertOverflow="overflow" horzOverflow="overflow" vert="horz" wrap="square" lIns="96775" tIns="48386" rIns="96775" bIns="48386" numCol="1" spcCol="0" rtlCol="0" fromWordArt="0" anchor="ctr" anchorCtr="0" forceAA="0" compatLnSpc="1">
                 <a:prstTxWarp prst="textNoShape">
                   <a:avLst/>
                 </a:prstTxWarp>
@@ -7571,7 +7573,7 @@
               <a:lstStyle/>
               <a:p>
                 <a:pPr algn="ctr"/>
-                <a:endParaRPr lang="zh-TW" altLang="en-US" sz="900" dirty="0"/>
+                <a:endParaRPr lang="zh-TW" altLang="en-US" sz="952" dirty="0"/>
               </a:p>
             </p:txBody>
           </p:sp>
@@ -7614,7 +7616,7 @@
               </a:fontRef>
             </p:style>
             <p:txBody>
-              <a:bodyPr rot="0" spcFirstLastPara="0" vertOverflow="overflow" horzOverflow="overflow" vert="horz" wrap="square" lIns="91440" tIns="45719" rIns="91440" bIns="45719" numCol="1" spcCol="0" rtlCol="0" fromWordArt="0" anchor="ctr" anchorCtr="0" forceAA="0" compatLnSpc="1">
+              <a:bodyPr rot="0" spcFirstLastPara="0" vertOverflow="overflow" horzOverflow="overflow" vert="horz" wrap="square" lIns="96775" tIns="48386" rIns="96775" bIns="48386" numCol="1" spcCol="0" rtlCol="0" fromWordArt="0" anchor="ctr" anchorCtr="0" forceAA="0" compatLnSpc="1">
                 <a:prstTxWarp prst="textNoShape">
                   <a:avLst/>
                 </a:prstTxWarp>
@@ -7623,7 +7625,7 @@
               <a:lstStyle/>
               <a:p>
                 <a:pPr algn="ctr"/>
-                <a:endParaRPr lang="zh-TW" altLang="en-US" sz="900"/>
+                <a:endParaRPr lang="zh-TW" altLang="en-US" sz="952"/>
               </a:p>
             </p:txBody>
           </p:sp>
@@ -7666,7 +7668,7 @@
               </a:fontRef>
             </p:style>
             <p:txBody>
-              <a:bodyPr rot="0" spcFirstLastPara="0" vertOverflow="overflow" horzOverflow="overflow" vert="horz" wrap="square" lIns="91440" tIns="45719" rIns="91440" bIns="45719" numCol="1" spcCol="0" rtlCol="0" fromWordArt="0" anchor="ctr" anchorCtr="0" forceAA="0" compatLnSpc="1">
+              <a:bodyPr rot="0" spcFirstLastPara="0" vertOverflow="overflow" horzOverflow="overflow" vert="horz" wrap="square" lIns="96775" tIns="48386" rIns="96775" bIns="48386" numCol="1" spcCol="0" rtlCol="0" fromWordArt="0" anchor="ctr" anchorCtr="0" forceAA="0" compatLnSpc="1">
                 <a:prstTxWarp prst="textNoShape">
                   <a:avLst/>
                 </a:prstTxWarp>
@@ -7675,7 +7677,7 @@
               <a:lstStyle/>
               <a:p>
                 <a:pPr algn="ctr"/>
-                <a:endParaRPr lang="zh-TW" altLang="en-US" sz="900" dirty="0"/>
+                <a:endParaRPr lang="zh-TW" altLang="en-US" sz="952" dirty="0"/>
               </a:p>
             </p:txBody>
           </p:sp>
@@ -7718,7 +7720,7 @@
               </a:fontRef>
             </p:style>
             <p:txBody>
-              <a:bodyPr rot="0" spcFirstLastPara="0" vertOverflow="overflow" horzOverflow="overflow" vert="horz" wrap="square" lIns="91440" tIns="45719" rIns="91440" bIns="45719" numCol="1" spcCol="0" rtlCol="0" fromWordArt="0" anchor="ctr" anchorCtr="0" forceAA="0" compatLnSpc="1">
+              <a:bodyPr rot="0" spcFirstLastPara="0" vertOverflow="overflow" horzOverflow="overflow" vert="horz" wrap="square" lIns="96775" tIns="48386" rIns="96775" bIns="48386" numCol="1" spcCol="0" rtlCol="0" fromWordArt="0" anchor="ctr" anchorCtr="0" forceAA="0" compatLnSpc="1">
                 <a:prstTxWarp prst="textNoShape">
                   <a:avLst/>
                 </a:prstTxWarp>
@@ -7727,7 +7729,7 @@
               <a:lstStyle/>
               <a:p>
                 <a:pPr algn="ctr"/>
-                <a:endParaRPr lang="zh-TW" altLang="en-US" sz="900"/>
+                <a:endParaRPr lang="zh-TW" altLang="en-US" sz="952"/>
               </a:p>
             </p:txBody>
           </p:sp>
@@ -7770,7 +7772,7 @@
               </a:fontRef>
             </p:style>
             <p:txBody>
-              <a:bodyPr rot="0" spcFirstLastPara="0" vertOverflow="overflow" horzOverflow="overflow" vert="horz" wrap="square" lIns="91440" tIns="45719" rIns="91440" bIns="45719" numCol="1" spcCol="0" rtlCol="0" fromWordArt="0" anchor="ctr" anchorCtr="0" forceAA="0" compatLnSpc="1">
+              <a:bodyPr rot="0" spcFirstLastPara="0" vertOverflow="overflow" horzOverflow="overflow" vert="horz" wrap="square" lIns="96775" tIns="48386" rIns="96775" bIns="48386" numCol="1" spcCol="0" rtlCol="0" fromWordArt="0" anchor="ctr" anchorCtr="0" forceAA="0" compatLnSpc="1">
                 <a:prstTxWarp prst="textNoShape">
                   <a:avLst/>
                 </a:prstTxWarp>
@@ -7779,7 +7781,7 @@
               <a:lstStyle/>
               <a:p>
                 <a:pPr algn="ctr"/>
-                <a:endParaRPr lang="zh-TW" altLang="en-US" sz="900" dirty="0"/>
+                <a:endParaRPr lang="zh-TW" altLang="en-US" sz="952" dirty="0"/>
               </a:p>
             </p:txBody>
           </p:sp>
@@ -7822,7 +7824,7 @@
               </a:fontRef>
             </p:style>
             <p:txBody>
-              <a:bodyPr rot="0" spcFirstLastPara="0" vertOverflow="overflow" horzOverflow="overflow" vert="horz" wrap="square" lIns="91440" tIns="45719" rIns="91440" bIns="45719" numCol="1" spcCol="0" rtlCol="0" fromWordArt="0" anchor="ctr" anchorCtr="0" forceAA="0" compatLnSpc="1">
+              <a:bodyPr rot="0" spcFirstLastPara="0" vertOverflow="overflow" horzOverflow="overflow" vert="horz" wrap="square" lIns="96775" tIns="48386" rIns="96775" bIns="48386" numCol="1" spcCol="0" rtlCol="0" fromWordArt="0" anchor="ctr" anchorCtr="0" forceAA="0" compatLnSpc="1">
                 <a:prstTxWarp prst="textNoShape">
                   <a:avLst/>
                 </a:prstTxWarp>
@@ -7831,7 +7833,7 @@
               <a:lstStyle/>
               <a:p>
                 <a:pPr algn="ctr"/>
-                <a:endParaRPr lang="zh-TW" altLang="en-US" sz="900"/>
+                <a:endParaRPr lang="zh-TW" altLang="en-US" sz="952"/>
               </a:p>
             </p:txBody>
           </p:sp>
@@ -7874,7 +7876,7 @@
               </a:fontRef>
             </p:style>
             <p:txBody>
-              <a:bodyPr rot="0" spcFirstLastPara="0" vertOverflow="overflow" horzOverflow="overflow" vert="horz" wrap="square" lIns="91440" tIns="45719" rIns="91440" bIns="45719" numCol="1" spcCol="0" rtlCol="0" fromWordArt="0" anchor="ctr" anchorCtr="0" forceAA="0" compatLnSpc="1">
+              <a:bodyPr rot="0" spcFirstLastPara="0" vertOverflow="overflow" horzOverflow="overflow" vert="horz" wrap="square" lIns="96775" tIns="48386" rIns="96775" bIns="48386" numCol="1" spcCol="0" rtlCol="0" fromWordArt="0" anchor="ctr" anchorCtr="0" forceAA="0" compatLnSpc="1">
                 <a:prstTxWarp prst="textNoShape">
                   <a:avLst/>
                 </a:prstTxWarp>
@@ -7883,7 +7885,7 @@
               <a:lstStyle/>
               <a:p>
                 <a:pPr algn="ctr"/>
-                <a:endParaRPr lang="zh-TW" altLang="en-US" sz="900"/>
+                <a:endParaRPr lang="zh-TW" altLang="en-US" sz="952"/>
               </a:p>
             </p:txBody>
           </p:sp>
@@ -7926,7 +7928,7 @@
               </a:fontRef>
             </p:style>
             <p:txBody>
-              <a:bodyPr rot="0" spcFirstLastPara="0" vertOverflow="overflow" horzOverflow="overflow" vert="horz" wrap="square" lIns="91440" tIns="45719" rIns="91440" bIns="45719" numCol="1" spcCol="0" rtlCol="0" fromWordArt="0" anchor="ctr" anchorCtr="0" forceAA="0" compatLnSpc="1">
+              <a:bodyPr rot="0" spcFirstLastPara="0" vertOverflow="overflow" horzOverflow="overflow" vert="horz" wrap="square" lIns="96775" tIns="48386" rIns="96775" bIns="48386" numCol="1" spcCol="0" rtlCol="0" fromWordArt="0" anchor="ctr" anchorCtr="0" forceAA="0" compatLnSpc="1">
                 <a:prstTxWarp prst="textNoShape">
                   <a:avLst/>
                 </a:prstTxWarp>
@@ -7935,7 +7937,7 @@
               <a:lstStyle/>
               <a:p>
                 <a:pPr algn="ctr"/>
-                <a:endParaRPr lang="zh-TW" altLang="en-US" sz="900"/>
+                <a:endParaRPr lang="zh-TW" altLang="en-US" sz="952"/>
               </a:p>
             </p:txBody>
           </p:sp>
@@ -8002,7 +8004,7 @@
               </a:fontRef>
             </p:style>
             <p:txBody>
-              <a:bodyPr rot="0" spcFirstLastPara="0" vertOverflow="overflow" horzOverflow="overflow" vert="horz" wrap="square" lIns="91440" tIns="45719" rIns="91440" bIns="45719" numCol="1" spcCol="0" rtlCol="0" fromWordArt="0" anchor="ctr" anchorCtr="0" forceAA="0" compatLnSpc="1">
+              <a:bodyPr rot="0" spcFirstLastPara="0" vertOverflow="overflow" horzOverflow="overflow" vert="horz" wrap="square" lIns="96775" tIns="48386" rIns="96775" bIns="48386" numCol="1" spcCol="0" rtlCol="0" fromWordArt="0" anchor="ctr" anchorCtr="0" forceAA="0" compatLnSpc="1">
                 <a:prstTxWarp prst="textNoShape">
                   <a:avLst/>
                 </a:prstTxWarp>
@@ -8011,7 +8013,7 @@
               <a:lstStyle/>
               <a:p>
                 <a:pPr algn="ctr"/>
-                <a:endParaRPr lang="zh-TW" altLang="en-US" sz="900" dirty="0"/>
+                <a:endParaRPr lang="zh-TW" altLang="en-US" sz="952" dirty="0"/>
               </a:p>
             </p:txBody>
           </p:sp>
@@ -8054,7 +8056,7 @@
               </a:fontRef>
             </p:style>
             <p:txBody>
-              <a:bodyPr rot="0" spcFirstLastPara="0" vertOverflow="overflow" horzOverflow="overflow" vert="horz" wrap="square" lIns="91440" tIns="45719" rIns="91440" bIns="45719" numCol="1" spcCol="0" rtlCol="0" fromWordArt="0" anchor="ctr" anchorCtr="0" forceAA="0" compatLnSpc="1">
+              <a:bodyPr rot="0" spcFirstLastPara="0" vertOverflow="overflow" horzOverflow="overflow" vert="horz" wrap="square" lIns="96775" tIns="48386" rIns="96775" bIns="48386" numCol="1" spcCol="0" rtlCol="0" fromWordArt="0" anchor="ctr" anchorCtr="0" forceAA="0" compatLnSpc="1">
                 <a:prstTxWarp prst="textNoShape">
                   <a:avLst/>
                 </a:prstTxWarp>
@@ -8063,7 +8065,7 @@
               <a:lstStyle/>
               <a:p>
                 <a:pPr algn="ctr"/>
-                <a:endParaRPr lang="zh-TW" altLang="en-US" sz="900" dirty="0"/>
+                <a:endParaRPr lang="zh-TW" altLang="en-US" sz="952" dirty="0"/>
               </a:p>
             </p:txBody>
           </p:sp>
@@ -8106,7 +8108,7 @@
               </a:fontRef>
             </p:style>
             <p:txBody>
-              <a:bodyPr rot="0" spcFirstLastPara="0" vertOverflow="overflow" horzOverflow="overflow" vert="horz" wrap="square" lIns="91440" tIns="45719" rIns="91440" bIns="45719" numCol="1" spcCol="0" rtlCol="0" fromWordArt="0" anchor="ctr" anchorCtr="0" forceAA="0" compatLnSpc="1">
+              <a:bodyPr rot="0" spcFirstLastPara="0" vertOverflow="overflow" horzOverflow="overflow" vert="horz" wrap="square" lIns="96775" tIns="48386" rIns="96775" bIns="48386" numCol="1" spcCol="0" rtlCol="0" fromWordArt="0" anchor="ctr" anchorCtr="0" forceAA="0" compatLnSpc="1">
                 <a:prstTxWarp prst="textNoShape">
                   <a:avLst/>
                 </a:prstTxWarp>
@@ -8115,7 +8117,7 @@
               <a:lstStyle/>
               <a:p>
                 <a:pPr algn="ctr"/>
-                <a:endParaRPr lang="zh-TW" altLang="en-US" sz="900"/>
+                <a:endParaRPr lang="zh-TW" altLang="en-US" sz="952"/>
               </a:p>
             </p:txBody>
           </p:sp>
@@ -8158,7 +8160,7 @@
               </a:fontRef>
             </p:style>
             <p:txBody>
-              <a:bodyPr rot="0" spcFirstLastPara="0" vertOverflow="overflow" horzOverflow="overflow" vert="horz" wrap="square" lIns="91440" tIns="45719" rIns="91440" bIns="45719" numCol="1" spcCol="0" rtlCol="0" fromWordArt="0" anchor="ctr" anchorCtr="0" forceAA="0" compatLnSpc="1">
+              <a:bodyPr rot="0" spcFirstLastPara="0" vertOverflow="overflow" horzOverflow="overflow" vert="horz" wrap="square" lIns="96775" tIns="48386" rIns="96775" bIns="48386" numCol="1" spcCol="0" rtlCol="0" fromWordArt="0" anchor="ctr" anchorCtr="0" forceAA="0" compatLnSpc="1">
                 <a:prstTxWarp prst="textNoShape">
                   <a:avLst/>
                 </a:prstTxWarp>
@@ -8167,7 +8169,7 @@
               <a:lstStyle/>
               <a:p>
                 <a:pPr algn="ctr"/>
-                <a:endParaRPr lang="zh-TW" altLang="en-US" sz="900"/>
+                <a:endParaRPr lang="zh-TW" altLang="en-US" sz="952"/>
               </a:p>
             </p:txBody>
           </p:sp>
@@ -8210,7 +8212,7 @@
               </a:fontRef>
             </p:style>
             <p:txBody>
-              <a:bodyPr rot="0" spcFirstLastPara="0" vertOverflow="overflow" horzOverflow="overflow" vert="horz" wrap="square" lIns="91440" tIns="45719" rIns="91440" bIns="45719" numCol="1" spcCol="0" rtlCol="0" fromWordArt="0" anchor="ctr" anchorCtr="0" forceAA="0" compatLnSpc="1">
+              <a:bodyPr rot="0" spcFirstLastPara="0" vertOverflow="overflow" horzOverflow="overflow" vert="horz" wrap="square" lIns="96775" tIns="48386" rIns="96775" bIns="48386" numCol="1" spcCol="0" rtlCol="0" fromWordArt="0" anchor="ctr" anchorCtr="0" forceAA="0" compatLnSpc="1">
                 <a:prstTxWarp prst="textNoShape">
                   <a:avLst/>
                 </a:prstTxWarp>
@@ -8219,7 +8221,7 @@
               <a:lstStyle/>
               <a:p>
                 <a:pPr algn="ctr"/>
-                <a:endParaRPr lang="zh-TW" altLang="en-US" sz="900"/>
+                <a:endParaRPr lang="zh-TW" altLang="en-US" sz="952"/>
               </a:p>
             </p:txBody>
           </p:sp>
@@ -8262,7 +8264,7 @@
               </a:fontRef>
             </p:style>
             <p:txBody>
-              <a:bodyPr rot="0" spcFirstLastPara="0" vertOverflow="overflow" horzOverflow="overflow" vert="horz" wrap="square" lIns="91440" tIns="45719" rIns="91440" bIns="45719" numCol="1" spcCol="0" rtlCol="0" fromWordArt="0" anchor="ctr" anchorCtr="0" forceAA="0" compatLnSpc="1">
+              <a:bodyPr rot="0" spcFirstLastPara="0" vertOverflow="overflow" horzOverflow="overflow" vert="horz" wrap="square" lIns="96775" tIns="48386" rIns="96775" bIns="48386" numCol="1" spcCol="0" rtlCol="0" fromWordArt="0" anchor="ctr" anchorCtr="0" forceAA="0" compatLnSpc="1">
                 <a:prstTxWarp prst="textNoShape">
                   <a:avLst/>
                 </a:prstTxWarp>
@@ -8271,7 +8273,7 @@
               <a:lstStyle/>
               <a:p>
                 <a:pPr algn="ctr"/>
-                <a:endParaRPr lang="zh-TW" altLang="en-US" sz="900" dirty="0"/>
+                <a:endParaRPr lang="zh-TW" altLang="en-US" sz="952" dirty="0"/>
               </a:p>
             </p:txBody>
           </p:sp>
@@ -8314,7 +8316,7 @@
               </a:fontRef>
             </p:style>
             <p:txBody>
-              <a:bodyPr rot="0" spcFirstLastPara="0" vertOverflow="overflow" horzOverflow="overflow" vert="horz" wrap="square" lIns="91440" tIns="45719" rIns="91440" bIns="45719" numCol="1" spcCol="0" rtlCol="0" fromWordArt="0" anchor="ctr" anchorCtr="0" forceAA="0" compatLnSpc="1">
+              <a:bodyPr rot="0" spcFirstLastPara="0" vertOverflow="overflow" horzOverflow="overflow" vert="horz" wrap="square" lIns="96775" tIns="48386" rIns="96775" bIns="48386" numCol="1" spcCol="0" rtlCol="0" fromWordArt="0" anchor="ctr" anchorCtr="0" forceAA="0" compatLnSpc="1">
                 <a:prstTxWarp prst="textNoShape">
                   <a:avLst/>
                 </a:prstTxWarp>
@@ -8323,7 +8325,7 @@
               <a:lstStyle/>
               <a:p>
                 <a:pPr algn="ctr"/>
-                <a:endParaRPr lang="zh-TW" altLang="en-US" sz="900"/>
+                <a:endParaRPr lang="zh-TW" altLang="en-US" sz="952"/>
               </a:p>
             </p:txBody>
           </p:sp>
@@ -8366,7 +8368,7 @@
               </a:fontRef>
             </p:style>
             <p:txBody>
-              <a:bodyPr rot="0" spcFirstLastPara="0" vertOverflow="overflow" horzOverflow="overflow" vert="horz" wrap="square" lIns="91440" tIns="45719" rIns="91440" bIns="45719" numCol="1" spcCol="0" rtlCol="0" fromWordArt="0" anchor="ctr" anchorCtr="0" forceAA="0" compatLnSpc="1">
+              <a:bodyPr rot="0" spcFirstLastPara="0" vertOverflow="overflow" horzOverflow="overflow" vert="horz" wrap="square" lIns="96775" tIns="48386" rIns="96775" bIns="48386" numCol="1" spcCol="0" rtlCol="0" fromWordArt="0" anchor="ctr" anchorCtr="0" forceAA="0" compatLnSpc="1">
                 <a:prstTxWarp prst="textNoShape">
                   <a:avLst/>
                 </a:prstTxWarp>
@@ -8375,7 +8377,7 @@
               <a:lstStyle/>
               <a:p>
                 <a:pPr algn="ctr"/>
-                <a:endParaRPr lang="zh-TW" altLang="en-US" sz="900"/>
+                <a:endParaRPr lang="zh-TW" altLang="en-US" sz="952"/>
               </a:p>
             </p:txBody>
           </p:sp>
@@ -8418,7 +8420,7 @@
               </a:fontRef>
             </p:style>
             <p:txBody>
-              <a:bodyPr rot="0" spcFirstLastPara="0" vertOverflow="overflow" horzOverflow="overflow" vert="horz" wrap="square" lIns="91440" tIns="45719" rIns="91440" bIns="45719" numCol="1" spcCol="0" rtlCol="0" fromWordArt="0" anchor="ctr" anchorCtr="0" forceAA="0" compatLnSpc="1">
+              <a:bodyPr rot="0" spcFirstLastPara="0" vertOverflow="overflow" horzOverflow="overflow" vert="horz" wrap="square" lIns="96775" tIns="48386" rIns="96775" bIns="48386" numCol="1" spcCol="0" rtlCol="0" fromWordArt="0" anchor="ctr" anchorCtr="0" forceAA="0" compatLnSpc="1">
                 <a:prstTxWarp prst="textNoShape">
                   <a:avLst/>
                 </a:prstTxWarp>
@@ -8427,7 +8429,7 @@
               <a:lstStyle/>
               <a:p>
                 <a:pPr algn="ctr"/>
-                <a:endParaRPr lang="zh-TW" altLang="en-US" sz="900"/>
+                <a:endParaRPr lang="zh-TW" altLang="en-US" sz="952"/>
               </a:p>
             </p:txBody>
           </p:sp>
@@ -8449,7 +8451,7 @@
               <p:spPr>
                 <a:xfrm>
                   <a:off x="11053174" y="6621466"/>
-                  <a:ext cx="1669442" cy="519661"/>
+                  <a:ext cx="1669442" cy="518066"/>
                 </a:xfrm>
                 <a:prstGeom prst="rect">
                   <a:avLst/>
@@ -8470,19 +8472,19 @@
                       </m:oMathParaPr>
                       <m:oMath xmlns:m="http://schemas.openxmlformats.org/officeDocument/2006/math">
                         <m:r>
-                          <a:rPr lang="en-US" altLang="zh-TW" sz="2800" i="1">
+                          <a:rPr lang="en-US" altLang="zh-TW" sz="2963" i="1">
                             <a:latin typeface="Cambria Math" panose="02040503050406030204" pitchFamily="18" charset="0"/>
                           </a:rPr>
                           <m:t>𝛼</m:t>
                         </m:r>
                         <m:r>
-                          <a:rPr lang="en-US" altLang="zh-TW" sz="2800" i="1">
+                          <a:rPr lang="en-US" altLang="zh-TW" sz="2963" i="1">
                             <a:latin typeface="Cambria Math" panose="02040503050406030204" pitchFamily="18" charset="0"/>
                           </a:rPr>
                           <m:t>=</m:t>
                         </m:r>
                         <m:r>
-                          <a:rPr lang="en-US" altLang="zh-TW" sz="2800" i="1">
+                          <a:rPr lang="en-US" altLang="zh-TW" sz="2963" i="1">
                             <a:latin typeface="Cambria Math" panose="02040503050406030204" pitchFamily="18" charset="0"/>
                           </a:rPr>
                           <m:t>𝜋</m:t>
@@ -8490,7 +8492,7 @@
                       </m:oMath>
                     </m:oMathPara>
                   </a14:m>
-                  <a:endParaRPr lang="zh-TW" altLang="en-US" sz="2800" dirty="0"/>
+                  <a:endParaRPr lang="zh-TW" altLang="en-US" sz="2963" dirty="0"/>
                 </a:p>
               </p:txBody>
             </p:sp>
@@ -8513,7 +8515,7 @@
               <p:spPr>
                 <a:xfrm>
                   <a:off x="11053174" y="6621466"/>
-                  <a:ext cx="1669442" cy="519661"/>
+                  <a:ext cx="1669442" cy="518066"/>
                 </a:xfrm>
                 <a:prstGeom prst="rect">
                   <a:avLst/>
@@ -8557,7 +8559,7 @@
               <p:spPr>
                 <a:xfrm>
                   <a:off x="4037782" y="7537311"/>
-                  <a:ext cx="4366125" cy="519661"/>
+                  <a:ext cx="4366125" cy="518066"/>
                 </a:xfrm>
                 <a:prstGeom prst="rect">
                   <a:avLst/>
@@ -8572,7 +8574,7 @@
                 <a:p>
                   <a:pPr algn="ctr"/>
                   <a:r>
-                    <a:rPr lang="en-US" altLang="zh-TW" sz="2800" dirty="0">
+                    <a:rPr lang="en-US" altLang="zh-TW" sz="2963" dirty="0">
                       <a:latin typeface="Times New Roman" panose="02020603050405020304" pitchFamily="18" charset="0"/>
                       <a:cs typeface="Times New Roman" panose="02020603050405020304" pitchFamily="18" charset="0"/>
                     </a:rPr>
@@ -8581,27 +8583,27 @@
                   <a14:m>
                     <m:oMath xmlns:m="http://schemas.openxmlformats.org/officeDocument/2006/math">
                       <m:r>
-                        <a:rPr lang="en-US" altLang="zh-TW" sz="2800" i="1">
+                        <a:rPr lang="en-US" altLang="zh-TW" sz="2963" i="1">
                           <a:latin typeface="Cambria Math" panose="02040503050406030204" pitchFamily="18" charset="0"/>
                           <a:cs typeface="Times New Roman" panose="02020603050405020304" pitchFamily="18" charset="0"/>
                         </a:rPr>
                         <m:t>𝛽</m:t>
                       </m:r>
                       <m:r>
-                        <a:rPr lang="en-US" altLang="zh-TW" sz="2800" i="1">
+                        <a:rPr lang="en-US" altLang="zh-TW" sz="2963" i="1">
                           <a:latin typeface="Cambria Math" panose="02040503050406030204" pitchFamily="18" charset="0"/>
                           <a:cs typeface="Times New Roman" panose="02020603050405020304" pitchFamily="18" charset="0"/>
                         </a:rPr>
                         <m:t>=</m:t>
                       </m:r>
                       <m:r>
-                        <a:rPr lang="en-US" altLang="zh-TW" sz="2800" i="1">
+                        <a:rPr lang="en-US" altLang="zh-TW" sz="2963" i="1">
                           <a:latin typeface="Cambria Math" panose="02040503050406030204" pitchFamily="18" charset="0"/>
                         </a:rPr>
                         <m:t>𝜋</m:t>
                       </m:r>
                       <m:r>
-                        <a:rPr lang="en-US" altLang="zh-TW" sz="2800" i="1">
+                        <a:rPr lang="en-US" altLang="zh-TW" sz="2963" i="1">
                           <a:latin typeface="Cambria Math" panose="02040503050406030204" pitchFamily="18" charset="0"/>
                         </a:rPr>
                         <m:t>/2</m:t>
@@ -8609,13 +8611,13 @@
                     </m:oMath>
                   </a14:m>
                   <a:r>
-                    <a:rPr lang="en-US" altLang="zh-TW" sz="2800" dirty="0">
+                    <a:rPr lang="en-US" altLang="zh-TW" sz="2963" dirty="0">
                       <a:latin typeface="Times New Roman" panose="02020603050405020304" pitchFamily="18" charset="0"/>
                       <a:cs typeface="Times New Roman" panose="02020603050405020304" pitchFamily="18" charset="0"/>
                     </a:rPr>
                     <a:t>)</a:t>
                   </a:r>
-                  <a:endParaRPr lang="zh-TW" altLang="en-US" sz="2800" dirty="0">
+                  <a:endParaRPr lang="zh-TW" altLang="en-US" sz="2963" dirty="0">
                     <a:latin typeface="Times New Roman" panose="02020603050405020304" pitchFamily="18" charset="0"/>
                     <a:cs typeface="Times New Roman" panose="02020603050405020304" pitchFamily="18" charset="0"/>
                   </a:endParaRPr>
@@ -8641,7 +8643,7 @@
               <p:spPr>
                 <a:xfrm>
                   <a:off x="4037782" y="7537311"/>
-                  <a:ext cx="4366125" cy="519661"/>
+                  <a:ext cx="4366125" cy="518066"/>
                 </a:xfrm>
                 <a:prstGeom prst="rect">
                   <a:avLst/>
@@ -8649,7 +8651,7 @@
                 <a:blipFill>
                   <a:blip r:embed="rId21"/>
                   <a:stretch>
-                    <a:fillRect t="-11628" b="-31395"/>
+                    <a:fillRect t="-13333" b="-32222"/>
                   </a:stretch>
                 </a:blipFill>
               </p:spPr>
@@ -8683,7 +8685,7 @@
           <p:spPr>
             <a:xfrm>
               <a:off x="4037782" y="4893994"/>
-              <a:ext cx="4366125" cy="519661"/>
+              <a:ext cx="4366125" cy="518066"/>
             </a:xfrm>
             <a:prstGeom prst="rect">
               <a:avLst/>
@@ -8698,27 +8700,27 @@
             <a:p>
               <a:pPr algn="ctr"/>
               <a:r>
-                <a:rPr lang="en-US" altLang="zh-TW" sz="2800" dirty="0">
+                <a:rPr lang="en-US" altLang="zh-TW" sz="2963" dirty="0">
                   <a:latin typeface="Times New Roman" panose="02020603050405020304" pitchFamily="18" charset="0"/>
                   <a:cs typeface="Times New Roman" panose="02020603050405020304" pitchFamily="18" charset="0"/>
                 </a:rPr>
                 <a:t>Transition dipole</a:t>
               </a:r>
               <a:r>
-                <a:rPr lang="zh-TW" altLang="en-US" sz="2800" dirty="0">
+                <a:rPr lang="zh-TW" altLang="en-US" sz="2963" dirty="0">
                   <a:latin typeface="Times New Roman" panose="02020603050405020304" pitchFamily="18" charset="0"/>
                   <a:cs typeface="Times New Roman" panose="02020603050405020304" pitchFamily="18" charset="0"/>
                 </a:rPr>
                 <a:t> </a:t>
               </a:r>
               <a:r>
-                <a:rPr lang="en-US" altLang="zh-TW" sz="2800" dirty="0">
+                <a:rPr lang="en-US" altLang="zh-TW" sz="2963" dirty="0">
                   <a:latin typeface="Times New Roman" panose="02020603050405020304" pitchFamily="18" charset="0"/>
                   <a:cs typeface="Times New Roman" panose="02020603050405020304" pitchFamily="18" charset="0"/>
                 </a:rPr>
                 <a:t>(BXs)</a:t>
               </a:r>
-              <a:endParaRPr lang="zh-TW" altLang="en-US" sz="2800" dirty="0">
+              <a:endParaRPr lang="zh-TW" altLang="en-US" sz="2963" dirty="0">
                 <a:latin typeface="Times New Roman" panose="02020603050405020304" pitchFamily="18" charset="0"/>
                 <a:cs typeface="Times New Roman" panose="02020603050405020304" pitchFamily="18" charset="0"/>
               </a:endParaRPr>
@@ -8740,9 +8742,9 @@
           <p:grpSpPr>
             <a:xfrm>
               <a:off x="9202829" y="7606750"/>
-              <a:ext cx="609103" cy="503890"/>
+              <a:ext cx="609103" cy="498739"/>
               <a:chOff x="6583394" y="1501875"/>
-              <a:chExt cx="1650681" cy="1365553"/>
+              <a:chExt cx="1650681" cy="1351594"/>
             </a:xfrm>
           </p:grpSpPr>
           <p:grpSp>
@@ -8818,7 +8820,7 @@
                 <a:lstStyle/>
                 <a:p>
                   <a:pPr algn="ctr"/>
-                  <a:endParaRPr lang="zh-TW" altLang="en-US" sz="1142">
+                  <a:endParaRPr lang="zh-TW" altLang="en-US" sz="1209">
                     <a:solidFill>
                       <a:schemeClr val="bg1"/>
                     </a:solidFill>
@@ -8879,7 +8881,7 @@
                 <a:lstStyle/>
                 <a:p>
                   <a:pPr algn="ctr"/>
-                  <a:endParaRPr lang="zh-TW" altLang="en-US" sz="1142" dirty="0">
+                  <a:endParaRPr lang="zh-TW" altLang="en-US" sz="1209" dirty="0">
                     <a:solidFill>
                       <a:schemeClr val="bg1"/>
                     </a:solidFill>
@@ -8905,7 +8907,7 @@
                 <p:spPr>
                   <a:xfrm>
                     <a:off x="6583394" y="1501875"/>
-                    <a:ext cx="416137" cy="655101"/>
+                    <a:ext cx="416137" cy="640330"/>
                   </a:xfrm>
                   <a:prstGeom prst="rect">
                     <a:avLst/>
@@ -8928,7 +8930,7 @@
                           <m:sSub>
                             <m:sSubPr>
                               <m:ctrlPr>
-                                <a:rPr lang="en-US" altLang="zh-TW" sz="900" i="1">
+                                <a:rPr lang="en-US" altLang="zh-TW" sz="952" i="1">
                                   <a:solidFill>
                                     <a:schemeClr val="bg1"/>
                                   </a:solidFill>
@@ -8938,7 +8940,7 @@
                             </m:sSubPr>
                             <m:e>
                               <m:r>
-                                <a:rPr lang="en-US" altLang="zh-TW" sz="900" i="1">
+                                <a:rPr lang="en-US" altLang="zh-TW" sz="952" i="1">
                                   <a:solidFill>
                                     <a:schemeClr val="bg1"/>
                                   </a:solidFill>
@@ -8949,7 +8951,7 @@
                             </m:e>
                             <m:sub>
                               <m:r>
-                                <a:rPr lang="en-US" altLang="zh-TW" sz="900" i="1">
+                                <a:rPr lang="en-US" altLang="zh-TW" sz="952" i="1">
                                   <a:solidFill>
                                     <a:schemeClr val="bg1"/>
                                   </a:solidFill>
@@ -8962,7 +8964,7 @@
                         </m:oMath>
                       </m:oMathPara>
                     </a14:m>
-                    <a:endParaRPr lang="en-US" altLang="zh-TW" sz="900" dirty="0">
+                    <a:endParaRPr lang="en-US" altLang="zh-TW" sz="952" dirty="0">
                       <a:solidFill>
                         <a:schemeClr val="bg1"/>
                       </a:solidFill>
@@ -8989,7 +8991,7 @@
                 <p:spPr>
                   <a:xfrm>
                     <a:off x="6583394" y="1501875"/>
-                    <a:ext cx="416137" cy="655101"/>
+                    <a:ext cx="416137" cy="640330"/>
                   </a:xfrm>
                   <a:prstGeom prst="rect">
                     <a:avLst/>
@@ -8997,7 +8999,7 @@
                   <a:blipFill>
                     <a:blip r:embed="rId22"/>
                     <a:stretch>
-                      <a:fillRect r="-56000"/>
+                      <a:fillRect r="-57692"/>
                     </a:stretch>
                   </a:blipFill>
                 </p:spPr>
@@ -9032,8 +9034,8 @@
                 </p:nvSpPr>
                 <p:spPr>
                   <a:xfrm>
-                    <a:off x="7165989" y="2241868"/>
-                    <a:ext cx="1068086" cy="625560"/>
+                    <a:off x="7165989" y="2241869"/>
+                    <a:ext cx="1068086" cy="611600"/>
                   </a:xfrm>
                   <a:prstGeom prst="rect">
                     <a:avLst/>
@@ -9056,7 +9058,7 @@
                           <m:sSub>
                             <m:sSubPr>
                               <m:ctrlPr>
-                                <a:rPr lang="en-US" altLang="zh-TW" sz="900" i="1">
+                                <a:rPr lang="en-US" altLang="zh-TW" sz="952" i="1">
                                   <a:solidFill>
                                     <a:schemeClr val="bg1"/>
                                   </a:solidFill>
@@ -9066,7 +9068,7 @@
                             </m:sSubPr>
                             <m:e>
                               <m:r>
-                                <a:rPr lang="en-US" altLang="zh-TW" sz="900" i="1">
+                                <a:rPr lang="en-US" altLang="zh-TW" sz="952" i="1">
                                   <a:solidFill>
                                     <a:schemeClr val="bg1"/>
                                   </a:solidFill>
@@ -9077,7 +9079,7 @@
                             </m:e>
                             <m:sub>
                               <m:r>
-                                <a:rPr lang="en-US" altLang="zh-TW" sz="900" i="1">
+                                <a:rPr lang="en-US" altLang="zh-TW" sz="952" i="1">
                                   <a:solidFill>
                                     <a:schemeClr val="bg1"/>
                                   </a:solidFill>
@@ -9090,7 +9092,7 @@
                         </m:oMath>
                       </m:oMathPara>
                     </a14:m>
-                    <a:endParaRPr lang="en-US" altLang="zh-TW" sz="900" dirty="0">
+                    <a:endParaRPr lang="en-US" altLang="zh-TW" sz="952" dirty="0">
                       <a:solidFill>
                         <a:schemeClr val="bg1"/>
                       </a:solidFill>
@@ -9116,14 +9118,14 @@
                 </p:nvSpPr>
                 <p:spPr>
                   <a:xfrm>
-                    <a:off x="7165989" y="2241868"/>
-                    <a:ext cx="1068086" cy="625560"/>
+                    <a:off x="7165989" y="2241869"/>
+                    <a:ext cx="1068086" cy="611600"/>
                   </a:xfrm>
                   <a:prstGeom prst="rect">
                     <a:avLst/>
                   </a:prstGeom>
                   <a:blipFill>
-                    <a:blip r:embed="rId23"/>
+                    <a:blip r:embed="rId18"/>
                     <a:stretch>
                       <a:fillRect/>
                     </a:stretch>
@@ -9162,7 +9164,7 @@
               <p:spPr>
                 <a:xfrm>
                   <a:off x="8335016" y="6621466"/>
-                  <a:ext cx="1953311" cy="519661"/>
+                  <a:ext cx="1953311" cy="518066"/>
                 </a:xfrm>
                 <a:prstGeom prst="rect">
                   <a:avLst/>
@@ -9183,13 +9185,13 @@
                       </m:oMathParaPr>
                       <m:oMath xmlns:m="http://schemas.openxmlformats.org/officeDocument/2006/math">
                         <m:r>
-                          <a:rPr lang="en-US" altLang="zh-TW" sz="2800" i="1">
+                          <a:rPr lang="en-US" altLang="zh-TW" sz="2963" i="1">
                             <a:latin typeface="Cambria Math" panose="02040503050406030204" pitchFamily="18" charset="0"/>
                           </a:rPr>
                           <m:t>𝛼</m:t>
                         </m:r>
                         <m:r>
-                          <a:rPr lang="en-US" altLang="zh-TW" sz="2800" i="1">
+                          <a:rPr lang="en-US" altLang="zh-TW" sz="2963" i="1">
                             <a:latin typeface="Cambria Math" panose="02040503050406030204" pitchFamily="18" charset="0"/>
                           </a:rPr>
                           <m:t>=0</m:t>
@@ -9197,7 +9199,7 @@
                       </m:oMath>
                     </m:oMathPara>
                   </a14:m>
-                  <a:endParaRPr lang="zh-TW" altLang="en-US" sz="2800" dirty="0"/>
+                  <a:endParaRPr lang="zh-TW" altLang="en-US" sz="2963" dirty="0"/>
                 </a:p>
               </p:txBody>
             </p:sp>
@@ -9220,13 +9222,13 @@
               <p:spPr>
                 <a:xfrm>
                   <a:off x="8335016" y="6621466"/>
-                  <a:ext cx="1953311" cy="519661"/>
+                  <a:ext cx="1953311" cy="518066"/>
                 </a:xfrm>
                 <a:prstGeom prst="rect">
                   <a:avLst/>
                 </a:prstGeom>
                 <a:blipFill>
-                  <a:blip r:embed="rId24"/>
+                  <a:blip r:embed="rId23"/>
                   <a:stretch>
                     <a:fillRect/>
                   </a:stretch>
@@ -9262,7 +9264,7 @@
             <p:nvPr/>
           </p:nvPicPr>
           <p:blipFill rotWithShape="1">
-            <a:blip r:embed="rId25">
+            <a:blip r:embed="rId24">
               <a:clrChange>
                 <a:clrFrom>
                   <a:srgbClr val="FFFFFF"/>
@@ -9302,7 +9304,7 @@
             <p:nvPr/>
           </p:nvPicPr>
           <p:blipFill rotWithShape="1">
-            <a:blip r:embed="rId25">
+            <a:blip r:embed="rId24">
               <a:clrChange>
                 <a:clrFrom>
                   <a:srgbClr val="FFFFFF"/>
@@ -9389,7 +9391,7 @@
               </a:fontRef>
             </p:style>
             <p:txBody>
-              <a:bodyPr rot="0" spcFirstLastPara="0" vertOverflow="overflow" horzOverflow="overflow" vert="horz" wrap="square" lIns="91440" tIns="45719" rIns="91440" bIns="45719" numCol="1" spcCol="0" rtlCol="0" fromWordArt="0" anchor="ctr" anchorCtr="0" forceAA="0" compatLnSpc="1">
+              <a:bodyPr rot="0" spcFirstLastPara="0" vertOverflow="overflow" horzOverflow="overflow" vert="horz" wrap="square" lIns="96775" tIns="48386" rIns="96775" bIns="48386" numCol="1" spcCol="0" rtlCol="0" fromWordArt="0" anchor="ctr" anchorCtr="0" forceAA="0" compatLnSpc="1">
                 <a:prstTxWarp prst="textNoShape">
                   <a:avLst/>
                 </a:prstTxWarp>
@@ -9398,7 +9400,7 @@
               <a:lstStyle/>
               <a:p>
                 <a:pPr algn="ctr"/>
-                <a:endParaRPr lang="zh-TW" altLang="en-US" sz="900" dirty="0"/>
+                <a:endParaRPr lang="zh-TW" altLang="en-US" sz="952" dirty="0"/>
               </a:p>
             </p:txBody>
           </p:sp>
@@ -9444,7 +9446,7 @@
               </a:fontRef>
             </p:style>
             <p:txBody>
-              <a:bodyPr rot="0" spcFirstLastPara="0" vertOverflow="overflow" horzOverflow="overflow" vert="horz" wrap="square" lIns="91440" tIns="45719" rIns="91440" bIns="45719" numCol="1" spcCol="0" rtlCol="0" fromWordArt="0" anchor="ctr" anchorCtr="0" forceAA="0" compatLnSpc="1">
+              <a:bodyPr rot="0" spcFirstLastPara="0" vertOverflow="overflow" horzOverflow="overflow" vert="horz" wrap="square" lIns="96775" tIns="48386" rIns="96775" bIns="48386" numCol="1" spcCol="0" rtlCol="0" fromWordArt="0" anchor="ctr" anchorCtr="0" forceAA="0" compatLnSpc="1">
                 <a:prstTxWarp prst="textNoShape">
                   <a:avLst/>
                 </a:prstTxWarp>
@@ -9453,7 +9455,7 @@
               <a:lstStyle/>
               <a:p>
                 <a:pPr algn="ctr"/>
-                <a:endParaRPr lang="zh-TW" altLang="en-US" sz="900"/>
+                <a:endParaRPr lang="zh-TW" altLang="en-US" sz="952"/>
               </a:p>
             </p:txBody>
           </p:sp>
@@ -9499,7 +9501,7 @@
               </a:fontRef>
             </p:style>
             <p:txBody>
-              <a:bodyPr rot="0" spcFirstLastPara="0" vertOverflow="overflow" horzOverflow="overflow" vert="horz" wrap="square" lIns="91440" tIns="45719" rIns="91440" bIns="45719" numCol="1" spcCol="0" rtlCol="0" fromWordArt="0" anchor="ctr" anchorCtr="0" forceAA="0" compatLnSpc="1">
+              <a:bodyPr rot="0" spcFirstLastPara="0" vertOverflow="overflow" horzOverflow="overflow" vert="horz" wrap="square" lIns="96775" tIns="48386" rIns="96775" bIns="48386" numCol="1" spcCol="0" rtlCol="0" fromWordArt="0" anchor="ctr" anchorCtr="0" forceAA="0" compatLnSpc="1">
                 <a:prstTxWarp prst="textNoShape">
                   <a:avLst/>
                 </a:prstTxWarp>
@@ -9508,7 +9510,7 @@
               <a:lstStyle/>
               <a:p>
                 <a:pPr algn="ctr"/>
-                <a:endParaRPr lang="zh-TW" altLang="en-US" sz="900"/>
+                <a:endParaRPr lang="zh-TW" altLang="en-US" sz="952"/>
               </a:p>
             </p:txBody>
           </p:sp>
@@ -9554,7 +9556,7 @@
               </a:fontRef>
             </p:style>
             <p:txBody>
-              <a:bodyPr rot="0" spcFirstLastPara="0" vertOverflow="overflow" horzOverflow="overflow" vert="horz" wrap="square" lIns="91440" tIns="45719" rIns="91440" bIns="45719" numCol="1" spcCol="0" rtlCol="0" fromWordArt="0" anchor="ctr" anchorCtr="0" forceAA="0" compatLnSpc="1">
+              <a:bodyPr rot="0" spcFirstLastPara="0" vertOverflow="overflow" horzOverflow="overflow" vert="horz" wrap="square" lIns="96775" tIns="48386" rIns="96775" bIns="48386" numCol="1" spcCol="0" rtlCol="0" fromWordArt="0" anchor="ctr" anchorCtr="0" forceAA="0" compatLnSpc="1">
                 <a:prstTxWarp prst="textNoShape">
                   <a:avLst/>
                 </a:prstTxWarp>
@@ -9563,7 +9565,7 @@
               <a:lstStyle/>
               <a:p>
                 <a:pPr algn="ctr"/>
-                <a:endParaRPr lang="zh-TW" altLang="en-US" sz="900"/>
+                <a:endParaRPr lang="zh-TW" altLang="en-US" sz="952"/>
               </a:p>
             </p:txBody>
           </p:sp>
@@ -9609,7 +9611,7 @@
               </a:fontRef>
             </p:style>
             <p:txBody>
-              <a:bodyPr rot="0" spcFirstLastPara="0" vertOverflow="overflow" horzOverflow="overflow" vert="horz" wrap="square" lIns="91440" tIns="45719" rIns="91440" bIns="45719" numCol="1" spcCol="0" rtlCol="0" fromWordArt="0" anchor="ctr" anchorCtr="0" forceAA="0" compatLnSpc="1">
+              <a:bodyPr rot="0" spcFirstLastPara="0" vertOverflow="overflow" horzOverflow="overflow" vert="horz" wrap="square" lIns="96775" tIns="48386" rIns="96775" bIns="48386" numCol="1" spcCol="0" rtlCol="0" fromWordArt="0" anchor="ctr" anchorCtr="0" forceAA="0" compatLnSpc="1">
                 <a:prstTxWarp prst="textNoShape">
                   <a:avLst/>
                 </a:prstTxWarp>
@@ -9618,7 +9620,7 @@
               <a:lstStyle/>
               <a:p>
                 <a:pPr algn="ctr"/>
-                <a:endParaRPr lang="zh-TW" altLang="en-US" sz="900"/>
+                <a:endParaRPr lang="zh-TW" altLang="en-US" sz="952"/>
               </a:p>
             </p:txBody>
           </p:sp>
@@ -9664,7 +9666,7 @@
               </a:fontRef>
             </p:style>
             <p:txBody>
-              <a:bodyPr rot="0" spcFirstLastPara="0" vertOverflow="overflow" horzOverflow="overflow" vert="horz" wrap="square" lIns="91440" tIns="45719" rIns="91440" bIns="45719" numCol="1" spcCol="0" rtlCol="0" fromWordArt="0" anchor="ctr" anchorCtr="0" forceAA="0" compatLnSpc="1">
+              <a:bodyPr rot="0" spcFirstLastPara="0" vertOverflow="overflow" horzOverflow="overflow" vert="horz" wrap="square" lIns="96775" tIns="48386" rIns="96775" bIns="48386" numCol="1" spcCol="0" rtlCol="0" fromWordArt="0" anchor="ctr" anchorCtr="0" forceAA="0" compatLnSpc="1">
                 <a:prstTxWarp prst="textNoShape">
                   <a:avLst/>
                 </a:prstTxWarp>
@@ -9673,7 +9675,7 @@
               <a:lstStyle/>
               <a:p>
                 <a:pPr algn="ctr"/>
-                <a:endParaRPr lang="zh-TW" altLang="en-US" sz="900"/>
+                <a:endParaRPr lang="zh-TW" altLang="en-US" sz="952"/>
               </a:p>
             </p:txBody>
           </p:sp>
@@ -9719,7 +9721,7 @@
               </a:fontRef>
             </p:style>
             <p:txBody>
-              <a:bodyPr rot="0" spcFirstLastPara="0" vertOverflow="overflow" horzOverflow="overflow" vert="horz" wrap="square" lIns="91440" tIns="45719" rIns="91440" bIns="45719" numCol="1" spcCol="0" rtlCol="0" fromWordArt="0" anchor="ctr" anchorCtr="0" forceAA="0" compatLnSpc="1">
+              <a:bodyPr rot="0" spcFirstLastPara="0" vertOverflow="overflow" horzOverflow="overflow" vert="horz" wrap="square" lIns="96775" tIns="48386" rIns="96775" bIns="48386" numCol="1" spcCol="0" rtlCol="0" fromWordArt="0" anchor="ctr" anchorCtr="0" forceAA="0" compatLnSpc="1">
                 <a:prstTxWarp prst="textNoShape">
                   <a:avLst/>
                 </a:prstTxWarp>
@@ -9728,7 +9730,7 @@
               <a:lstStyle/>
               <a:p>
                 <a:pPr algn="ctr"/>
-                <a:endParaRPr lang="zh-TW" altLang="en-US" sz="900"/>
+                <a:endParaRPr lang="zh-TW" altLang="en-US" sz="952"/>
               </a:p>
             </p:txBody>
           </p:sp>
@@ -9774,7 +9776,7 @@
               </a:fontRef>
             </p:style>
             <p:txBody>
-              <a:bodyPr rot="0" spcFirstLastPara="0" vertOverflow="overflow" horzOverflow="overflow" vert="horz" wrap="square" lIns="91440" tIns="45719" rIns="91440" bIns="45719" numCol="1" spcCol="0" rtlCol="0" fromWordArt="0" anchor="ctr" anchorCtr="0" forceAA="0" compatLnSpc="1">
+              <a:bodyPr rot="0" spcFirstLastPara="0" vertOverflow="overflow" horzOverflow="overflow" vert="horz" wrap="square" lIns="96775" tIns="48386" rIns="96775" bIns="48386" numCol="1" spcCol="0" rtlCol="0" fromWordArt="0" anchor="ctr" anchorCtr="0" forceAA="0" compatLnSpc="1">
                 <a:prstTxWarp prst="textNoShape">
                   <a:avLst/>
                 </a:prstTxWarp>
@@ -9783,7 +9785,7 @@
               <a:lstStyle/>
               <a:p>
                 <a:pPr algn="ctr"/>
-                <a:endParaRPr lang="zh-TW" altLang="en-US" sz="900" dirty="0"/>
+                <a:endParaRPr lang="zh-TW" altLang="en-US" sz="952" dirty="0"/>
               </a:p>
             </p:txBody>
           </p:sp>
@@ -9829,7 +9831,7 @@
               </a:fontRef>
             </p:style>
             <p:txBody>
-              <a:bodyPr rot="0" spcFirstLastPara="0" vertOverflow="overflow" horzOverflow="overflow" vert="horz" wrap="square" lIns="91440" tIns="45719" rIns="91440" bIns="45719" numCol="1" spcCol="0" rtlCol="0" fromWordArt="0" anchor="ctr" anchorCtr="0" forceAA="0" compatLnSpc="1">
+              <a:bodyPr rot="0" spcFirstLastPara="0" vertOverflow="overflow" horzOverflow="overflow" vert="horz" wrap="square" lIns="96775" tIns="48386" rIns="96775" bIns="48386" numCol="1" spcCol="0" rtlCol="0" fromWordArt="0" anchor="ctr" anchorCtr="0" forceAA="0" compatLnSpc="1">
                 <a:prstTxWarp prst="textNoShape">
                   <a:avLst/>
                 </a:prstTxWarp>
@@ -9838,7 +9840,7 @@
               <a:lstStyle/>
               <a:p>
                 <a:pPr algn="ctr"/>
-                <a:endParaRPr lang="zh-TW" altLang="en-US" sz="900"/>
+                <a:endParaRPr lang="zh-TW" altLang="en-US" sz="952"/>
               </a:p>
             </p:txBody>
           </p:sp>
@@ -9905,7 +9907,7 @@
               </a:fontRef>
             </p:style>
             <p:txBody>
-              <a:bodyPr rot="0" spcFirstLastPara="0" vertOverflow="overflow" horzOverflow="overflow" vert="horz" wrap="square" lIns="91440" tIns="45719" rIns="91440" bIns="45719" numCol="1" spcCol="0" rtlCol="0" fromWordArt="0" anchor="ctr" anchorCtr="0" forceAA="0" compatLnSpc="1">
+              <a:bodyPr rot="0" spcFirstLastPara="0" vertOverflow="overflow" horzOverflow="overflow" vert="horz" wrap="square" lIns="96775" tIns="48386" rIns="96775" bIns="48386" numCol="1" spcCol="0" rtlCol="0" fromWordArt="0" anchor="ctr" anchorCtr="0" forceAA="0" compatLnSpc="1">
                 <a:prstTxWarp prst="textNoShape">
                   <a:avLst/>
                 </a:prstTxWarp>
@@ -9914,7 +9916,7 @@
               <a:lstStyle/>
               <a:p>
                 <a:pPr algn="ctr"/>
-                <a:endParaRPr lang="zh-TW" altLang="en-US" sz="900" dirty="0"/>
+                <a:endParaRPr lang="zh-TW" altLang="en-US" sz="952" dirty="0"/>
               </a:p>
             </p:txBody>
           </p:sp>
@@ -9960,7 +9962,7 @@
               </a:fontRef>
             </p:style>
             <p:txBody>
-              <a:bodyPr rot="0" spcFirstLastPara="0" vertOverflow="overflow" horzOverflow="overflow" vert="horz" wrap="square" lIns="91440" tIns="45719" rIns="91440" bIns="45719" numCol="1" spcCol="0" rtlCol="0" fromWordArt="0" anchor="ctr" anchorCtr="0" forceAA="0" compatLnSpc="1">
+              <a:bodyPr rot="0" spcFirstLastPara="0" vertOverflow="overflow" horzOverflow="overflow" vert="horz" wrap="square" lIns="96775" tIns="48386" rIns="96775" bIns="48386" numCol="1" spcCol="0" rtlCol="0" fromWordArt="0" anchor="ctr" anchorCtr="0" forceAA="0" compatLnSpc="1">
                 <a:prstTxWarp prst="textNoShape">
                   <a:avLst/>
                 </a:prstTxWarp>
@@ -9969,7 +9971,7 @@
               <a:lstStyle/>
               <a:p>
                 <a:pPr algn="ctr"/>
-                <a:endParaRPr lang="zh-TW" altLang="en-US" sz="900"/>
+                <a:endParaRPr lang="zh-TW" altLang="en-US" sz="952"/>
               </a:p>
             </p:txBody>
           </p:sp>
@@ -10015,7 +10017,7 @@
               </a:fontRef>
             </p:style>
             <p:txBody>
-              <a:bodyPr rot="0" spcFirstLastPara="0" vertOverflow="overflow" horzOverflow="overflow" vert="horz" wrap="square" lIns="91440" tIns="45719" rIns="91440" bIns="45719" numCol="1" spcCol="0" rtlCol="0" fromWordArt="0" anchor="ctr" anchorCtr="0" forceAA="0" compatLnSpc="1">
+              <a:bodyPr rot="0" spcFirstLastPara="0" vertOverflow="overflow" horzOverflow="overflow" vert="horz" wrap="square" lIns="96775" tIns="48386" rIns="96775" bIns="48386" numCol="1" spcCol="0" rtlCol="0" fromWordArt="0" anchor="ctr" anchorCtr="0" forceAA="0" compatLnSpc="1">
                 <a:prstTxWarp prst="textNoShape">
                   <a:avLst/>
                 </a:prstTxWarp>
@@ -10024,7 +10026,7 @@
               <a:lstStyle/>
               <a:p>
                 <a:pPr algn="ctr"/>
-                <a:endParaRPr lang="zh-TW" altLang="en-US" sz="900"/>
+                <a:endParaRPr lang="zh-TW" altLang="en-US" sz="952"/>
               </a:p>
             </p:txBody>
           </p:sp>
@@ -10070,7 +10072,7 @@
               </a:fontRef>
             </p:style>
             <p:txBody>
-              <a:bodyPr rot="0" spcFirstLastPara="0" vertOverflow="overflow" horzOverflow="overflow" vert="horz" wrap="square" lIns="91440" tIns="45719" rIns="91440" bIns="45719" numCol="1" spcCol="0" rtlCol="0" fromWordArt="0" anchor="ctr" anchorCtr="0" forceAA="0" compatLnSpc="1">
+              <a:bodyPr rot="0" spcFirstLastPara="0" vertOverflow="overflow" horzOverflow="overflow" vert="horz" wrap="square" lIns="96775" tIns="48386" rIns="96775" bIns="48386" numCol="1" spcCol="0" rtlCol="0" fromWordArt="0" anchor="ctr" anchorCtr="0" forceAA="0" compatLnSpc="1">
                 <a:prstTxWarp prst="textNoShape">
                   <a:avLst/>
                 </a:prstTxWarp>
@@ -10079,7 +10081,7 @@
               <a:lstStyle/>
               <a:p>
                 <a:pPr algn="ctr"/>
-                <a:endParaRPr lang="zh-TW" altLang="en-US" sz="900"/>
+                <a:endParaRPr lang="zh-TW" altLang="en-US" sz="952"/>
               </a:p>
             </p:txBody>
           </p:sp>
@@ -10125,7 +10127,7 @@
               </a:fontRef>
             </p:style>
             <p:txBody>
-              <a:bodyPr rot="0" spcFirstLastPara="0" vertOverflow="overflow" horzOverflow="overflow" vert="horz" wrap="square" lIns="91440" tIns="45719" rIns="91440" bIns="45719" numCol="1" spcCol="0" rtlCol="0" fromWordArt="0" anchor="ctr" anchorCtr="0" forceAA="0" compatLnSpc="1">
+              <a:bodyPr rot="0" spcFirstLastPara="0" vertOverflow="overflow" horzOverflow="overflow" vert="horz" wrap="square" lIns="96775" tIns="48386" rIns="96775" bIns="48386" numCol="1" spcCol="0" rtlCol="0" fromWordArt="0" anchor="ctr" anchorCtr="0" forceAA="0" compatLnSpc="1">
                 <a:prstTxWarp prst="textNoShape">
                   <a:avLst/>
                 </a:prstTxWarp>
@@ -10134,7 +10136,7 @@
               <a:lstStyle/>
               <a:p>
                 <a:pPr algn="ctr"/>
-                <a:endParaRPr lang="zh-TW" altLang="en-US" sz="900"/>
+                <a:endParaRPr lang="zh-TW" altLang="en-US" sz="952"/>
               </a:p>
             </p:txBody>
           </p:sp>
@@ -10180,7 +10182,7 @@
               </a:fontRef>
             </p:style>
             <p:txBody>
-              <a:bodyPr rot="0" spcFirstLastPara="0" vertOverflow="overflow" horzOverflow="overflow" vert="horz" wrap="square" lIns="91440" tIns="45719" rIns="91440" bIns="45719" numCol="1" spcCol="0" rtlCol="0" fromWordArt="0" anchor="ctr" anchorCtr="0" forceAA="0" compatLnSpc="1">
+              <a:bodyPr rot="0" spcFirstLastPara="0" vertOverflow="overflow" horzOverflow="overflow" vert="horz" wrap="square" lIns="96775" tIns="48386" rIns="96775" bIns="48386" numCol="1" spcCol="0" rtlCol="0" fromWordArt="0" anchor="ctr" anchorCtr="0" forceAA="0" compatLnSpc="1">
                 <a:prstTxWarp prst="textNoShape">
                   <a:avLst/>
                 </a:prstTxWarp>
@@ -10189,7 +10191,7 @@
               <a:lstStyle/>
               <a:p>
                 <a:pPr algn="ctr"/>
-                <a:endParaRPr lang="zh-TW" altLang="en-US" sz="900"/>
+                <a:endParaRPr lang="zh-TW" altLang="en-US" sz="952"/>
               </a:p>
             </p:txBody>
           </p:sp>
@@ -10235,7 +10237,7 @@
               </a:fontRef>
             </p:style>
             <p:txBody>
-              <a:bodyPr rot="0" spcFirstLastPara="0" vertOverflow="overflow" horzOverflow="overflow" vert="horz" wrap="square" lIns="91440" tIns="45719" rIns="91440" bIns="45719" numCol="1" spcCol="0" rtlCol="0" fromWordArt="0" anchor="ctr" anchorCtr="0" forceAA="0" compatLnSpc="1">
+              <a:bodyPr rot="0" spcFirstLastPara="0" vertOverflow="overflow" horzOverflow="overflow" vert="horz" wrap="square" lIns="96775" tIns="48386" rIns="96775" bIns="48386" numCol="1" spcCol="0" rtlCol="0" fromWordArt="0" anchor="ctr" anchorCtr="0" forceAA="0" compatLnSpc="1">
                 <a:prstTxWarp prst="textNoShape">
                   <a:avLst/>
                 </a:prstTxWarp>
@@ -10244,7 +10246,7 @@
               <a:lstStyle/>
               <a:p>
                 <a:pPr algn="ctr"/>
-                <a:endParaRPr lang="zh-TW" altLang="en-US" sz="900"/>
+                <a:endParaRPr lang="zh-TW" altLang="en-US" sz="952"/>
               </a:p>
             </p:txBody>
           </p:sp>
@@ -10290,7 +10292,7 @@
               </a:fontRef>
             </p:style>
             <p:txBody>
-              <a:bodyPr rot="0" spcFirstLastPara="0" vertOverflow="overflow" horzOverflow="overflow" vert="horz" wrap="square" lIns="91440" tIns="45719" rIns="91440" bIns="45719" numCol="1" spcCol="0" rtlCol="0" fromWordArt="0" anchor="ctr" anchorCtr="0" forceAA="0" compatLnSpc="1">
+              <a:bodyPr rot="0" spcFirstLastPara="0" vertOverflow="overflow" horzOverflow="overflow" vert="horz" wrap="square" lIns="96775" tIns="48386" rIns="96775" bIns="48386" numCol="1" spcCol="0" rtlCol="0" fromWordArt="0" anchor="ctr" anchorCtr="0" forceAA="0" compatLnSpc="1">
                 <a:prstTxWarp prst="textNoShape">
                   <a:avLst/>
                 </a:prstTxWarp>
@@ -10299,7 +10301,7 @@
               <a:lstStyle/>
               <a:p>
                 <a:pPr algn="ctr"/>
-                <a:endParaRPr lang="zh-TW" altLang="en-US" sz="900" dirty="0"/>
+                <a:endParaRPr lang="zh-TW" altLang="en-US" sz="952" dirty="0"/>
               </a:p>
             </p:txBody>
           </p:sp>
@@ -10345,7 +10347,7 @@
               </a:fontRef>
             </p:style>
             <p:txBody>
-              <a:bodyPr rot="0" spcFirstLastPara="0" vertOverflow="overflow" horzOverflow="overflow" vert="horz" wrap="square" lIns="91440" tIns="45719" rIns="91440" bIns="45719" numCol="1" spcCol="0" rtlCol="0" fromWordArt="0" anchor="ctr" anchorCtr="0" forceAA="0" compatLnSpc="1">
+              <a:bodyPr rot="0" spcFirstLastPara="0" vertOverflow="overflow" horzOverflow="overflow" vert="horz" wrap="square" lIns="96775" tIns="48386" rIns="96775" bIns="48386" numCol="1" spcCol="0" rtlCol="0" fromWordArt="0" anchor="ctr" anchorCtr="0" forceAA="0" compatLnSpc="1">
                 <a:prstTxWarp prst="textNoShape">
                   <a:avLst/>
                 </a:prstTxWarp>
@@ -10354,7 +10356,7 @@
               <a:lstStyle/>
               <a:p>
                 <a:pPr algn="ctr"/>
-                <a:endParaRPr lang="zh-TW" altLang="en-US" sz="900"/>
+                <a:endParaRPr lang="zh-TW" altLang="en-US" sz="952"/>
               </a:p>
             </p:txBody>
           </p:sp>
@@ -10374,9 +10376,9 @@
           <p:grpSpPr>
             <a:xfrm>
               <a:off x="11698379" y="7606750"/>
-              <a:ext cx="609103" cy="503890"/>
+              <a:ext cx="609103" cy="498739"/>
               <a:chOff x="6583394" y="1501875"/>
-              <a:chExt cx="1650681" cy="1365553"/>
+              <a:chExt cx="1650681" cy="1351594"/>
             </a:xfrm>
           </p:grpSpPr>
           <p:grpSp>
@@ -10452,7 +10454,7 @@
                 <a:lstStyle/>
                 <a:p>
                   <a:pPr algn="ctr"/>
-                  <a:endParaRPr lang="zh-TW" altLang="en-US" sz="1142">
+                  <a:endParaRPr lang="zh-TW" altLang="en-US" sz="1209">
                     <a:solidFill>
                       <a:schemeClr val="bg1"/>
                     </a:solidFill>
@@ -10513,7 +10515,7 @@
                 <a:lstStyle/>
                 <a:p>
                   <a:pPr algn="ctr"/>
-                  <a:endParaRPr lang="zh-TW" altLang="en-US" sz="1142" dirty="0">
+                  <a:endParaRPr lang="zh-TW" altLang="en-US" sz="1209" dirty="0">
                     <a:solidFill>
                       <a:schemeClr val="bg1"/>
                     </a:solidFill>
@@ -10539,7 +10541,7 @@
                 <p:spPr>
                   <a:xfrm>
                     <a:off x="6583394" y="1501875"/>
-                    <a:ext cx="416137" cy="655101"/>
+                    <a:ext cx="416137" cy="640330"/>
                   </a:xfrm>
                   <a:prstGeom prst="rect">
                     <a:avLst/>
@@ -10562,7 +10564,7 @@
                           <m:sSub>
                             <m:sSubPr>
                               <m:ctrlPr>
-                                <a:rPr lang="en-US" altLang="zh-TW" sz="900" i="1">
+                                <a:rPr lang="en-US" altLang="zh-TW" sz="952" i="1">
                                   <a:solidFill>
                                     <a:schemeClr val="bg1"/>
                                   </a:solidFill>
@@ -10572,7 +10574,7 @@
                             </m:sSubPr>
                             <m:e>
                               <m:r>
-                                <a:rPr lang="en-US" altLang="zh-TW" sz="900" i="1">
+                                <a:rPr lang="en-US" altLang="zh-TW" sz="952" i="1">
                                   <a:solidFill>
                                     <a:schemeClr val="bg1"/>
                                   </a:solidFill>
@@ -10583,7 +10585,7 @@
                             </m:e>
                             <m:sub>
                               <m:r>
-                                <a:rPr lang="en-US" altLang="zh-TW" sz="900" i="1">
+                                <a:rPr lang="en-US" altLang="zh-TW" sz="952" i="1">
                                   <a:solidFill>
                                     <a:schemeClr val="bg1"/>
                                   </a:solidFill>
@@ -10596,7 +10598,7 @@
                         </m:oMath>
                       </m:oMathPara>
                     </a14:m>
-                    <a:endParaRPr lang="en-US" altLang="zh-TW" sz="900" dirty="0">
+                    <a:endParaRPr lang="en-US" altLang="zh-TW" sz="952" dirty="0">
                       <a:solidFill>
                         <a:schemeClr val="bg1"/>
                       </a:solidFill>
@@ -10623,15 +10625,15 @@
                 <p:spPr>
                   <a:xfrm>
                     <a:off x="6583394" y="1501875"/>
-                    <a:ext cx="416137" cy="655101"/>
+                    <a:ext cx="416137" cy="640330"/>
                   </a:xfrm>
                   <a:prstGeom prst="rect">
                     <a:avLst/>
                   </a:prstGeom>
                   <a:blipFill>
-                    <a:blip r:embed="rId26"/>
+                    <a:blip r:embed="rId25"/>
                     <a:stretch>
-                      <a:fillRect r="-56000"/>
+                      <a:fillRect r="-55556"/>
                     </a:stretch>
                   </a:blipFill>
                 </p:spPr>
@@ -10666,8 +10668,8 @@
                 </p:nvSpPr>
                 <p:spPr>
                   <a:xfrm>
-                    <a:off x="7165989" y="2241868"/>
-                    <a:ext cx="1068086" cy="625560"/>
+                    <a:off x="7165989" y="2241869"/>
+                    <a:ext cx="1068086" cy="611600"/>
                   </a:xfrm>
                   <a:prstGeom prst="rect">
                     <a:avLst/>
@@ -10690,7 +10692,7 @@
                           <m:sSub>
                             <m:sSubPr>
                               <m:ctrlPr>
-                                <a:rPr lang="en-US" altLang="zh-TW" sz="900" i="1">
+                                <a:rPr lang="en-US" altLang="zh-TW" sz="952" i="1">
                                   <a:solidFill>
                                     <a:schemeClr val="bg1"/>
                                   </a:solidFill>
@@ -10700,7 +10702,7 @@
                             </m:sSubPr>
                             <m:e>
                               <m:r>
-                                <a:rPr lang="en-US" altLang="zh-TW" sz="900" i="1">
+                                <a:rPr lang="en-US" altLang="zh-TW" sz="952" i="1">
                                   <a:solidFill>
                                     <a:schemeClr val="bg1"/>
                                   </a:solidFill>
@@ -10711,7 +10713,7 @@
                             </m:e>
                             <m:sub>
                               <m:r>
-                                <a:rPr lang="en-US" altLang="zh-TW" sz="900" i="1">
+                                <a:rPr lang="en-US" altLang="zh-TW" sz="952" i="1">
                                   <a:solidFill>
                                     <a:schemeClr val="bg1"/>
                                   </a:solidFill>
@@ -10724,7 +10726,7 @@
                         </m:oMath>
                       </m:oMathPara>
                     </a14:m>
-                    <a:endParaRPr lang="en-US" altLang="zh-TW" sz="900" dirty="0">
+                    <a:endParaRPr lang="en-US" altLang="zh-TW" sz="952" dirty="0">
                       <a:solidFill>
                         <a:schemeClr val="bg1"/>
                       </a:solidFill>
@@ -10750,14 +10752,14 @@
                 </p:nvSpPr>
                 <p:spPr>
                   <a:xfrm>
-                    <a:off x="7165989" y="2241868"/>
-                    <a:ext cx="1068086" cy="625560"/>
+                    <a:off x="7165989" y="2241869"/>
+                    <a:ext cx="1068086" cy="611600"/>
                   </a:xfrm>
                   <a:prstGeom prst="rect">
                     <a:avLst/>
                   </a:prstGeom>
                   <a:blipFill>
-                    <a:blip r:embed="rId27"/>
+                    <a:blip r:embed="rId26"/>
                     <a:stretch>
                       <a:fillRect/>
                     </a:stretch>
@@ -10794,9 +10796,9 @@
           <p:grpSpPr>
             <a:xfrm>
               <a:off x="9202829" y="4824639"/>
-              <a:ext cx="609103" cy="503890"/>
+              <a:ext cx="609103" cy="498739"/>
               <a:chOff x="6583394" y="1501875"/>
-              <a:chExt cx="1650681" cy="1365553"/>
+              <a:chExt cx="1650681" cy="1351594"/>
             </a:xfrm>
           </p:grpSpPr>
           <p:grpSp>
@@ -10872,7 +10874,7 @@
                 <a:lstStyle/>
                 <a:p>
                   <a:pPr algn="ctr"/>
-                  <a:endParaRPr lang="zh-TW" altLang="en-US" sz="1142">
+                  <a:endParaRPr lang="zh-TW" altLang="en-US" sz="1209">
                     <a:solidFill>
                       <a:schemeClr val="bg1"/>
                     </a:solidFill>
@@ -10933,7 +10935,7 @@
                 <a:lstStyle/>
                 <a:p>
                   <a:pPr algn="ctr"/>
-                  <a:endParaRPr lang="zh-TW" altLang="en-US" sz="1142" dirty="0">
+                  <a:endParaRPr lang="zh-TW" altLang="en-US" sz="1209" dirty="0">
                     <a:solidFill>
                       <a:schemeClr val="bg1"/>
                     </a:solidFill>
@@ -10959,7 +10961,7 @@
                 <p:spPr>
                   <a:xfrm>
                     <a:off x="6583394" y="1501875"/>
-                    <a:ext cx="416137" cy="655101"/>
+                    <a:ext cx="416137" cy="640330"/>
                   </a:xfrm>
                   <a:prstGeom prst="rect">
                     <a:avLst/>
@@ -10982,7 +10984,7 @@
                           <m:sSub>
                             <m:sSubPr>
                               <m:ctrlPr>
-                                <a:rPr lang="en-US" altLang="zh-TW" sz="900" i="1">
+                                <a:rPr lang="en-US" altLang="zh-TW" sz="952" i="1">
                                   <a:solidFill>
                                     <a:schemeClr val="bg1"/>
                                   </a:solidFill>
@@ -10992,7 +10994,7 @@
                             </m:sSubPr>
                             <m:e>
                               <m:r>
-                                <a:rPr lang="en-US" altLang="zh-TW" sz="900" i="1">
+                                <a:rPr lang="en-US" altLang="zh-TW" sz="952" i="1">
                                   <a:solidFill>
                                     <a:schemeClr val="bg1"/>
                                   </a:solidFill>
@@ -11003,7 +11005,7 @@
                             </m:e>
                             <m:sub>
                               <m:r>
-                                <a:rPr lang="en-US" altLang="zh-TW" sz="900" i="1">
+                                <a:rPr lang="en-US" altLang="zh-TW" sz="952" i="1">
                                   <a:solidFill>
                                     <a:schemeClr val="bg1"/>
                                   </a:solidFill>
@@ -11016,7 +11018,7 @@
                         </m:oMath>
                       </m:oMathPara>
                     </a14:m>
-                    <a:endParaRPr lang="en-US" altLang="zh-TW" sz="900" dirty="0">
+                    <a:endParaRPr lang="en-US" altLang="zh-TW" sz="952" dirty="0">
                       <a:solidFill>
                         <a:schemeClr val="bg1"/>
                       </a:solidFill>
@@ -11043,15 +11045,15 @@
                 <p:spPr>
                   <a:xfrm>
                     <a:off x="6583394" y="1501875"/>
-                    <a:ext cx="416137" cy="655101"/>
+                    <a:ext cx="416137" cy="640330"/>
                   </a:xfrm>
                   <a:prstGeom prst="rect">
                     <a:avLst/>
                   </a:prstGeom>
                   <a:blipFill>
-                    <a:blip r:embed="rId16"/>
+                    <a:blip r:embed="rId22"/>
                     <a:stretch>
-                      <a:fillRect r="-56000"/>
+                      <a:fillRect r="-57692"/>
                     </a:stretch>
                   </a:blipFill>
                 </p:spPr>
@@ -11086,8 +11088,8 @@
                 </p:nvSpPr>
                 <p:spPr>
                   <a:xfrm>
-                    <a:off x="7165989" y="2241868"/>
-                    <a:ext cx="1068086" cy="625560"/>
+                    <a:off x="7165989" y="2241869"/>
+                    <a:ext cx="1068086" cy="611600"/>
                   </a:xfrm>
                   <a:prstGeom prst="rect">
                     <a:avLst/>
@@ -11110,7 +11112,7 @@
                           <m:sSub>
                             <m:sSubPr>
                               <m:ctrlPr>
-                                <a:rPr lang="en-US" altLang="zh-TW" sz="900" i="1">
+                                <a:rPr lang="en-US" altLang="zh-TW" sz="952" i="1">
                                   <a:solidFill>
                                     <a:schemeClr val="bg1"/>
                                   </a:solidFill>
@@ -11120,7 +11122,7 @@
                             </m:sSubPr>
                             <m:e>
                               <m:r>
-                                <a:rPr lang="en-US" altLang="zh-TW" sz="900" i="1">
+                                <a:rPr lang="en-US" altLang="zh-TW" sz="952" i="1">
                                   <a:solidFill>
                                     <a:schemeClr val="bg1"/>
                                   </a:solidFill>
@@ -11131,7 +11133,7 @@
                             </m:e>
                             <m:sub>
                               <m:r>
-                                <a:rPr lang="en-US" altLang="zh-TW" sz="900" i="1">
+                                <a:rPr lang="en-US" altLang="zh-TW" sz="952" i="1">
                                   <a:solidFill>
                                     <a:schemeClr val="bg1"/>
                                   </a:solidFill>
@@ -11144,7 +11146,7 @@
                         </m:oMath>
                       </m:oMathPara>
                     </a14:m>
-                    <a:endParaRPr lang="en-US" altLang="zh-TW" sz="900" dirty="0">
+                    <a:endParaRPr lang="en-US" altLang="zh-TW" sz="952" dirty="0">
                       <a:solidFill>
                         <a:schemeClr val="bg1"/>
                       </a:solidFill>
@@ -11170,14 +11172,14 @@
                 </p:nvSpPr>
                 <p:spPr>
                   <a:xfrm>
-                    <a:off x="7165989" y="2241868"/>
-                    <a:ext cx="1068086" cy="625560"/>
+                    <a:off x="7165989" y="2241869"/>
+                    <a:ext cx="1068086" cy="611600"/>
                   </a:xfrm>
                   <a:prstGeom prst="rect">
                     <a:avLst/>
                   </a:prstGeom>
                   <a:blipFill>
-                    <a:blip r:embed="rId23"/>
+                    <a:blip r:embed="rId18"/>
                     <a:stretch>
                       <a:fillRect/>
                     </a:stretch>
@@ -11214,9 +11216,9 @@
           <p:grpSpPr>
             <a:xfrm>
               <a:off x="11698379" y="4824639"/>
-              <a:ext cx="609103" cy="503890"/>
+              <a:ext cx="609103" cy="498739"/>
               <a:chOff x="6583394" y="1501875"/>
-              <a:chExt cx="1650681" cy="1365553"/>
+              <a:chExt cx="1650681" cy="1351594"/>
             </a:xfrm>
           </p:grpSpPr>
           <p:grpSp>
@@ -11292,7 +11294,7 @@
                 <a:lstStyle/>
                 <a:p>
                   <a:pPr algn="ctr"/>
-                  <a:endParaRPr lang="zh-TW" altLang="en-US" sz="1142">
+                  <a:endParaRPr lang="zh-TW" altLang="en-US" sz="1209">
                     <a:solidFill>
                       <a:schemeClr val="bg1"/>
                     </a:solidFill>
@@ -11353,7 +11355,7 @@
                 <a:lstStyle/>
                 <a:p>
                   <a:pPr algn="ctr"/>
-                  <a:endParaRPr lang="zh-TW" altLang="en-US" sz="1142" dirty="0">
+                  <a:endParaRPr lang="zh-TW" altLang="en-US" sz="1209" dirty="0">
                     <a:solidFill>
                       <a:schemeClr val="bg1"/>
                     </a:solidFill>
@@ -11379,7 +11381,7 @@
                 <p:spPr>
                   <a:xfrm>
                     <a:off x="6583394" y="1501875"/>
-                    <a:ext cx="416137" cy="655101"/>
+                    <a:ext cx="416137" cy="640330"/>
                   </a:xfrm>
                   <a:prstGeom prst="rect">
                     <a:avLst/>
@@ -11402,7 +11404,7 @@
                           <m:sSub>
                             <m:sSubPr>
                               <m:ctrlPr>
-                                <a:rPr lang="en-US" altLang="zh-TW" sz="900" i="1">
+                                <a:rPr lang="en-US" altLang="zh-TW" sz="952" i="1">
                                   <a:solidFill>
                                     <a:schemeClr val="bg1"/>
                                   </a:solidFill>
@@ -11412,7 +11414,7 @@
                             </m:sSubPr>
                             <m:e>
                               <m:r>
-                                <a:rPr lang="en-US" altLang="zh-TW" sz="900" i="1">
+                                <a:rPr lang="en-US" altLang="zh-TW" sz="952" i="1">
                                   <a:solidFill>
                                     <a:schemeClr val="bg1"/>
                                   </a:solidFill>
@@ -11423,7 +11425,7 @@
                             </m:e>
                             <m:sub>
                               <m:r>
-                                <a:rPr lang="en-US" altLang="zh-TW" sz="900" i="1">
+                                <a:rPr lang="en-US" altLang="zh-TW" sz="952" i="1">
                                   <a:solidFill>
                                     <a:schemeClr val="bg1"/>
                                   </a:solidFill>
@@ -11436,7 +11438,7 @@
                         </m:oMath>
                       </m:oMathPara>
                     </a14:m>
-                    <a:endParaRPr lang="en-US" altLang="zh-TW" sz="900" dirty="0">
+                    <a:endParaRPr lang="en-US" altLang="zh-TW" sz="952" dirty="0">
                       <a:solidFill>
                         <a:schemeClr val="bg1"/>
                       </a:solidFill>
@@ -11463,15 +11465,15 @@
                 <p:spPr>
                   <a:xfrm>
                     <a:off x="6583394" y="1501875"/>
-                    <a:ext cx="416137" cy="655101"/>
+                    <a:ext cx="416137" cy="640330"/>
                   </a:xfrm>
                   <a:prstGeom prst="rect">
                     <a:avLst/>
                   </a:prstGeom>
                   <a:blipFill>
-                    <a:blip r:embed="rId28"/>
+                    <a:blip r:embed="rId25"/>
                     <a:stretch>
-                      <a:fillRect r="-56000"/>
+                      <a:fillRect r="-55556"/>
                     </a:stretch>
                   </a:blipFill>
                 </p:spPr>
@@ -11506,8 +11508,8 @@
                 </p:nvSpPr>
                 <p:spPr>
                   <a:xfrm>
-                    <a:off x="7165989" y="2241868"/>
-                    <a:ext cx="1068086" cy="625560"/>
+                    <a:off x="7165989" y="2241869"/>
+                    <a:ext cx="1068086" cy="611600"/>
                   </a:xfrm>
                   <a:prstGeom prst="rect">
                     <a:avLst/>
@@ -11530,7 +11532,7 @@
                           <m:sSub>
                             <m:sSubPr>
                               <m:ctrlPr>
-                                <a:rPr lang="en-US" altLang="zh-TW" sz="900" i="1">
+                                <a:rPr lang="en-US" altLang="zh-TW" sz="952" i="1">
                                   <a:solidFill>
                                     <a:schemeClr val="bg1"/>
                                   </a:solidFill>
@@ -11540,7 +11542,7 @@
                             </m:sSubPr>
                             <m:e>
                               <m:r>
-                                <a:rPr lang="en-US" altLang="zh-TW" sz="900" i="1">
+                                <a:rPr lang="en-US" altLang="zh-TW" sz="952" i="1">
                                   <a:solidFill>
                                     <a:schemeClr val="bg1"/>
                                   </a:solidFill>
@@ -11551,7 +11553,7 @@
                             </m:e>
                             <m:sub>
                               <m:r>
-                                <a:rPr lang="en-US" altLang="zh-TW" sz="900" i="1">
+                                <a:rPr lang="en-US" altLang="zh-TW" sz="952" i="1">
                                   <a:solidFill>
                                     <a:schemeClr val="bg1"/>
                                   </a:solidFill>
@@ -11564,7 +11566,7 @@
                         </m:oMath>
                       </m:oMathPara>
                     </a14:m>
-                    <a:endParaRPr lang="en-US" altLang="zh-TW" sz="900" dirty="0">
+                    <a:endParaRPr lang="en-US" altLang="zh-TW" sz="952" dirty="0">
                       <a:solidFill>
                         <a:schemeClr val="bg1"/>
                       </a:solidFill>
@@ -11590,14 +11592,14 @@
                 </p:nvSpPr>
                 <p:spPr>
                   <a:xfrm>
-                    <a:off x="7165989" y="2241868"/>
-                    <a:ext cx="1068086" cy="625560"/>
+                    <a:off x="7165989" y="2241869"/>
+                    <a:ext cx="1068086" cy="611600"/>
                   </a:xfrm>
                   <a:prstGeom prst="rect">
                     <a:avLst/>
                   </a:prstGeom>
                   <a:blipFill>
-                    <a:blip r:embed="rId27"/>
+                    <a:blip r:embed="rId26"/>
                     <a:stretch>
                       <a:fillRect/>
                     </a:stretch>
@@ -11652,10 +11654,10 @@
       </p:grpSpPr>
       <p:grpSp>
         <p:nvGrpSpPr>
-          <p:cNvPr id="3" name="群組 2">
+          <p:cNvPr id="5" name="群組 4">
             <a:extLst>
               <a:ext uri="{FF2B5EF4-FFF2-40B4-BE49-F238E27FC236}">
-                <a16:creationId xmlns:a16="http://schemas.microsoft.com/office/drawing/2014/main" id="{9F94ED83-6694-4F34-A194-D348D8A5C5A5}"/>
+                <a16:creationId xmlns:a16="http://schemas.microsoft.com/office/drawing/2014/main" id="{5A6F3EA4-88A7-4E1B-9C6F-2BA263CD50A3}"/>
               </a:ext>
             </a:extLst>
           </p:cNvPr>
@@ -11664,10 +11666,10 @@
         </p:nvGrpSpPr>
         <p:grpSpPr>
           <a:xfrm>
-            <a:off x="124381" y="59531"/>
-            <a:ext cx="9111141" cy="6000750"/>
-            <a:chOff x="-172720" y="59531"/>
-            <a:chExt cx="9111141" cy="6000750"/>
+            <a:off x="863405" y="36970"/>
+            <a:ext cx="8179203" cy="5326743"/>
+            <a:chOff x="569686" y="765629"/>
+            <a:chExt cx="8179203" cy="5326743"/>
           </a:xfrm>
         </p:grpSpPr>
         <p:sp>
@@ -11684,14 +11686,30 @@
           </p:nvSpPr>
           <p:spPr>
             <a:xfrm>
-              <a:off x="-172720" y="59531"/>
-              <a:ext cx="9111141" cy="6000750"/>
+              <a:off x="569686" y="765629"/>
+              <a:ext cx="8179203" cy="5326743"/>
             </a:xfrm>
             <a:prstGeom prst="roundRect">
               <a:avLst>
                 <a:gd name="adj" fmla="val 7772"/>
               </a:avLst>
             </a:prstGeom>
+            <a:gradFill flip="none" rotWithShape="1">
+              <a:gsLst>
+                <a:gs pos="0">
+                  <a:schemeClr val="bg1">
+                    <a:lumMod val="95000"/>
+                  </a:schemeClr>
+                </a:gs>
+                <a:gs pos="100000">
+                  <a:schemeClr val="bg1">
+                    <a:lumMod val="85000"/>
+                  </a:schemeClr>
+                </a:gs>
+              </a:gsLst>
+              <a:lin ang="5400000" scaled="1"/>
+              <a:tileRect/>
+            </a:gradFill>
           </p:spPr>
           <p:style>
             <a:lnRef idx="1">
@@ -11708,7 +11726,7 @@
             </a:fontRef>
           </p:style>
           <p:txBody>
-            <a:bodyPr rot="0" spcFirstLastPara="0" vertOverflow="overflow" horzOverflow="overflow" vert="horz" wrap="square" lIns="58066" tIns="29033" rIns="58066" bIns="29033" numCol="1" spcCol="0" rtlCol="0" fromWordArt="0" anchor="ctr" anchorCtr="0" forceAA="0" compatLnSpc="1">
+            <a:bodyPr rot="0" spcFirstLastPara="0" vertOverflow="overflow" horzOverflow="overflow" vert="horz" wrap="square" lIns="61454" tIns="30727" rIns="61454" bIns="30727" numCol="1" spcCol="0" rtlCol="0" fromWordArt="0" anchor="ctr" anchorCtr="0" forceAA="0" compatLnSpc="1">
               <a:prstTxWarp prst="textNoShape">
                 <a:avLst/>
               </a:prstTxWarp>
@@ -11717,7 +11735,7 @@
             <a:lstStyle/>
             <a:p>
               <a:pPr algn="ctr"/>
-              <a:endParaRPr lang="zh-TW" altLang="en-US" sz="1142" dirty="0"/>
+              <a:endParaRPr lang="zh-TW" altLang="en-US" sz="2700" dirty="0"/>
             </a:p>
           </p:txBody>
         </p:sp>
@@ -11735,8 +11753,8 @@
           </p:nvGrpSpPr>
           <p:grpSpPr>
             <a:xfrm>
-              <a:off x="6595490" y="3643982"/>
-              <a:ext cx="2090057" cy="2090057"/>
+              <a:off x="6625755" y="3874077"/>
+              <a:ext cx="1825190" cy="1825188"/>
               <a:chOff x="8631015" y="5186974"/>
               <a:chExt cx="2090057" cy="2090057"/>
             </a:xfrm>
@@ -11783,7 +11801,7 @@
               </a:fontRef>
             </p:style>
             <p:txBody>
-              <a:bodyPr rot="0" spcFirstLastPara="0" vertOverflow="overflow" horzOverflow="overflow" vert="horz" wrap="square" lIns="91440" tIns="45719" rIns="91440" bIns="45719" numCol="1" spcCol="0" rtlCol="0" fromWordArt="0" anchor="ctr" anchorCtr="0" forceAA="0" compatLnSpc="1">
+              <a:bodyPr rot="0" spcFirstLastPara="0" vertOverflow="overflow" horzOverflow="overflow" vert="horz" wrap="square" lIns="96775" tIns="48386" rIns="96775" bIns="48386" numCol="1" spcCol="0" rtlCol="0" fromWordArt="0" anchor="ctr" anchorCtr="0" forceAA="0" compatLnSpc="1">
                 <a:prstTxWarp prst="textNoShape">
                   <a:avLst/>
                 </a:prstTxWarp>
@@ -11792,7 +11810,7 @@
               <a:lstStyle/>
               <a:p>
                 <a:pPr algn="ctr"/>
-                <a:endParaRPr lang="zh-TW" altLang="en-US" sz="900" dirty="0"/>
+                <a:endParaRPr lang="zh-TW" altLang="en-US" sz="2700" dirty="0"/>
               </a:p>
             </p:txBody>
           </p:sp>
@@ -11835,7 +11853,7 @@
               </a:fontRef>
             </p:style>
             <p:txBody>
-              <a:bodyPr rot="0" spcFirstLastPara="0" vertOverflow="overflow" horzOverflow="overflow" vert="horz" wrap="square" lIns="91440" tIns="45719" rIns="91440" bIns="45719" numCol="1" spcCol="0" rtlCol="0" fromWordArt="0" anchor="ctr" anchorCtr="0" forceAA="0" compatLnSpc="1">
+              <a:bodyPr rot="0" spcFirstLastPara="0" vertOverflow="overflow" horzOverflow="overflow" vert="horz" wrap="square" lIns="96775" tIns="48386" rIns="96775" bIns="48386" numCol="1" spcCol="0" rtlCol="0" fromWordArt="0" anchor="ctr" anchorCtr="0" forceAA="0" compatLnSpc="1">
                 <a:prstTxWarp prst="textNoShape">
                   <a:avLst/>
                 </a:prstTxWarp>
@@ -11844,7 +11862,7 @@
               <a:lstStyle/>
               <a:p>
                 <a:pPr algn="ctr"/>
-                <a:endParaRPr lang="zh-TW" altLang="en-US" sz="900" dirty="0"/>
+                <a:endParaRPr lang="zh-TW" altLang="en-US" sz="2700" dirty="0"/>
               </a:p>
             </p:txBody>
           </p:sp>
@@ -11887,7 +11905,7 @@
               </a:fontRef>
             </p:style>
             <p:txBody>
-              <a:bodyPr rot="0" spcFirstLastPara="0" vertOverflow="overflow" horzOverflow="overflow" vert="horz" wrap="square" lIns="91440" tIns="45719" rIns="91440" bIns="45719" numCol="1" spcCol="0" rtlCol="0" fromWordArt="0" anchor="ctr" anchorCtr="0" forceAA="0" compatLnSpc="1">
+              <a:bodyPr rot="0" spcFirstLastPara="0" vertOverflow="overflow" horzOverflow="overflow" vert="horz" wrap="square" lIns="96775" tIns="48386" rIns="96775" bIns="48386" numCol="1" spcCol="0" rtlCol="0" fromWordArt="0" anchor="ctr" anchorCtr="0" forceAA="0" compatLnSpc="1">
                 <a:prstTxWarp prst="textNoShape">
                   <a:avLst/>
                 </a:prstTxWarp>
@@ -11896,7 +11914,7 @@
               <a:lstStyle/>
               <a:p>
                 <a:pPr algn="ctr"/>
-                <a:endParaRPr lang="zh-TW" altLang="en-US" sz="900"/>
+                <a:endParaRPr lang="zh-TW" altLang="en-US" sz="2700"/>
               </a:p>
             </p:txBody>
           </p:sp>
@@ -11939,7 +11957,7 @@
               </a:fontRef>
             </p:style>
             <p:txBody>
-              <a:bodyPr rot="0" spcFirstLastPara="0" vertOverflow="overflow" horzOverflow="overflow" vert="horz" wrap="square" lIns="91440" tIns="45719" rIns="91440" bIns="45719" numCol="1" spcCol="0" rtlCol="0" fromWordArt="0" anchor="ctr" anchorCtr="0" forceAA="0" compatLnSpc="1">
+              <a:bodyPr rot="0" spcFirstLastPara="0" vertOverflow="overflow" horzOverflow="overflow" vert="horz" wrap="square" lIns="96775" tIns="48386" rIns="96775" bIns="48386" numCol="1" spcCol="0" rtlCol="0" fromWordArt="0" anchor="ctr" anchorCtr="0" forceAA="0" compatLnSpc="1">
                 <a:prstTxWarp prst="textNoShape">
                   <a:avLst/>
                 </a:prstTxWarp>
@@ -11948,7 +11966,7 @@
               <a:lstStyle/>
               <a:p>
                 <a:pPr algn="ctr"/>
-                <a:endParaRPr lang="zh-TW" altLang="en-US" sz="900" dirty="0"/>
+                <a:endParaRPr lang="zh-TW" altLang="en-US" sz="2700" dirty="0"/>
               </a:p>
             </p:txBody>
           </p:sp>
@@ -11991,7 +12009,7 @@
               </a:fontRef>
             </p:style>
             <p:txBody>
-              <a:bodyPr rot="0" spcFirstLastPara="0" vertOverflow="overflow" horzOverflow="overflow" vert="horz" wrap="square" lIns="91440" tIns="45719" rIns="91440" bIns="45719" numCol="1" spcCol="0" rtlCol="0" fromWordArt="0" anchor="ctr" anchorCtr="0" forceAA="0" compatLnSpc="1">
+              <a:bodyPr rot="0" spcFirstLastPara="0" vertOverflow="overflow" horzOverflow="overflow" vert="horz" wrap="square" lIns="96775" tIns="48386" rIns="96775" bIns="48386" numCol="1" spcCol="0" rtlCol="0" fromWordArt="0" anchor="ctr" anchorCtr="0" forceAA="0" compatLnSpc="1">
                 <a:prstTxWarp prst="textNoShape">
                   <a:avLst/>
                 </a:prstTxWarp>
@@ -12000,7 +12018,7 @@
               <a:lstStyle/>
               <a:p>
                 <a:pPr algn="ctr"/>
-                <a:endParaRPr lang="zh-TW" altLang="en-US" sz="900"/>
+                <a:endParaRPr lang="zh-TW" altLang="en-US" sz="2700"/>
               </a:p>
             </p:txBody>
           </p:sp>
@@ -12043,7 +12061,7 @@
               </a:fontRef>
             </p:style>
             <p:txBody>
-              <a:bodyPr rot="0" spcFirstLastPara="0" vertOverflow="overflow" horzOverflow="overflow" vert="horz" wrap="square" lIns="91440" tIns="45719" rIns="91440" bIns="45719" numCol="1" spcCol="0" rtlCol="0" fromWordArt="0" anchor="ctr" anchorCtr="0" forceAA="0" compatLnSpc="1">
+              <a:bodyPr rot="0" spcFirstLastPara="0" vertOverflow="overflow" horzOverflow="overflow" vert="horz" wrap="square" lIns="96775" tIns="48386" rIns="96775" bIns="48386" numCol="1" spcCol="0" rtlCol="0" fromWordArt="0" anchor="ctr" anchorCtr="0" forceAA="0" compatLnSpc="1">
                 <a:prstTxWarp prst="textNoShape">
                   <a:avLst/>
                 </a:prstTxWarp>
@@ -12052,7 +12070,7 @@
               <a:lstStyle/>
               <a:p>
                 <a:pPr algn="ctr"/>
-                <a:endParaRPr lang="zh-TW" altLang="en-US" sz="900" dirty="0"/>
+                <a:endParaRPr lang="zh-TW" altLang="en-US" sz="2700" dirty="0"/>
               </a:p>
             </p:txBody>
           </p:sp>
@@ -12095,7 +12113,7 @@
               </a:fontRef>
             </p:style>
             <p:txBody>
-              <a:bodyPr rot="0" spcFirstLastPara="0" vertOverflow="overflow" horzOverflow="overflow" vert="horz" wrap="square" lIns="91440" tIns="45719" rIns="91440" bIns="45719" numCol="1" spcCol="0" rtlCol="0" fromWordArt="0" anchor="ctr" anchorCtr="0" forceAA="0" compatLnSpc="1">
+              <a:bodyPr rot="0" spcFirstLastPara="0" vertOverflow="overflow" horzOverflow="overflow" vert="horz" wrap="square" lIns="96775" tIns="48386" rIns="96775" bIns="48386" numCol="1" spcCol="0" rtlCol="0" fromWordArt="0" anchor="ctr" anchorCtr="0" forceAA="0" compatLnSpc="1">
                 <a:prstTxWarp prst="textNoShape">
                   <a:avLst/>
                 </a:prstTxWarp>
@@ -12104,7 +12122,7 @@
               <a:lstStyle/>
               <a:p>
                 <a:pPr algn="ctr"/>
-                <a:endParaRPr lang="zh-TW" altLang="en-US" sz="900"/>
+                <a:endParaRPr lang="zh-TW" altLang="en-US" sz="2700"/>
               </a:p>
             </p:txBody>
           </p:sp>
@@ -12147,7 +12165,7 @@
               </a:fontRef>
             </p:style>
             <p:txBody>
-              <a:bodyPr rot="0" spcFirstLastPara="0" vertOverflow="overflow" horzOverflow="overflow" vert="horz" wrap="square" lIns="91440" tIns="45719" rIns="91440" bIns="45719" numCol="1" spcCol="0" rtlCol="0" fromWordArt="0" anchor="ctr" anchorCtr="0" forceAA="0" compatLnSpc="1">
+              <a:bodyPr rot="0" spcFirstLastPara="0" vertOverflow="overflow" horzOverflow="overflow" vert="horz" wrap="square" lIns="96775" tIns="48386" rIns="96775" bIns="48386" numCol="1" spcCol="0" rtlCol="0" fromWordArt="0" anchor="ctr" anchorCtr="0" forceAA="0" compatLnSpc="1">
                 <a:prstTxWarp prst="textNoShape">
                   <a:avLst/>
                 </a:prstTxWarp>
@@ -12156,7 +12174,7 @@
               <a:lstStyle/>
               <a:p>
                 <a:pPr algn="ctr"/>
-                <a:endParaRPr lang="zh-TW" altLang="en-US" sz="900"/>
+                <a:endParaRPr lang="zh-TW" altLang="en-US" sz="2700"/>
               </a:p>
             </p:txBody>
           </p:sp>
@@ -12199,7 +12217,7 @@
               </a:fontRef>
             </p:style>
             <p:txBody>
-              <a:bodyPr rot="0" spcFirstLastPara="0" vertOverflow="overflow" horzOverflow="overflow" vert="horz" wrap="square" lIns="91440" tIns="45719" rIns="91440" bIns="45719" numCol="1" spcCol="0" rtlCol="0" fromWordArt="0" anchor="ctr" anchorCtr="0" forceAA="0" compatLnSpc="1">
+              <a:bodyPr rot="0" spcFirstLastPara="0" vertOverflow="overflow" horzOverflow="overflow" vert="horz" wrap="square" lIns="96775" tIns="48386" rIns="96775" bIns="48386" numCol="1" spcCol="0" rtlCol="0" fromWordArt="0" anchor="ctr" anchorCtr="0" forceAA="0" compatLnSpc="1">
                 <a:prstTxWarp prst="textNoShape">
                   <a:avLst/>
                 </a:prstTxWarp>
@@ -12208,7 +12226,7 @@
               <a:lstStyle/>
               <a:p>
                 <a:pPr algn="ctr"/>
-                <a:endParaRPr lang="zh-TW" altLang="en-US" sz="900"/>
+                <a:endParaRPr lang="zh-TW" altLang="en-US" sz="2700"/>
               </a:p>
             </p:txBody>
           </p:sp>
@@ -12227,8 +12245,8 @@
           </p:nvGrpSpPr>
           <p:grpSpPr>
             <a:xfrm>
-              <a:off x="4100993" y="3643982"/>
-              <a:ext cx="2090057" cy="2090057"/>
+              <a:off x="4663050" y="3874077"/>
+              <a:ext cx="1825190" cy="1825188"/>
               <a:chOff x="-756975" y="5254023"/>
               <a:chExt cx="2090057" cy="2090057"/>
             </a:xfrm>
@@ -12275,7 +12293,7 @@
               </a:fontRef>
             </p:style>
             <p:txBody>
-              <a:bodyPr rot="0" spcFirstLastPara="0" vertOverflow="overflow" horzOverflow="overflow" vert="horz" wrap="square" lIns="91440" tIns="45719" rIns="91440" bIns="45719" numCol="1" spcCol="0" rtlCol="0" fromWordArt="0" anchor="ctr" anchorCtr="0" forceAA="0" compatLnSpc="1">
+              <a:bodyPr rot="0" spcFirstLastPara="0" vertOverflow="overflow" horzOverflow="overflow" vert="horz" wrap="square" lIns="96775" tIns="48386" rIns="96775" bIns="48386" numCol="1" spcCol="0" rtlCol="0" fromWordArt="0" anchor="ctr" anchorCtr="0" forceAA="0" compatLnSpc="1">
                 <a:prstTxWarp prst="textNoShape">
                   <a:avLst/>
                 </a:prstTxWarp>
@@ -12284,7 +12302,7 @@
               <a:lstStyle/>
               <a:p>
                 <a:pPr algn="ctr"/>
-                <a:endParaRPr lang="zh-TW" altLang="en-US" sz="900" dirty="0"/>
+                <a:endParaRPr lang="zh-TW" altLang="en-US" sz="2700" dirty="0"/>
               </a:p>
             </p:txBody>
           </p:sp>
@@ -12327,7 +12345,7 @@
               </a:fontRef>
             </p:style>
             <p:txBody>
-              <a:bodyPr rot="0" spcFirstLastPara="0" vertOverflow="overflow" horzOverflow="overflow" vert="horz" wrap="square" lIns="91440" tIns="45719" rIns="91440" bIns="45719" numCol="1" spcCol="0" rtlCol="0" fromWordArt="0" anchor="ctr" anchorCtr="0" forceAA="0" compatLnSpc="1">
+              <a:bodyPr rot="0" spcFirstLastPara="0" vertOverflow="overflow" horzOverflow="overflow" vert="horz" wrap="square" lIns="96775" tIns="48386" rIns="96775" bIns="48386" numCol="1" spcCol="0" rtlCol="0" fromWordArt="0" anchor="ctr" anchorCtr="0" forceAA="0" compatLnSpc="1">
                 <a:prstTxWarp prst="textNoShape">
                   <a:avLst/>
                 </a:prstTxWarp>
@@ -12336,7 +12354,7 @@
               <a:lstStyle/>
               <a:p>
                 <a:pPr algn="ctr"/>
-                <a:endParaRPr lang="zh-TW" altLang="en-US" sz="900" dirty="0"/>
+                <a:endParaRPr lang="zh-TW" altLang="en-US" sz="2700" dirty="0"/>
               </a:p>
             </p:txBody>
           </p:sp>
@@ -12379,7 +12397,7 @@
               </a:fontRef>
             </p:style>
             <p:txBody>
-              <a:bodyPr rot="0" spcFirstLastPara="0" vertOverflow="overflow" horzOverflow="overflow" vert="horz" wrap="square" lIns="91440" tIns="45719" rIns="91440" bIns="45719" numCol="1" spcCol="0" rtlCol="0" fromWordArt="0" anchor="ctr" anchorCtr="0" forceAA="0" compatLnSpc="1">
+              <a:bodyPr rot="0" spcFirstLastPara="0" vertOverflow="overflow" horzOverflow="overflow" vert="horz" wrap="square" lIns="96775" tIns="48386" rIns="96775" bIns="48386" numCol="1" spcCol="0" rtlCol="0" fromWordArt="0" anchor="ctr" anchorCtr="0" forceAA="0" compatLnSpc="1">
                 <a:prstTxWarp prst="textNoShape">
                   <a:avLst/>
                 </a:prstTxWarp>
@@ -12388,7 +12406,7 @@
               <a:lstStyle/>
               <a:p>
                 <a:pPr algn="ctr"/>
-                <a:endParaRPr lang="zh-TW" altLang="en-US" sz="900"/>
+                <a:endParaRPr lang="zh-TW" altLang="en-US" sz="2700"/>
               </a:p>
             </p:txBody>
           </p:sp>
@@ -12431,7 +12449,7 @@
               </a:fontRef>
             </p:style>
             <p:txBody>
-              <a:bodyPr rot="0" spcFirstLastPara="0" vertOverflow="overflow" horzOverflow="overflow" vert="horz" wrap="square" lIns="91440" tIns="45719" rIns="91440" bIns="45719" numCol="1" spcCol="0" rtlCol="0" fromWordArt="0" anchor="ctr" anchorCtr="0" forceAA="0" compatLnSpc="1">
+              <a:bodyPr rot="0" spcFirstLastPara="0" vertOverflow="overflow" horzOverflow="overflow" vert="horz" wrap="square" lIns="96775" tIns="48386" rIns="96775" bIns="48386" numCol="1" spcCol="0" rtlCol="0" fromWordArt="0" anchor="ctr" anchorCtr="0" forceAA="0" compatLnSpc="1">
                 <a:prstTxWarp prst="textNoShape">
                   <a:avLst/>
                 </a:prstTxWarp>
@@ -12440,7 +12458,7 @@
               <a:lstStyle/>
               <a:p>
                 <a:pPr algn="ctr"/>
-                <a:endParaRPr lang="zh-TW" altLang="en-US" sz="900"/>
+                <a:endParaRPr lang="zh-TW" altLang="en-US" sz="2700"/>
               </a:p>
             </p:txBody>
           </p:sp>
@@ -12483,7 +12501,7 @@
               </a:fontRef>
             </p:style>
             <p:txBody>
-              <a:bodyPr rot="0" spcFirstLastPara="0" vertOverflow="overflow" horzOverflow="overflow" vert="horz" wrap="square" lIns="91440" tIns="45719" rIns="91440" bIns="45719" numCol="1" spcCol="0" rtlCol="0" fromWordArt="0" anchor="ctr" anchorCtr="0" forceAA="0" compatLnSpc="1">
+              <a:bodyPr rot="0" spcFirstLastPara="0" vertOverflow="overflow" horzOverflow="overflow" vert="horz" wrap="square" lIns="96775" tIns="48386" rIns="96775" bIns="48386" numCol="1" spcCol="0" rtlCol="0" fromWordArt="0" anchor="ctr" anchorCtr="0" forceAA="0" compatLnSpc="1">
                 <a:prstTxWarp prst="textNoShape">
                   <a:avLst/>
                 </a:prstTxWarp>
@@ -12492,7 +12510,7 @@
               <a:lstStyle/>
               <a:p>
                 <a:pPr algn="ctr"/>
-                <a:endParaRPr lang="zh-TW" altLang="en-US" sz="900"/>
+                <a:endParaRPr lang="zh-TW" altLang="en-US" sz="2700"/>
               </a:p>
             </p:txBody>
           </p:sp>
@@ -12535,7 +12553,7 @@
               </a:fontRef>
             </p:style>
             <p:txBody>
-              <a:bodyPr rot="0" spcFirstLastPara="0" vertOverflow="overflow" horzOverflow="overflow" vert="horz" wrap="square" lIns="91440" tIns="45719" rIns="91440" bIns="45719" numCol="1" spcCol="0" rtlCol="0" fromWordArt="0" anchor="ctr" anchorCtr="0" forceAA="0" compatLnSpc="1">
+              <a:bodyPr rot="0" spcFirstLastPara="0" vertOverflow="overflow" horzOverflow="overflow" vert="horz" wrap="square" lIns="96775" tIns="48386" rIns="96775" bIns="48386" numCol="1" spcCol="0" rtlCol="0" fromWordArt="0" anchor="ctr" anchorCtr="0" forceAA="0" compatLnSpc="1">
                 <a:prstTxWarp prst="textNoShape">
                   <a:avLst/>
                 </a:prstTxWarp>
@@ -12544,7 +12562,7 @@
               <a:lstStyle/>
               <a:p>
                 <a:pPr algn="ctr"/>
-                <a:endParaRPr lang="zh-TW" altLang="en-US" sz="900" dirty="0"/>
+                <a:endParaRPr lang="zh-TW" altLang="en-US" sz="2700" dirty="0"/>
               </a:p>
             </p:txBody>
           </p:sp>
@@ -12587,7 +12605,7 @@
               </a:fontRef>
             </p:style>
             <p:txBody>
-              <a:bodyPr rot="0" spcFirstLastPara="0" vertOverflow="overflow" horzOverflow="overflow" vert="horz" wrap="square" lIns="91440" tIns="45719" rIns="91440" bIns="45719" numCol="1" spcCol="0" rtlCol="0" fromWordArt="0" anchor="ctr" anchorCtr="0" forceAA="0" compatLnSpc="1">
+              <a:bodyPr rot="0" spcFirstLastPara="0" vertOverflow="overflow" horzOverflow="overflow" vert="horz" wrap="square" lIns="96775" tIns="48386" rIns="96775" bIns="48386" numCol="1" spcCol="0" rtlCol="0" fromWordArt="0" anchor="ctr" anchorCtr="0" forceAA="0" compatLnSpc="1">
                 <a:prstTxWarp prst="textNoShape">
                   <a:avLst/>
                 </a:prstTxWarp>
@@ -12596,7 +12614,7 @@
               <a:lstStyle/>
               <a:p>
                 <a:pPr algn="ctr"/>
-                <a:endParaRPr lang="zh-TW" altLang="en-US" sz="900"/>
+                <a:endParaRPr lang="zh-TW" altLang="en-US" sz="2700"/>
               </a:p>
             </p:txBody>
           </p:sp>
@@ -12639,7 +12657,7 @@
               </a:fontRef>
             </p:style>
             <p:txBody>
-              <a:bodyPr rot="0" spcFirstLastPara="0" vertOverflow="overflow" horzOverflow="overflow" vert="horz" wrap="square" lIns="91440" tIns="45719" rIns="91440" bIns="45719" numCol="1" spcCol="0" rtlCol="0" fromWordArt="0" anchor="ctr" anchorCtr="0" forceAA="0" compatLnSpc="1">
+              <a:bodyPr rot="0" spcFirstLastPara="0" vertOverflow="overflow" horzOverflow="overflow" vert="horz" wrap="square" lIns="96775" tIns="48386" rIns="96775" bIns="48386" numCol="1" spcCol="0" rtlCol="0" fromWordArt="0" anchor="ctr" anchorCtr="0" forceAA="0" compatLnSpc="1">
                 <a:prstTxWarp prst="textNoShape">
                   <a:avLst/>
                 </a:prstTxWarp>
@@ -12648,7 +12666,7 @@
               <a:lstStyle/>
               <a:p>
                 <a:pPr algn="ctr"/>
-                <a:endParaRPr lang="zh-TW" altLang="en-US" sz="900"/>
+                <a:endParaRPr lang="zh-TW" altLang="en-US" sz="2700"/>
               </a:p>
             </p:txBody>
           </p:sp>
@@ -12691,7 +12709,7 @@
               </a:fontRef>
             </p:style>
             <p:txBody>
-              <a:bodyPr rot="0" spcFirstLastPara="0" vertOverflow="overflow" horzOverflow="overflow" vert="horz" wrap="square" lIns="91440" tIns="45719" rIns="91440" bIns="45719" numCol="1" spcCol="0" rtlCol="0" fromWordArt="0" anchor="ctr" anchorCtr="0" forceAA="0" compatLnSpc="1">
+              <a:bodyPr rot="0" spcFirstLastPara="0" vertOverflow="overflow" horzOverflow="overflow" vert="horz" wrap="square" lIns="96775" tIns="48386" rIns="96775" bIns="48386" numCol="1" spcCol="0" rtlCol="0" fromWordArt="0" anchor="ctr" anchorCtr="0" forceAA="0" compatLnSpc="1">
                 <a:prstTxWarp prst="textNoShape">
                   <a:avLst/>
                 </a:prstTxWarp>
@@ -12700,7 +12718,7 @@
               <a:lstStyle/>
               <a:p>
                 <a:pPr algn="ctr"/>
-                <a:endParaRPr lang="zh-TW" altLang="en-US" sz="900"/>
+                <a:endParaRPr lang="zh-TW" altLang="en-US" sz="2700"/>
               </a:p>
             </p:txBody>
           </p:sp>
@@ -12721,8 +12739,8 @@
               </p:nvSpPr>
               <p:spPr>
                 <a:xfrm>
-                  <a:off x="6866145" y="3232947"/>
-                  <a:ext cx="1669442" cy="519661"/>
+                  <a:off x="6673640" y="3405310"/>
+                  <a:ext cx="1766845" cy="507831"/>
                 </a:xfrm>
                 <a:prstGeom prst="rect">
                   <a:avLst/>
@@ -12743,19 +12761,19 @@
                       </m:oMathParaPr>
                       <m:oMath xmlns:m="http://schemas.openxmlformats.org/officeDocument/2006/math">
                         <m:r>
-                          <a:rPr lang="en-US" altLang="zh-TW" sz="2800" i="1">
+                          <a:rPr lang="en-US" altLang="zh-TW" sz="2700" i="1">
                             <a:latin typeface="Cambria Math" panose="02040503050406030204" pitchFamily="18" charset="0"/>
                           </a:rPr>
                           <m:t>𝛼</m:t>
                         </m:r>
                         <m:r>
-                          <a:rPr lang="en-US" altLang="zh-TW" sz="2800" i="1">
+                          <a:rPr lang="en-US" altLang="zh-TW" sz="2700" i="1">
                             <a:latin typeface="Cambria Math" panose="02040503050406030204" pitchFamily="18" charset="0"/>
                           </a:rPr>
                           <m:t>=</m:t>
                         </m:r>
                         <m:r>
-                          <a:rPr lang="en-US" altLang="zh-TW" sz="2800" i="1">
+                          <a:rPr lang="en-US" altLang="zh-TW" sz="2700" i="1">
                             <a:latin typeface="Cambria Math" panose="02040503050406030204" pitchFamily="18" charset="0"/>
                           </a:rPr>
                           <m:t>𝜋</m:t>
@@ -12763,7 +12781,7 @@
                       </m:oMath>
                     </m:oMathPara>
                   </a14:m>
-                  <a:endParaRPr lang="zh-TW" altLang="en-US" sz="2800" dirty="0"/>
+                  <a:endParaRPr lang="zh-TW" altLang="en-US" sz="2700" dirty="0"/>
                 </a:p>
               </p:txBody>
             </p:sp>
@@ -12785,8 +12803,8 @@
               </p:nvSpPr>
               <p:spPr>
                 <a:xfrm>
-                  <a:off x="6866145" y="3232947"/>
-                  <a:ext cx="1669442" cy="519661"/>
+                  <a:off x="6673640" y="3405310"/>
+                  <a:ext cx="1766845" cy="507831"/>
                 </a:xfrm>
                 <a:prstGeom prst="rect">
                   <a:avLst/>
@@ -12827,8 +12845,8 @@
           </p:nvSpPr>
           <p:spPr>
             <a:xfrm>
-              <a:off x="129502" y="4037032"/>
-              <a:ext cx="3628606" cy="519661"/>
+              <a:off x="745409" y="4096652"/>
+              <a:ext cx="3840316" cy="507831"/>
             </a:xfrm>
             <a:prstGeom prst="rect">
               <a:avLst/>
@@ -12843,27 +12861,27 @@
             <a:p>
               <a:pPr algn="ctr"/>
               <a:r>
-                <a:rPr lang="en-US" altLang="zh-TW" sz="2800" dirty="0">
+                <a:rPr lang="en-US" altLang="zh-TW" sz="2700" dirty="0">
                   <a:latin typeface="Times New Roman" panose="02020603050405020304" pitchFamily="18" charset="0"/>
                   <a:cs typeface="Times New Roman" panose="02020603050405020304" pitchFamily="18" charset="0"/>
                 </a:rPr>
                 <a:t>Polarization</a:t>
               </a:r>
               <a:r>
-                <a:rPr lang="zh-TW" altLang="en-US" sz="2800" dirty="0">
+                <a:rPr lang="zh-TW" altLang="en-US" sz="2700" dirty="0">
                   <a:latin typeface="Times New Roman" panose="02020603050405020304" pitchFamily="18" charset="0"/>
                   <a:cs typeface="Times New Roman" panose="02020603050405020304" pitchFamily="18" charset="0"/>
                 </a:rPr>
                 <a:t> </a:t>
               </a:r>
               <a:r>
-                <a:rPr lang="en-US" altLang="zh-TW" sz="2800" dirty="0">
+                <a:rPr lang="en-US" altLang="zh-TW" sz="2700" dirty="0">
                   <a:latin typeface="Times New Roman" panose="02020603050405020304" pitchFamily="18" charset="0"/>
                   <a:cs typeface="Times New Roman" panose="02020603050405020304" pitchFamily="18" charset="0"/>
                 </a:rPr>
                 <a:t>of </a:t>
               </a:r>
-              <a:endParaRPr lang="zh-TW" altLang="en-US" sz="2800" dirty="0">
+              <a:endParaRPr lang="zh-TW" altLang="en-US" sz="2700" dirty="0">
                 <a:latin typeface="Times New Roman" panose="02020603050405020304" pitchFamily="18" charset="0"/>
                 <a:cs typeface="Times New Roman" panose="02020603050405020304" pitchFamily="18" charset="0"/>
               </a:endParaRPr>
@@ -12884,8 +12902,8 @@
           </p:nvSpPr>
           <p:spPr>
             <a:xfrm>
-              <a:off x="129502" y="1596915"/>
-              <a:ext cx="3628606" cy="519661"/>
+              <a:off x="745409" y="2123767"/>
+              <a:ext cx="3840316" cy="507831"/>
             </a:xfrm>
             <a:prstGeom prst="rect">
               <a:avLst/>
@@ -12900,27 +12918,27 @@
             <a:p>
               <a:pPr algn="ctr"/>
               <a:r>
-                <a:rPr lang="en-US" altLang="zh-TW" sz="2800" dirty="0">
+                <a:rPr lang="en-US" altLang="zh-TW" sz="2700" dirty="0">
                   <a:latin typeface="Times New Roman" panose="02020603050405020304" pitchFamily="18" charset="0"/>
                   <a:cs typeface="Times New Roman" panose="02020603050405020304" pitchFamily="18" charset="0"/>
                 </a:rPr>
                 <a:t>Transition dipole</a:t>
               </a:r>
               <a:r>
-                <a:rPr lang="zh-TW" altLang="en-US" sz="2800" dirty="0">
+                <a:rPr lang="zh-TW" altLang="en-US" sz="2700" dirty="0">
                   <a:latin typeface="Times New Roman" panose="02020603050405020304" pitchFamily="18" charset="0"/>
                   <a:cs typeface="Times New Roman" panose="02020603050405020304" pitchFamily="18" charset="0"/>
                 </a:rPr>
                 <a:t> </a:t>
               </a:r>
               <a:r>
-                <a:rPr lang="en-US" altLang="zh-TW" sz="2800" dirty="0">
+                <a:rPr lang="en-US" altLang="zh-TW" sz="2700" dirty="0">
                   <a:latin typeface="Times New Roman" panose="02020603050405020304" pitchFamily="18" charset="0"/>
                   <a:cs typeface="Times New Roman" panose="02020603050405020304" pitchFamily="18" charset="0"/>
                 </a:rPr>
                 <a:t>(BXs)</a:t>
               </a:r>
-              <a:endParaRPr lang="zh-TW" altLang="en-US" sz="2800" dirty="0">
+              <a:endParaRPr lang="zh-TW" altLang="en-US" sz="2700" dirty="0">
                 <a:latin typeface="Times New Roman" panose="02020603050405020304" pitchFamily="18" charset="0"/>
                 <a:cs typeface="Times New Roman" panose="02020603050405020304" pitchFamily="18" charset="0"/>
               </a:endParaRPr>
@@ -12941,10 +12959,10 @@
           </p:nvGrpSpPr>
           <p:grpSpPr>
             <a:xfrm>
-              <a:off x="5015800" y="4218231"/>
-              <a:ext cx="609103" cy="638837"/>
+              <a:off x="5437825" y="4288423"/>
+              <a:ext cx="644641" cy="689099"/>
               <a:chOff x="6583394" y="1501875"/>
-              <a:chExt cx="1650681" cy="1731258"/>
+              <a:chExt cx="1650681" cy="1764520"/>
             </a:xfrm>
           </p:grpSpPr>
           <p:grpSp>
@@ -13020,7 +13038,7 @@
                 <a:lstStyle/>
                 <a:p>
                   <a:pPr algn="ctr"/>
-                  <a:endParaRPr lang="zh-TW" altLang="en-US" sz="1142">
+                  <a:endParaRPr lang="zh-TW" altLang="en-US" sz="2000">
                     <a:solidFill>
                       <a:schemeClr val="bg1"/>
                     </a:solidFill>
@@ -13081,7 +13099,7 @@
                 <a:lstStyle/>
                 <a:p>
                   <a:pPr algn="ctr"/>
-                  <a:endParaRPr lang="zh-TW" altLang="en-US" sz="1142" dirty="0">
+                  <a:endParaRPr lang="zh-TW" altLang="en-US" sz="2000" dirty="0">
                     <a:solidFill>
                       <a:schemeClr val="bg1"/>
                     </a:solidFill>
@@ -13107,7 +13125,7 @@
                 <p:spPr>
                   <a:xfrm>
                     <a:off x="6583394" y="1501875"/>
-                    <a:ext cx="416137" cy="1060323"/>
+                    <a:ext cx="416137" cy="1086427"/>
                   </a:xfrm>
                   <a:prstGeom prst="rect">
                     <a:avLst/>
@@ -13130,7 +13148,7 @@
                           <m:sSub>
                             <m:sSubPr>
                               <m:ctrlPr>
-                                <a:rPr lang="en-US" altLang="zh-TW" i="1">
+                                <a:rPr lang="en-US" altLang="zh-TW" sz="2000" i="1">
                                   <a:solidFill>
                                     <a:schemeClr val="bg1"/>
                                   </a:solidFill>
@@ -13140,7 +13158,7 @@
                             </m:sSubPr>
                             <m:e>
                               <m:r>
-                                <a:rPr lang="en-US" altLang="zh-TW" i="1">
+                                <a:rPr lang="en-US" altLang="zh-TW" sz="2000" i="1">
                                   <a:solidFill>
                                     <a:schemeClr val="bg1"/>
                                   </a:solidFill>
@@ -13151,7 +13169,7 @@
                             </m:e>
                             <m:sub>
                               <m:r>
-                                <a:rPr lang="en-US" altLang="zh-TW" i="1">
+                                <a:rPr lang="en-US" altLang="zh-TW" sz="2000" i="1">
                                   <a:solidFill>
                                     <a:schemeClr val="bg1"/>
                                   </a:solidFill>
@@ -13164,7 +13182,7 @@
                         </m:oMath>
                       </m:oMathPara>
                     </a14:m>
-                    <a:endParaRPr lang="en-US" altLang="zh-TW" dirty="0">
+                    <a:endParaRPr lang="en-US" altLang="zh-TW" sz="2000" dirty="0">
                       <a:solidFill>
                         <a:schemeClr val="bg1"/>
                       </a:solidFill>
@@ -13191,7 +13209,7 @@
                 <p:spPr>
                   <a:xfrm>
                     <a:off x="6583394" y="1501875"/>
-                    <a:ext cx="416137" cy="1060323"/>
+                    <a:ext cx="416137" cy="1086427"/>
                   </a:xfrm>
                   <a:prstGeom prst="rect">
                     <a:avLst/>
@@ -13199,7 +13217,7 @@
                   <a:blipFill>
                     <a:blip r:embed="rId3"/>
                     <a:stretch>
-                      <a:fillRect l="-20000" r="-160000" b="-4688"/>
+                      <a:fillRect l="-14815" r="-166667" b="-4286"/>
                     </a:stretch>
                   </a:blipFill>
                 </p:spPr>
@@ -13234,8 +13252,8 @@
                 </p:nvSpPr>
                 <p:spPr>
                   <a:xfrm>
-                    <a:off x="7165988" y="2241867"/>
-                    <a:ext cx="1068087" cy="991266"/>
+                    <a:off x="7165989" y="2241866"/>
+                    <a:ext cx="1068086" cy="1024529"/>
                   </a:xfrm>
                   <a:prstGeom prst="rect">
                     <a:avLst/>
@@ -13258,7 +13276,7 @@
                           <m:sSub>
                             <m:sSubPr>
                               <m:ctrlPr>
-                                <a:rPr lang="en-US" altLang="zh-TW" i="1">
+                                <a:rPr lang="en-US" altLang="zh-TW" sz="2000" i="1">
                                   <a:solidFill>
                                     <a:schemeClr val="bg1"/>
                                   </a:solidFill>
@@ -13268,7 +13286,7 @@
                             </m:sSubPr>
                             <m:e>
                               <m:r>
-                                <a:rPr lang="en-US" altLang="zh-TW" i="1">
+                                <a:rPr lang="en-US" altLang="zh-TW" sz="2000" i="1">
                                   <a:solidFill>
                                     <a:schemeClr val="bg1"/>
                                   </a:solidFill>
@@ -13279,7 +13297,7 @@
                             </m:e>
                             <m:sub>
                               <m:r>
-                                <a:rPr lang="en-US" altLang="zh-TW" i="1">
+                                <a:rPr lang="en-US" altLang="zh-TW" sz="2000" i="1">
                                   <a:solidFill>
                                     <a:schemeClr val="bg1"/>
                                   </a:solidFill>
@@ -13292,7 +13310,7 @@
                         </m:oMath>
                       </m:oMathPara>
                     </a14:m>
-                    <a:endParaRPr lang="en-US" altLang="zh-TW" dirty="0">
+                    <a:endParaRPr lang="en-US" altLang="zh-TW" sz="2000" dirty="0">
                       <a:solidFill>
                         <a:schemeClr val="bg1"/>
                       </a:solidFill>
@@ -13318,8 +13336,8 @@
                 </p:nvSpPr>
                 <p:spPr>
                   <a:xfrm>
-                    <a:off x="7165988" y="2241867"/>
-                    <a:ext cx="1068087" cy="991266"/>
+                    <a:off x="7165989" y="2241866"/>
+                    <a:ext cx="1068086" cy="1024529"/>
                   </a:xfrm>
                   <a:prstGeom prst="rect">
                     <a:avLst/>
@@ -13327,7 +13345,7 @@
                   <a:blipFill>
                     <a:blip r:embed="rId4"/>
                     <a:stretch>
-                      <a:fillRect l="-3125" b="-10000"/>
+                      <a:fillRect l="-4412" b="-9091"/>
                     </a:stretch>
                   </a:blipFill>
                 </p:spPr>
@@ -13363,8 +13381,8 @@
               </p:nvSpPr>
               <p:spPr>
                 <a:xfrm>
-                  <a:off x="4147987" y="3232947"/>
-                  <a:ext cx="1953311" cy="519661"/>
+                  <a:off x="4587114" y="3405310"/>
+                  <a:ext cx="2067276" cy="507831"/>
                 </a:xfrm>
                 <a:prstGeom prst="rect">
                   <a:avLst/>
@@ -13385,13 +13403,13 @@
                       </m:oMathParaPr>
                       <m:oMath xmlns:m="http://schemas.openxmlformats.org/officeDocument/2006/math">
                         <m:r>
-                          <a:rPr lang="en-US" altLang="zh-TW" sz="2800" i="1">
+                          <a:rPr lang="en-US" altLang="zh-TW" sz="2700" i="1">
                             <a:latin typeface="Cambria Math" panose="02040503050406030204" pitchFamily="18" charset="0"/>
                           </a:rPr>
                           <m:t>𝛼</m:t>
                         </m:r>
                         <m:r>
-                          <a:rPr lang="en-US" altLang="zh-TW" sz="2800" i="1">
+                          <a:rPr lang="en-US" altLang="zh-TW" sz="2700" i="1">
                             <a:latin typeface="Cambria Math" panose="02040503050406030204" pitchFamily="18" charset="0"/>
                           </a:rPr>
                           <m:t>=0</m:t>
@@ -13399,7 +13417,7 @@
                       </m:oMath>
                     </m:oMathPara>
                   </a14:m>
-                  <a:endParaRPr lang="zh-TW" altLang="en-US" sz="2800" dirty="0"/>
+                  <a:endParaRPr lang="zh-TW" altLang="en-US" sz="2700" dirty="0"/>
                 </a:p>
               </p:txBody>
             </p:sp>
@@ -13421,8 +13439,8 @@
               </p:nvSpPr>
               <p:spPr>
                 <a:xfrm>
-                  <a:off x="4147987" y="3232947"/>
-                  <a:ext cx="1953311" cy="519661"/>
+                  <a:off x="4587114" y="3405310"/>
+                  <a:ext cx="2067276" cy="507831"/>
                 </a:xfrm>
                 <a:prstGeom prst="rect">
                   <a:avLst/>
@@ -13481,8 +13499,8 @@
           </p:blipFill>
           <p:spPr>
             <a:xfrm>
-              <a:off x="4618801" y="248081"/>
-              <a:ext cx="1196285" cy="600664"/>
+              <a:off x="5131151" y="1095541"/>
+              <a:ext cx="885827" cy="444781"/>
             </a:xfrm>
             <a:prstGeom prst="rect">
               <a:avLst/>
@@ -13521,8 +13539,8 @@
           </p:blipFill>
           <p:spPr>
             <a:xfrm>
-              <a:off x="7069039" y="273279"/>
-              <a:ext cx="1196282" cy="575465"/>
+              <a:off x="7047015" y="1115876"/>
+              <a:ext cx="885825" cy="426121"/>
             </a:xfrm>
             <a:prstGeom prst="rect">
               <a:avLst/>
@@ -13543,8 +13561,8 @@
           </p:nvGrpSpPr>
           <p:grpSpPr>
             <a:xfrm>
-              <a:off x="4100993" y="864440"/>
-              <a:ext cx="2090057" cy="2090057"/>
+              <a:off x="4663050" y="1541963"/>
+              <a:ext cx="1825190" cy="1825188"/>
               <a:chOff x="5094694" y="9823325"/>
               <a:chExt cx="2090057" cy="2090057"/>
             </a:xfrm>
@@ -13591,7 +13609,7 @@
               </a:fontRef>
             </p:style>
             <p:txBody>
-              <a:bodyPr rot="0" spcFirstLastPara="0" vertOverflow="overflow" horzOverflow="overflow" vert="horz" wrap="square" lIns="91440" tIns="45719" rIns="91440" bIns="45719" numCol="1" spcCol="0" rtlCol="0" fromWordArt="0" anchor="ctr" anchorCtr="0" forceAA="0" compatLnSpc="1">
+              <a:bodyPr rot="0" spcFirstLastPara="0" vertOverflow="overflow" horzOverflow="overflow" vert="horz" wrap="square" lIns="96775" tIns="48386" rIns="96775" bIns="48386" numCol="1" spcCol="0" rtlCol="0" fromWordArt="0" anchor="ctr" anchorCtr="0" forceAA="0" compatLnSpc="1">
                 <a:prstTxWarp prst="textNoShape">
                   <a:avLst/>
                 </a:prstTxWarp>
@@ -13600,7 +13618,7 @@
               <a:lstStyle/>
               <a:p>
                 <a:pPr algn="ctr"/>
-                <a:endParaRPr lang="zh-TW" altLang="en-US" sz="900" dirty="0"/>
+                <a:endParaRPr lang="zh-TW" altLang="en-US" sz="2700" dirty="0"/>
               </a:p>
             </p:txBody>
           </p:sp>
@@ -13646,7 +13664,7 @@
               </a:fontRef>
             </p:style>
             <p:txBody>
-              <a:bodyPr rot="0" spcFirstLastPara="0" vertOverflow="overflow" horzOverflow="overflow" vert="horz" wrap="square" lIns="91440" tIns="45719" rIns="91440" bIns="45719" numCol="1" spcCol="0" rtlCol="0" fromWordArt="0" anchor="ctr" anchorCtr="0" forceAA="0" compatLnSpc="1">
+              <a:bodyPr rot="0" spcFirstLastPara="0" vertOverflow="overflow" horzOverflow="overflow" vert="horz" wrap="square" lIns="96775" tIns="48386" rIns="96775" bIns="48386" numCol="1" spcCol="0" rtlCol="0" fromWordArt="0" anchor="ctr" anchorCtr="0" forceAA="0" compatLnSpc="1">
                 <a:prstTxWarp prst="textNoShape">
                   <a:avLst/>
                 </a:prstTxWarp>
@@ -13655,7 +13673,7 @@
               <a:lstStyle/>
               <a:p>
                 <a:pPr algn="ctr"/>
-                <a:endParaRPr lang="zh-TW" altLang="en-US" sz="900"/>
+                <a:endParaRPr lang="zh-TW" altLang="en-US" sz="2700"/>
               </a:p>
             </p:txBody>
           </p:sp>
@@ -13701,7 +13719,7 @@
               </a:fontRef>
             </p:style>
             <p:txBody>
-              <a:bodyPr rot="0" spcFirstLastPara="0" vertOverflow="overflow" horzOverflow="overflow" vert="horz" wrap="square" lIns="91440" tIns="45719" rIns="91440" bIns="45719" numCol="1" spcCol="0" rtlCol="0" fromWordArt="0" anchor="ctr" anchorCtr="0" forceAA="0" compatLnSpc="1">
+              <a:bodyPr rot="0" spcFirstLastPara="0" vertOverflow="overflow" horzOverflow="overflow" vert="horz" wrap="square" lIns="96775" tIns="48386" rIns="96775" bIns="48386" numCol="1" spcCol="0" rtlCol="0" fromWordArt="0" anchor="ctr" anchorCtr="0" forceAA="0" compatLnSpc="1">
                 <a:prstTxWarp prst="textNoShape">
                   <a:avLst/>
                 </a:prstTxWarp>
@@ -13710,7 +13728,7 @@
               <a:lstStyle/>
               <a:p>
                 <a:pPr algn="ctr"/>
-                <a:endParaRPr lang="zh-TW" altLang="en-US" sz="900"/>
+                <a:endParaRPr lang="zh-TW" altLang="en-US" sz="2700"/>
               </a:p>
             </p:txBody>
           </p:sp>
@@ -13756,7 +13774,7 @@
               </a:fontRef>
             </p:style>
             <p:txBody>
-              <a:bodyPr rot="0" spcFirstLastPara="0" vertOverflow="overflow" horzOverflow="overflow" vert="horz" wrap="square" lIns="91440" tIns="45719" rIns="91440" bIns="45719" numCol="1" spcCol="0" rtlCol="0" fromWordArt="0" anchor="ctr" anchorCtr="0" forceAA="0" compatLnSpc="1">
+              <a:bodyPr rot="0" spcFirstLastPara="0" vertOverflow="overflow" horzOverflow="overflow" vert="horz" wrap="square" lIns="96775" tIns="48386" rIns="96775" bIns="48386" numCol="1" spcCol="0" rtlCol="0" fromWordArt="0" anchor="ctr" anchorCtr="0" forceAA="0" compatLnSpc="1">
                 <a:prstTxWarp prst="textNoShape">
                   <a:avLst/>
                 </a:prstTxWarp>
@@ -13765,7 +13783,7 @@
               <a:lstStyle/>
               <a:p>
                 <a:pPr algn="ctr"/>
-                <a:endParaRPr lang="zh-TW" altLang="en-US" sz="900"/>
+                <a:endParaRPr lang="zh-TW" altLang="en-US" sz="2700"/>
               </a:p>
             </p:txBody>
           </p:sp>
@@ -13811,7 +13829,7 @@
               </a:fontRef>
             </p:style>
             <p:txBody>
-              <a:bodyPr rot="0" spcFirstLastPara="0" vertOverflow="overflow" horzOverflow="overflow" vert="horz" wrap="square" lIns="91440" tIns="45719" rIns="91440" bIns="45719" numCol="1" spcCol="0" rtlCol="0" fromWordArt="0" anchor="ctr" anchorCtr="0" forceAA="0" compatLnSpc="1">
+              <a:bodyPr rot="0" spcFirstLastPara="0" vertOverflow="overflow" horzOverflow="overflow" vert="horz" wrap="square" lIns="96775" tIns="48386" rIns="96775" bIns="48386" numCol="1" spcCol="0" rtlCol="0" fromWordArt="0" anchor="ctr" anchorCtr="0" forceAA="0" compatLnSpc="1">
                 <a:prstTxWarp prst="textNoShape">
                   <a:avLst/>
                 </a:prstTxWarp>
@@ -13820,7 +13838,7 @@
               <a:lstStyle/>
               <a:p>
                 <a:pPr algn="ctr"/>
-                <a:endParaRPr lang="zh-TW" altLang="en-US" sz="900"/>
+                <a:endParaRPr lang="zh-TW" altLang="en-US" sz="2700"/>
               </a:p>
             </p:txBody>
           </p:sp>
@@ -13866,7 +13884,7 @@
               </a:fontRef>
             </p:style>
             <p:txBody>
-              <a:bodyPr rot="0" spcFirstLastPara="0" vertOverflow="overflow" horzOverflow="overflow" vert="horz" wrap="square" lIns="91440" tIns="45719" rIns="91440" bIns="45719" numCol="1" spcCol="0" rtlCol="0" fromWordArt="0" anchor="ctr" anchorCtr="0" forceAA="0" compatLnSpc="1">
+              <a:bodyPr rot="0" spcFirstLastPara="0" vertOverflow="overflow" horzOverflow="overflow" vert="horz" wrap="square" lIns="96775" tIns="48386" rIns="96775" bIns="48386" numCol="1" spcCol="0" rtlCol="0" fromWordArt="0" anchor="ctr" anchorCtr="0" forceAA="0" compatLnSpc="1">
                 <a:prstTxWarp prst="textNoShape">
                   <a:avLst/>
                 </a:prstTxWarp>
@@ -13875,7 +13893,7 @@
               <a:lstStyle/>
               <a:p>
                 <a:pPr algn="ctr"/>
-                <a:endParaRPr lang="zh-TW" altLang="en-US" sz="900"/>
+                <a:endParaRPr lang="zh-TW" altLang="en-US" sz="2700"/>
               </a:p>
             </p:txBody>
           </p:sp>
@@ -13921,7 +13939,7 @@
               </a:fontRef>
             </p:style>
             <p:txBody>
-              <a:bodyPr rot="0" spcFirstLastPara="0" vertOverflow="overflow" horzOverflow="overflow" vert="horz" wrap="square" lIns="91440" tIns="45719" rIns="91440" bIns="45719" numCol="1" spcCol="0" rtlCol="0" fromWordArt="0" anchor="ctr" anchorCtr="0" forceAA="0" compatLnSpc="1">
+              <a:bodyPr rot="0" spcFirstLastPara="0" vertOverflow="overflow" horzOverflow="overflow" vert="horz" wrap="square" lIns="96775" tIns="48386" rIns="96775" bIns="48386" numCol="1" spcCol="0" rtlCol="0" fromWordArt="0" anchor="ctr" anchorCtr="0" forceAA="0" compatLnSpc="1">
                 <a:prstTxWarp prst="textNoShape">
                   <a:avLst/>
                 </a:prstTxWarp>
@@ -13930,7 +13948,7 @@
               <a:lstStyle/>
               <a:p>
                 <a:pPr algn="ctr"/>
-                <a:endParaRPr lang="zh-TW" altLang="en-US" sz="900"/>
+                <a:endParaRPr lang="zh-TW" altLang="en-US" sz="2700"/>
               </a:p>
             </p:txBody>
           </p:sp>
@@ -13976,7 +13994,7 @@
               </a:fontRef>
             </p:style>
             <p:txBody>
-              <a:bodyPr rot="0" spcFirstLastPara="0" vertOverflow="overflow" horzOverflow="overflow" vert="horz" wrap="square" lIns="91440" tIns="45719" rIns="91440" bIns="45719" numCol="1" spcCol="0" rtlCol="0" fromWordArt="0" anchor="ctr" anchorCtr="0" forceAA="0" compatLnSpc="1">
+              <a:bodyPr rot="0" spcFirstLastPara="0" vertOverflow="overflow" horzOverflow="overflow" vert="horz" wrap="square" lIns="96775" tIns="48386" rIns="96775" bIns="48386" numCol="1" spcCol="0" rtlCol="0" fromWordArt="0" anchor="ctr" anchorCtr="0" forceAA="0" compatLnSpc="1">
                 <a:prstTxWarp prst="textNoShape">
                   <a:avLst/>
                 </a:prstTxWarp>
@@ -13985,7 +14003,7 @@
               <a:lstStyle/>
               <a:p>
                 <a:pPr algn="ctr"/>
-                <a:endParaRPr lang="zh-TW" altLang="en-US" sz="900" dirty="0"/>
+                <a:endParaRPr lang="zh-TW" altLang="en-US" sz="2700" dirty="0"/>
               </a:p>
             </p:txBody>
           </p:sp>
@@ -14031,7 +14049,7 @@
               </a:fontRef>
             </p:style>
             <p:txBody>
-              <a:bodyPr rot="0" spcFirstLastPara="0" vertOverflow="overflow" horzOverflow="overflow" vert="horz" wrap="square" lIns="91440" tIns="45719" rIns="91440" bIns="45719" numCol="1" spcCol="0" rtlCol="0" fromWordArt="0" anchor="ctr" anchorCtr="0" forceAA="0" compatLnSpc="1">
+              <a:bodyPr rot="0" spcFirstLastPara="0" vertOverflow="overflow" horzOverflow="overflow" vert="horz" wrap="square" lIns="96775" tIns="48386" rIns="96775" bIns="48386" numCol="1" spcCol="0" rtlCol="0" fromWordArt="0" anchor="ctr" anchorCtr="0" forceAA="0" compatLnSpc="1">
                 <a:prstTxWarp prst="textNoShape">
                   <a:avLst/>
                 </a:prstTxWarp>
@@ -14040,7 +14058,7 @@
               <a:lstStyle/>
               <a:p>
                 <a:pPr algn="ctr"/>
-                <a:endParaRPr lang="zh-TW" altLang="en-US" sz="900"/>
+                <a:endParaRPr lang="zh-TW" altLang="en-US" sz="2700"/>
               </a:p>
             </p:txBody>
           </p:sp>
@@ -14059,8 +14077,8 @@
           </p:nvGrpSpPr>
           <p:grpSpPr>
             <a:xfrm>
-              <a:off x="6595490" y="864440"/>
-              <a:ext cx="2090057" cy="2090057"/>
+              <a:off x="6625755" y="1541963"/>
+              <a:ext cx="1825190" cy="1825188"/>
               <a:chOff x="7828725" y="9933124"/>
               <a:chExt cx="2090057" cy="2090057"/>
             </a:xfrm>
@@ -14107,7 +14125,7 @@
               </a:fontRef>
             </p:style>
             <p:txBody>
-              <a:bodyPr rot="0" spcFirstLastPara="0" vertOverflow="overflow" horzOverflow="overflow" vert="horz" wrap="square" lIns="91440" tIns="45719" rIns="91440" bIns="45719" numCol="1" spcCol="0" rtlCol="0" fromWordArt="0" anchor="ctr" anchorCtr="0" forceAA="0" compatLnSpc="1">
+              <a:bodyPr rot="0" spcFirstLastPara="0" vertOverflow="overflow" horzOverflow="overflow" vert="horz" wrap="square" lIns="96775" tIns="48386" rIns="96775" bIns="48386" numCol="1" spcCol="0" rtlCol="0" fromWordArt="0" anchor="ctr" anchorCtr="0" forceAA="0" compatLnSpc="1">
                 <a:prstTxWarp prst="textNoShape">
                   <a:avLst/>
                 </a:prstTxWarp>
@@ -14116,7 +14134,7 @@
               <a:lstStyle/>
               <a:p>
                 <a:pPr algn="ctr"/>
-                <a:endParaRPr lang="zh-TW" altLang="en-US" sz="900" dirty="0"/>
+                <a:endParaRPr lang="zh-TW" altLang="en-US" sz="2700" dirty="0"/>
               </a:p>
             </p:txBody>
           </p:sp>
@@ -14162,7 +14180,7 @@
               </a:fontRef>
             </p:style>
             <p:txBody>
-              <a:bodyPr rot="0" spcFirstLastPara="0" vertOverflow="overflow" horzOverflow="overflow" vert="horz" wrap="square" lIns="91440" tIns="45719" rIns="91440" bIns="45719" numCol="1" spcCol="0" rtlCol="0" fromWordArt="0" anchor="ctr" anchorCtr="0" forceAA="0" compatLnSpc="1">
+              <a:bodyPr rot="0" spcFirstLastPara="0" vertOverflow="overflow" horzOverflow="overflow" vert="horz" wrap="square" lIns="96775" tIns="48386" rIns="96775" bIns="48386" numCol="1" spcCol="0" rtlCol="0" fromWordArt="0" anchor="ctr" anchorCtr="0" forceAA="0" compatLnSpc="1">
                 <a:prstTxWarp prst="textNoShape">
                   <a:avLst/>
                 </a:prstTxWarp>
@@ -14171,7 +14189,7 @@
               <a:lstStyle/>
               <a:p>
                 <a:pPr algn="ctr"/>
-                <a:endParaRPr lang="zh-TW" altLang="en-US" sz="900"/>
+                <a:endParaRPr lang="zh-TW" altLang="en-US" sz="2700"/>
               </a:p>
             </p:txBody>
           </p:sp>
@@ -14217,7 +14235,7 @@
               </a:fontRef>
             </p:style>
             <p:txBody>
-              <a:bodyPr rot="0" spcFirstLastPara="0" vertOverflow="overflow" horzOverflow="overflow" vert="horz" wrap="square" lIns="91440" tIns="45719" rIns="91440" bIns="45719" numCol="1" spcCol="0" rtlCol="0" fromWordArt="0" anchor="ctr" anchorCtr="0" forceAA="0" compatLnSpc="1">
+              <a:bodyPr rot="0" spcFirstLastPara="0" vertOverflow="overflow" horzOverflow="overflow" vert="horz" wrap="square" lIns="96775" tIns="48386" rIns="96775" bIns="48386" numCol="1" spcCol="0" rtlCol="0" fromWordArt="0" anchor="ctr" anchorCtr="0" forceAA="0" compatLnSpc="1">
                 <a:prstTxWarp prst="textNoShape">
                   <a:avLst/>
                 </a:prstTxWarp>
@@ -14226,7 +14244,7 @@
               <a:lstStyle/>
               <a:p>
                 <a:pPr algn="ctr"/>
-                <a:endParaRPr lang="zh-TW" altLang="en-US" sz="900"/>
+                <a:endParaRPr lang="zh-TW" altLang="en-US" sz="2700"/>
               </a:p>
             </p:txBody>
           </p:sp>
@@ -14272,7 +14290,7 @@
               </a:fontRef>
             </p:style>
             <p:txBody>
-              <a:bodyPr rot="0" spcFirstLastPara="0" vertOverflow="overflow" horzOverflow="overflow" vert="horz" wrap="square" lIns="91440" tIns="45719" rIns="91440" bIns="45719" numCol="1" spcCol="0" rtlCol="0" fromWordArt="0" anchor="ctr" anchorCtr="0" forceAA="0" compatLnSpc="1">
+              <a:bodyPr rot="0" spcFirstLastPara="0" vertOverflow="overflow" horzOverflow="overflow" vert="horz" wrap="square" lIns="96775" tIns="48386" rIns="96775" bIns="48386" numCol="1" spcCol="0" rtlCol="0" fromWordArt="0" anchor="ctr" anchorCtr="0" forceAA="0" compatLnSpc="1">
                 <a:prstTxWarp prst="textNoShape">
                   <a:avLst/>
                 </a:prstTxWarp>
@@ -14281,7 +14299,7 @@
               <a:lstStyle/>
               <a:p>
                 <a:pPr algn="ctr"/>
-                <a:endParaRPr lang="zh-TW" altLang="en-US" sz="900"/>
+                <a:endParaRPr lang="zh-TW" altLang="en-US" sz="2700"/>
               </a:p>
             </p:txBody>
           </p:sp>
@@ -14327,7 +14345,7 @@
               </a:fontRef>
             </p:style>
             <p:txBody>
-              <a:bodyPr rot="0" spcFirstLastPara="0" vertOverflow="overflow" horzOverflow="overflow" vert="horz" wrap="square" lIns="91440" tIns="45719" rIns="91440" bIns="45719" numCol="1" spcCol="0" rtlCol="0" fromWordArt="0" anchor="ctr" anchorCtr="0" forceAA="0" compatLnSpc="1">
+              <a:bodyPr rot="0" spcFirstLastPara="0" vertOverflow="overflow" horzOverflow="overflow" vert="horz" wrap="square" lIns="96775" tIns="48386" rIns="96775" bIns="48386" numCol="1" spcCol="0" rtlCol="0" fromWordArt="0" anchor="ctr" anchorCtr="0" forceAA="0" compatLnSpc="1">
                 <a:prstTxWarp prst="textNoShape">
                   <a:avLst/>
                 </a:prstTxWarp>
@@ -14336,7 +14354,7 @@
               <a:lstStyle/>
               <a:p>
                 <a:pPr algn="ctr"/>
-                <a:endParaRPr lang="zh-TW" altLang="en-US" sz="900"/>
+                <a:endParaRPr lang="zh-TW" altLang="en-US" sz="2700"/>
               </a:p>
             </p:txBody>
           </p:sp>
@@ -14382,7 +14400,7 @@
               </a:fontRef>
             </p:style>
             <p:txBody>
-              <a:bodyPr rot="0" spcFirstLastPara="0" vertOverflow="overflow" horzOverflow="overflow" vert="horz" wrap="square" lIns="91440" tIns="45719" rIns="91440" bIns="45719" numCol="1" spcCol="0" rtlCol="0" fromWordArt="0" anchor="ctr" anchorCtr="0" forceAA="0" compatLnSpc="1">
+              <a:bodyPr rot="0" spcFirstLastPara="0" vertOverflow="overflow" horzOverflow="overflow" vert="horz" wrap="square" lIns="96775" tIns="48386" rIns="96775" bIns="48386" numCol="1" spcCol="0" rtlCol="0" fromWordArt="0" anchor="ctr" anchorCtr="0" forceAA="0" compatLnSpc="1">
                 <a:prstTxWarp prst="textNoShape">
                   <a:avLst/>
                 </a:prstTxWarp>
@@ -14391,7 +14409,7 @@
               <a:lstStyle/>
               <a:p>
                 <a:pPr algn="ctr"/>
-                <a:endParaRPr lang="zh-TW" altLang="en-US" sz="900"/>
+                <a:endParaRPr lang="zh-TW" altLang="en-US" sz="2700"/>
               </a:p>
             </p:txBody>
           </p:sp>
@@ -14437,7 +14455,7 @@
               </a:fontRef>
             </p:style>
             <p:txBody>
-              <a:bodyPr rot="0" spcFirstLastPara="0" vertOverflow="overflow" horzOverflow="overflow" vert="horz" wrap="square" lIns="91440" tIns="45719" rIns="91440" bIns="45719" numCol="1" spcCol="0" rtlCol="0" fromWordArt="0" anchor="ctr" anchorCtr="0" forceAA="0" compatLnSpc="1">
+              <a:bodyPr rot="0" spcFirstLastPara="0" vertOverflow="overflow" horzOverflow="overflow" vert="horz" wrap="square" lIns="96775" tIns="48386" rIns="96775" bIns="48386" numCol="1" spcCol="0" rtlCol="0" fromWordArt="0" anchor="ctr" anchorCtr="0" forceAA="0" compatLnSpc="1">
                 <a:prstTxWarp prst="textNoShape">
                   <a:avLst/>
                 </a:prstTxWarp>
@@ -14446,7 +14464,7 @@
               <a:lstStyle/>
               <a:p>
                 <a:pPr algn="ctr"/>
-                <a:endParaRPr lang="zh-TW" altLang="en-US" sz="900"/>
+                <a:endParaRPr lang="zh-TW" altLang="en-US" sz="2700"/>
               </a:p>
             </p:txBody>
           </p:sp>
@@ -14492,7 +14510,7 @@
               </a:fontRef>
             </p:style>
             <p:txBody>
-              <a:bodyPr rot="0" spcFirstLastPara="0" vertOverflow="overflow" horzOverflow="overflow" vert="horz" wrap="square" lIns="91440" tIns="45719" rIns="91440" bIns="45719" numCol="1" spcCol="0" rtlCol="0" fromWordArt="0" anchor="ctr" anchorCtr="0" forceAA="0" compatLnSpc="1">
+              <a:bodyPr rot="0" spcFirstLastPara="0" vertOverflow="overflow" horzOverflow="overflow" vert="horz" wrap="square" lIns="96775" tIns="48386" rIns="96775" bIns="48386" numCol="1" spcCol="0" rtlCol="0" fromWordArt="0" anchor="ctr" anchorCtr="0" forceAA="0" compatLnSpc="1">
                 <a:prstTxWarp prst="textNoShape">
                   <a:avLst/>
                 </a:prstTxWarp>
@@ -14501,7 +14519,7 @@
               <a:lstStyle/>
               <a:p>
                 <a:pPr algn="ctr"/>
-                <a:endParaRPr lang="zh-TW" altLang="en-US" sz="900" dirty="0"/>
+                <a:endParaRPr lang="zh-TW" altLang="en-US" sz="2700" dirty="0"/>
               </a:p>
             </p:txBody>
           </p:sp>
@@ -14547,7 +14565,7 @@
               </a:fontRef>
             </p:style>
             <p:txBody>
-              <a:bodyPr rot="0" spcFirstLastPara="0" vertOverflow="overflow" horzOverflow="overflow" vert="horz" wrap="square" lIns="91440" tIns="45719" rIns="91440" bIns="45719" numCol="1" spcCol="0" rtlCol="0" fromWordArt="0" anchor="ctr" anchorCtr="0" forceAA="0" compatLnSpc="1">
+              <a:bodyPr rot="0" spcFirstLastPara="0" vertOverflow="overflow" horzOverflow="overflow" vert="horz" wrap="square" lIns="96775" tIns="48386" rIns="96775" bIns="48386" numCol="1" spcCol="0" rtlCol="0" fromWordArt="0" anchor="ctr" anchorCtr="0" forceAA="0" compatLnSpc="1">
                 <a:prstTxWarp prst="textNoShape">
                   <a:avLst/>
                 </a:prstTxWarp>
@@ -14556,7 +14574,7 @@
               <a:lstStyle/>
               <a:p>
                 <a:pPr algn="ctr"/>
-                <a:endParaRPr lang="zh-TW" altLang="en-US" sz="900"/>
+                <a:endParaRPr lang="zh-TW" altLang="en-US" sz="2700"/>
               </a:p>
             </p:txBody>
           </p:sp>
@@ -14575,10 +14593,10 @@
           </p:nvGrpSpPr>
           <p:grpSpPr>
             <a:xfrm>
-              <a:off x="7511350" y="4218231"/>
-              <a:ext cx="609103" cy="638837"/>
+              <a:off x="7401644" y="4288423"/>
+              <a:ext cx="644641" cy="689099"/>
               <a:chOff x="6583394" y="1501875"/>
-              <a:chExt cx="1650681" cy="1731258"/>
+              <a:chExt cx="1650681" cy="1764520"/>
             </a:xfrm>
           </p:grpSpPr>
           <p:grpSp>
@@ -14654,7 +14672,7 @@
                 <a:lstStyle/>
                 <a:p>
                   <a:pPr algn="ctr"/>
-                  <a:endParaRPr lang="zh-TW" altLang="en-US" sz="1142">
+                  <a:endParaRPr lang="zh-TW" altLang="en-US" sz="2000">
                     <a:solidFill>
                       <a:schemeClr val="bg1"/>
                     </a:solidFill>
@@ -14715,7 +14733,7 @@
                 <a:lstStyle/>
                 <a:p>
                   <a:pPr algn="ctr"/>
-                  <a:endParaRPr lang="zh-TW" altLang="en-US" sz="1142" dirty="0">
+                  <a:endParaRPr lang="zh-TW" altLang="en-US" sz="2000" dirty="0">
                     <a:solidFill>
                       <a:schemeClr val="bg1"/>
                     </a:solidFill>
@@ -14741,7 +14759,7 @@
                 <p:spPr>
                   <a:xfrm>
                     <a:off x="6583394" y="1501875"/>
-                    <a:ext cx="416137" cy="1060323"/>
+                    <a:ext cx="416137" cy="1086427"/>
                   </a:xfrm>
                   <a:prstGeom prst="rect">
                     <a:avLst/>
@@ -14764,7 +14782,7 @@
                           <m:sSub>
                             <m:sSubPr>
                               <m:ctrlPr>
-                                <a:rPr lang="en-US" altLang="zh-TW" i="1">
+                                <a:rPr lang="en-US" altLang="zh-TW" sz="2000" i="1">
                                   <a:solidFill>
                                     <a:schemeClr val="bg1"/>
                                   </a:solidFill>
@@ -14774,7 +14792,7 @@
                             </m:sSubPr>
                             <m:e>
                               <m:r>
-                                <a:rPr lang="en-US" altLang="zh-TW" i="1">
+                                <a:rPr lang="en-US" altLang="zh-TW" sz="2000" i="1">
                                   <a:solidFill>
                                     <a:schemeClr val="bg1"/>
                                   </a:solidFill>
@@ -14785,7 +14803,7 @@
                             </m:e>
                             <m:sub>
                               <m:r>
-                                <a:rPr lang="en-US" altLang="zh-TW" i="1">
+                                <a:rPr lang="en-US" altLang="zh-TW" sz="2000" i="1">
                                   <a:solidFill>
                                     <a:schemeClr val="bg1"/>
                                   </a:solidFill>
@@ -14798,7 +14816,7 @@
                         </m:oMath>
                       </m:oMathPara>
                     </a14:m>
-                    <a:endParaRPr lang="en-US" altLang="zh-TW" dirty="0">
+                    <a:endParaRPr lang="en-US" altLang="zh-TW" sz="2000" dirty="0">
                       <a:solidFill>
                         <a:schemeClr val="bg1"/>
                       </a:solidFill>
@@ -14825,7 +14843,7 @@
                 <p:spPr>
                   <a:xfrm>
                     <a:off x="6583394" y="1501875"/>
-                    <a:ext cx="416137" cy="1060323"/>
+                    <a:ext cx="416137" cy="1086427"/>
                   </a:xfrm>
                   <a:prstGeom prst="rect">
                     <a:avLst/>
@@ -14833,7 +14851,7 @@
                   <a:blipFill>
                     <a:blip r:embed="rId7"/>
                     <a:stretch>
-                      <a:fillRect l="-16000" r="-164000" b="-4688"/>
+                      <a:fillRect l="-14815" r="-166667" b="-4286"/>
                     </a:stretch>
                   </a:blipFill>
                 </p:spPr>
@@ -14868,8 +14886,8 @@
                 </p:nvSpPr>
                 <p:spPr>
                   <a:xfrm>
-                    <a:off x="7165988" y="2241867"/>
-                    <a:ext cx="1068087" cy="991266"/>
+                    <a:off x="7165989" y="2241866"/>
+                    <a:ext cx="1068086" cy="1024529"/>
                   </a:xfrm>
                   <a:prstGeom prst="rect">
                     <a:avLst/>
@@ -14892,7 +14910,7 @@
                           <m:sSub>
                             <m:sSubPr>
                               <m:ctrlPr>
-                                <a:rPr lang="en-US" altLang="zh-TW" i="1">
+                                <a:rPr lang="en-US" altLang="zh-TW" sz="2000" i="1">
                                   <a:solidFill>
                                     <a:schemeClr val="bg1"/>
                                   </a:solidFill>
@@ -14902,7 +14920,7 @@
                             </m:sSubPr>
                             <m:e>
                               <m:r>
-                                <a:rPr lang="en-US" altLang="zh-TW" i="1">
+                                <a:rPr lang="en-US" altLang="zh-TW" sz="2000" i="1">
                                   <a:solidFill>
                                     <a:schemeClr val="bg1"/>
                                   </a:solidFill>
@@ -14913,7 +14931,7 @@
                             </m:e>
                             <m:sub>
                               <m:r>
-                                <a:rPr lang="en-US" altLang="zh-TW" i="1">
+                                <a:rPr lang="en-US" altLang="zh-TW" sz="2000" i="1">
                                   <a:solidFill>
                                     <a:schemeClr val="bg1"/>
                                   </a:solidFill>
@@ -14926,7 +14944,7 @@
                         </m:oMath>
                       </m:oMathPara>
                     </a14:m>
-                    <a:endParaRPr lang="en-US" altLang="zh-TW" dirty="0">
+                    <a:endParaRPr lang="en-US" altLang="zh-TW" sz="2000" dirty="0">
                       <a:solidFill>
                         <a:schemeClr val="bg1"/>
                       </a:solidFill>
@@ -14952,8 +14970,8 @@
                 </p:nvSpPr>
                 <p:spPr>
                   <a:xfrm>
-                    <a:off x="7165988" y="2241867"/>
-                    <a:ext cx="1068087" cy="991266"/>
+                    <a:off x="7165989" y="2241866"/>
+                    <a:ext cx="1068086" cy="1024529"/>
                   </a:xfrm>
                   <a:prstGeom prst="rect">
                     <a:avLst/>
@@ -14961,7 +14979,7 @@
                   <a:blipFill>
                     <a:blip r:embed="rId8"/>
                     <a:stretch>
-                      <a:fillRect l="-3077" b="-10000"/>
+                      <a:fillRect l="-4412" b="-9091"/>
                     </a:stretch>
                   </a:blipFill>
                 </p:spPr>
@@ -14995,10 +15013,10 @@
           </p:nvGrpSpPr>
           <p:grpSpPr>
             <a:xfrm>
-              <a:off x="5015800" y="1436120"/>
-              <a:ext cx="609103" cy="638837"/>
+              <a:off x="5437825" y="1953591"/>
+              <a:ext cx="644641" cy="689099"/>
               <a:chOff x="6583394" y="1501875"/>
-              <a:chExt cx="1650681" cy="1731258"/>
+              <a:chExt cx="1650681" cy="1764520"/>
             </a:xfrm>
           </p:grpSpPr>
           <p:grpSp>
@@ -15074,7 +15092,7 @@
                 <a:lstStyle/>
                 <a:p>
                   <a:pPr algn="ctr"/>
-                  <a:endParaRPr lang="zh-TW" altLang="en-US" sz="1142">
+                  <a:endParaRPr lang="zh-TW" altLang="en-US" sz="2000">
                     <a:solidFill>
                       <a:schemeClr val="bg1"/>
                     </a:solidFill>
@@ -15135,7 +15153,7 @@
                 <a:lstStyle/>
                 <a:p>
                   <a:pPr algn="ctr"/>
-                  <a:endParaRPr lang="zh-TW" altLang="en-US" sz="1142" dirty="0">
+                  <a:endParaRPr lang="zh-TW" altLang="en-US" sz="2000" dirty="0">
                     <a:solidFill>
                       <a:schemeClr val="bg1"/>
                     </a:solidFill>
@@ -15161,7 +15179,7 @@
                 <p:spPr>
                   <a:xfrm>
                     <a:off x="6583394" y="1501875"/>
-                    <a:ext cx="416137" cy="1060323"/>
+                    <a:ext cx="416137" cy="1086427"/>
                   </a:xfrm>
                   <a:prstGeom prst="rect">
                     <a:avLst/>
@@ -15184,7 +15202,7 @@
                           <m:sSub>
                             <m:sSubPr>
                               <m:ctrlPr>
-                                <a:rPr lang="en-US" altLang="zh-TW" i="1">
+                                <a:rPr lang="en-US" altLang="zh-TW" sz="2000" i="1">
                                   <a:solidFill>
                                     <a:schemeClr val="bg1"/>
                                   </a:solidFill>
@@ -15194,7 +15212,7 @@
                             </m:sSubPr>
                             <m:e>
                               <m:r>
-                                <a:rPr lang="en-US" altLang="zh-TW" i="1">
+                                <a:rPr lang="en-US" altLang="zh-TW" sz="2000" i="1">
                                   <a:solidFill>
                                     <a:schemeClr val="bg1"/>
                                   </a:solidFill>
@@ -15205,7 +15223,7 @@
                             </m:e>
                             <m:sub>
                               <m:r>
-                                <a:rPr lang="en-US" altLang="zh-TW" i="1">
+                                <a:rPr lang="en-US" altLang="zh-TW" sz="2000" i="1">
                                   <a:solidFill>
                                     <a:schemeClr val="bg1"/>
                                   </a:solidFill>
@@ -15218,7 +15236,7 @@
                         </m:oMath>
                       </m:oMathPara>
                     </a14:m>
-                    <a:endParaRPr lang="en-US" altLang="zh-TW" dirty="0">
+                    <a:endParaRPr lang="en-US" altLang="zh-TW" sz="2000" dirty="0">
                       <a:solidFill>
                         <a:schemeClr val="bg1"/>
                       </a:solidFill>
@@ -15245,7 +15263,7 @@
                 <p:spPr>
                   <a:xfrm>
                     <a:off x="6583394" y="1501875"/>
-                    <a:ext cx="416137" cy="1060323"/>
+                    <a:ext cx="416137" cy="1086427"/>
                   </a:xfrm>
                   <a:prstGeom prst="rect">
                     <a:avLst/>
@@ -15253,7 +15271,7 @@
                   <a:blipFill>
                     <a:blip r:embed="rId9"/>
                     <a:stretch>
-                      <a:fillRect l="-20000" r="-160000" b="-4688"/>
+                      <a:fillRect l="-14815" r="-166667" b="-4286"/>
                     </a:stretch>
                   </a:blipFill>
                 </p:spPr>
@@ -15288,8 +15306,8 @@
                 </p:nvSpPr>
                 <p:spPr>
                   <a:xfrm>
-                    <a:off x="7165988" y="2241867"/>
-                    <a:ext cx="1068087" cy="991266"/>
+                    <a:off x="7165989" y="2241866"/>
+                    <a:ext cx="1068086" cy="1024529"/>
                   </a:xfrm>
                   <a:prstGeom prst="rect">
                     <a:avLst/>
@@ -15312,7 +15330,7 @@
                           <m:sSub>
                             <m:sSubPr>
                               <m:ctrlPr>
-                                <a:rPr lang="en-US" altLang="zh-TW" i="1">
+                                <a:rPr lang="en-US" altLang="zh-TW" sz="2000" i="1">
                                   <a:solidFill>
                                     <a:schemeClr val="bg1"/>
                                   </a:solidFill>
@@ -15322,7 +15340,7 @@
                             </m:sSubPr>
                             <m:e>
                               <m:r>
-                                <a:rPr lang="en-US" altLang="zh-TW" i="1">
+                                <a:rPr lang="en-US" altLang="zh-TW" sz="2000" i="1">
                                   <a:solidFill>
                                     <a:schemeClr val="bg1"/>
                                   </a:solidFill>
@@ -15333,7 +15351,7 @@
                             </m:e>
                             <m:sub>
                               <m:r>
-                                <a:rPr lang="en-US" altLang="zh-TW" i="1">
+                                <a:rPr lang="en-US" altLang="zh-TW" sz="2000" i="1">
                                   <a:solidFill>
                                     <a:schemeClr val="bg1"/>
                                   </a:solidFill>
@@ -15346,7 +15364,7 @@
                         </m:oMath>
                       </m:oMathPara>
                     </a14:m>
-                    <a:endParaRPr lang="en-US" altLang="zh-TW" dirty="0">
+                    <a:endParaRPr lang="en-US" altLang="zh-TW" sz="2000" dirty="0">
                       <a:solidFill>
                         <a:schemeClr val="bg1"/>
                       </a:solidFill>
@@ -15372,8 +15390,8 @@
                 </p:nvSpPr>
                 <p:spPr>
                   <a:xfrm>
-                    <a:off x="7165988" y="2241867"/>
-                    <a:ext cx="1068087" cy="991266"/>
+                    <a:off x="7165989" y="2241866"/>
+                    <a:ext cx="1068086" cy="1024529"/>
                   </a:xfrm>
                   <a:prstGeom prst="rect">
                     <a:avLst/>
@@ -15381,7 +15399,7 @@
                   <a:blipFill>
                     <a:blip r:embed="rId10"/>
                     <a:stretch>
-                      <a:fillRect l="-3125" b="-11667"/>
+                      <a:fillRect l="-4412" b="-9091"/>
                     </a:stretch>
                   </a:blipFill>
                 </p:spPr>
@@ -15415,10 +15433,10 @@
           </p:nvGrpSpPr>
           <p:grpSpPr>
             <a:xfrm>
-              <a:off x="7511350" y="1436120"/>
-              <a:ext cx="609103" cy="638837"/>
+              <a:off x="7401644" y="1953591"/>
+              <a:ext cx="644641" cy="689099"/>
               <a:chOff x="6583394" y="1501875"/>
-              <a:chExt cx="1650681" cy="1731258"/>
+              <a:chExt cx="1650681" cy="1764520"/>
             </a:xfrm>
           </p:grpSpPr>
           <p:grpSp>
@@ -15494,7 +15512,7 @@
                 <a:lstStyle/>
                 <a:p>
                   <a:pPr algn="ctr"/>
-                  <a:endParaRPr lang="zh-TW" altLang="en-US" sz="1142">
+                  <a:endParaRPr lang="zh-TW" altLang="en-US" sz="2000">
                     <a:solidFill>
                       <a:schemeClr val="bg1"/>
                     </a:solidFill>
@@ -15555,7 +15573,7 @@
                 <a:lstStyle/>
                 <a:p>
                   <a:pPr algn="ctr"/>
-                  <a:endParaRPr lang="zh-TW" altLang="en-US" sz="1142" dirty="0">
+                  <a:endParaRPr lang="zh-TW" altLang="en-US" sz="2000" dirty="0">
                     <a:solidFill>
                       <a:schemeClr val="bg1"/>
                     </a:solidFill>
@@ -15581,7 +15599,7 @@
                 <p:spPr>
                   <a:xfrm>
                     <a:off x="6583394" y="1501875"/>
-                    <a:ext cx="416137" cy="1060323"/>
+                    <a:ext cx="416137" cy="1086427"/>
                   </a:xfrm>
                   <a:prstGeom prst="rect">
                     <a:avLst/>
@@ -15604,7 +15622,7 @@
                           <m:sSub>
                             <m:sSubPr>
                               <m:ctrlPr>
-                                <a:rPr lang="en-US" altLang="zh-TW" i="1">
+                                <a:rPr lang="en-US" altLang="zh-TW" sz="2000" i="1">
                                   <a:solidFill>
                                     <a:schemeClr val="bg1"/>
                                   </a:solidFill>
@@ -15614,7 +15632,7 @@
                             </m:sSubPr>
                             <m:e>
                               <m:r>
-                                <a:rPr lang="en-US" altLang="zh-TW" i="1">
+                                <a:rPr lang="en-US" altLang="zh-TW" sz="2000" i="1">
                                   <a:solidFill>
                                     <a:schemeClr val="bg1"/>
                                   </a:solidFill>
@@ -15625,7 +15643,7 @@
                             </m:e>
                             <m:sub>
                               <m:r>
-                                <a:rPr lang="en-US" altLang="zh-TW" i="1">
+                                <a:rPr lang="en-US" altLang="zh-TW" sz="2000" i="1">
                                   <a:solidFill>
                                     <a:schemeClr val="bg1"/>
                                   </a:solidFill>
@@ -15638,7 +15656,7 @@
                         </m:oMath>
                       </m:oMathPara>
                     </a14:m>
-                    <a:endParaRPr lang="en-US" altLang="zh-TW" dirty="0">
+                    <a:endParaRPr lang="en-US" altLang="zh-TW" sz="2000" dirty="0">
                       <a:solidFill>
                         <a:schemeClr val="bg1"/>
                       </a:solidFill>
@@ -15665,7 +15683,7 @@
                 <p:spPr>
                   <a:xfrm>
                     <a:off x="6583394" y="1501875"/>
-                    <a:ext cx="416137" cy="1060323"/>
+                    <a:ext cx="416137" cy="1086427"/>
                   </a:xfrm>
                   <a:prstGeom prst="rect">
                     <a:avLst/>
@@ -15673,7 +15691,7 @@
                   <a:blipFill>
                     <a:blip r:embed="rId11"/>
                     <a:stretch>
-                      <a:fillRect l="-16000" r="-164000" b="-4688"/>
+                      <a:fillRect l="-14815" r="-166667" b="-4286"/>
                     </a:stretch>
                   </a:blipFill>
                 </p:spPr>
@@ -15708,8 +15726,8 @@
                 </p:nvSpPr>
                 <p:spPr>
                   <a:xfrm>
-                    <a:off x="7165988" y="2241867"/>
-                    <a:ext cx="1068087" cy="991266"/>
+                    <a:off x="7165989" y="2241866"/>
+                    <a:ext cx="1068086" cy="1024529"/>
                   </a:xfrm>
                   <a:prstGeom prst="rect">
                     <a:avLst/>
@@ -15732,7 +15750,7 @@
                           <m:sSub>
                             <m:sSubPr>
                               <m:ctrlPr>
-                                <a:rPr lang="en-US" altLang="zh-TW" i="1">
+                                <a:rPr lang="en-US" altLang="zh-TW" sz="2000" i="1">
                                   <a:solidFill>
                                     <a:schemeClr val="bg1"/>
                                   </a:solidFill>
@@ -15742,7 +15760,7 @@
                             </m:sSubPr>
                             <m:e>
                               <m:r>
-                                <a:rPr lang="en-US" altLang="zh-TW" i="1">
+                                <a:rPr lang="en-US" altLang="zh-TW" sz="2000" i="1">
                                   <a:solidFill>
                                     <a:schemeClr val="bg1"/>
                                   </a:solidFill>
@@ -15753,7 +15771,7 @@
                             </m:e>
                             <m:sub>
                               <m:r>
-                                <a:rPr lang="en-US" altLang="zh-TW" i="1">
+                                <a:rPr lang="en-US" altLang="zh-TW" sz="2000" i="1">
                                   <a:solidFill>
                                     <a:schemeClr val="bg1"/>
                                   </a:solidFill>
@@ -15766,7 +15784,7 @@
                         </m:oMath>
                       </m:oMathPara>
                     </a14:m>
-                    <a:endParaRPr lang="en-US" altLang="zh-TW" dirty="0">
+                    <a:endParaRPr lang="en-US" altLang="zh-TW" sz="2000" dirty="0">
                       <a:solidFill>
                         <a:schemeClr val="bg1"/>
                       </a:solidFill>
@@ -15792,8 +15810,8 @@
                 </p:nvSpPr>
                 <p:spPr>
                   <a:xfrm>
-                    <a:off x="7165988" y="2241867"/>
-                    <a:ext cx="1068087" cy="991266"/>
+                    <a:off x="7165989" y="2241866"/>
+                    <a:ext cx="1068086" cy="1024529"/>
                   </a:xfrm>
                   <a:prstGeom prst="rect">
                     <a:avLst/>
@@ -15801,7 +15819,7 @@
                   <a:blipFill>
                     <a:blip r:embed="rId12"/>
                     <a:stretch>
-                      <a:fillRect l="-3077" b="-11667"/>
+                      <a:fillRect l="-4412" b="-9091"/>
                     </a:stretch>
                   </a:blipFill>
                 </p:spPr>
@@ -15853,8 +15871,8 @@
           </p:blipFill>
           <p:spPr>
             <a:xfrm>
-              <a:off x="17085" y="4632960"/>
-              <a:ext cx="3853440" cy="598404"/>
+              <a:off x="882907" y="4575265"/>
+              <a:ext cx="3565320" cy="553662"/>
             </a:xfrm>
             <a:prstGeom prst="rect">
               <a:avLst/>

--- a/Final/Figures/dipole.pptx
+++ b/Final/Figures/dipole.pptx
@@ -2,14 +2,15 @@
 <file path=ppt/presentation.xml><?xml version="1.0" encoding="utf-8"?>
 <p:presentation xmlns:a="http://schemas.openxmlformats.org/drawingml/2006/main" xmlns:r="http://schemas.openxmlformats.org/officeDocument/2006/relationships" xmlns:p="http://schemas.openxmlformats.org/presentationml/2006/main" saveSubsetFonts="1">
   <p:sldMasterIdLst>
-    <p:sldMasterId id="2147483744" r:id="rId1"/>
+    <p:sldMasterId id="2147483780" r:id="rId1"/>
   </p:sldMasterIdLst>
   <p:sldIdLst>
     <p:sldId id="256" r:id="rId2"/>
     <p:sldId id="257" r:id="rId3"/>
     <p:sldId id="258" r:id="rId4"/>
+    <p:sldId id="259" r:id="rId5"/>
   </p:sldIdLst>
-  <p:sldSz cx="9906000" cy="5400675"/>
+  <p:sldSz cx="8243888" cy="5400675"/>
   <p:notesSz cx="6858000" cy="9144000"/>
   <p:defaultTextStyle>
     <a:defPPr>
@@ -143,8 +144,8 @@
         </p:nvSpPr>
         <p:spPr>
           <a:xfrm>
-            <a:off x="1238250" y="883861"/>
-            <a:ext cx="7429500" cy="1880235"/>
+            <a:off x="618292" y="883861"/>
+            <a:ext cx="7007305" cy="1880235"/>
           </a:xfrm>
         </p:spPr>
         <p:txBody>
@@ -175,8 +176,8 @@
         </p:nvSpPr>
         <p:spPr>
           <a:xfrm>
-            <a:off x="1238250" y="2836605"/>
-            <a:ext cx="7429500" cy="1303913"/>
+            <a:off x="1030486" y="2836605"/>
+            <a:ext cx="6182916" cy="1303913"/>
           </a:xfrm>
         </p:spPr>
         <p:txBody>
@@ -245,7 +246,7 @@
           <a:p>
             <a:fld id="{306DA3B7-5B64-4C08-AEF8-96FFEFD7A1CA}" type="datetimeFigureOut">
               <a:rPr lang="zh-TW" altLang="en-US" smtClean="0"/>
-              <a:t>2026/5/21</a:t>
+              <a:t>2026/7/13</a:t>
             </a:fld>
             <a:endParaRPr lang="zh-TW" altLang="en-US"/>
           </a:p>
@@ -296,7 +297,7 @@
     </p:spTree>
     <p:extLst>
       <p:ext uri="{BB962C8B-B14F-4D97-AF65-F5344CB8AC3E}">
-        <p14:creationId xmlns:p14="http://schemas.microsoft.com/office/powerpoint/2010/main" val="1455866177"/>
+        <p14:creationId xmlns:p14="http://schemas.microsoft.com/office/powerpoint/2010/main" val="346409976"/>
       </p:ext>
     </p:extLst>
   </p:cSld>
@@ -415,7 +416,7 @@
           <a:p>
             <a:fld id="{306DA3B7-5B64-4C08-AEF8-96FFEFD7A1CA}" type="datetimeFigureOut">
               <a:rPr lang="zh-TW" altLang="en-US" smtClean="0"/>
-              <a:t>2026/5/21</a:t>
+              <a:t>2026/7/13</a:t>
             </a:fld>
             <a:endParaRPr lang="zh-TW" altLang="en-US"/>
           </a:p>
@@ -466,7 +467,7 @@
     </p:spTree>
     <p:extLst>
       <p:ext uri="{BB962C8B-B14F-4D97-AF65-F5344CB8AC3E}">
-        <p14:creationId xmlns:p14="http://schemas.microsoft.com/office/powerpoint/2010/main" val="2197049621"/>
+        <p14:creationId xmlns:p14="http://schemas.microsoft.com/office/powerpoint/2010/main" val="2691402881"/>
       </p:ext>
     </p:extLst>
   </p:cSld>
@@ -505,8 +506,8 @@
         </p:nvSpPr>
         <p:spPr>
           <a:xfrm>
-            <a:off x="7088981" y="287536"/>
-            <a:ext cx="2135981" cy="4576822"/>
+            <a:off x="5899533" y="287536"/>
+            <a:ext cx="1777588" cy="4576822"/>
           </a:xfrm>
         </p:spPr>
         <p:txBody>
@@ -533,8 +534,8 @@
         </p:nvSpPr>
         <p:spPr>
           <a:xfrm>
-            <a:off x="681037" y="287536"/>
-            <a:ext cx="6284119" cy="4576822"/>
+            <a:off x="566768" y="287536"/>
+            <a:ext cx="5229716" cy="4576822"/>
           </a:xfrm>
         </p:spPr>
         <p:txBody>
@@ -595,7 +596,7 @@
           <a:p>
             <a:fld id="{306DA3B7-5B64-4C08-AEF8-96FFEFD7A1CA}" type="datetimeFigureOut">
               <a:rPr lang="zh-TW" altLang="en-US" smtClean="0"/>
-              <a:t>2026/5/21</a:t>
+              <a:t>2026/7/13</a:t>
             </a:fld>
             <a:endParaRPr lang="zh-TW" altLang="en-US"/>
           </a:p>
@@ -646,7 +647,7 @@
     </p:spTree>
     <p:extLst>
       <p:ext uri="{BB962C8B-B14F-4D97-AF65-F5344CB8AC3E}">
-        <p14:creationId xmlns:p14="http://schemas.microsoft.com/office/powerpoint/2010/main" val="2847984823"/>
+        <p14:creationId xmlns:p14="http://schemas.microsoft.com/office/powerpoint/2010/main" val="344621299"/>
       </p:ext>
     </p:extLst>
   </p:cSld>
@@ -765,7 +766,7 @@
           <a:p>
             <a:fld id="{306DA3B7-5B64-4C08-AEF8-96FFEFD7A1CA}" type="datetimeFigureOut">
               <a:rPr lang="zh-TW" altLang="en-US" smtClean="0"/>
-              <a:t>2026/5/21</a:t>
+              <a:t>2026/7/13</a:t>
             </a:fld>
             <a:endParaRPr lang="zh-TW" altLang="en-US"/>
           </a:p>
@@ -816,7 +817,7 @@
     </p:spTree>
     <p:extLst>
       <p:ext uri="{BB962C8B-B14F-4D97-AF65-F5344CB8AC3E}">
-        <p14:creationId xmlns:p14="http://schemas.microsoft.com/office/powerpoint/2010/main" val="3881741055"/>
+        <p14:creationId xmlns:p14="http://schemas.microsoft.com/office/powerpoint/2010/main" val="741796995"/>
       </p:ext>
     </p:extLst>
   </p:cSld>
@@ -855,8 +856,8 @@
         </p:nvSpPr>
         <p:spPr>
           <a:xfrm>
-            <a:off x="675878" y="1346419"/>
-            <a:ext cx="8543925" cy="2246530"/>
+            <a:off x="562474" y="1346420"/>
+            <a:ext cx="7110353" cy="2246530"/>
           </a:xfrm>
         </p:spPr>
         <p:txBody>
@@ -887,8 +888,8 @@
         </p:nvSpPr>
         <p:spPr>
           <a:xfrm>
-            <a:off x="675878" y="3614203"/>
-            <a:ext cx="8543925" cy="1181397"/>
+            <a:off x="562474" y="3614203"/>
+            <a:ext cx="7110353" cy="1181397"/>
           </a:xfrm>
         </p:spPr>
         <p:txBody>
@@ -898,9 +899,7 @@
               <a:buNone/>
               <a:defRPr sz="1890">
                 <a:solidFill>
-                  <a:schemeClr val="tx1">
-                    <a:tint val="75000"/>
-                  </a:schemeClr>
+                  <a:schemeClr val="tx1"/>
                 </a:solidFill>
               </a:defRPr>
             </a:lvl1pPr>
@@ -1011,7 +1010,7 @@
           <a:p>
             <a:fld id="{306DA3B7-5B64-4C08-AEF8-96FFEFD7A1CA}" type="datetimeFigureOut">
               <a:rPr lang="zh-TW" altLang="en-US" smtClean="0"/>
-              <a:t>2026/5/21</a:t>
+              <a:t>2026/7/13</a:t>
             </a:fld>
             <a:endParaRPr lang="zh-TW" altLang="en-US"/>
           </a:p>
@@ -1062,7 +1061,7 @@
     </p:spTree>
     <p:extLst>
       <p:ext uri="{BB962C8B-B14F-4D97-AF65-F5344CB8AC3E}">
-        <p14:creationId xmlns:p14="http://schemas.microsoft.com/office/powerpoint/2010/main" val="2426752646"/>
+        <p14:creationId xmlns:p14="http://schemas.microsoft.com/office/powerpoint/2010/main" val="214695657"/>
       </p:ext>
     </p:extLst>
   </p:cSld>
@@ -1124,8 +1123,8 @@
         </p:nvSpPr>
         <p:spPr>
           <a:xfrm>
-            <a:off x="681038" y="1437680"/>
-            <a:ext cx="4210050" cy="3426679"/>
+            <a:off x="566768" y="1437680"/>
+            <a:ext cx="3503652" cy="3426679"/>
           </a:xfrm>
         </p:spPr>
         <p:txBody>
@@ -1181,8 +1180,8 @@
         </p:nvSpPr>
         <p:spPr>
           <a:xfrm>
-            <a:off x="5014913" y="1437680"/>
-            <a:ext cx="4210050" cy="3426679"/>
+            <a:off x="4173469" y="1437680"/>
+            <a:ext cx="3503652" cy="3426679"/>
           </a:xfrm>
         </p:spPr>
         <p:txBody>
@@ -1243,7 +1242,7 @@
           <a:p>
             <a:fld id="{306DA3B7-5B64-4C08-AEF8-96FFEFD7A1CA}" type="datetimeFigureOut">
               <a:rPr lang="zh-TW" altLang="en-US" smtClean="0"/>
-              <a:t>2026/5/21</a:t>
+              <a:t>2026/7/13</a:t>
             </a:fld>
             <a:endParaRPr lang="zh-TW" altLang="en-US"/>
           </a:p>
@@ -1294,7 +1293,7 @@
     </p:spTree>
     <p:extLst>
       <p:ext uri="{BB962C8B-B14F-4D97-AF65-F5344CB8AC3E}">
-        <p14:creationId xmlns:p14="http://schemas.microsoft.com/office/powerpoint/2010/main" val="113065881"/>
+        <p14:creationId xmlns:p14="http://schemas.microsoft.com/office/powerpoint/2010/main" val="1636227169"/>
       </p:ext>
     </p:extLst>
   </p:cSld>
@@ -1333,8 +1332,8 @@
         </p:nvSpPr>
         <p:spPr>
           <a:xfrm>
-            <a:off x="682328" y="287536"/>
-            <a:ext cx="8543925" cy="1043881"/>
+            <a:off x="567841" y="287537"/>
+            <a:ext cx="7110353" cy="1043881"/>
           </a:xfrm>
         </p:spPr>
         <p:txBody>
@@ -1361,8 +1360,8 @@
         </p:nvSpPr>
         <p:spPr>
           <a:xfrm>
-            <a:off x="682328" y="1323916"/>
-            <a:ext cx="4190702" cy="648831"/>
+            <a:off x="567842" y="1323916"/>
+            <a:ext cx="3487550" cy="648831"/>
           </a:xfrm>
         </p:spPr>
         <p:txBody>
@@ -1426,8 +1425,8 @@
         </p:nvSpPr>
         <p:spPr>
           <a:xfrm>
-            <a:off x="682328" y="1972747"/>
-            <a:ext cx="4190702" cy="2901613"/>
+            <a:off x="567842" y="1972747"/>
+            <a:ext cx="3487550" cy="2901613"/>
           </a:xfrm>
         </p:spPr>
         <p:txBody>
@@ -1483,8 +1482,8 @@
         </p:nvSpPr>
         <p:spPr>
           <a:xfrm>
-            <a:off x="5014913" y="1323916"/>
-            <a:ext cx="4211340" cy="648831"/>
+            <a:off x="4173469" y="1323916"/>
+            <a:ext cx="3504726" cy="648831"/>
           </a:xfrm>
         </p:spPr>
         <p:txBody>
@@ -1548,8 +1547,8 @@
         </p:nvSpPr>
         <p:spPr>
           <a:xfrm>
-            <a:off x="5014913" y="1972747"/>
-            <a:ext cx="4211340" cy="2901613"/>
+            <a:off x="4173469" y="1972747"/>
+            <a:ext cx="3504726" cy="2901613"/>
           </a:xfrm>
         </p:spPr>
         <p:txBody>
@@ -1610,7 +1609,7 @@
           <a:p>
             <a:fld id="{306DA3B7-5B64-4C08-AEF8-96FFEFD7A1CA}" type="datetimeFigureOut">
               <a:rPr lang="zh-TW" altLang="en-US" smtClean="0"/>
-              <a:t>2026/5/21</a:t>
+              <a:t>2026/7/13</a:t>
             </a:fld>
             <a:endParaRPr lang="zh-TW" altLang="en-US"/>
           </a:p>
@@ -1661,7 +1660,7 @@
     </p:spTree>
     <p:extLst>
       <p:ext uri="{BB962C8B-B14F-4D97-AF65-F5344CB8AC3E}">
-        <p14:creationId xmlns:p14="http://schemas.microsoft.com/office/powerpoint/2010/main" val="1719056550"/>
+        <p14:creationId xmlns:p14="http://schemas.microsoft.com/office/powerpoint/2010/main" val="3026185589"/>
       </p:ext>
     </p:extLst>
   </p:cSld>
@@ -1728,7 +1727,7 @@
           <a:p>
             <a:fld id="{306DA3B7-5B64-4C08-AEF8-96FFEFD7A1CA}" type="datetimeFigureOut">
               <a:rPr lang="zh-TW" altLang="en-US" smtClean="0"/>
-              <a:t>2026/5/21</a:t>
+              <a:t>2026/7/13</a:t>
             </a:fld>
             <a:endParaRPr lang="zh-TW" altLang="en-US"/>
           </a:p>
@@ -1779,7 +1778,7 @@
     </p:spTree>
     <p:extLst>
       <p:ext uri="{BB962C8B-B14F-4D97-AF65-F5344CB8AC3E}">
-        <p14:creationId xmlns:p14="http://schemas.microsoft.com/office/powerpoint/2010/main" val="1120837913"/>
+        <p14:creationId xmlns:p14="http://schemas.microsoft.com/office/powerpoint/2010/main" val="4074275936"/>
       </p:ext>
     </p:extLst>
   </p:cSld>
@@ -1823,7 +1822,7 @@
           <a:p>
             <a:fld id="{306DA3B7-5B64-4C08-AEF8-96FFEFD7A1CA}" type="datetimeFigureOut">
               <a:rPr lang="zh-TW" altLang="en-US" smtClean="0"/>
-              <a:t>2026/5/21</a:t>
+              <a:t>2026/7/13</a:t>
             </a:fld>
             <a:endParaRPr lang="zh-TW" altLang="en-US"/>
           </a:p>
@@ -1874,7 +1873,7 @@
     </p:spTree>
     <p:extLst>
       <p:ext uri="{BB962C8B-B14F-4D97-AF65-F5344CB8AC3E}">
-        <p14:creationId xmlns:p14="http://schemas.microsoft.com/office/powerpoint/2010/main" val="1578995102"/>
+        <p14:creationId xmlns:p14="http://schemas.microsoft.com/office/powerpoint/2010/main" val="326555679"/>
       </p:ext>
     </p:extLst>
   </p:cSld>
@@ -1913,8 +1912,8 @@
         </p:nvSpPr>
         <p:spPr>
           <a:xfrm>
-            <a:off x="682328" y="360045"/>
-            <a:ext cx="3194943" cy="1260158"/>
+            <a:off x="567841" y="360045"/>
+            <a:ext cx="2658868" cy="1260158"/>
           </a:xfrm>
         </p:spPr>
         <p:txBody>
@@ -1945,8 +1944,8 @@
         </p:nvSpPr>
         <p:spPr>
           <a:xfrm>
-            <a:off x="4211340" y="777597"/>
-            <a:ext cx="5014913" cy="3837980"/>
+            <a:off x="3504726" y="777598"/>
+            <a:ext cx="4173468" cy="3837980"/>
           </a:xfrm>
         </p:spPr>
         <p:txBody>
@@ -2030,8 +2029,8 @@
         </p:nvSpPr>
         <p:spPr>
           <a:xfrm>
-            <a:off x="682328" y="1620202"/>
-            <a:ext cx="3194943" cy="3001626"/>
+            <a:off x="567841" y="1620202"/>
+            <a:ext cx="2658868" cy="3001626"/>
           </a:xfrm>
         </p:spPr>
         <p:txBody>
@@ -2100,7 +2099,7 @@
           <a:p>
             <a:fld id="{306DA3B7-5B64-4C08-AEF8-96FFEFD7A1CA}" type="datetimeFigureOut">
               <a:rPr lang="zh-TW" altLang="en-US" smtClean="0"/>
-              <a:t>2026/5/21</a:t>
+              <a:t>2026/7/13</a:t>
             </a:fld>
             <a:endParaRPr lang="zh-TW" altLang="en-US"/>
           </a:p>
@@ -2151,7 +2150,7 @@
     </p:spTree>
     <p:extLst>
       <p:ext uri="{BB962C8B-B14F-4D97-AF65-F5344CB8AC3E}">
-        <p14:creationId xmlns:p14="http://schemas.microsoft.com/office/powerpoint/2010/main" val="2677434993"/>
+        <p14:creationId xmlns:p14="http://schemas.microsoft.com/office/powerpoint/2010/main" val="3152703112"/>
       </p:ext>
     </p:extLst>
   </p:cSld>
@@ -2190,8 +2189,8 @@
         </p:nvSpPr>
         <p:spPr>
           <a:xfrm>
-            <a:off x="682328" y="360045"/>
-            <a:ext cx="3194943" cy="1260158"/>
+            <a:off x="567841" y="360045"/>
+            <a:ext cx="2658868" cy="1260158"/>
           </a:xfrm>
         </p:spPr>
         <p:txBody>
@@ -2222,8 +2221,8 @@
         </p:nvSpPr>
         <p:spPr>
           <a:xfrm>
-            <a:off x="4211340" y="777597"/>
-            <a:ext cx="5014913" cy="3837980"/>
+            <a:off x="3504726" y="777598"/>
+            <a:ext cx="4173468" cy="3837980"/>
           </a:xfrm>
         </p:spPr>
         <p:txBody>
@@ -2287,8 +2286,8 @@
         </p:nvSpPr>
         <p:spPr>
           <a:xfrm>
-            <a:off x="682328" y="1620202"/>
-            <a:ext cx="3194943" cy="3001626"/>
+            <a:off x="567841" y="1620202"/>
+            <a:ext cx="2658868" cy="3001626"/>
           </a:xfrm>
         </p:spPr>
         <p:txBody>
@@ -2357,7 +2356,7 @@
           <a:p>
             <a:fld id="{306DA3B7-5B64-4C08-AEF8-96FFEFD7A1CA}" type="datetimeFigureOut">
               <a:rPr lang="zh-TW" altLang="en-US" smtClean="0"/>
-              <a:t>2026/5/21</a:t>
+              <a:t>2026/7/13</a:t>
             </a:fld>
             <a:endParaRPr lang="zh-TW" altLang="en-US"/>
           </a:p>
@@ -2408,7 +2407,7 @@
     </p:spTree>
     <p:extLst>
       <p:ext uri="{BB962C8B-B14F-4D97-AF65-F5344CB8AC3E}">
-        <p14:creationId xmlns:p14="http://schemas.microsoft.com/office/powerpoint/2010/main" val="660656462"/>
+        <p14:creationId xmlns:p14="http://schemas.microsoft.com/office/powerpoint/2010/main" val="807619956"/>
       </p:ext>
     </p:extLst>
   </p:cSld>
@@ -2452,8 +2451,8 @@
         </p:nvSpPr>
         <p:spPr>
           <a:xfrm>
-            <a:off x="681038" y="287536"/>
-            <a:ext cx="8543925" cy="1043881"/>
+            <a:off x="566768" y="287537"/>
+            <a:ext cx="7110353" cy="1043881"/>
           </a:xfrm>
           <a:prstGeom prst="rect">
             <a:avLst/>
@@ -2485,8 +2484,8 @@
         </p:nvSpPr>
         <p:spPr>
           <a:xfrm>
-            <a:off x="681038" y="1437680"/>
-            <a:ext cx="8543925" cy="3426679"/>
+            <a:off x="566768" y="1437680"/>
+            <a:ext cx="7110353" cy="3426679"/>
           </a:xfrm>
           <a:prstGeom prst="rect">
             <a:avLst/>
@@ -2547,8 +2546,8 @@
         </p:nvSpPr>
         <p:spPr>
           <a:xfrm>
-            <a:off x="681038" y="5005626"/>
-            <a:ext cx="2228850" cy="287536"/>
+            <a:off x="566767" y="5005627"/>
+            <a:ext cx="1854875" cy="287536"/>
           </a:xfrm>
           <a:prstGeom prst="rect">
             <a:avLst/>
@@ -2570,7 +2569,7 @@
           <a:p>
             <a:fld id="{306DA3B7-5B64-4C08-AEF8-96FFEFD7A1CA}" type="datetimeFigureOut">
               <a:rPr lang="zh-TW" altLang="en-US" smtClean="0"/>
-              <a:t>2026/5/21</a:t>
+              <a:t>2026/7/13</a:t>
             </a:fld>
             <a:endParaRPr lang="zh-TW" altLang="en-US"/>
           </a:p>
@@ -2588,8 +2587,8 @@
         </p:nvSpPr>
         <p:spPr>
           <a:xfrm>
-            <a:off x="3281363" y="5005626"/>
-            <a:ext cx="3343275" cy="287536"/>
+            <a:off x="2730788" y="5005627"/>
+            <a:ext cx="2782312" cy="287536"/>
           </a:xfrm>
           <a:prstGeom prst="rect">
             <a:avLst/>
@@ -2625,8 +2624,8 @@
         </p:nvSpPr>
         <p:spPr>
           <a:xfrm>
-            <a:off x="6996113" y="5005626"/>
-            <a:ext cx="2228850" cy="287536"/>
+            <a:off x="5822246" y="5005627"/>
+            <a:ext cx="1854875" cy="287536"/>
           </a:xfrm>
           <a:prstGeom prst="rect">
             <a:avLst/>
@@ -2657,23 +2656,23 @@
     </p:spTree>
     <p:extLst>
       <p:ext uri="{BB962C8B-B14F-4D97-AF65-F5344CB8AC3E}">
-        <p14:creationId xmlns:p14="http://schemas.microsoft.com/office/powerpoint/2010/main" val="1264179763"/>
+        <p14:creationId xmlns:p14="http://schemas.microsoft.com/office/powerpoint/2010/main" val="1163940093"/>
       </p:ext>
     </p:extLst>
   </p:cSld>
   <p:clrMap bg1="lt1" tx1="dk1" bg2="lt2" tx2="dk2" accent1="accent1" accent2="accent2" accent3="accent3" accent4="accent4" accent5="accent5" accent6="accent6" hlink="hlink" folHlink="folHlink"/>
   <p:sldLayoutIdLst>
-    <p:sldLayoutId id="2147483745" r:id="rId1"/>
-    <p:sldLayoutId id="2147483746" r:id="rId2"/>
-    <p:sldLayoutId id="2147483747" r:id="rId3"/>
-    <p:sldLayoutId id="2147483748" r:id="rId4"/>
-    <p:sldLayoutId id="2147483749" r:id="rId5"/>
-    <p:sldLayoutId id="2147483750" r:id="rId6"/>
-    <p:sldLayoutId id="2147483751" r:id="rId7"/>
-    <p:sldLayoutId id="2147483752" r:id="rId8"/>
-    <p:sldLayoutId id="2147483753" r:id="rId9"/>
-    <p:sldLayoutId id="2147483754" r:id="rId10"/>
-    <p:sldLayoutId id="2147483755" r:id="rId11"/>
+    <p:sldLayoutId id="2147483781" r:id="rId1"/>
+    <p:sldLayoutId id="2147483782" r:id="rId2"/>
+    <p:sldLayoutId id="2147483783" r:id="rId3"/>
+    <p:sldLayoutId id="2147483784" r:id="rId4"/>
+    <p:sldLayoutId id="2147483785" r:id="rId5"/>
+    <p:sldLayoutId id="2147483786" r:id="rId6"/>
+    <p:sldLayoutId id="2147483787" r:id="rId7"/>
+    <p:sldLayoutId id="2147483788" r:id="rId8"/>
+    <p:sldLayoutId id="2147483789" r:id="rId9"/>
+    <p:sldLayoutId id="2147483790" r:id="rId10"/>
+    <p:sldLayoutId id="2147483791" r:id="rId11"/>
   </p:sldLayoutIdLst>
   <p:txStyles>
     <p:titleStyle>
@@ -3002,7 +3001,7 @@
         </p:blipFill>
         <p:spPr>
           <a:xfrm>
-            <a:off x="-735695" y="-3059097"/>
+            <a:off x="-1566751" y="-3059097"/>
             <a:ext cx="11342139" cy="978503"/>
           </a:xfrm>
           <a:prstGeom prst="rect">
@@ -3024,7 +3023,7 @@
         </p:nvGrpSpPr>
         <p:grpSpPr>
           <a:xfrm>
-            <a:off x="-1159671" y="-2835214"/>
+            <a:off x="-1990727" y="-2835214"/>
             <a:ext cx="11342139" cy="5388315"/>
             <a:chOff x="1170223" y="1467294"/>
             <a:chExt cx="10716867" cy="5091267"/>
@@ -3132,7 +3131,7 @@
         </p:nvGrpSpPr>
         <p:grpSpPr>
           <a:xfrm>
-            <a:off x="-452259" y="3674058"/>
+            <a:off x="-1283315" y="3674058"/>
             <a:ext cx="2472376" cy="2468416"/>
             <a:chOff x="1685309" y="1218891"/>
             <a:chExt cx="4427304" cy="4420217"/>
@@ -3239,7 +3238,7 @@
         </p:nvGrpSpPr>
         <p:grpSpPr>
           <a:xfrm>
-            <a:off x="2392818" y="3674061"/>
+            <a:off x="1561762" y="3674061"/>
             <a:ext cx="2560190" cy="2468416"/>
             <a:chOff x="5922135" y="1218891"/>
             <a:chExt cx="4584555" cy="4420217"/>
@@ -3376,7 +3375,7 @@
         </p:nvGrpSpPr>
         <p:grpSpPr>
           <a:xfrm>
-            <a:off x="-4272717" y="-1331116"/>
+            <a:off x="-5103773" y="-1331116"/>
             <a:ext cx="11872632" cy="9445082"/>
             <a:chOff x="283210" y="3390900"/>
             <a:chExt cx="11218114" cy="8924391"/>
@@ -3503,8 +3502,8 @@
             </a:prstGeom>
           </p:spPr>
         </p:pic>
-        <mc:AlternateContent xmlns:mc="http://schemas.openxmlformats.org/markup-compatibility/2006">
-          <mc:Choice xmlns:a14="http://schemas.microsoft.com/office/drawing/2010/main" Requires="a14">
+        <mc:AlternateContent xmlns:mc="http://schemas.openxmlformats.org/markup-compatibility/2006" xmlns:a14="http://schemas.microsoft.com/office/drawing/2010/main">
+          <mc:Choice Requires="a14">
             <p:sp>
               <p:nvSpPr>
                 <p:cNvPr id="113" name="文字方塊 112">
@@ -3573,7 +3572,7 @@
               </p:txBody>
             </p:sp>
           </mc:Choice>
-          <mc:Fallback>
+          <mc:Fallback xmlns="">
             <p:sp>
               <p:nvSpPr>
                 <p:cNvPr id="113" name="文字方塊 112">
@@ -3618,8 +3617,8 @@
             </p:sp>
           </mc:Fallback>
         </mc:AlternateContent>
-        <mc:AlternateContent xmlns:mc="http://schemas.openxmlformats.org/markup-compatibility/2006">
-          <mc:Choice xmlns:a14="http://schemas.microsoft.com/office/drawing/2010/main" Requires="a14">
+        <mc:AlternateContent xmlns:mc="http://schemas.openxmlformats.org/markup-compatibility/2006" xmlns:a14="http://schemas.microsoft.com/office/drawing/2010/main">
+          <mc:Choice Requires="a14">
             <p:sp>
               <p:nvSpPr>
                 <p:cNvPr id="114" name="文字方塊 113">
@@ -3688,7 +3687,7 @@
               </p:txBody>
             </p:sp>
           </mc:Choice>
-          <mc:Fallback>
+          <mc:Fallback xmlns="">
             <p:sp>
               <p:nvSpPr>
                 <p:cNvPr id="114" name="文字方塊 113">
@@ -3943,8 +3942,8 @@
             </a:prstGeom>
           </p:spPr>
         </p:pic>
-        <mc:AlternateContent xmlns:mc="http://schemas.openxmlformats.org/markup-compatibility/2006">
-          <mc:Choice xmlns:a14="http://schemas.microsoft.com/office/drawing/2010/main" Requires="a14">
+        <mc:AlternateContent xmlns:mc="http://schemas.openxmlformats.org/markup-compatibility/2006" xmlns:a14="http://schemas.microsoft.com/office/drawing/2010/main">
+          <mc:Choice Requires="a14">
             <p:sp>
               <p:nvSpPr>
                 <p:cNvPr id="36" name="文字方塊 35">
@@ -4049,7 +4048,7 @@
               </p:txBody>
             </p:sp>
           </mc:Choice>
-          <mc:Fallback>
+          <mc:Fallback xmlns="">
             <p:sp>
               <p:nvSpPr>
                 <p:cNvPr id="36" name="文字方塊 35">
@@ -4094,8 +4093,8 @@
             </p:sp>
           </mc:Fallback>
         </mc:AlternateContent>
-        <mc:AlternateContent xmlns:mc="http://schemas.openxmlformats.org/markup-compatibility/2006">
-          <mc:Choice xmlns:a14="http://schemas.microsoft.com/office/drawing/2010/main" Requires="a14">
+        <mc:AlternateContent xmlns:mc="http://schemas.openxmlformats.org/markup-compatibility/2006" xmlns:a14="http://schemas.microsoft.com/office/drawing/2010/main">
+          <mc:Choice Requires="a14">
             <p:sp>
               <p:nvSpPr>
                 <p:cNvPr id="221" name="文字方塊 220">
@@ -4168,7 +4167,7 @@
               </p:txBody>
             </p:sp>
           </mc:Choice>
-          <mc:Fallback>
+          <mc:Fallback xmlns="">
             <p:sp>
               <p:nvSpPr>
                 <p:cNvPr id="221" name="文字方塊 220">
@@ -4213,8 +4212,8 @@
             </p:sp>
           </mc:Fallback>
         </mc:AlternateContent>
-        <mc:AlternateContent xmlns:mc="http://schemas.openxmlformats.org/markup-compatibility/2006">
-          <mc:Choice xmlns:a14="http://schemas.microsoft.com/office/drawing/2010/main" Requires="a14">
+        <mc:AlternateContent xmlns:mc="http://schemas.openxmlformats.org/markup-compatibility/2006" xmlns:a14="http://schemas.microsoft.com/office/drawing/2010/main">
+          <mc:Choice Requires="a14">
             <p:sp>
               <p:nvSpPr>
                 <p:cNvPr id="222" name="文字方塊 221">
@@ -4293,7 +4292,7 @@
               </p:txBody>
             </p:sp>
           </mc:Choice>
-          <mc:Fallback>
+          <mc:Fallback xmlns="">
             <p:sp>
               <p:nvSpPr>
                 <p:cNvPr id="222" name="文字方塊 221">
@@ -4338,8 +4337,8 @@
             </p:sp>
           </mc:Fallback>
         </mc:AlternateContent>
-        <mc:AlternateContent xmlns:mc="http://schemas.openxmlformats.org/markup-compatibility/2006">
-          <mc:Choice xmlns:a14="http://schemas.microsoft.com/office/drawing/2010/main" Requires="a14">
+        <mc:AlternateContent xmlns:mc="http://schemas.openxmlformats.org/markup-compatibility/2006" xmlns:a14="http://schemas.microsoft.com/office/drawing/2010/main">
+          <mc:Choice Requires="a14">
             <p:sp>
               <p:nvSpPr>
                 <p:cNvPr id="223" name="文字方塊 222">
@@ -4406,7 +4405,7 @@
               </p:txBody>
             </p:sp>
           </mc:Choice>
-          <mc:Fallback>
+          <mc:Fallback xmlns="">
             <p:sp>
               <p:nvSpPr>
                 <p:cNvPr id="223" name="文字方塊 222">
@@ -4533,8 +4532,8 @@
             </a:prstGeom>
           </p:spPr>
         </p:pic>
-        <mc:AlternateContent xmlns:mc="http://schemas.openxmlformats.org/markup-compatibility/2006">
-          <mc:Choice xmlns:a14="http://schemas.microsoft.com/office/drawing/2010/main" Requires="a14">
+        <mc:AlternateContent xmlns:mc="http://schemas.openxmlformats.org/markup-compatibility/2006" xmlns:a14="http://schemas.microsoft.com/office/drawing/2010/main">
+          <mc:Choice Requires="a14">
             <p:sp>
               <p:nvSpPr>
                 <p:cNvPr id="214" name="文字方塊 213">
@@ -4612,7 +4611,7 @@
               </p:txBody>
             </p:sp>
           </mc:Choice>
-          <mc:Fallback>
+          <mc:Fallback xmlns="">
             <p:sp>
               <p:nvSpPr>
                 <p:cNvPr id="214" name="文字方塊 213">
@@ -4697,8 +4696,8 @@
             </a:prstGeom>
           </p:spPr>
         </p:pic>
-        <mc:AlternateContent xmlns:mc="http://schemas.openxmlformats.org/markup-compatibility/2006">
-          <mc:Choice xmlns:a14="http://schemas.microsoft.com/office/drawing/2010/main" Requires="a14">
+        <mc:AlternateContent xmlns:mc="http://schemas.openxmlformats.org/markup-compatibility/2006" xmlns:a14="http://schemas.microsoft.com/office/drawing/2010/main">
+          <mc:Choice Requires="a14">
             <p:sp>
               <p:nvSpPr>
                 <p:cNvPr id="71" name="文字方塊 70">
@@ -4776,7 +4775,7 @@
               </p:txBody>
             </p:sp>
           </mc:Choice>
-          <mc:Fallback>
+          <mc:Fallback xmlns="">
             <p:sp>
               <p:nvSpPr>
                 <p:cNvPr id="71" name="文字方塊 70">
@@ -5333,8 +5332,8 @@
               </a:p>
             </p:txBody>
           </p:sp>
-          <mc:AlternateContent xmlns:mc="http://schemas.openxmlformats.org/markup-compatibility/2006">
-            <mc:Choice xmlns:a14="http://schemas.microsoft.com/office/drawing/2010/main" Requires="a14">
+          <mc:AlternateContent xmlns:mc="http://schemas.openxmlformats.org/markup-compatibility/2006" xmlns:a14="http://schemas.microsoft.com/office/drawing/2010/main">
+            <mc:Choice Requires="a14">
               <p:sp>
                 <p:nvSpPr>
                   <p:cNvPr id="121" name="TextBox 10">
@@ -5397,7 +5396,7 @@
                 </p:txBody>
               </p:sp>
             </mc:Choice>
-            <mc:Fallback>
+            <mc:Fallback xmlns="">
               <p:sp>
                 <p:nvSpPr>
                   <p:cNvPr id="121" name="TextBox 10">
@@ -5442,8 +5441,8 @@
               </p:sp>
             </mc:Fallback>
           </mc:AlternateContent>
-          <mc:AlternateContent xmlns:mc="http://schemas.openxmlformats.org/markup-compatibility/2006">
-            <mc:Choice xmlns:a14="http://schemas.microsoft.com/office/drawing/2010/main" Requires="a14">
+          <mc:AlternateContent xmlns:mc="http://schemas.openxmlformats.org/markup-compatibility/2006" xmlns:a14="http://schemas.microsoft.com/office/drawing/2010/main">
+            <mc:Choice Requires="a14">
               <p:sp>
                 <p:nvSpPr>
                   <p:cNvPr id="122" name="TextBox 11">
@@ -5493,7 +5492,7 @@
                 </p:txBody>
               </p:sp>
             </mc:Choice>
-            <mc:Fallback>
+            <mc:Fallback xmlns="">
               <p:sp>
                 <p:nvSpPr>
                   <p:cNvPr id="122" name="TextBox 11">
@@ -5621,8 +5620,8 @@
               </a:p>
             </p:txBody>
           </p:sp>
-          <mc:AlternateContent xmlns:mc="http://schemas.openxmlformats.org/markup-compatibility/2006">
-            <mc:Choice xmlns:a14="http://schemas.microsoft.com/office/drawing/2010/main" Requires="a14">
+          <mc:AlternateContent xmlns:mc="http://schemas.openxmlformats.org/markup-compatibility/2006" xmlns:a14="http://schemas.microsoft.com/office/drawing/2010/main">
+            <mc:Choice Requires="a14">
               <p:sp>
                 <p:nvSpPr>
                   <p:cNvPr id="124" name="TextBox 12">
@@ -5672,7 +5671,7 @@
                 </p:txBody>
               </p:sp>
             </mc:Choice>
-            <mc:Fallback>
+            <mc:Fallback xmlns="">
               <p:sp>
                 <p:nvSpPr>
                   <p:cNvPr id="124" name="TextBox 12">
@@ -5717,8 +5716,8 @@
               </p:sp>
             </mc:Fallback>
           </mc:AlternateContent>
-          <mc:AlternateContent xmlns:mc="http://schemas.openxmlformats.org/markup-compatibility/2006">
-            <mc:Choice xmlns:a14="http://schemas.microsoft.com/office/drawing/2010/main" Requires="a14">
+          <mc:AlternateContent xmlns:mc="http://schemas.openxmlformats.org/markup-compatibility/2006" xmlns:a14="http://schemas.microsoft.com/office/drawing/2010/main">
+            <mc:Choice Requires="a14">
               <p:sp>
                 <p:nvSpPr>
                   <p:cNvPr id="125" name="TextBox 13">
@@ -5768,7 +5767,7 @@
                 </p:txBody>
               </p:sp>
             </mc:Choice>
-            <mc:Fallback>
+            <mc:Fallback xmlns="">
               <p:sp>
                 <p:nvSpPr>
                   <p:cNvPr id="125" name="TextBox 13">
@@ -6128,8 +6127,8 @@
               </a:fontRef>
             </p:style>
           </p:cxnSp>
-          <mc:AlternateContent xmlns:mc="http://schemas.openxmlformats.org/markup-compatibility/2006">
-            <mc:Choice xmlns:a14="http://schemas.microsoft.com/office/drawing/2010/main" Requires="a14">
+          <mc:AlternateContent xmlns:mc="http://schemas.openxmlformats.org/markup-compatibility/2006" xmlns:a14="http://schemas.microsoft.com/office/drawing/2010/main">
+            <mc:Choice Requires="a14">
               <p:sp>
                 <p:nvSpPr>
                   <p:cNvPr id="131" name="TextBox 10">
@@ -6192,7 +6191,7 @@
                 </p:txBody>
               </p:sp>
             </mc:Choice>
-            <mc:Fallback>
+            <mc:Fallback xmlns="">
               <p:sp>
                 <p:nvSpPr>
                   <p:cNvPr id="131" name="TextBox 10">
@@ -6701,8 +6700,8 @@
               </p:txBody>
             </p:sp>
           </p:grpSp>
-          <mc:AlternateContent xmlns:mc="http://schemas.openxmlformats.org/markup-compatibility/2006">
-            <mc:Choice xmlns:a14="http://schemas.microsoft.com/office/drawing/2010/main" Requires="a14">
+          <mc:AlternateContent xmlns:mc="http://schemas.openxmlformats.org/markup-compatibility/2006" xmlns:a14="http://schemas.microsoft.com/office/drawing/2010/main">
+            <mc:Choice Requires="a14">
               <p:sp>
                 <p:nvSpPr>
                   <p:cNvPr id="151" name="文字方塊 150">
@@ -6784,7 +6783,7 @@
                 </p:txBody>
               </p:sp>
             </mc:Choice>
-            <mc:Fallback>
+            <mc:Fallback xmlns="">
               <p:sp>
                 <p:nvSpPr>
                   <p:cNvPr id="151" name="文字方塊 150">
@@ -6829,8 +6828,8 @@
               </p:sp>
             </mc:Fallback>
           </mc:AlternateContent>
-          <mc:AlternateContent xmlns:mc="http://schemas.openxmlformats.org/markup-compatibility/2006">
-            <mc:Choice xmlns:a14="http://schemas.microsoft.com/office/drawing/2010/main" Requires="a14">
+          <mc:AlternateContent xmlns:mc="http://schemas.openxmlformats.org/markup-compatibility/2006" xmlns:a14="http://schemas.microsoft.com/office/drawing/2010/main">
+            <mc:Choice Requires="a14">
               <p:sp>
                 <p:nvSpPr>
                   <p:cNvPr id="152" name="文字方塊 151">
@@ -6912,7 +6911,7 @@
                 </p:txBody>
               </p:sp>
             </mc:Choice>
-            <mc:Fallback>
+            <mc:Fallback xmlns="">
               <p:sp>
                 <p:nvSpPr>
                   <p:cNvPr id="152" name="文字方塊 151">
@@ -7121,8 +7120,8 @@
               </p:txBody>
             </p:sp>
           </p:grpSp>
-          <mc:AlternateContent xmlns:mc="http://schemas.openxmlformats.org/markup-compatibility/2006">
-            <mc:Choice xmlns:a14="http://schemas.microsoft.com/office/drawing/2010/main" Requires="a14">
+          <mc:AlternateContent xmlns:mc="http://schemas.openxmlformats.org/markup-compatibility/2006" xmlns:a14="http://schemas.microsoft.com/office/drawing/2010/main">
+            <mc:Choice Requires="a14">
               <p:sp>
                 <p:nvSpPr>
                   <p:cNvPr id="157" name="文字方塊 156">
@@ -7204,7 +7203,7 @@
                 </p:txBody>
               </p:sp>
             </mc:Choice>
-            <mc:Fallback>
+            <mc:Fallback xmlns="">
               <p:sp>
                 <p:nvSpPr>
                   <p:cNvPr id="157" name="文字方塊 156">
@@ -7249,8 +7248,8 @@
               </p:sp>
             </mc:Fallback>
           </mc:AlternateContent>
-          <mc:AlternateContent xmlns:mc="http://schemas.openxmlformats.org/markup-compatibility/2006">
-            <mc:Choice xmlns:a14="http://schemas.microsoft.com/office/drawing/2010/main" Requires="a14">
+          <mc:AlternateContent xmlns:mc="http://schemas.openxmlformats.org/markup-compatibility/2006" xmlns:a14="http://schemas.microsoft.com/office/drawing/2010/main">
+            <mc:Choice Requires="a14">
               <p:sp>
                 <p:nvSpPr>
                   <p:cNvPr id="158" name="文字方塊 157">
@@ -7332,7 +7331,7 @@
                 </p:txBody>
               </p:sp>
             </mc:Choice>
-            <mc:Fallback>
+            <mc:Fallback xmlns="">
               <p:sp>
                 <p:nvSpPr>
                   <p:cNvPr id="158" name="文字方塊 157">
@@ -7393,7 +7392,7 @@
         </p:nvGrpSpPr>
         <p:grpSpPr>
           <a:xfrm>
-            <a:off x="8167909" y="97415"/>
+            <a:off x="7336858" y="97415"/>
             <a:ext cx="9617885" cy="6350862"/>
             <a:chOff x="4037782" y="3448050"/>
             <a:chExt cx="9087668" cy="6000750"/>
@@ -8434,8 +8433,8 @@
             </p:txBody>
           </p:sp>
         </p:grpSp>
-        <mc:AlternateContent xmlns:mc="http://schemas.openxmlformats.org/markup-compatibility/2006">
-          <mc:Choice xmlns:a14="http://schemas.microsoft.com/office/drawing/2010/main" Requires="a14">
+        <mc:AlternateContent xmlns:mc="http://schemas.openxmlformats.org/markup-compatibility/2006" xmlns:a14="http://schemas.microsoft.com/office/drawing/2010/main">
+          <mc:Choice Requires="a14">
             <p:sp>
               <p:nvSpPr>
                 <p:cNvPr id="182" name="文字方塊 181">
@@ -8497,7 +8496,7 @@
               </p:txBody>
             </p:sp>
           </mc:Choice>
-          <mc:Fallback>
+          <mc:Fallback xmlns="">
             <p:sp>
               <p:nvSpPr>
                 <p:cNvPr id="182" name="文字方塊 181">
@@ -8542,8 +8541,8 @@
             </p:sp>
           </mc:Fallback>
         </mc:AlternateContent>
-        <mc:AlternateContent xmlns:mc="http://schemas.openxmlformats.org/markup-compatibility/2006">
-          <mc:Choice xmlns:a14="http://schemas.microsoft.com/office/drawing/2010/main" Requires="a14">
+        <mc:AlternateContent xmlns:mc="http://schemas.openxmlformats.org/markup-compatibility/2006" xmlns:a14="http://schemas.microsoft.com/office/drawing/2010/main">
+          <mc:Choice Requires="a14">
             <p:sp>
               <p:nvSpPr>
                 <p:cNvPr id="183" name="文字方塊 182">
@@ -8625,7 +8624,7 @@
               </p:txBody>
             </p:sp>
           </mc:Choice>
-          <mc:Fallback>
+          <mc:Fallback xmlns="">
             <p:sp>
               <p:nvSpPr>
                 <p:cNvPr id="183" name="文字方塊 182">
@@ -8890,8 +8889,8 @@
               </p:txBody>
             </p:sp>
           </p:grpSp>
-          <mc:AlternateContent xmlns:mc="http://schemas.openxmlformats.org/markup-compatibility/2006">
-            <mc:Choice xmlns:a14="http://schemas.microsoft.com/office/drawing/2010/main" Requires="a14">
+          <mc:AlternateContent xmlns:mc="http://schemas.openxmlformats.org/markup-compatibility/2006" xmlns:a14="http://schemas.microsoft.com/office/drawing/2010/main">
+            <mc:Choice Requires="a14">
               <p:sp>
                 <p:nvSpPr>
                   <p:cNvPr id="189" name="文字方塊 188">
@@ -8973,7 +8972,7 @@
                 </p:txBody>
               </p:sp>
             </mc:Choice>
-            <mc:Fallback>
+            <mc:Fallback xmlns="">
               <p:sp>
                 <p:nvSpPr>
                   <p:cNvPr id="189" name="文字方塊 188">
@@ -9018,8 +9017,8 @@
               </p:sp>
             </mc:Fallback>
           </mc:AlternateContent>
-          <mc:AlternateContent xmlns:mc="http://schemas.openxmlformats.org/markup-compatibility/2006">
-            <mc:Choice xmlns:a14="http://schemas.microsoft.com/office/drawing/2010/main" Requires="a14">
+          <mc:AlternateContent xmlns:mc="http://schemas.openxmlformats.org/markup-compatibility/2006" xmlns:a14="http://schemas.microsoft.com/office/drawing/2010/main">
+            <mc:Choice Requires="a14">
               <p:sp>
                 <p:nvSpPr>
                   <p:cNvPr id="190" name="文字方塊 189">
@@ -9101,7 +9100,7 @@
                 </p:txBody>
               </p:sp>
             </mc:Choice>
-            <mc:Fallback>
+            <mc:Fallback xmlns="">
               <p:sp>
                 <p:nvSpPr>
                   <p:cNvPr id="190" name="文字方塊 189">
@@ -9147,8 +9146,8 @@
             </mc:Fallback>
           </mc:AlternateContent>
         </p:grpSp>
-        <mc:AlternateContent xmlns:mc="http://schemas.openxmlformats.org/markup-compatibility/2006">
-          <mc:Choice xmlns:a14="http://schemas.microsoft.com/office/drawing/2010/main" Requires="a14">
+        <mc:AlternateContent xmlns:mc="http://schemas.openxmlformats.org/markup-compatibility/2006" xmlns:a14="http://schemas.microsoft.com/office/drawing/2010/main">
+          <mc:Choice Requires="a14">
             <p:sp>
               <p:nvSpPr>
                 <p:cNvPr id="193" name="文字方塊 192">
@@ -9204,7 +9203,7 @@
               </p:txBody>
             </p:sp>
           </mc:Choice>
-          <mc:Fallback>
+          <mc:Fallback xmlns="">
             <p:sp>
               <p:nvSpPr>
                 <p:cNvPr id="193" name="文字方塊 192">
@@ -10524,8 +10523,8 @@
               </p:txBody>
             </p:sp>
           </p:grpSp>
-          <mc:AlternateContent xmlns:mc="http://schemas.openxmlformats.org/markup-compatibility/2006">
-            <mc:Choice xmlns:a14="http://schemas.microsoft.com/office/drawing/2010/main" Requires="a14">
+          <mc:AlternateContent xmlns:mc="http://schemas.openxmlformats.org/markup-compatibility/2006" xmlns:a14="http://schemas.microsoft.com/office/drawing/2010/main">
+            <mc:Choice Requires="a14">
               <p:sp>
                 <p:nvSpPr>
                   <p:cNvPr id="235" name="文字方塊 234">
@@ -10607,7 +10606,7 @@
                 </p:txBody>
               </p:sp>
             </mc:Choice>
-            <mc:Fallback>
+            <mc:Fallback xmlns="">
               <p:sp>
                 <p:nvSpPr>
                   <p:cNvPr id="235" name="文字方塊 234">
@@ -10652,8 +10651,8 @@
               </p:sp>
             </mc:Fallback>
           </mc:AlternateContent>
-          <mc:AlternateContent xmlns:mc="http://schemas.openxmlformats.org/markup-compatibility/2006">
-            <mc:Choice xmlns:a14="http://schemas.microsoft.com/office/drawing/2010/main" Requires="a14">
+          <mc:AlternateContent xmlns:mc="http://schemas.openxmlformats.org/markup-compatibility/2006" xmlns:a14="http://schemas.microsoft.com/office/drawing/2010/main">
+            <mc:Choice Requires="a14">
               <p:sp>
                 <p:nvSpPr>
                   <p:cNvPr id="236" name="文字方塊 235">
@@ -10735,7 +10734,7 @@
                 </p:txBody>
               </p:sp>
             </mc:Choice>
-            <mc:Fallback>
+            <mc:Fallback xmlns="">
               <p:sp>
                 <p:nvSpPr>
                   <p:cNvPr id="236" name="文字方塊 235">
@@ -10944,8 +10943,8 @@
               </p:txBody>
             </p:sp>
           </p:grpSp>
-          <mc:AlternateContent xmlns:mc="http://schemas.openxmlformats.org/markup-compatibility/2006">
-            <mc:Choice xmlns:a14="http://schemas.microsoft.com/office/drawing/2010/main" Requires="a14">
+          <mc:AlternateContent xmlns:mc="http://schemas.openxmlformats.org/markup-compatibility/2006" xmlns:a14="http://schemas.microsoft.com/office/drawing/2010/main">
+            <mc:Choice Requires="a14">
               <p:sp>
                 <p:nvSpPr>
                   <p:cNvPr id="241" name="文字方塊 240">
@@ -11027,7 +11026,7 @@
                 </p:txBody>
               </p:sp>
             </mc:Choice>
-            <mc:Fallback>
+            <mc:Fallback xmlns="">
               <p:sp>
                 <p:nvSpPr>
                   <p:cNvPr id="241" name="文字方塊 240">
@@ -11072,8 +11071,8 @@
               </p:sp>
             </mc:Fallback>
           </mc:AlternateContent>
-          <mc:AlternateContent xmlns:mc="http://schemas.openxmlformats.org/markup-compatibility/2006">
-            <mc:Choice xmlns:a14="http://schemas.microsoft.com/office/drawing/2010/main" Requires="a14">
+          <mc:AlternateContent xmlns:mc="http://schemas.openxmlformats.org/markup-compatibility/2006" xmlns:a14="http://schemas.microsoft.com/office/drawing/2010/main">
+            <mc:Choice Requires="a14">
               <p:sp>
                 <p:nvSpPr>
                   <p:cNvPr id="242" name="文字方塊 241">
@@ -11155,7 +11154,7 @@
                 </p:txBody>
               </p:sp>
             </mc:Choice>
-            <mc:Fallback>
+            <mc:Fallback xmlns="">
               <p:sp>
                 <p:nvSpPr>
                   <p:cNvPr id="242" name="文字方塊 241">
@@ -11364,8 +11363,8 @@
               </p:txBody>
             </p:sp>
           </p:grpSp>
-          <mc:AlternateContent xmlns:mc="http://schemas.openxmlformats.org/markup-compatibility/2006">
-            <mc:Choice xmlns:a14="http://schemas.microsoft.com/office/drawing/2010/main" Requires="a14">
+          <mc:AlternateContent xmlns:mc="http://schemas.openxmlformats.org/markup-compatibility/2006" xmlns:a14="http://schemas.microsoft.com/office/drawing/2010/main">
+            <mc:Choice Requires="a14">
               <p:sp>
                 <p:nvSpPr>
                   <p:cNvPr id="247" name="文字方塊 246">
@@ -11447,7 +11446,7 @@
                 </p:txBody>
               </p:sp>
             </mc:Choice>
-            <mc:Fallback>
+            <mc:Fallback xmlns="">
               <p:sp>
                 <p:nvSpPr>
                   <p:cNvPr id="247" name="文字方塊 246">
@@ -11492,8 +11491,8 @@
               </p:sp>
             </mc:Fallback>
           </mc:AlternateContent>
-          <mc:AlternateContent xmlns:mc="http://schemas.openxmlformats.org/markup-compatibility/2006">
-            <mc:Choice xmlns:a14="http://schemas.microsoft.com/office/drawing/2010/main" Requires="a14">
+          <mc:AlternateContent xmlns:mc="http://schemas.openxmlformats.org/markup-compatibility/2006" xmlns:a14="http://schemas.microsoft.com/office/drawing/2010/main">
+            <mc:Choice Requires="a14">
               <p:sp>
                 <p:nvSpPr>
                   <p:cNvPr id="248" name="文字方塊 247">
@@ -11575,7 +11574,7 @@
                 </p:txBody>
               </p:sp>
             </mc:Choice>
-            <mc:Fallback>
+            <mc:Fallback xmlns="">
               <p:sp>
                 <p:nvSpPr>
                   <p:cNvPr id="248" name="文字方塊 247">
@@ -11636,6 +11635,4243 @@
 </file>
 
 <file path=ppt/slides/slide3.xml><?xml version="1.0" encoding="utf-8"?>
+<p:sld xmlns:a="http://schemas.openxmlformats.org/drawingml/2006/main" xmlns:r="http://schemas.openxmlformats.org/officeDocument/2006/relationships" xmlns:p="http://schemas.openxmlformats.org/presentationml/2006/main" show="0">
+  <p:cSld>
+    <p:spTree>
+      <p:nvGrpSpPr>
+        <p:cNvPr id="1" name=""/>
+        <p:cNvGrpSpPr/>
+        <p:nvPr/>
+      </p:nvGrpSpPr>
+      <p:grpSpPr>
+        <a:xfrm>
+          <a:off x="0" y="0"/>
+          <a:ext cx="0" cy="0"/>
+          <a:chOff x="0" y="0"/>
+          <a:chExt cx="0" cy="0"/>
+        </a:xfrm>
+      </p:grpSpPr>
+      <p:sp>
+        <p:nvSpPr>
+          <p:cNvPr id="238" name="矩形: 圓角 237">
+            <a:extLst>
+              <a:ext uri="{FF2B5EF4-FFF2-40B4-BE49-F238E27FC236}">
+                <a16:creationId xmlns:a16="http://schemas.microsoft.com/office/drawing/2014/main" id="{64BFFBEE-304B-4ED2-9791-4679E8397C85}"/>
+              </a:ext>
+            </a:extLst>
+          </p:cNvPr>
+          <p:cNvSpPr/>
+          <p:nvPr/>
+        </p:nvSpPr>
+        <p:spPr>
+          <a:xfrm>
+            <a:off x="32353" y="36975"/>
+            <a:ext cx="8179203" cy="5326743"/>
+          </a:xfrm>
+          <a:prstGeom prst="roundRect">
+            <a:avLst>
+              <a:gd name="adj" fmla="val 7772"/>
+            </a:avLst>
+          </a:prstGeom>
+          <a:gradFill flip="none" rotWithShape="1">
+            <a:gsLst>
+              <a:gs pos="0">
+                <a:schemeClr val="bg1">
+                  <a:lumMod val="95000"/>
+                </a:schemeClr>
+              </a:gs>
+              <a:gs pos="100000">
+                <a:schemeClr val="bg1">
+                  <a:lumMod val="85000"/>
+                </a:schemeClr>
+              </a:gs>
+            </a:gsLst>
+            <a:lin ang="5400000" scaled="1"/>
+            <a:tileRect/>
+          </a:gradFill>
+        </p:spPr>
+        <p:style>
+          <a:lnRef idx="1">
+            <a:schemeClr val="accent3"/>
+          </a:lnRef>
+          <a:fillRef idx="2">
+            <a:schemeClr val="accent3"/>
+          </a:fillRef>
+          <a:effectRef idx="1">
+            <a:schemeClr val="accent3"/>
+          </a:effectRef>
+          <a:fontRef idx="minor">
+            <a:schemeClr val="dk1"/>
+          </a:fontRef>
+        </p:style>
+        <p:txBody>
+          <a:bodyPr rot="0" spcFirstLastPara="0" vertOverflow="overflow" horzOverflow="overflow" vert="horz" wrap="square" lIns="61454" tIns="30727" rIns="61454" bIns="30727" numCol="1" spcCol="0" rtlCol="0" fromWordArt="0" anchor="ctr" anchorCtr="0" forceAA="0" compatLnSpc="1">
+            <a:prstTxWarp prst="textNoShape">
+              <a:avLst/>
+            </a:prstTxWarp>
+            <a:noAutofit/>
+          </a:bodyPr>
+          <a:lstStyle/>
+          <a:p>
+            <a:pPr algn="ctr"/>
+            <a:endParaRPr lang="zh-TW" altLang="en-US" sz="2700" dirty="0"/>
+          </a:p>
+        </p:txBody>
+      </p:sp>
+      <p:grpSp>
+        <p:nvGrpSpPr>
+          <p:cNvPr id="239" name="群組 238">
+            <a:extLst>
+              <a:ext uri="{FF2B5EF4-FFF2-40B4-BE49-F238E27FC236}">
+                <a16:creationId xmlns:a16="http://schemas.microsoft.com/office/drawing/2014/main" id="{434308FE-DBC5-4ED8-8617-7F1BBC16AB66}"/>
+              </a:ext>
+            </a:extLst>
+          </p:cNvPr>
+          <p:cNvGrpSpPr/>
+          <p:nvPr/>
+        </p:nvGrpSpPr>
+        <p:grpSpPr>
+          <a:xfrm>
+            <a:off x="6088418" y="3145418"/>
+            <a:ext cx="1825190" cy="1825188"/>
+            <a:chOff x="8631015" y="5186974"/>
+            <a:chExt cx="2090057" cy="2090057"/>
+          </a:xfrm>
+        </p:grpSpPr>
+        <p:sp>
+          <p:nvSpPr>
+            <p:cNvPr id="300" name="矩形: 圓角 299">
+              <a:extLst>
+                <a:ext uri="{FF2B5EF4-FFF2-40B4-BE49-F238E27FC236}">
+                  <a16:creationId xmlns:a16="http://schemas.microsoft.com/office/drawing/2014/main" id="{F41F6D6B-A57D-4325-9AF1-DAD9B137CF93}"/>
+                </a:ext>
+              </a:extLst>
+            </p:cNvPr>
+            <p:cNvSpPr/>
+            <p:nvPr/>
+          </p:nvSpPr>
+          <p:spPr>
+            <a:xfrm>
+              <a:off x="8631015" y="5186974"/>
+              <a:ext cx="2090057" cy="2090057"/>
+            </a:xfrm>
+            <a:prstGeom prst="roundRect">
+              <a:avLst/>
+            </a:prstGeom>
+            <a:solidFill>
+              <a:schemeClr val="tx1">
+                <a:lumMod val="65000"/>
+                <a:lumOff val="35000"/>
+              </a:schemeClr>
+            </a:solidFill>
+          </p:spPr>
+          <p:style>
+            <a:lnRef idx="0">
+              <a:schemeClr val="accent3"/>
+            </a:lnRef>
+            <a:fillRef idx="3">
+              <a:schemeClr val="accent3"/>
+            </a:fillRef>
+            <a:effectRef idx="3">
+              <a:schemeClr val="accent3"/>
+            </a:effectRef>
+            <a:fontRef idx="minor">
+              <a:schemeClr val="lt1"/>
+            </a:fontRef>
+          </p:style>
+          <p:txBody>
+            <a:bodyPr rot="0" spcFirstLastPara="0" vertOverflow="overflow" horzOverflow="overflow" vert="horz" wrap="square" lIns="96775" tIns="48386" rIns="96775" bIns="48386" numCol="1" spcCol="0" rtlCol="0" fromWordArt="0" anchor="ctr" anchorCtr="0" forceAA="0" compatLnSpc="1">
+              <a:prstTxWarp prst="textNoShape">
+                <a:avLst/>
+              </a:prstTxWarp>
+              <a:noAutofit/>
+            </a:bodyPr>
+            <a:lstStyle/>
+            <a:p>
+              <a:pPr algn="ctr"/>
+              <a:endParaRPr lang="zh-TW" altLang="en-US" sz="2700" dirty="0"/>
+            </a:p>
+          </p:txBody>
+        </p:sp>
+        <p:sp>
+          <p:nvSpPr>
+            <p:cNvPr id="301" name="箭號: 左-右雙向 300">
+              <a:extLst>
+                <a:ext uri="{FF2B5EF4-FFF2-40B4-BE49-F238E27FC236}">
+                  <a16:creationId xmlns:a16="http://schemas.microsoft.com/office/drawing/2014/main" id="{CF154CF6-2929-464D-A4B7-34A76E46B2A2}"/>
+                </a:ext>
+              </a:extLst>
+            </p:cNvPr>
+            <p:cNvSpPr/>
+            <p:nvPr/>
+          </p:nvSpPr>
+          <p:spPr>
+            <a:xfrm rot="5400000">
+              <a:off x="8825319" y="6077225"/>
+              <a:ext cx="432000" cy="217754"/>
+            </a:xfrm>
+            <a:prstGeom prst="leftRightArrow">
+              <a:avLst>
+                <a:gd name="adj1" fmla="val 28600"/>
+                <a:gd name="adj2" fmla="val 50000"/>
+              </a:avLst>
+            </a:prstGeom>
+          </p:spPr>
+          <p:style>
+            <a:lnRef idx="0">
+              <a:schemeClr val="accent2"/>
+            </a:lnRef>
+            <a:fillRef idx="3">
+              <a:schemeClr val="accent2"/>
+            </a:fillRef>
+            <a:effectRef idx="3">
+              <a:schemeClr val="accent2"/>
+            </a:effectRef>
+            <a:fontRef idx="minor">
+              <a:schemeClr val="lt1"/>
+            </a:fontRef>
+          </p:style>
+          <p:txBody>
+            <a:bodyPr rot="0" spcFirstLastPara="0" vertOverflow="overflow" horzOverflow="overflow" vert="horz" wrap="square" lIns="96775" tIns="48386" rIns="96775" bIns="48386" numCol="1" spcCol="0" rtlCol="0" fromWordArt="0" anchor="ctr" anchorCtr="0" forceAA="0" compatLnSpc="1">
+              <a:prstTxWarp prst="textNoShape">
+                <a:avLst/>
+              </a:prstTxWarp>
+              <a:noAutofit/>
+            </a:bodyPr>
+            <a:lstStyle/>
+            <a:p>
+              <a:pPr algn="ctr"/>
+              <a:endParaRPr lang="zh-TW" altLang="en-US" sz="2700" dirty="0"/>
+            </a:p>
+          </p:txBody>
+        </p:sp>
+        <p:sp>
+          <p:nvSpPr>
+            <p:cNvPr id="302" name="箭號: 左-右雙向 301">
+              <a:extLst>
+                <a:ext uri="{FF2B5EF4-FFF2-40B4-BE49-F238E27FC236}">
+                  <a16:creationId xmlns:a16="http://schemas.microsoft.com/office/drawing/2014/main" id="{71F49CDB-2E48-4DEB-B572-41D81377B2D1}"/>
+                </a:ext>
+              </a:extLst>
+            </p:cNvPr>
+            <p:cNvSpPr/>
+            <p:nvPr/>
+          </p:nvSpPr>
+          <p:spPr>
+            <a:xfrm rot="5400000">
+              <a:off x="10130264" y="6077225"/>
+              <a:ext cx="432000" cy="217754"/>
+            </a:xfrm>
+            <a:prstGeom prst="leftRightArrow">
+              <a:avLst>
+                <a:gd name="adj1" fmla="val 28600"/>
+                <a:gd name="adj2" fmla="val 50000"/>
+              </a:avLst>
+            </a:prstGeom>
+          </p:spPr>
+          <p:style>
+            <a:lnRef idx="0">
+              <a:schemeClr val="accent2"/>
+            </a:lnRef>
+            <a:fillRef idx="3">
+              <a:schemeClr val="accent2"/>
+            </a:fillRef>
+            <a:effectRef idx="3">
+              <a:schemeClr val="accent2"/>
+            </a:effectRef>
+            <a:fontRef idx="minor">
+              <a:schemeClr val="lt1"/>
+            </a:fontRef>
+          </p:style>
+          <p:txBody>
+            <a:bodyPr rot="0" spcFirstLastPara="0" vertOverflow="overflow" horzOverflow="overflow" vert="horz" wrap="square" lIns="96775" tIns="48386" rIns="96775" bIns="48386" numCol="1" spcCol="0" rtlCol="0" fromWordArt="0" anchor="ctr" anchorCtr="0" forceAA="0" compatLnSpc="1">
+              <a:prstTxWarp prst="textNoShape">
+                <a:avLst/>
+              </a:prstTxWarp>
+              <a:noAutofit/>
+            </a:bodyPr>
+            <a:lstStyle/>
+            <a:p>
+              <a:pPr algn="ctr"/>
+              <a:endParaRPr lang="zh-TW" altLang="en-US" sz="2700"/>
+            </a:p>
+          </p:txBody>
+        </p:sp>
+        <p:sp>
+          <p:nvSpPr>
+            <p:cNvPr id="303" name="箭號: 左-右雙向 302">
+              <a:extLst>
+                <a:ext uri="{FF2B5EF4-FFF2-40B4-BE49-F238E27FC236}">
+                  <a16:creationId xmlns:a16="http://schemas.microsoft.com/office/drawing/2014/main" id="{9CB03C62-C3D9-43BE-A86C-2F2F1C028BCF}"/>
+                </a:ext>
+              </a:extLst>
+            </p:cNvPr>
+            <p:cNvSpPr/>
+            <p:nvPr/>
+          </p:nvSpPr>
+          <p:spPr>
+            <a:xfrm rot="18900000">
+              <a:off x="9018245" y="5615062"/>
+              <a:ext cx="432000" cy="217754"/>
+            </a:xfrm>
+            <a:prstGeom prst="leftRightArrow">
+              <a:avLst>
+                <a:gd name="adj1" fmla="val 28600"/>
+                <a:gd name="adj2" fmla="val 50000"/>
+              </a:avLst>
+            </a:prstGeom>
+          </p:spPr>
+          <p:style>
+            <a:lnRef idx="0">
+              <a:schemeClr val="accent2"/>
+            </a:lnRef>
+            <a:fillRef idx="3">
+              <a:schemeClr val="accent2"/>
+            </a:fillRef>
+            <a:effectRef idx="3">
+              <a:schemeClr val="accent2"/>
+            </a:effectRef>
+            <a:fontRef idx="minor">
+              <a:schemeClr val="lt1"/>
+            </a:fontRef>
+          </p:style>
+          <p:txBody>
+            <a:bodyPr rot="0" spcFirstLastPara="0" vertOverflow="overflow" horzOverflow="overflow" vert="horz" wrap="square" lIns="96775" tIns="48386" rIns="96775" bIns="48386" numCol="1" spcCol="0" rtlCol="0" fromWordArt="0" anchor="ctr" anchorCtr="0" forceAA="0" compatLnSpc="1">
+              <a:prstTxWarp prst="textNoShape">
+                <a:avLst/>
+              </a:prstTxWarp>
+              <a:noAutofit/>
+            </a:bodyPr>
+            <a:lstStyle/>
+            <a:p>
+              <a:pPr algn="ctr"/>
+              <a:endParaRPr lang="zh-TW" altLang="en-US" sz="2700" dirty="0"/>
+            </a:p>
+          </p:txBody>
+        </p:sp>
+        <p:sp>
+          <p:nvSpPr>
+            <p:cNvPr id="304" name="箭號: 左-右雙向 303">
+              <a:extLst>
+                <a:ext uri="{FF2B5EF4-FFF2-40B4-BE49-F238E27FC236}">
+                  <a16:creationId xmlns:a16="http://schemas.microsoft.com/office/drawing/2014/main" id="{C2E4F5D0-9580-40BE-BB3A-1CA2ED33FB13}"/>
+                </a:ext>
+              </a:extLst>
+            </p:cNvPr>
+            <p:cNvSpPr/>
+            <p:nvPr/>
+          </p:nvSpPr>
+          <p:spPr>
+            <a:xfrm rot="18900000">
+              <a:off x="9922348" y="6556570"/>
+              <a:ext cx="432000" cy="217754"/>
+            </a:xfrm>
+            <a:prstGeom prst="leftRightArrow">
+              <a:avLst>
+                <a:gd name="adj1" fmla="val 28600"/>
+                <a:gd name="adj2" fmla="val 50000"/>
+              </a:avLst>
+            </a:prstGeom>
+          </p:spPr>
+          <p:style>
+            <a:lnRef idx="0">
+              <a:schemeClr val="accent2"/>
+            </a:lnRef>
+            <a:fillRef idx="3">
+              <a:schemeClr val="accent2"/>
+            </a:fillRef>
+            <a:effectRef idx="3">
+              <a:schemeClr val="accent2"/>
+            </a:effectRef>
+            <a:fontRef idx="minor">
+              <a:schemeClr val="lt1"/>
+            </a:fontRef>
+          </p:style>
+          <p:txBody>
+            <a:bodyPr rot="0" spcFirstLastPara="0" vertOverflow="overflow" horzOverflow="overflow" vert="horz" wrap="square" lIns="96775" tIns="48386" rIns="96775" bIns="48386" numCol="1" spcCol="0" rtlCol="0" fromWordArt="0" anchor="ctr" anchorCtr="0" forceAA="0" compatLnSpc="1">
+              <a:prstTxWarp prst="textNoShape">
+                <a:avLst/>
+              </a:prstTxWarp>
+              <a:noAutofit/>
+            </a:bodyPr>
+            <a:lstStyle/>
+            <a:p>
+              <a:pPr algn="ctr"/>
+              <a:endParaRPr lang="zh-TW" altLang="en-US" sz="2700"/>
+            </a:p>
+          </p:txBody>
+        </p:sp>
+        <p:sp>
+          <p:nvSpPr>
+            <p:cNvPr id="305" name="箭號: 左-右雙向 304">
+              <a:extLst>
+                <a:ext uri="{FF2B5EF4-FFF2-40B4-BE49-F238E27FC236}">
+                  <a16:creationId xmlns:a16="http://schemas.microsoft.com/office/drawing/2014/main" id="{E434F85A-31E3-4187-9773-024A557EEDA1}"/>
+                </a:ext>
+              </a:extLst>
+            </p:cNvPr>
+            <p:cNvSpPr/>
+            <p:nvPr/>
+          </p:nvSpPr>
+          <p:spPr>
+            <a:xfrm rot="2700000">
+              <a:off x="9018246" y="6556571"/>
+              <a:ext cx="432000" cy="217754"/>
+            </a:xfrm>
+            <a:prstGeom prst="leftRightArrow">
+              <a:avLst>
+                <a:gd name="adj1" fmla="val 28600"/>
+                <a:gd name="adj2" fmla="val 50000"/>
+              </a:avLst>
+            </a:prstGeom>
+          </p:spPr>
+          <p:style>
+            <a:lnRef idx="0">
+              <a:schemeClr val="accent2"/>
+            </a:lnRef>
+            <a:fillRef idx="3">
+              <a:schemeClr val="accent2"/>
+            </a:fillRef>
+            <a:effectRef idx="3">
+              <a:schemeClr val="accent2"/>
+            </a:effectRef>
+            <a:fontRef idx="minor">
+              <a:schemeClr val="lt1"/>
+            </a:fontRef>
+          </p:style>
+          <p:txBody>
+            <a:bodyPr rot="0" spcFirstLastPara="0" vertOverflow="overflow" horzOverflow="overflow" vert="horz" wrap="square" lIns="96775" tIns="48386" rIns="96775" bIns="48386" numCol="1" spcCol="0" rtlCol="0" fromWordArt="0" anchor="ctr" anchorCtr="0" forceAA="0" compatLnSpc="1">
+              <a:prstTxWarp prst="textNoShape">
+                <a:avLst/>
+              </a:prstTxWarp>
+              <a:noAutofit/>
+            </a:bodyPr>
+            <a:lstStyle/>
+            <a:p>
+              <a:pPr algn="ctr"/>
+              <a:endParaRPr lang="zh-TW" altLang="en-US" sz="2700" dirty="0"/>
+            </a:p>
+          </p:txBody>
+        </p:sp>
+        <p:sp>
+          <p:nvSpPr>
+            <p:cNvPr id="306" name="箭號: 左-右雙向 305">
+              <a:extLst>
+                <a:ext uri="{FF2B5EF4-FFF2-40B4-BE49-F238E27FC236}">
+                  <a16:creationId xmlns:a16="http://schemas.microsoft.com/office/drawing/2014/main" id="{9E9C54A5-3FAD-4D52-BAF7-00407B47FA38}"/>
+                </a:ext>
+              </a:extLst>
+            </p:cNvPr>
+            <p:cNvSpPr/>
+            <p:nvPr/>
+          </p:nvSpPr>
+          <p:spPr>
+            <a:xfrm rot="2700000">
+              <a:off x="9922347" y="5615061"/>
+              <a:ext cx="432000" cy="217754"/>
+            </a:xfrm>
+            <a:prstGeom prst="leftRightArrow">
+              <a:avLst>
+                <a:gd name="adj1" fmla="val 28600"/>
+                <a:gd name="adj2" fmla="val 50000"/>
+              </a:avLst>
+            </a:prstGeom>
+          </p:spPr>
+          <p:style>
+            <a:lnRef idx="0">
+              <a:schemeClr val="accent2"/>
+            </a:lnRef>
+            <a:fillRef idx="3">
+              <a:schemeClr val="accent2"/>
+            </a:fillRef>
+            <a:effectRef idx="3">
+              <a:schemeClr val="accent2"/>
+            </a:effectRef>
+            <a:fontRef idx="minor">
+              <a:schemeClr val="lt1"/>
+            </a:fontRef>
+          </p:style>
+          <p:txBody>
+            <a:bodyPr rot="0" spcFirstLastPara="0" vertOverflow="overflow" horzOverflow="overflow" vert="horz" wrap="square" lIns="96775" tIns="48386" rIns="96775" bIns="48386" numCol="1" spcCol="0" rtlCol="0" fromWordArt="0" anchor="ctr" anchorCtr="0" forceAA="0" compatLnSpc="1">
+              <a:prstTxWarp prst="textNoShape">
+                <a:avLst/>
+              </a:prstTxWarp>
+              <a:noAutofit/>
+            </a:bodyPr>
+            <a:lstStyle/>
+            <a:p>
+              <a:pPr algn="ctr"/>
+              <a:endParaRPr lang="zh-TW" altLang="en-US" sz="2700"/>
+            </a:p>
+          </p:txBody>
+        </p:sp>
+        <p:sp>
+          <p:nvSpPr>
+            <p:cNvPr id="307" name="箭號: 左-右雙向 306">
+              <a:extLst>
+                <a:ext uri="{FF2B5EF4-FFF2-40B4-BE49-F238E27FC236}">
+                  <a16:creationId xmlns:a16="http://schemas.microsoft.com/office/drawing/2014/main" id="{F9F884A9-62E4-430D-BC69-FD325ABBC766}"/>
+                </a:ext>
+              </a:extLst>
+            </p:cNvPr>
+            <p:cNvSpPr/>
+            <p:nvPr/>
+          </p:nvSpPr>
+          <p:spPr>
+            <a:xfrm>
+              <a:off x="9460044" y="6744367"/>
+              <a:ext cx="432000" cy="217754"/>
+            </a:xfrm>
+            <a:prstGeom prst="leftRightArrow">
+              <a:avLst>
+                <a:gd name="adj1" fmla="val 28600"/>
+                <a:gd name="adj2" fmla="val 50000"/>
+              </a:avLst>
+            </a:prstGeom>
+          </p:spPr>
+          <p:style>
+            <a:lnRef idx="0">
+              <a:schemeClr val="accent2"/>
+            </a:lnRef>
+            <a:fillRef idx="3">
+              <a:schemeClr val="accent2"/>
+            </a:fillRef>
+            <a:effectRef idx="3">
+              <a:schemeClr val="accent2"/>
+            </a:effectRef>
+            <a:fontRef idx="minor">
+              <a:schemeClr val="lt1"/>
+            </a:fontRef>
+          </p:style>
+          <p:txBody>
+            <a:bodyPr rot="0" spcFirstLastPara="0" vertOverflow="overflow" horzOverflow="overflow" vert="horz" wrap="square" lIns="96775" tIns="48386" rIns="96775" bIns="48386" numCol="1" spcCol="0" rtlCol="0" fromWordArt="0" anchor="ctr" anchorCtr="0" forceAA="0" compatLnSpc="1">
+              <a:prstTxWarp prst="textNoShape">
+                <a:avLst/>
+              </a:prstTxWarp>
+              <a:noAutofit/>
+            </a:bodyPr>
+            <a:lstStyle/>
+            <a:p>
+              <a:pPr algn="ctr"/>
+              <a:endParaRPr lang="zh-TW" altLang="en-US" sz="2700"/>
+            </a:p>
+          </p:txBody>
+        </p:sp>
+        <p:sp>
+          <p:nvSpPr>
+            <p:cNvPr id="308" name="箭號: 左-右雙向 307">
+              <a:extLst>
+                <a:ext uri="{FF2B5EF4-FFF2-40B4-BE49-F238E27FC236}">
+                  <a16:creationId xmlns:a16="http://schemas.microsoft.com/office/drawing/2014/main" id="{61E36FEB-3C59-4377-BD24-510AAF550F27}"/>
+                </a:ext>
+              </a:extLst>
+            </p:cNvPr>
+            <p:cNvSpPr/>
+            <p:nvPr/>
+          </p:nvSpPr>
+          <p:spPr>
+            <a:xfrm>
+              <a:off x="9460044" y="5414685"/>
+              <a:ext cx="432000" cy="217754"/>
+            </a:xfrm>
+            <a:prstGeom prst="leftRightArrow">
+              <a:avLst>
+                <a:gd name="adj1" fmla="val 28600"/>
+                <a:gd name="adj2" fmla="val 50000"/>
+              </a:avLst>
+            </a:prstGeom>
+          </p:spPr>
+          <p:style>
+            <a:lnRef idx="0">
+              <a:schemeClr val="accent2"/>
+            </a:lnRef>
+            <a:fillRef idx="3">
+              <a:schemeClr val="accent2"/>
+            </a:fillRef>
+            <a:effectRef idx="3">
+              <a:schemeClr val="accent2"/>
+            </a:effectRef>
+            <a:fontRef idx="minor">
+              <a:schemeClr val="lt1"/>
+            </a:fontRef>
+          </p:style>
+          <p:txBody>
+            <a:bodyPr rot="0" spcFirstLastPara="0" vertOverflow="overflow" horzOverflow="overflow" vert="horz" wrap="square" lIns="96775" tIns="48386" rIns="96775" bIns="48386" numCol="1" spcCol="0" rtlCol="0" fromWordArt="0" anchor="ctr" anchorCtr="0" forceAA="0" compatLnSpc="1">
+              <a:prstTxWarp prst="textNoShape">
+                <a:avLst/>
+              </a:prstTxWarp>
+              <a:noAutofit/>
+            </a:bodyPr>
+            <a:lstStyle/>
+            <a:p>
+              <a:pPr algn="ctr"/>
+              <a:endParaRPr lang="zh-TW" altLang="en-US" sz="2700"/>
+            </a:p>
+          </p:txBody>
+        </p:sp>
+      </p:grpSp>
+      <p:grpSp>
+        <p:nvGrpSpPr>
+          <p:cNvPr id="240" name="群組 239">
+            <a:extLst>
+              <a:ext uri="{FF2B5EF4-FFF2-40B4-BE49-F238E27FC236}">
+                <a16:creationId xmlns:a16="http://schemas.microsoft.com/office/drawing/2014/main" id="{3E146815-3CD6-4F4A-8583-75BFAE20000B}"/>
+              </a:ext>
+            </a:extLst>
+          </p:cNvPr>
+          <p:cNvGrpSpPr/>
+          <p:nvPr/>
+        </p:nvGrpSpPr>
+        <p:grpSpPr>
+          <a:xfrm>
+            <a:off x="4125713" y="3145418"/>
+            <a:ext cx="1825190" cy="1825188"/>
+            <a:chOff x="-756975" y="5254023"/>
+            <a:chExt cx="2090057" cy="2090057"/>
+          </a:xfrm>
+        </p:grpSpPr>
+        <p:sp>
+          <p:nvSpPr>
+            <p:cNvPr id="291" name="矩形: 圓角 290">
+              <a:extLst>
+                <a:ext uri="{FF2B5EF4-FFF2-40B4-BE49-F238E27FC236}">
+                  <a16:creationId xmlns:a16="http://schemas.microsoft.com/office/drawing/2014/main" id="{A6F75195-A241-4C03-A09B-90A053E9ACDA}"/>
+                </a:ext>
+              </a:extLst>
+            </p:cNvPr>
+            <p:cNvSpPr/>
+            <p:nvPr/>
+          </p:nvSpPr>
+          <p:spPr>
+            <a:xfrm>
+              <a:off x="-756975" y="5254023"/>
+              <a:ext cx="2090057" cy="2090057"/>
+            </a:xfrm>
+            <a:prstGeom prst="roundRect">
+              <a:avLst/>
+            </a:prstGeom>
+            <a:solidFill>
+              <a:schemeClr val="tx1">
+                <a:lumMod val="65000"/>
+                <a:lumOff val="35000"/>
+              </a:schemeClr>
+            </a:solidFill>
+          </p:spPr>
+          <p:style>
+            <a:lnRef idx="0">
+              <a:schemeClr val="accent3"/>
+            </a:lnRef>
+            <a:fillRef idx="3">
+              <a:schemeClr val="accent3"/>
+            </a:fillRef>
+            <a:effectRef idx="3">
+              <a:schemeClr val="accent3"/>
+            </a:effectRef>
+            <a:fontRef idx="minor">
+              <a:schemeClr val="lt1"/>
+            </a:fontRef>
+          </p:style>
+          <p:txBody>
+            <a:bodyPr rot="0" spcFirstLastPara="0" vertOverflow="overflow" horzOverflow="overflow" vert="horz" wrap="square" lIns="96775" tIns="48386" rIns="96775" bIns="48386" numCol="1" spcCol="0" rtlCol="0" fromWordArt="0" anchor="ctr" anchorCtr="0" forceAA="0" compatLnSpc="1">
+              <a:prstTxWarp prst="textNoShape">
+                <a:avLst/>
+              </a:prstTxWarp>
+              <a:noAutofit/>
+            </a:bodyPr>
+            <a:lstStyle/>
+            <a:p>
+              <a:pPr algn="ctr"/>
+              <a:endParaRPr lang="zh-TW" altLang="en-US" sz="2700" dirty="0"/>
+            </a:p>
+          </p:txBody>
+        </p:sp>
+        <p:sp>
+          <p:nvSpPr>
+            <p:cNvPr id="292" name="箭號: 左-右雙向 291">
+              <a:extLst>
+                <a:ext uri="{FF2B5EF4-FFF2-40B4-BE49-F238E27FC236}">
+                  <a16:creationId xmlns:a16="http://schemas.microsoft.com/office/drawing/2014/main" id="{06A9FFDF-D95E-4033-B89C-8DA4AE91977C}"/>
+                </a:ext>
+              </a:extLst>
+            </p:cNvPr>
+            <p:cNvSpPr/>
+            <p:nvPr/>
+          </p:nvSpPr>
+          <p:spPr>
+            <a:xfrm rot="10800000">
+              <a:off x="-564882" y="6190175"/>
+              <a:ext cx="432000" cy="217754"/>
+            </a:xfrm>
+            <a:prstGeom prst="leftRightArrow">
+              <a:avLst>
+                <a:gd name="adj1" fmla="val 28600"/>
+                <a:gd name="adj2" fmla="val 50000"/>
+              </a:avLst>
+            </a:prstGeom>
+          </p:spPr>
+          <p:style>
+            <a:lnRef idx="0">
+              <a:schemeClr val="accent2"/>
+            </a:lnRef>
+            <a:fillRef idx="3">
+              <a:schemeClr val="accent2"/>
+            </a:fillRef>
+            <a:effectRef idx="3">
+              <a:schemeClr val="accent2"/>
+            </a:effectRef>
+            <a:fontRef idx="minor">
+              <a:schemeClr val="lt1"/>
+            </a:fontRef>
+          </p:style>
+          <p:txBody>
+            <a:bodyPr rot="0" spcFirstLastPara="0" vertOverflow="overflow" horzOverflow="overflow" vert="horz" wrap="square" lIns="96775" tIns="48386" rIns="96775" bIns="48386" numCol="1" spcCol="0" rtlCol="0" fromWordArt="0" anchor="ctr" anchorCtr="0" forceAA="0" compatLnSpc="1">
+              <a:prstTxWarp prst="textNoShape">
+                <a:avLst/>
+              </a:prstTxWarp>
+              <a:noAutofit/>
+            </a:bodyPr>
+            <a:lstStyle/>
+            <a:p>
+              <a:pPr algn="ctr"/>
+              <a:endParaRPr lang="zh-TW" altLang="en-US" sz="2700" dirty="0"/>
+            </a:p>
+          </p:txBody>
+        </p:sp>
+        <p:sp>
+          <p:nvSpPr>
+            <p:cNvPr id="293" name="箭號: 左-右雙向 292">
+              <a:extLst>
+                <a:ext uri="{FF2B5EF4-FFF2-40B4-BE49-F238E27FC236}">
+                  <a16:creationId xmlns:a16="http://schemas.microsoft.com/office/drawing/2014/main" id="{5DBE807D-04AC-4965-9C07-6AB5349CD6AC}"/>
+                </a:ext>
+              </a:extLst>
+            </p:cNvPr>
+            <p:cNvSpPr/>
+            <p:nvPr/>
+          </p:nvSpPr>
+          <p:spPr>
+            <a:xfrm rot="10800000">
+              <a:off x="740063" y="6190175"/>
+              <a:ext cx="432000" cy="217754"/>
+            </a:xfrm>
+            <a:prstGeom prst="leftRightArrow">
+              <a:avLst>
+                <a:gd name="adj1" fmla="val 28600"/>
+                <a:gd name="adj2" fmla="val 50000"/>
+              </a:avLst>
+            </a:prstGeom>
+          </p:spPr>
+          <p:style>
+            <a:lnRef idx="0">
+              <a:schemeClr val="accent2"/>
+            </a:lnRef>
+            <a:fillRef idx="3">
+              <a:schemeClr val="accent2"/>
+            </a:fillRef>
+            <a:effectRef idx="3">
+              <a:schemeClr val="accent2"/>
+            </a:effectRef>
+            <a:fontRef idx="minor">
+              <a:schemeClr val="lt1"/>
+            </a:fontRef>
+          </p:style>
+          <p:txBody>
+            <a:bodyPr rot="0" spcFirstLastPara="0" vertOverflow="overflow" horzOverflow="overflow" vert="horz" wrap="square" lIns="96775" tIns="48386" rIns="96775" bIns="48386" numCol="1" spcCol="0" rtlCol="0" fromWordArt="0" anchor="ctr" anchorCtr="0" forceAA="0" compatLnSpc="1">
+              <a:prstTxWarp prst="textNoShape">
+                <a:avLst/>
+              </a:prstTxWarp>
+              <a:noAutofit/>
+            </a:bodyPr>
+            <a:lstStyle/>
+            <a:p>
+              <a:pPr algn="ctr"/>
+              <a:endParaRPr lang="zh-TW" altLang="en-US" sz="2700"/>
+            </a:p>
+          </p:txBody>
+        </p:sp>
+        <p:sp>
+          <p:nvSpPr>
+            <p:cNvPr id="294" name="箭號: 左-右雙向 293">
+              <a:extLst>
+                <a:ext uri="{FF2B5EF4-FFF2-40B4-BE49-F238E27FC236}">
+                  <a16:creationId xmlns:a16="http://schemas.microsoft.com/office/drawing/2014/main" id="{D0975030-27D9-478B-A57F-8FE0C7F09014}"/>
+                </a:ext>
+              </a:extLst>
+            </p:cNvPr>
+            <p:cNvSpPr/>
+            <p:nvPr/>
+          </p:nvSpPr>
+          <p:spPr>
+            <a:xfrm rot="2700000">
+              <a:off x="-371956" y="5728012"/>
+              <a:ext cx="432000" cy="217754"/>
+            </a:xfrm>
+            <a:prstGeom prst="leftRightArrow">
+              <a:avLst>
+                <a:gd name="adj1" fmla="val 28600"/>
+                <a:gd name="adj2" fmla="val 50000"/>
+              </a:avLst>
+            </a:prstGeom>
+          </p:spPr>
+          <p:style>
+            <a:lnRef idx="0">
+              <a:schemeClr val="accent2"/>
+            </a:lnRef>
+            <a:fillRef idx="3">
+              <a:schemeClr val="accent2"/>
+            </a:fillRef>
+            <a:effectRef idx="3">
+              <a:schemeClr val="accent2"/>
+            </a:effectRef>
+            <a:fontRef idx="minor">
+              <a:schemeClr val="lt1"/>
+            </a:fontRef>
+          </p:style>
+          <p:txBody>
+            <a:bodyPr rot="0" spcFirstLastPara="0" vertOverflow="overflow" horzOverflow="overflow" vert="horz" wrap="square" lIns="96775" tIns="48386" rIns="96775" bIns="48386" numCol="1" spcCol="0" rtlCol="0" fromWordArt="0" anchor="ctr" anchorCtr="0" forceAA="0" compatLnSpc="1">
+              <a:prstTxWarp prst="textNoShape">
+                <a:avLst/>
+              </a:prstTxWarp>
+              <a:noAutofit/>
+            </a:bodyPr>
+            <a:lstStyle/>
+            <a:p>
+              <a:pPr algn="ctr"/>
+              <a:endParaRPr lang="zh-TW" altLang="en-US" sz="2700"/>
+            </a:p>
+          </p:txBody>
+        </p:sp>
+        <p:sp>
+          <p:nvSpPr>
+            <p:cNvPr id="295" name="箭號: 左-右雙向 294">
+              <a:extLst>
+                <a:ext uri="{FF2B5EF4-FFF2-40B4-BE49-F238E27FC236}">
+                  <a16:creationId xmlns:a16="http://schemas.microsoft.com/office/drawing/2014/main" id="{35AA1802-12FD-4697-B11B-9E1720F76695}"/>
+                </a:ext>
+              </a:extLst>
+            </p:cNvPr>
+            <p:cNvSpPr/>
+            <p:nvPr/>
+          </p:nvSpPr>
+          <p:spPr>
+            <a:xfrm rot="2700000">
+              <a:off x="532147" y="6669520"/>
+              <a:ext cx="432000" cy="217754"/>
+            </a:xfrm>
+            <a:prstGeom prst="leftRightArrow">
+              <a:avLst>
+                <a:gd name="adj1" fmla="val 28600"/>
+                <a:gd name="adj2" fmla="val 50000"/>
+              </a:avLst>
+            </a:prstGeom>
+          </p:spPr>
+          <p:style>
+            <a:lnRef idx="0">
+              <a:schemeClr val="accent2"/>
+            </a:lnRef>
+            <a:fillRef idx="3">
+              <a:schemeClr val="accent2"/>
+            </a:fillRef>
+            <a:effectRef idx="3">
+              <a:schemeClr val="accent2"/>
+            </a:effectRef>
+            <a:fontRef idx="minor">
+              <a:schemeClr val="lt1"/>
+            </a:fontRef>
+          </p:style>
+          <p:txBody>
+            <a:bodyPr rot="0" spcFirstLastPara="0" vertOverflow="overflow" horzOverflow="overflow" vert="horz" wrap="square" lIns="96775" tIns="48386" rIns="96775" bIns="48386" numCol="1" spcCol="0" rtlCol="0" fromWordArt="0" anchor="ctr" anchorCtr="0" forceAA="0" compatLnSpc="1">
+              <a:prstTxWarp prst="textNoShape">
+                <a:avLst/>
+              </a:prstTxWarp>
+              <a:noAutofit/>
+            </a:bodyPr>
+            <a:lstStyle/>
+            <a:p>
+              <a:pPr algn="ctr"/>
+              <a:endParaRPr lang="zh-TW" altLang="en-US" sz="2700"/>
+            </a:p>
+          </p:txBody>
+        </p:sp>
+        <p:sp>
+          <p:nvSpPr>
+            <p:cNvPr id="296" name="箭號: 左-右雙向 295">
+              <a:extLst>
+                <a:ext uri="{FF2B5EF4-FFF2-40B4-BE49-F238E27FC236}">
+                  <a16:creationId xmlns:a16="http://schemas.microsoft.com/office/drawing/2014/main" id="{5E718F26-0DF9-407B-A4EB-EDE50C04F5B4}"/>
+                </a:ext>
+              </a:extLst>
+            </p:cNvPr>
+            <p:cNvSpPr/>
+            <p:nvPr/>
+          </p:nvSpPr>
+          <p:spPr>
+            <a:xfrm rot="18900000">
+              <a:off x="-371955" y="6669521"/>
+              <a:ext cx="432000" cy="217754"/>
+            </a:xfrm>
+            <a:prstGeom prst="leftRightArrow">
+              <a:avLst>
+                <a:gd name="adj1" fmla="val 28600"/>
+                <a:gd name="adj2" fmla="val 50000"/>
+              </a:avLst>
+            </a:prstGeom>
+          </p:spPr>
+          <p:style>
+            <a:lnRef idx="0">
+              <a:schemeClr val="accent2"/>
+            </a:lnRef>
+            <a:fillRef idx="3">
+              <a:schemeClr val="accent2"/>
+            </a:fillRef>
+            <a:effectRef idx="3">
+              <a:schemeClr val="accent2"/>
+            </a:effectRef>
+            <a:fontRef idx="minor">
+              <a:schemeClr val="lt1"/>
+            </a:fontRef>
+          </p:style>
+          <p:txBody>
+            <a:bodyPr rot="0" spcFirstLastPara="0" vertOverflow="overflow" horzOverflow="overflow" vert="horz" wrap="square" lIns="96775" tIns="48386" rIns="96775" bIns="48386" numCol="1" spcCol="0" rtlCol="0" fromWordArt="0" anchor="ctr" anchorCtr="0" forceAA="0" compatLnSpc="1">
+              <a:prstTxWarp prst="textNoShape">
+                <a:avLst/>
+              </a:prstTxWarp>
+              <a:noAutofit/>
+            </a:bodyPr>
+            <a:lstStyle/>
+            <a:p>
+              <a:pPr algn="ctr"/>
+              <a:endParaRPr lang="zh-TW" altLang="en-US" sz="2700" dirty="0"/>
+            </a:p>
+          </p:txBody>
+        </p:sp>
+        <p:sp>
+          <p:nvSpPr>
+            <p:cNvPr id="297" name="箭號: 左-右雙向 296">
+              <a:extLst>
+                <a:ext uri="{FF2B5EF4-FFF2-40B4-BE49-F238E27FC236}">
+                  <a16:creationId xmlns:a16="http://schemas.microsoft.com/office/drawing/2014/main" id="{5C457973-B20A-48B9-8B8F-6965D4DC31E7}"/>
+                </a:ext>
+              </a:extLst>
+            </p:cNvPr>
+            <p:cNvSpPr/>
+            <p:nvPr/>
+          </p:nvSpPr>
+          <p:spPr>
+            <a:xfrm rot="18900000">
+              <a:off x="532146" y="5728011"/>
+              <a:ext cx="432000" cy="217754"/>
+            </a:xfrm>
+            <a:prstGeom prst="leftRightArrow">
+              <a:avLst>
+                <a:gd name="adj1" fmla="val 28600"/>
+                <a:gd name="adj2" fmla="val 50000"/>
+              </a:avLst>
+            </a:prstGeom>
+          </p:spPr>
+          <p:style>
+            <a:lnRef idx="0">
+              <a:schemeClr val="accent2"/>
+            </a:lnRef>
+            <a:fillRef idx="3">
+              <a:schemeClr val="accent2"/>
+            </a:fillRef>
+            <a:effectRef idx="3">
+              <a:schemeClr val="accent2"/>
+            </a:effectRef>
+            <a:fontRef idx="minor">
+              <a:schemeClr val="lt1"/>
+            </a:fontRef>
+          </p:style>
+          <p:txBody>
+            <a:bodyPr rot="0" spcFirstLastPara="0" vertOverflow="overflow" horzOverflow="overflow" vert="horz" wrap="square" lIns="96775" tIns="48386" rIns="96775" bIns="48386" numCol="1" spcCol="0" rtlCol="0" fromWordArt="0" anchor="ctr" anchorCtr="0" forceAA="0" compatLnSpc="1">
+              <a:prstTxWarp prst="textNoShape">
+                <a:avLst/>
+              </a:prstTxWarp>
+              <a:noAutofit/>
+            </a:bodyPr>
+            <a:lstStyle/>
+            <a:p>
+              <a:pPr algn="ctr"/>
+              <a:endParaRPr lang="zh-TW" altLang="en-US" sz="2700"/>
+            </a:p>
+          </p:txBody>
+        </p:sp>
+        <p:sp>
+          <p:nvSpPr>
+            <p:cNvPr id="298" name="箭號: 左-右雙向 297">
+              <a:extLst>
+                <a:ext uri="{FF2B5EF4-FFF2-40B4-BE49-F238E27FC236}">
+                  <a16:creationId xmlns:a16="http://schemas.microsoft.com/office/drawing/2014/main" id="{D108C214-3007-4700-A042-255CB97186AD}"/>
+                </a:ext>
+              </a:extLst>
+            </p:cNvPr>
+            <p:cNvSpPr/>
+            <p:nvPr/>
+          </p:nvSpPr>
+          <p:spPr>
+            <a:xfrm rot="5400000">
+              <a:off x="69843" y="6857317"/>
+              <a:ext cx="432000" cy="217754"/>
+            </a:xfrm>
+            <a:prstGeom prst="leftRightArrow">
+              <a:avLst>
+                <a:gd name="adj1" fmla="val 28600"/>
+                <a:gd name="adj2" fmla="val 50000"/>
+              </a:avLst>
+            </a:prstGeom>
+          </p:spPr>
+          <p:style>
+            <a:lnRef idx="0">
+              <a:schemeClr val="accent2"/>
+            </a:lnRef>
+            <a:fillRef idx="3">
+              <a:schemeClr val="accent2"/>
+            </a:fillRef>
+            <a:effectRef idx="3">
+              <a:schemeClr val="accent2"/>
+            </a:effectRef>
+            <a:fontRef idx="minor">
+              <a:schemeClr val="lt1"/>
+            </a:fontRef>
+          </p:style>
+          <p:txBody>
+            <a:bodyPr rot="0" spcFirstLastPara="0" vertOverflow="overflow" horzOverflow="overflow" vert="horz" wrap="square" lIns="96775" tIns="48386" rIns="96775" bIns="48386" numCol="1" spcCol="0" rtlCol="0" fromWordArt="0" anchor="ctr" anchorCtr="0" forceAA="0" compatLnSpc="1">
+              <a:prstTxWarp prst="textNoShape">
+                <a:avLst/>
+              </a:prstTxWarp>
+              <a:noAutofit/>
+            </a:bodyPr>
+            <a:lstStyle/>
+            <a:p>
+              <a:pPr algn="ctr"/>
+              <a:endParaRPr lang="zh-TW" altLang="en-US" sz="2700"/>
+            </a:p>
+          </p:txBody>
+        </p:sp>
+        <p:sp>
+          <p:nvSpPr>
+            <p:cNvPr id="299" name="箭號: 左-右雙向 298">
+              <a:extLst>
+                <a:ext uri="{FF2B5EF4-FFF2-40B4-BE49-F238E27FC236}">
+                  <a16:creationId xmlns:a16="http://schemas.microsoft.com/office/drawing/2014/main" id="{861AEE02-5D4A-460C-8CA4-87DB84F354DD}"/>
+                </a:ext>
+              </a:extLst>
+            </p:cNvPr>
+            <p:cNvSpPr/>
+            <p:nvPr/>
+          </p:nvSpPr>
+          <p:spPr>
+            <a:xfrm rot="5400000">
+              <a:off x="69843" y="5527635"/>
+              <a:ext cx="432000" cy="217754"/>
+            </a:xfrm>
+            <a:prstGeom prst="leftRightArrow">
+              <a:avLst>
+                <a:gd name="adj1" fmla="val 28600"/>
+                <a:gd name="adj2" fmla="val 50000"/>
+              </a:avLst>
+            </a:prstGeom>
+          </p:spPr>
+          <p:style>
+            <a:lnRef idx="0">
+              <a:schemeClr val="accent2"/>
+            </a:lnRef>
+            <a:fillRef idx="3">
+              <a:schemeClr val="accent2"/>
+            </a:fillRef>
+            <a:effectRef idx="3">
+              <a:schemeClr val="accent2"/>
+            </a:effectRef>
+            <a:fontRef idx="minor">
+              <a:schemeClr val="lt1"/>
+            </a:fontRef>
+          </p:style>
+          <p:txBody>
+            <a:bodyPr rot="0" spcFirstLastPara="0" vertOverflow="overflow" horzOverflow="overflow" vert="horz" wrap="square" lIns="96775" tIns="48386" rIns="96775" bIns="48386" numCol="1" spcCol="0" rtlCol="0" fromWordArt="0" anchor="ctr" anchorCtr="0" forceAA="0" compatLnSpc="1">
+              <a:prstTxWarp prst="textNoShape">
+                <a:avLst/>
+              </a:prstTxWarp>
+              <a:noAutofit/>
+            </a:bodyPr>
+            <a:lstStyle/>
+            <a:p>
+              <a:pPr algn="ctr"/>
+              <a:endParaRPr lang="zh-TW" altLang="en-US" sz="2700"/>
+            </a:p>
+          </p:txBody>
+        </p:sp>
+      </p:grpSp>
+      <mc:AlternateContent xmlns:mc="http://schemas.openxmlformats.org/markup-compatibility/2006" xmlns:a14="http://schemas.microsoft.com/office/drawing/2010/main">
+        <mc:Choice Requires="a14">
+          <p:sp>
+            <p:nvSpPr>
+              <p:cNvPr id="241" name="文字方塊 240">
+                <a:extLst>
+                  <a:ext uri="{FF2B5EF4-FFF2-40B4-BE49-F238E27FC236}">
+                    <a16:creationId xmlns:a16="http://schemas.microsoft.com/office/drawing/2014/main" id="{D6BBFCC5-85B4-4394-9437-49450C509BCA}"/>
+                  </a:ext>
+                </a:extLst>
+              </p:cNvPr>
+              <p:cNvSpPr txBox="1"/>
+              <p:nvPr/>
+            </p:nvSpPr>
+            <p:spPr>
+              <a:xfrm>
+                <a:off x="6136308" y="2676656"/>
+                <a:ext cx="1766845" cy="507831"/>
+              </a:xfrm>
+              <a:prstGeom prst="rect">
+                <a:avLst/>
+              </a:prstGeom>
+              <a:noFill/>
+            </p:spPr>
+            <p:txBody>
+              <a:bodyPr wrap="square" rtlCol="0">
+                <a:spAutoFit/>
+              </a:bodyPr>
+              <a:lstStyle/>
+              <a:p>
+                <a:pPr/>
+                <a14:m>
+                  <m:oMathPara xmlns:m="http://schemas.openxmlformats.org/officeDocument/2006/math">
+                    <m:oMathParaPr>
+                      <m:jc m:val="centerGroup"/>
+                    </m:oMathParaPr>
+                    <m:oMath xmlns:m="http://schemas.openxmlformats.org/officeDocument/2006/math">
+                      <m:r>
+                        <a:rPr lang="en-US" altLang="zh-TW" sz="2700" i="1">
+                          <a:latin typeface="Cambria Math" panose="02040503050406030204" pitchFamily="18" charset="0"/>
+                        </a:rPr>
+                        <m:t>𝛼</m:t>
+                      </m:r>
+                      <m:r>
+                        <a:rPr lang="en-US" altLang="zh-TW" sz="2700" i="1">
+                          <a:latin typeface="Cambria Math" panose="02040503050406030204" pitchFamily="18" charset="0"/>
+                        </a:rPr>
+                        <m:t>=</m:t>
+                      </m:r>
+                      <m:r>
+                        <a:rPr lang="en-US" altLang="zh-TW" sz="2700" i="1">
+                          <a:latin typeface="Cambria Math" panose="02040503050406030204" pitchFamily="18" charset="0"/>
+                        </a:rPr>
+                        <m:t>𝜋</m:t>
+                      </m:r>
+                    </m:oMath>
+                  </m:oMathPara>
+                </a14:m>
+                <a:endParaRPr lang="zh-TW" altLang="en-US" sz="2700" dirty="0"/>
+              </a:p>
+            </p:txBody>
+          </p:sp>
+        </mc:Choice>
+        <mc:Fallback xmlns="">
+          <p:sp>
+            <p:nvSpPr>
+              <p:cNvPr id="241" name="文字方塊 240">
+                <a:extLst>
+                  <a:ext uri="{FF2B5EF4-FFF2-40B4-BE49-F238E27FC236}">
+                    <a16:creationId xmlns:a16="http://schemas.microsoft.com/office/drawing/2014/main" id="{D6BBFCC5-85B4-4394-9437-49450C509BCA}"/>
+                  </a:ext>
+                </a:extLst>
+              </p:cNvPr>
+              <p:cNvSpPr txBox="1">
+                <a:spLocks noRot="1" noChangeAspect="1" noMove="1" noResize="1" noEditPoints="1" noAdjustHandles="1" noChangeArrowheads="1" noChangeShapeType="1" noTextEdit="1"/>
+              </p:cNvSpPr>
+              <p:nvPr/>
+            </p:nvSpPr>
+            <p:spPr>
+              <a:xfrm>
+                <a:off x="6136308" y="2676656"/>
+                <a:ext cx="1766845" cy="507831"/>
+              </a:xfrm>
+              <a:prstGeom prst="rect">
+                <a:avLst/>
+              </a:prstGeom>
+              <a:blipFill>
+                <a:blip r:embed="rId2"/>
+                <a:stretch>
+                  <a:fillRect/>
+                </a:stretch>
+              </a:blipFill>
+            </p:spPr>
+            <p:txBody>
+              <a:bodyPr/>
+              <a:lstStyle/>
+              <a:p>
+                <a:r>
+                  <a:rPr lang="zh-TW" altLang="en-US">
+                    <a:noFill/>
+                  </a:rPr>
+                  <a:t> </a:t>
+                </a:r>
+              </a:p>
+            </p:txBody>
+          </p:sp>
+        </mc:Fallback>
+      </mc:AlternateContent>
+      <p:sp>
+        <p:nvSpPr>
+          <p:cNvPr id="242" name="文字方塊 241">
+            <a:extLst>
+              <a:ext uri="{FF2B5EF4-FFF2-40B4-BE49-F238E27FC236}">
+                <a16:creationId xmlns:a16="http://schemas.microsoft.com/office/drawing/2014/main" id="{19EB1EA4-9D8C-43AA-A1F5-D2BE884FA21B}"/>
+              </a:ext>
+            </a:extLst>
+          </p:cNvPr>
+          <p:cNvSpPr txBox="1"/>
+          <p:nvPr/>
+        </p:nvSpPr>
+        <p:spPr>
+          <a:xfrm>
+            <a:off x="208072" y="3367998"/>
+            <a:ext cx="3840316" cy="507831"/>
+          </a:xfrm>
+          <a:prstGeom prst="rect">
+            <a:avLst/>
+          </a:prstGeom>
+          <a:noFill/>
+        </p:spPr>
+        <p:txBody>
+          <a:bodyPr wrap="square" rtlCol="0">
+            <a:spAutoFit/>
+          </a:bodyPr>
+          <a:lstStyle/>
+          <a:p>
+            <a:pPr algn="ctr"/>
+            <a:r>
+              <a:rPr lang="en-US" altLang="zh-TW" sz="2700" dirty="0">
+                <a:latin typeface="Times New Roman" panose="02020603050405020304" pitchFamily="18" charset="0"/>
+                <a:cs typeface="Times New Roman" panose="02020603050405020304" pitchFamily="18" charset="0"/>
+              </a:rPr>
+              <a:t>Polarization</a:t>
+            </a:r>
+            <a:r>
+              <a:rPr lang="zh-TW" altLang="en-US" sz="2700" dirty="0">
+                <a:latin typeface="Times New Roman" panose="02020603050405020304" pitchFamily="18" charset="0"/>
+                <a:cs typeface="Times New Roman" panose="02020603050405020304" pitchFamily="18" charset="0"/>
+              </a:rPr>
+              <a:t> </a:t>
+            </a:r>
+            <a:r>
+              <a:rPr lang="en-US" altLang="zh-TW" sz="2700" dirty="0">
+                <a:latin typeface="Times New Roman" panose="02020603050405020304" pitchFamily="18" charset="0"/>
+                <a:cs typeface="Times New Roman" panose="02020603050405020304" pitchFamily="18" charset="0"/>
+              </a:rPr>
+              <a:t>of </a:t>
+            </a:r>
+            <a:endParaRPr lang="zh-TW" altLang="en-US" sz="2700" dirty="0">
+              <a:latin typeface="Times New Roman" panose="02020603050405020304" pitchFamily="18" charset="0"/>
+              <a:cs typeface="Times New Roman" panose="02020603050405020304" pitchFamily="18" charset="0"/>
+            </a:endParaRPr>
+          </a:p>
+        </p:txBody>
+      </p:sp>
+      <p:sp>
+        <p:nvSpPr>
+          <p:cNvPr id="243" name="文字方塊 242">
+            <a:extLst>
+              <a:ext uri="{FF2B5EF4-FFF2-40B4-BE49-F238E27FC236}">
+                <a16:creationId xmlns:a16="http://schemas.microsoft.com/office/drawing/2014/main" id="{86885DCE-9326-4EBD-B3A8-36A7FA9FAAF4}"/>
+              </a:ext>
+            </a:extLst>
+          </p:cNvPr>
+          <p:cNvSpPr txBox="1"/>
+          <p:nvPr/>
+        </p:nvSpPr>
+        <p:spPr>
+          <a:xfrm>
+            <a:off x="208072" y="1395113"/>
+            <a:ext cx="3840316" cy="507831"/>
+          </a:xfrm>
+          <a:prstGeom prst="rect">
+            <a:avLst/>
+          </a:prstGeom>
+          <a:noFill/>
+        </p:spPr>
+        <p:txBody>
+          <a:bodyPr wrap="square" rtlCol="0">
+            <a:spAutoFit/>
+          </a:bodyPr>
+          <a:lstStyle/>
+          <a:p>
+            <a:pPr algn="ctr"/>
+            <a:r>
+              <a:rPr lang="en-US" altLang="zh-TW" sz="2700" dirty="0">
+                <a:latin typeface="Times New Roman" panose="02020603050405020304" pitchFamily="18" charset="0"/>
+                <a:cs typeface="Times New Roman" panose="02020603050405020304" pitchFamily="18" charset="0"/>
+              </a:rPr>
+              <a:t>Transition dipole</a:t>
+            </a:r>
+            <a:r>
+              <a:rPr lang="zh-TW" altLang="en-US" sz="2700" dirty="0">
+                <a:latin typeface="Times New Roman" panose="02020603050405020304" pitchFamily="18" charset="0"/>
+                <a:cs typeface="Times New Roman" panose="02020603050405020304" pitchFamily="18" charset="0"/>
+              </a:rPr>
+              <a:t> </a:t>
+            </a:r>
+            <a:r>
+              <a:rPr lang="en-US" altLang="zh-TW" sz="2700" dirty="0">
+                <a:latin typeface="Times New Roman" panose="02020603050405020304" pitchFamily="18" charset="0"/>
+                <a:cs typeface="Times New Roman" panose="02020603050405020304" pitchFamily="18" charset="0"/>
+              </a:rPr>
+              <a:t>(BXs)</a:t>
+            </a:r>
+            <a:endParaRPr lang="zh-TW" altLang="en-US" sz="2700" dirty="0">
+              <a:latin typeface="Times New Roman" panose="02020603050405020304" pitchFamily="18" charset="0"/>
+              <a:cs typeface="Times New Roman" panose="02020603050405020304" pitchFamily="18" charset="0"/>
+            </a:endParaRPr>
+          </a:p>
+        </p:txBody>
+      </p:sp>
+      <p:grpSp>
+        <p:nvGrpSpPr>
+          <p:cNvPr id="244" name="群組 243">
+            <a:extLst>
+              <a:ext uri="{FF2B5EF4-FFF2-40B4-BE49-F238E27FC236}">
+                <a16:creationId xmlns:a16="http://schemas.microsoft.com/office/drawing/2014/main" id="{0A560855-F5BA-406E-81CA-ECBEAE41CCFA}"/>
+              </a:ext>
+            </a:extLst>
+          </p:cNvPr>
+          <p:cNvGrpSpPr/>
+          <p:nvPr/>
+        </p:nvGrpSpPr>
+        <p:grpSpPr>
+          <a:xfrm>
+            <a:off x="4900493" y="3559769"/>
+            <a:ext cx="644641" cy="689099"/>
+            <a:chOff x="6583394" y="1501875"/>
+            <a:chExt cx="1650681" cy="1764520"/>
+          </a:xfrm>
+        </p:grpSpPr>
+        <p:grpSp>
+          <p:nvGrpSpPr>
+            <p:cNvPr id="286" name="群組 285">
+              <a:extLst>
+                <a:ext uri="{FF2B5EF4-FFF2-40B4-BE49-F238E27FC236}">
+                  <a16:creationId xmlns:a16="http://schemas.microsoft.com/office/drawing/2014/main" id="{708046E1-F6CA-4487-A845-8CBB437DD241}"/>
+                </a:ext>
+              </a:extLst>
+            </p:cNvPr>
+            <p:cNvGrpSpPr/>
+            <p:nvPr/>
+          </p:nvGrpSpPr>
+          <p:grpSpPr>
+            <a:xfrm>
+              <a:off x="6929132" y="2420541"/>
+              <a:ext cx="361452" cy="346736"/>
+              <a:chOff x="1373392" y="2391862"/>
+              <a:chExt cx="479433" cy="476535"/>
+            </a:xfrm>
+          </p:grpSpPr>
+          <p:sp>
+            <p:nvSpPr>
+              <p:cNvPr id="289" name="箭號: 向右 288">
+                <a:extLst>
+                  <a:ext uri="{FF2B5EF4-FFF2-40B4-BE49-F238E27FC236}">
+                    <a16:creationId xmlns:a16="http://schemas.microsoft.com/office/drawing/2014/main" id="{CC8F469B-45BA-47E1-80FB-282DBE47F2BC}"/>
+                  </a:ext>
+                </a:extLst>
+              </p:cNvPr>
+              <p:cNvSpPr/>
+              <p:nvPr/>
+            </p:nvSpPr>
+            <p:spPr>
+              <a:xfrm>
+                <a:off x="1411244" y="2735868"/>
+                <a:ext cx="441581" cy="132529"/>
+              </a:xfrm>
+              <a:prstGeom prst="rightArrow">
+                <a:avLst>
+                  <a:gd name="adj1" fmla="val 50000"/>
+                  <a:gd name="adj2" fmla="val 99023"/>
+                </a:avLst>
+              </a:prstGeom>
+              <a:solidFill>
+                <a:schemeClr val="bg1"/>
+              </a:solidFill>
+              <a:ln>
+                <a:solidFill>
+                  <a:schemeClr val="bg1"/>
+                </a:solidFill>
+              </a:ln>
+            </p:spPr>
+            <p:style>
+              <a:lnRef idx="2">
+                <a:schemeClr val="dk1">
+                  <a:shade val="50000"/>
+                </a:schemeClr>
+              </a:lnRef>
+              <a:fillRef idx="1">
+                <a:schemeClr val="dk1"/>
+              </a:fillRef>
+              <a:effectRef idx="0">
+                <a:schemeClr val="dk1"/>
+              </a:effectRef>
+              <a:fontRef idx="minor">
+                <a:schemeClr val="lt1"/>
+              </a:fontRef>
+            </p:style>
+            <p:txBody>
+              <a:bodyPr rtlCol="0" anchor="ctr"/>
+              <a:lstStyle/>
+              <a:p>
+                <a:pPr algn="ctr"/>
+                <a:endParaRPr lang="zh-TW" altLang="en-US" sz="2000">
+                  <a:solidFill>
+                    <a:schemeClr val="bg1"/>
+                  </a:solidFill>
+                </a:endParaRPr>
+              </a:p>
+            </p:txBody>
+          </p:sp>
+          <p:sp>
+            <p:nvSpPr>
+              <p:cNvPr id="290" name="箭號: 向右 289">
+                <a:extLst>
+                  <a:ext uri="{FF2B5EF4-FFF2-40B4-BE49-F238E27FC236}">
+                    <a16:creationId xmlns:a16="http://schemas.microsoft.com/office/drawing/2014/main" id="{E1696520-300B-4620-8BC3-010AC8EB9513}"/>
+                  </a:ext>
+                </a:extLst>
+              </p:cNvPr>
+              <p:cNvSpPr/>
+              <p:nvPr/>
+            </p:nvSpPr>
+            <p:spPr>
+              <a:xfrm rot="16200000">
+                <a:off x="1218866" y="2546388"/>
+                <a:ext cx="441581" cy="132529"/>
+              </a:xfrm>
+              <a:prstGeom prst="rightArrow">
+                <a:avLst>
+                  <a:gd name="adj1" fmla="val 50000"/>
+                  <a:gd name="adj2" fmla="val 99023"/>
+                </a:avLst>
+              </a:prstGeom>
+              <a:solidFill>
+                <a:schemeClr val="bg1"/>
+              </a:solidFill>
+              <a:ln>
+                <a:solidFill>
+                  <a:schemeClr val="bg1"/>
+                </a:solidFill>
+              </a:ln>
+            </p:spPr>
+            <p:style>
+              <a:lnRef idx="2">
+                <a:schemeClr val="dk1">
+                  <a:shade val="50000"/>
+                </a:schemeClr>
+              </a:lnRef>
+              <a:fillRef idx="1">
+                <a:schemeClr val="dk1"/>
+              </a:fillRef>
+              <a:effectRef idx="0">
+                <a:schemeClr val="dk1"/>
+              </a:effectRef>
+              <a:fontRef idx="minor">
+                <a:schemeClr val="lt1"/>
+              </a:fontRef>
+            </p:style>
+            <p:txBody>
+              <a:bodyPr rtlCol="0" anchor="ctr"/>
+              <a:lstStyle/>
+              <a:p>
+                <a:pPr algn="ctr"/>
+                <a:endParaRPr lang="zh-TW" altLang="en-US" sz="2000" dirty="0">
+                  <a:solidFill>
+                    <a:schemeClr val="bg1"/>
+                  </a:solidFill>
+                </a:endParaRPr>
+              </a:p>
+            </p:txBody>
+          </p:sp>
+        </p:grpSp>
+        <mc:AlternateContent xmlns:mc="http://schemas.openxmlformats.org/markup-compatibility/2006" xmlns:a14="http://schemas.microsoft.com/office/drawing/2010/main">
+          <mc:Choice Requires="a14">
+            <p:sp>
+              <p:nvSpPr>
+                <p:cNvPr id="287" name="文字方塊 286">
+                  <a:extLst>
+                    <a:ext uri="{FF2B5EF4-FFF2-40B4-BE49-F238E27FC236}">
+                      <a16:creationId xmlns:a16="http://schemas.microsoft.com/office/drawing/2014/main" id="{8660AA69-DE20-4AA8-B17C-A7A2D9DDFDD9}"/>
+                    </a:ext>
+                  </a:extLst>
+                </p:cNvPr>
+                <p:cNvSpPr txBox="1"/>
+                <p:nvPr/>
+              </p:nvSpPr>
+              <p:spPr>
+                <a:xfrm>
+                  <a:off x="6583394" y="1501875"/>
+                  <a:ext cx="416137" cy="1086427"/>
+                </a:xfrm>
+                <a:prstGeom prst="rect">
+                  <a:avLst/>
+                </a:prstGeom>
+                <a:noFill/>
+              </p:spPr>
+              <p:txBody>
+                <a:bodyPr wrap="square" rtlCol="0">
+                  <a:spAutoFit/>
+                </a:bodyPr>
+                <a:lstStyle/>
+                <a:p>
+                  <a:pPr/>
+                  <a14:m>
+                    <m:oMathPara xmlns:m="http://schemas.openxmlformats.org/officeDocument/2006/math">
+                      <m:oMathParaPr>
+                        <m:jc m:val="centerGroup"/>
+                      </m:oMathParaPr>
+                      <m:oMath xmlns:m="http://schemas.openxmlformats.org/officeDocument/2006/math">
+                        <m:sSub>
+                          <m:sSubPr>
+                            <m:ctrlPr>
+                              <a:rPr lang="en-US" altLang="zh-TW" sz="2000" i="1">
+                                <a:solidFill>
+                                  <a:schemeClr val="bg1"/>
+                                </a:solidFill>
+                                <a:latin typeface="Cambria Math" panose="02040503050406030204" pitchFamily="18" charset="0"/>
+                              </a:rPr>
+                            </m:ctrlPr>
+                          </m:sSubPr>
+                          <m:e>
+                            <m:r>
+                              <a:rPr lang="en-US" altLang="zh-TW" sz="2000" i="1">
+                                <a:solidFill>
+                                  <a:schemeClr val="bg1"/>
+                                </a:solidFill>
+                                <a:latin typeface="Cambria Math" panose="02040503050406030204" pitchFamily="18" charset="0"/>
+                              </a:rPr>
+                              <m:t>𝑄</m:t>
+                            </m:r>
+                          </m:e>
+                          <m:sub>
+                            <m:r>
+                              <a:rPr lang="en-US" altLang="zh-TW" sz="2000" i="1">
+                                <a:solidFill>
+                                  <a:schemeClr val="bg1"/>
+                                </a:solidFill>
+                                <a:latin typeface="Cambria Math" panose="02040503050406030204" pitchFamily="18" charset="0"/>
+                              </a:rPr>
+                              <m:t>𝑦</m:t>
+                            </m:r>
+                          </m:sub>
+                        </m:sSub>
+                      </m:oMath>
+                    </m:oMathPara>
+                  </a14:m>
+                  <a:endParaRPr lang="en-US" altLang="zh-TW" sz="2000" dirty="0">
+                    <a:solidFill>
+                      <a:schemeClr val="bg1"/>
+                    </a:solidFill>
+                  </a:endParaRPr>
+                </a:p>
+              </p:txBody>
+            </p:sp>
+          </mc:Choice>
+          <mc:Fallback xmlns="">
+            <p:sp>
+              <p:nvSpPr>
+                <p:cNvPr id="287" name="文字方塊 286">
+                  <a:extLst>
+                    <a:ext uri="{FF2B5EF4-FFF2-40B4-BE49-F238E27FC236}">
+                      <a16:creationId xmlns:a16="http://schemas.microsoft.com/office/drawing/2014/main" id="{8660AA69-DE20-4AA8-B17C-A7A2D9DDFDD9}"/>
+                    </a:ext>
+                  </a:extLst>
+                </p:cNvPr>
+                <p:cNvSpPr txBox="1">
+                  <a:spLocks noRot="1" noChangeAspect="1" noMove="1" noResize="1" noEditPoints="1" noAdjustHandles="1" noChangeArrowheads="1" noChangeShapeType="1" noTextEdit="1"/>
+                </p:cNvSpPr>
+                <p:nvPr/>
+              </p:nvSpPr>
+              <p:spPr>
+                <a:xfrm>
+                  <a:off x="6583394" y="1501875"/>
+                  <a:ext cx="416137" cy="1086427"/>
+                </a:xfrm>
+                <a:prstGeom prst="rect">
+                  <a:avLst/>
+                </a:prstGeom>
+                <a:blipFill>
+                  <a:blip r:embed="rId3"/>
+                  <a:stretch>
+                    <a:fillRect l="-14815" r="-166667" b="-4286"/>
+                  </a:stretch>
+                </a:blipFill>
+              </p:spPr>
+              <p:txBody>
+                <a:bodyPr/>
+                <a:lstStyle/>
+                <a:p>
+                  <a:r>
+                    <a:rPr lang="zh-TW" altLang="en-US">
+                      <a:noFill/>
+                    </a:rPr>
+                    <a:t> </a:t>
+                  </a:r>
+                </a:p>
+              </p:txBody>
+            </p:sp>
+          </mc:Fallback>
+        </mc:AlternateContent>
+        <mc:AlternateContent xmlns:mc="http://schemas.openxmlformats.org/markup-compatibility/2006" xmlns:a14="http://schemas.microsoft.com/office/drawing/2010/main">
+          <mc:Choice Requires="a14">
+            <p:sp>
+              <p:nvSpPr>
+                <p:cNvPr id="288" name="文字方塊 287">
+                  <a:extLst>
+                    <a:ext uri="{FF2B5EF4-FFF2-40B4-BE49-F238E27FC236}">
+                      <a16:creationId xmlns:a16="http://schemas.microsoft.com/office/drawing/2014/main" id="{1612911D-1B49-4BA9-8116-B49948A25B97}"/>
+                    </a:ext>
+                  </a:extLst>
+                </p:cNvPr>
+                <p:cNvSpPr txBox="1"/>
+                <p:nvPr/>
+              </p:nvSpPr>
+              <p:spPr>
+                <a:xfrm>
+                  <a:off x="7165989" y="2241866"/>
+                  <a:ext cx="1068086" cy="1024529"/>
+                </a:xfrm>
+                <a:prstGeom prst="rect">
+                  <a:avLst/>
+                </a:prstGeom>
+                <a:noFill/>
+              </p:spPr>
+              <p:txBody>
+                <a:bodyPr wrap="square" rtlCol="0">
+                  <a:spAutoFit/>
+                </a:bodyPr>
+                <a:lstStyle/>
+                <a:p>
+                  <a:pPr/>
+                  <a14:m>
+                    <m:oMathPara xmlns:m="http://schemas.openxmlformats.org/officeDocument/2006/math">
+                      <m:oMathParaPr>
+                        <m:jc m:val="centerGroup"/>
+                      </m:oMathParaPr>
+                      <m:oMath xmlns:m="http://schemas.openxmlformats.org/officeDocument/2006/math">
+                        <m:sSub>
+                          <m:sSubPr>
+                            <m:ctrlPr>
+                              <a:rPr lang="en-US" altLang="zh-TW" sz="2000" i="1">
+                                <a:solidFill>
+                                  <a:schemeClr val="bg1"/>
+                                </a:solidFill>
+                                <a:latin typeface="Cambria Math" panose="02040503050406030204" pitchFamily="18" charset="0"/>
+                              </a:rPr>
+                            </m:ctrlPr>
+                          </m:sSubPr>
+                          <m:e>
+                            <m:r>
+                              <a:rPr lang="en-US" altLang="zh-TW" sz="2000" i="1">
+                                <a:solidFill>
+                                  <a:schemeClr val="bg1"/>
+                                </a:solidFill>
+                                <a:latin typeface="Cambria Math" panose="02040503050406030204" pitchFamily="18" charset="0"/>
+                              </a:rPr>
+                              <m:t>𝑄</m:t>
+                            </m:r>
+                          </m:e>
+                          <m:sub>
+                            <m:r>
+                              <a:rPr lang="en-US" altLang="zh-TW" sz="2000" i="1">
+                                <a:solidFill>
+                                  <a:schemeClr val="bg1"/>
+                                </a:solidFill>
+                                <a:latin typeface="Cambria Math" panose="02040503050406030204" pitchFamily="18" charset="0"/>
+                              </a:rPr>
+                              <m:t>𝑥</m:t>
+                            </m:r>
+                          </m:sub>
+                        </m:sSub>
+                      </m:oMath>
+                    </m:oMathPara>
+                  </a14:m>
+                  <a:endParaRPr lang="en-US" altLang="zh-TW" sz="2000" dirty="0">
+                    <a:solidFill>
+                      <a:schemeClr val="bg1"/>
+                    </a:solidFill>
+                  </a:endParaRPr>
+                </a:p>
+              </p:txBody>
+            </p:sp>
+          </mc:Choice>
+          <mc:Fallback xmlns="">
+            <p:sp>
+              <p:nvSpPr>
+                <p:cNvPr id="288" name="文字方塊 287">
+                  <a:extLst>
+                    <a:ext uri="{FF2B5EF4-FFF2-40B4-BE49-F238E27FC236}">
+                      <a16:creationId xmlns:a16="http://schemas.microsoft.com/office/drawing/2014/main" id="{1612911D-1B49-4BA9-8116-B49948A25B97}"/>
+                    </a:ext>
+                  </a:extLst>
+                </p:cNvPr>
+                <p:cNvSpPr txBox="1">
+                  <a:spLocks noRot="1" noChangeAspect="1" noMove="1" noResize="1" noEditPoints="1" noAdjustHandles="1" noChangeArrowheads="1" noChangeShapeType="1" noTextEdit="1"/>
+                </p:cNvSpPr>
+                <p:nvPr/>
+              </p:nvSpPr>
+              <p:spPr>
+                <a:xfrm>
+                  <a:off x="7165989" y="2241866"/>
+                  <a:ext cx="1068086" cy="1024529"/>
+                </a:xfrm>
+                <a:prstGeom prst="rect">
+                  <a:avLst/>
+                </a:prstGeom>
+                <a:blipFill>
+                  <a:blip r:embed="rId4"/>
+                  <a:stretch>
+                    <a:fillRect l="-4412" b="-9091"/>
+                  </a:stretch>
+                </a:blipFill>
+              </p:spPr>
+              <p:txBody>
+                <a:bodyPr/>
+                <a:lstStyle/>
+                <a:p>
+                  <a:r>
+                    <a:rPr lang="zh-TW" altLang="en-US">
+                      <a:noFill/>
+                    </a:rPr>
+                    <a:t> </a:t>
+                  </a:r>
+                </a:p>
+              </p:txBody>
+            </p:sp>
+          </mc:Fallback>
+        </mc:AlternateContent>
+      </p:grpSp>
+      <mc:AlternateContent xmlns:mc="http://schemas.openxmlformats.org/markup-compatibility/2006" xmlns:a14="http://schemas.microsoft.com/office/drawing/2010/main">
+        <mc:Choice Requires="a14">
+          <p:sp>
+            <p:nvSpPr>
+              <p:cNvPr id="245" name="文字方塊 244">
+                <a:extLst>
+                  <a:ext uri="{FF2B5EF4-FFF2-40B4-BE49-F238E27FC236}">
+                    <a16:creationId xmlns:a16="http://schemas.microsoft.com/office/drawing/2014/main" id="{B62E15B4-AEBA-4A57-A261-01265B810C00}"/>
+                  </a:ext>
+                </a:extLst>
+              </p:cNvPr>
+              <p:cNvSpPr txBox="1"/>
+              <p:nvPr/>
+            </p:nvSpPr>
+            <p:spPr>
+              <a:xfrm>
+                <a:off x="4049777" y="2676656"/>
+                <a:ext cx="2067276" cy="507831"/>
+              </a:xfrm>
+              <a:prstGeom prst="rect">
+                <a:avLst/>
+              </a:prstGeom>
+              <a:noFill/>
+            </p:spPr>
+            <p:txBody>
+              <a:bodyPr wrap="square" rtlCol="0">
+                <a:spAutoFit/>
+              </a:bodyPr>
+              <a:lstStyle/>
+              <a:p>
+                <a:pPr/>
+                <a14:m>
+                  <m:oMathPara xmlns:m="http://schemas.openxmlformats.org/officeDocument/2006/math">
+                    <m:oMathParaPr>
+                      <m:jc m:val="centerGroup"/>
+                    </m:oMathParaPr>
+                    <m:oMath xmlns:m="http://schemas.openxmlformats.org/officeDocument/2006/math">
+                      <m:r>
+                        <a:rPr lang="en-US" altLang="zh-TW" sz="2700" i="1">
+                          <a:latin typeface="Cambria Math" panose="02040503050406030204" pitchFamily="18" charset="0"/>
+                        </a:rPr>
+                        <m:t>𝛼</m:t>
+                      </m:r>
+                      <m:r>
+                        <a:rPr lang="en-US" altLang="zh-TW" sz="2700" i="1">
+                          <a:latin typeface="Cambria Math" panose="02040503050406030204" pitchFamily="18" charset="0"/>
+                        </a:rPr>
+                        <m:t>=0</m:t>
+                      </m:r>
+                    </m:oMath>
+                  </m:oMathPara>
+                </a14:m>
+                <a:endParaRPr lang="zh-TW" altLang="en-US" sz="2700" dirty="0"/>
+              </a:p>
+            </p:txBody>
+          </p:sp>
+        </mc:Choice>
+        <mc:Fallback xmlns="">
+          <p:sp>
+            <p:nvSpPr>
+              <p:cNvPr id="245" name="文字方塊 244">
+                <a:extLst>
+                  <a:ext uri="{FF2B5EF4-FFF2-40B4-BE49-F238E27FC236}">
+                    <a16:creationId xmlns:a16="http://schemas.microsoft.com/office/drawing/2014/main" id="{B62E15B4-AEBA-4A57-A261-01265B810C00}"/>
+                  </a:ext>
+                </a:extLst>
+              </p:cNvPr>
+              <p:cNvSpPr txBox="1">
+                <a:spLocks noRot="1" noChangeAspect="1" noMove="1" noResize="1" noEditPoints="1" noAdjustHandles="1" noChangeArrowheads="1" noChangeShapeType="1" noTextEdit="1"/>
+              </p:cNvSpPr>
+              <p:nvPr/>
+            </p:nvSpPr>
+            <p:spPr>
+              <a:xfrm>
+                <a:off x="4049777" y="2676656"/>
+                <a:ext cx="2067276" cy="507831"/>
+              </a:xfrm>
+              <a:prstGeom prst="rect">
+                <a:avLst/>
+              </a:prstGeom>
+              <a:blipFill>
+                <a:blip r:embed="rId5"/>
+                <a:stretch>
+                  <a:fillRect/>
+                </a:stretch>
+              </a:blipFill>
+            </p:spPr>
+            <p:txBody>
+              <a:bodyPr/>
+              <a:lstStyle/>
+              <a:p>
+                <a:r>
+                  <a:rPr lang="zh-TW" altLang="en-US">
+                    <a:noFill/>
+                  </a:rPr>
+                  <a:t> </a:t>
+                </a:r>
+              </a:p>
+            </p:txBody>
+          </p:sp>
+        </mc:Fallback>
+      </mc:AlternateContent>
+      <p:pic>
+        <p:nvPicPr>
+          <p:cNvPr id="246" name="圖片 245">
+            <a:extLst>
+              <a:ext uri="{FF2B5EF4-FFF2-40B4-BE49-F238E27FC236}">
+                <a16:creationId xmlns:a16="http://schemas.microsoft.com/office/drawing/2014/main" id="{F84D42A7-F32D-4C69-B1E2-DDD2B71DA878}"/>
+              </a:ext>
+            </a:extLst>
+          </p:cNvPr>
+          <p:cNvPicPr>
+            <a:picLocks noChangeAspect="1"/>
+          </p:cNvPicPr>
+          <p:nvPr/>
+        </p:nvPicPr>
+        <p:blipFill rotWithShape="1">
+          <a:blip r:embed="rId6">
+            <a:clrChange>
+              <a:clrFrom>
+                <a:srgbClr val="FFFFFF"/>
+              </a:clrFrom>
+              <a:clrTo>
+                <a:srgbClr val="FFFFFF">
+                  <a:alpha val="0"/>
+                </a:srgbClr>
+              </a:clrTo>
+            </a:clrChange>
+          </a:blip>
+          <a:srcRect b="64376"/>
+          <a:stretch/>
+        </p:blipFill>
+        <p:spPr>
+          <a:xfrm>
+            <a:off x="4593819" y="366887"/>
+            <a:ext cx="885827" cy="444781"/>
+          </a:xfrm>
+          <a:prstGeom prst="rect">
+            <a:avLst/>
+          </a:prstGeom>
+        </p:spPr>
+      </p:pic>
+      <p:pic>
+        <p:nvPicPr>
+          <p:cNvPr id="247" name="圖片 246">
+            <a:extLst>
+              <a:ext uri="{FF2B5EF4-FFF2-40B4-BE49-F238E27FC236}">
+                <a16:creationId xmlns:a16="http://schemas.microsoft.com/office/drawing/2014/main" id="{AF377790-04D8-4346-8343-9D24B761AC58}"/>
+              </a:ext>
+            </a:extLst>
+          </p:cNvPr>
+          <p:cNvPicPr>
+            <a:picLocks noChangeAspect="1"/>
+          </p:cNvPicPr>
+          <p:nvPr/>
+        </p:nvPicPr>
+        <p:blipFill rotWithShape="1">
+          <a:blip r:embed="rId6">
+            <a:clrChange>
+              <a:clrFrom>
+                <a:srgbClr val="FFFFFF"/>
+              </a:clrFrom>
+              <a:clrTo>
+                <a:srgbClr val="FFFFFF">
+                  <a:alpha val="0"/>
+                </a:srgbClr>
+              </a:clrTo>
+            </a:clrChange>
+          </a:blip>
+          <a:srcRect t="65870"/>
+          <a:stretch/>
+        </p:blipFill>
+        <p:spPr>
+          <a:xfrm>
+            <a:off x="6509683" y="387222"/>
+            <a:ext cx="885825" cy="426121"/>
+          </a:xfrm>
+          <a:prstGeom prst="rect">
+            <a:avLst/>
+          </a:prstGeom>
+        </p:spPr>
+      </p:pic>
+      <p:grpSp>
+        <p:nvGrpSpPr>
+          <p:cNvPr id="248" name="群組 247">
+            <a:extLst>
+              <a:ext uri="{FF2B5EF4-FFF2-40B4-BE49-F238E27FC236}">
+                <a16:creationId xmlns:a16="http://schemas.microsoft.com/office/drawing/2014/main" id="{41602E3C-AA3E-4345-B429-5D883D926D8E}"/>
+              </a:ext>
+            </a:extLst>
+          </p:cNvPr>
+          <p:cNvGrpSpPr/>
+          <p:nvPr/>
+        </p:nvGrpSpPr>
+        <p:grpSpPr>
+          <a:xfrm>
+            <a:off x="4125713" y="813304"/>
+            <a:ext cx="1825190" cy="1825188"/>
+            <a:chOff x="5094694" y="9823325"/>
+            <a:chExt cx="2090057" cy="2090057"/>
+          </a:xfrm>
+        </p:grpSpPr>
+        <p:sp>
+          <p:nvSpPr>
+            <p:cNvPr id="277" name="矩形: 圓角 276">
+              <a:extLst>
+                <a:ext uri="{FF2B5EF4-FFF2-40B4-BE49-F238E27FC236}">
+                  <a16:creationId xmlns:a16="http://schemas.microsoft.com/office/drawing/2014/main" id="{59B7A56C-DE16-4A97-820D-D4F720D3F8C8}"/>
+                </a:ext>
+              </a:extLst>
+            </p:cNvPr>
+            <p:cNvSpPr/>
+            <p:nvPr/>
+          </p:nvSpPr>
+          <p:spPr>
+            <a:xfrm>
+              <a:off x="5094694" y="9823325"/>
+              <a:ext cx="2090057" cy="2090057"/>
+            </a:xfrm>
+            <a:prstGeom prst="roundRect">
+              <a:avLst/>
+            </a:prstGeom>
+            <a:solidFill>
+              <a:schemeClr val="tx1">
+                <a:lumMod val="65000"/>
+                <a:lumOff val="35000"/>
+              </a:schemeClr>
+            </a:solidFill>
+          </p:spPr>
+          <p:style>
+            <a:lnRef idx="0">
+              <a:schemeClr val="accent3"/>
+            </a:lnRef>
+            <a:fillRef idx="3">
+              <a:schemeClr val="accent3"/>
+            </a:fillRef>
+            <a:effectRef idx="3">
+              <a:schemeClr val="accent3"/>
+            </a:effectRef>
+            <a:fontRef idx="minor">
+              <a:schemeClr val="lt1"/>
+            </a:fontRef>
+          </p:style>
+          <p:txBody>
+            <a:bodyPr rot="0" spcFirstLastPara="0" vertOverflow="overflow" horzOverflow="overflow" vert="horz" wrap="square" lIns="96775" tIns="48386" rIns="96775" bIns="48386" numCol="1" spcCol="0" rtlCol="0" fromWordArt="0" anchor="ctr" anchorCtr="0" forceAA="0" compatLnSpc="1">
+              <a:prstTxWarp prst="textNoShape">
+                <a:avLst/>
+              </a:prstTxWarp>
+              <a:noAutofit/>
+            </a:bodyPr>
+            <a:lstStyle/>
+            <a:p>
+              <a:pPr algn="ctr"/>
+              <a:endParaRPr lang="zh-TW" altLang="en-US" sz="2700" dirty="0"/>
+            </a:p>
+          </p:txBody>
+        </p:sp>
+        <p:sp>
+          <p:nvSpPr>
+            <p:cNvPr id="278" name="箭號: 向右 277">
+              <a:extLst>
+                <a:ext uri="{FF2B5EF4-FFF2-40B4-BE49-F238E27FC236}">
+                  <a16:creationId xmlns:a16="http://schemas.microsoft.com/office/drawing/2014/main" id="{0324788E-D4A2-4FA3-91ED-E50617935210}"/>
+                </a:ext>
+              </a:extLst>
+            </p:cNvPr>
+            <p:cNvSpPr/>
+            <p:nvPr/>
+          </p:nvSpPr>
+          <p:spPr>
+            <a:xfrm rot="16200000">
+              <a:off x="5922594" y="10096014"/>
+              <a:ext cx="432000" cy="219600"/>
+            </a:xfrm>
+            <a:prstGeom prst="rightArrow">
+              <a:avLst>
+                <a:gd name="adj1" fmla="val 41325"/>
+                <a:gd name="adj2" fmla="val 50000"/>
+              </a:avLst>
+            </a:prstGeom>
+            <a:solidFill>
+              <a:srgbClr val="FF0000"/>
+            </a:solidFill>
+          </p:spPr>
+          <p:style>
+            <a:lnRef idx="0">
+              <a:schemeClr val="accent2"/>
+            </a:lnRef>
+            <a:fillRef idx="3">
+              <a:schemeClr val="accent2"/>
+            </a:fillRef>
+            <a:effectRef idx="3">
+              <a:schemeClr val="accent2"/>
+            </a:effectRef>
+            <a:fontRef idx="minor">
+              <a:schemeClr val="lt1"/>
+            </a:fontRef>
+          </p:style>
+          <p:txBody>
+            <a:bodyPr rot="0" spcFirstLastPara="0" vertOverflow="overflow" horzOverflow="overflow" vert="horz" wrap="square" lIns="96775" tIns="48386" rIns="96775" bIns="48386" numCol="1" spcCol="0" rtlCol="0" fromWordArt="0" anchor="ctr" anchorCtr="0" forceAA="0" compatLnSpc="1">
+              <a:prstTxWarp prst="textNoShape">
+                <a:avLst/>
+              </a:prstTxWarp>
+              <a:noAutofit/>
+            </a:bodyPr>
+            <a:lstStyle/>
+            <a:p>
+              <a:pPr algn="ctr"/>
+              <a:endParaRPr lang="zh-TW" altLang="en-US" sz="2700"/>
+            </a:p>
+          </p:txBody>
+        </p:sp>
+        <p:sp>
+          <p:nvSpPr>
+            <p:cNvPr id="279" name="箭號: 向右 278">
+              <a:extLst>
+                <a:ext uri="{FF2B5EF4-FFF2-40B4-BE49-F238E27FC236}">
+                  <a16:creationId xmlns:a16="http://schemas.microsoft.com/office/drawing/2014/main" id="{371A157E-54C5-4EDF-ACEA-7A90B08A1630}"/>
+                </a:ext>
+              </a:extLst>
+            </p:cNvPr>
+            <p:cNvSpPr/>
+            <p:nvPr/>
+          </p:nvSpPr>
+          <p:spPr>
+            <a:xfrm rot="-2700000">
+              <a:off x="6368008" y="10346626"/>
+              <a:ext cx="432000" cy="219600"/>
+            </a:xfrm>
+            <a:prstGeom prst="rightArrow">
+              <a:avLst>
+                <a:gd name="adj1" fmla="val 41325"/>
+                <a:gd name="adj2" fmla="val 50000"/>
+              </a:avLst>
+            </a:prstGeom>
+            <a:solidFill>
+              <a:srgbClr val="FF0000"/>
+            </a:solidFill>
+          </p:spPr>
+          <p:style>
+            <a:lnRef idx="0">
+              <a:schemeClr val="accent2"/>
+            </a:lnRef>
+            <a:fillRef idx="3">
+              <a:schemeClr val="accent2"/>
+            </a:fillRef>
+            <a:effectRef idx="3">
+              <a:schemeClr val="accent2"/>
+            </a:effectRef>
+            <a:fontRef idx="minor">
+              <a:schemeClr val="lt1"/>
+            </a:fontRef>
+          </p:style>
+          <p:txBody>
+            <a:bodyPr rot="0" spcFirstLastPara="0" vertOverflow="overflow" horzOverflow="overflow" vert="horz" wrap="square" lIns="96775" tIns="48386" rIns="96775" bIns="48386" numCol="1" spcCol="0" rtlCol="0" fromWordArt="0" anchor="ctr" anchorCtr="0" forceAA="0" compatLnSpc="1">
+              <a:prstTxWarp prst="textNoShape">
+                <a:avLst/>
+              </a:prstTxWarp>
+              <a:noAutofit/>
+            </a:bodyPr>
+            <a:lstStyle/>
+            <a:p>
+              <a:pPr algn="ctr"/>
+              <a:endParaRPr lang="zh-TW" altLang="en-US" sz="2700"/>
+            </a:p>
+          </p:txBody>
+        </p:sp>
+        <p:sp>
+          <p:nvSpPr>
+            <p:cNvPr id="280" name="箭號: 向右 279">
+              <a:extLst>
+                <a:ext uri="{FF2B5EF4-FFF2-40B4-BE49-F238E27FC236}">
+                  <a16:creationId xmlns:a16="http://schemas.microsoft.com/office/drawing/2014/main" id="{ECED82F6-3367-42E7-B293-071EBDCAC8BF}"/>
+                </a:ext>
+              </a:extLst>
+            </p:cNvPr>
+            <p:cNvSpPr/>
+            <p:nvPr/>
+          </p:nvSpPr>
+          <p:spPr>
+            <a:xfrm rot="13500000">
+              <a:off x="5487334" y="10363166"/>
+              <a:ext cx="432000" cy="219600"/>
+            </a:xfrm>
+            <a:prstGeom prst="rightArrow">
+              <a:avLst>
+                <a:gd name="adj1" fmla="val 41325"/>
+                <a:gd name="adj2" fmla="val 50000"/>
+              </a:avLst>
+            </a:prstGeom>
+            <a:solidFill>
+              <a:srgbClr val="FF0000"/>
+            </a:solidFill>
+          </p:spPr>
+          <p:style>
+            <a:lnRef idx="0">
+              <a:schemeClr val="accent2"/>
+            </a:lnRef>
+            <a:fillRef idx="3">
+              <a:schemeClr val="accent2"/>
+            </a:fillRef>
+            <a:effectRef idx="3">
+              <a:schemeClr val="accent2"/>
+            </a:effectRef>
+            <a:fontRef idx="minor">
+              <a:schemeClr val="lt1"/>
+            </a:fontRef>
+          </p:style>
+          <p:txBody>
+            <a:bodyPr rot="0" spcFirstLastPara="0" vertOverflow="overflow" horzOverflow="overflow" vert="horz" wrap="square" lIns="96775" tIns="48386" rIns="96775" bIns="48386" numCol="1" spcCol="0" rtlCol="0" fromWordArt="0" anchor="ctr" anchorCtr="0" forceAA="0" compatLnSpc="1">
+              <a:prstTxWarp prst="textNoShape">
+                <a:avLst/>
+              </a:prstTxWarp>
+              <a:noAutofit/>
+            </a:bodyPr>
+            <a:lstStyle/>
+            <a:p>
+              <a:pPr algn="ctr"/>
+              <a:endParaRPr lang="zh-TW" altLang="en-US" sz="2700"/>
+            </a:p>
+          </p:txBody>
+        </p:sp>
+        <p:sp>
+          <p:nvSpPr>
+            <p:cNvPr id="281" name="箭號: 向右 280">
+              <a:extLst>
+                <a:ext uri="{FF2B5EF4-FFF2-40B4-BE49-F238E27FC236}">
+                  <a16:creationId xmlns:a16="http://schemas.microsoft.com/office/drawing/2014/main" id="{CA648331-A619-45FB-91BE-FAB9C69EDA58}"/>
+                </a:ext>
+              </a:extLst>
+            </p:cNvPr>
+            <p:cNvSpPr/>
+            <p:nvPr/>
+          </p:nvSpPr>
+          <p:spPr>
+            <a:xfrm>
+              <a:off x="6589978" y="10758553"/>
+              <a:ext cx="432000" cy="219600"/>
+            </a:xfrm>
+            <a:prstGeom prst="rightArrow">
+              <a:avLst>
+                <a:gd name="adj1" fmla="val 41325"/>
+                <a:gd name="adj2" fmla="val 50000"/>
+              </a:avLst>
+            </a:prstGeom>
+            <a:solidFill>
+              <a:srgbClr val="FF0000"/>
+            </a:solidFill>
+          </p:spPr>
+          <p:style>
+            <a:lnRef idx="0">
+              <a:schemeClr val="accent2"/>
+            </a:lnRef>
+            <a:fillRef idx="3">
+              <a:schemeClr val="accent2"/>
+            </a:fillRef>
+            <a:effectRef idx="3">
+              <a:schemeClr val="accent2"/>
+            </a:effectRef>
+            <a:fontRef idx="minor">
+              <a:schemeClr val="lt1"/>
+            </a:fontRef>
+          </p:style>
+          <p:txBody>
+            <a:bodyPr rot="0" spcFirstLastPara="0" vertOverflow="overflow" horzOverflow="overflow" vert="horz" wrap="square" lIns="96775" tIns="48386" rIns="96775" bIns="48386" numCol="1" spcCol="0" rtlCol="0" fromWordArt="0" anchor="ctr" anchorCtr="0" forceAA="0" compatLnSpc="1">
+              <a:prstTxWarp prst="textNoShape">
+                <a:avLst/>
+              </a:prstTxWarp>
+              <a:noAutofit/>
+            </a:bodyPr>
+            <a:lstStyle/>
+            <a:p>
+              <a:pPr algn="ctr"/>
+              <a:endParaRPr lang="zh-TW" altLang="en-US" sz="2700"/>
+            </a:p>
+          </p:txBody>
+        </p:sp>
+        <p:sp>
+          <p:nvSpPr>
+            <p:cNvPr id="282" name="箭號: 向右 281">
+              <a:extLst>
+                <a:ext uri="{FF2B5EF4-FFF2-40B4-BE49-F238E27FC236}">
+                  <a16:creationId xmlns:a16="http://schemas.microsoft.com/office/drawing/2014/main" id="{D3F5D45A-9B3F-4759-A160-16138179ABF1}"/>
+                </a:ext>
+              </a:extLst>
+            </p:cNvPr>
+            <p:cNvSpPr/>
+            <p:nvPr/>
+          </p:nvSpPr>
+          <p:spPr>
+            <a:xfrm rot="10800000">
+              <a:off x="5286786" y="10758553"/>
+              <a:ext cx="432000" cy="219600"/>
+            </a:xfrm>
+            <a:prstGeom prst="rightArrow">
+              <a:avLst>
+                <a:gd name="adj1" fmla="val 41325"/>
+                <a:gd name="adj2" fmla="val 50000"/>
+              </a:avLst>
+            </a:prstGeom>
+            <a:solidFill>
+              <a:srgbClr val="FF0000"/>
+            </a:solidFill>
+          </p:spPr>
+          <p:style>
+            <a:lnRef idx="0">
+              <a:schemeClr val="accent2"/>
+            </a:lnRef>
+            <a:fillRef idx="3">
+              <a:schemeClr val="accent2"/>
+            </a:fillRef>
+            <a:effectRef idx="3">
+              <a:schemeClr val="accent2"/>
+            </a:effectRef>
+            <a:fontRef idx="minor">
+              <a:schemeClr val="lt1"/>
+            </a:fontRef>
+          </p:style>
+          <p:txBody>
+            <a:bodyPr rot="0" spcFirstLastPara="0" vertOverflow="overflow" horzOverflow="overflow" vert="horz" wrap="square" lIns="96775" tIns="48386" rIns="96775" bIns="48386" numCol="1" spcCol="0" rtlCol="0" fromWordArt="0" anchor="ctr" anchorCtr="0" forceAA="0" compatLnSpc="1">
+              <a:prstTxWarp prst="textNoShape">
+                <a:avLst/>
+              </a:prstTxWarp>
+              <a:noAutofit/>
+            </a:bodyPr>
+            <a:lstStyle/>
+            <a:p>
+              <a:pPr algn="ctr"/>
+              <a:endParaRPr lang="zh-TW" altLang="en-US" sz="2700"/>
+            </a:p>
+          </p:txBody>
+        </p:sp>
+        <p:sp>
+          <p:nvSpPr>
+            <p:cNvPr id="283" name="箭號: 向右 282">
+              <a:extLst>
+                <a:ext uri="{FF2B5EF4-FFF2-40B4-BE49-F238E27FC236}">
+                  <a16:creationId xmlns:a16="http://schemas.microsoft.com/office/drawing/2014/main" id="{47D3164A-9750-4A6E-9CE9-BF0AA4C0A973}"/>
+                </a:ext>
+              </a:extLst>
+            </p:cNvPr>
+            <p:cNvSpPr/>
+            <p:nvPr/>
+          </p:nvSpPr>
+          <p:spPr>
+            <a:xfrm rot="2700000">
+              <a:off x="6368007" y="11203875"/>
+              <a:ext cx="432000" cy="219600"/>
+            </a:xfrm>
+            <a:prstGeom prst="rightArrow">
+              <a:avLst>
+                <a:gd name="adj1" fmla="val 41325"/>
+                <a:gd name="adj2" fmla="val 50000"/>
+              </a:avLst>
+            </a:prstGeom>
+            <a:solidFill>
+              <a:srgbClr val="FF0000"/>
+            </a:solidFill>
+          </p:spPr>
+          <p:style>
+            <a:lnRef idx="0">
+              <a:schemeClr val="accent2"/>
+            </a:lnRef>
+            <a:fillRef idx="3">
+              <a:schemeClr val="accent2"/>
+            </a:fillRef>
+            <a:effectRef idx="3">
+              <a:schemeClr val="accent2"/>
+            </a:effectRef>
+            <a:fontRef idx="minor">
+              <a:schemeClr val="lt1"/>
+            </a:fontRef>
+          </p:style>
+          <p:txBody>
+            <a:bodyPr rot="0" spcFirstLastPara="0" vertOverflow="overflow" horzOverflow="overflow" vert="horz" wrap="square" lIns="96775" tIns="48386" rIns="96775" bIns="48386" numCol="1" spcCol="0" rtlCol="0" fromWordArt="0" anchor="ctr" anchorCtr="0" forceAA="0" compatLnSpc="1">
+              <a:prstTxWarp prst="textNoShape">
+                <a:avLst/>
+              </a:prstTxWarp>
+              <a:noAutofit/>
+            </a:bodyPr>
+            <a:lstStyle/>
+            <a:p>
+              <a:pPr algn="ctr"/>
+              <a:endParaRPr lang="zh-TW" altLang="en-US" sz="2700"/>
+            </a:p>
+          </p:txBody>
+        </p:sp>
+        <p:sp>
+          <p:nvSpPr>
+            <p:cNvPr id="284" name="箭號: 向右 283">
+              <a:extLst>
+                <a:ext uri="{FF2B5EF4-FFF2-40B4-BE49-F238E27FC236}">
+                  <a16:creationId xmlns:a16="http://schemas.microsoft.com/office/drawing/2014/main" id="{48988AC5-587D-4F26-9730-71735FFAC874}"/>
+                </a:ext>
+              </a:extLst>
+            </p:cNvPr>
+            <p:cNvSpPr/>
+            <p:nvPr/>
+          </p:nvSpPr>
+          <p:spPr>
+            <a:xfrm rot="8100000">
+              <a:off x="5487333" y="11203875"/>
+              <a:ext cx="432000" cy="219600"/>
+            </a:xfrm>
+            <a:prstGeom prst="rightArrow">
+              <a:avLst>
+                <a:gd name="adj1" fmla="val 41325"/>
+                <a:gd name="adj2" fmla="val 50000"/>
+              </a:avLst>
+            </a:prstGeom>
+            <a:solidFill>
+              <a:srgbClr val="FF0000"/>
+            </a:solidFill>
+          </p:spPr>
+          <p:style>
+            <a:lnRef idx="0">
+              <a:schemeClr val="accent2"/>
+            </a:lnRef>
+            <a:fillRef idx="3">
+              <a:schemeClr val="accent2"/>
+            </a:fillRef>
+            <a:effectRef idx="3">
+              <a:schemeClr val="accent2"/>
+            </a:effectRef>
+            <a:fontRef idx="minor">
+              <a:schemeClr val="lt1"/>
+            </a:fontRef>
+          </p:style>
+          <p:txBody>
+            <a:bodyPr rot="0" spcFirstLastPara="0" vertOverflow="overflow" horzOverflow="overflow" vert="horz" wrap="square" lIns="96775" tIns="48386" rIns="96775" bIns="48386" numCol="1" spcCol="0" rtlCol="0" fromWordArt="0" anchor="ctr" anchorCtr="0" forceAA="0" compatLnSpc="1">
+              <a:prstTxWarp prst="textNoShape">
+                <a:avLst/>
+              </a:prstTxWarp>
+              <a:noAutofit/>
+            </a:bodyPr>
+            <a:lstStyle/>
+            <a:p>
+              <a:pPr algn="ctr"/>
+              <a:endParaRPr lang="zh-TW" altLang="en-US" sz="2700" dirty="0"/>
+            </a:p>
+          </p:txBody>
+        </p:sp>
+        <p:sp>
+          <p:nvSpPr>
+            <p:cNvPr id="285" name="箭號: 向右 284">
+              <a:extLst>
+                <a:ext uri="{FF2B5EF4-FFF2-40B4-BE49-F238E27FC236}">
+                  <a16:creationId xmlns:a16="http://schemas.microsoft.com/office/drawing/2014/main" id="{CA8779FA-438C-48B8-94F8-3912960E1004}"/>
+                </a:ext>
+              </a:extLst>
+            </p:cNvPr>
+            <p:cNvSpPr/>
+            <p:nvPr/>
+          </p:nvSpPr>
+          <p:spPr>
+            <a:xfrm rot="5400000">
+              <a:off x="5922594" y="11427961"/>
+              <a:ext cx="432000" cy="219600"/>
+            </a:xfrm>
+            <a:prstGeom prst="rightArrow">
+              <a:avLst>
+                <a:gd name="adj1" fmla="val 41325"/>
+                <a:gd name="adj2" fmla="val 50000"/>
+              </a:avLst>
+            </a:prstGeom>
+            <a:solidFill>
+              <a:srgbClr val="FF0000"/>
+            </a:solidFill>
+          </p:spPr>
+          <p:style>
+            <a:lnRef idx="0">
+              <a:schemeClr val="accent2"/>
+            </a:lnRef>
+            <a:fillRef idx="3">
+              <a:schemeClr val="accent2"/>
+            </a:fillRef>
+            <a:effectRef idx="3">
+              <a:schemeClr val="accent2"/>
+            </a:effectRef>
+            <a:fontRef idx="minor">
+              <a:schemeClr val="lt1"/>
+            </a:fontRef>
+          </p:style>
+          <p:txBody>
+            <a:bodyPr rot="0" spcFirstLastPara="0" vertOverflow="overflow" horzOverflow="overflow" vert="horz" wrap="square" lIns="96775" tIns="48386" rIns="96775" bIns="48386" numCol="1" spcCol="0" rtlCol="0" fromWordArt="0" anchor="ctr" anchorCtr="0" forceAA="0" compatLnSpc="1">
+              <a:prstTxWarp prst="textNoShape">
+                <a:avLst/>
+              </a:prstTxWarp>
+              <a:noAutofit/>
+            </a:bodyPr>
+            <a:lstStyle/>
+            <a:p>
+              <a:pPr algn="ctr"/>
+              <a:endParaRPr lang="zh-TW" altLang="en-US" sz="2700"/>
+            </a:p>
+          </p:txBody>
+        </p:sp>
+      </p:grpSp>
+      <p:grpSp>
+        <p:nvGrpSpPr>
+          <p:cNvPr id="249" name="群組 248">
+            <a:extLst>
+              <a:ext uri="{FF2B5EF4-FFF2-40B4-BE49-F238E27FC236}">
+                <a16:creationId xmlns:a16="http://schemas.microsoft.com/office/drawing/2014/main" id="{12956D8C-AA53-4FB2-B00C-D3E0CC6B58DD}"/>
+              </a:ext>
+            </a:extLst>
+          </p:cNvPr>
+          <p:cNvGrpSpPr/>
+          <p:nvPr/>
+        </p:nvGrpSpPr>
+        <p:grpSpPr>
+          <a:xfrm>
+            <a:off x="6088418" y="813304"/>
+            <a:ext cx="1825190" cy="1825188"/>
+            <a:chOff x="7828725" y="9933124"/>
+            <a:chExt cx="2090057" cy="2090057"/>
+          </a:xfrm>
+        </p:grpSpPr>
+        <p:sp>
+          <p:nvSpPr>
+            <p:cNvPr id="268" name="矩形: 圓角 267">
+              <a:extLst>
+                <a:ext uri="{FF2B5EF4-FFF2-40B4-BE49-F238E27FC236}">
+                  <a16:creationId xmlns:a16="http://schemas.microsoft.com/office/drawing/2014/main" id="{7366A057-59FC-44FD-B35D-2EFD893D8A33}"/>
+                </a:ext>
+              </a:extLst>
+            </p:cNvPr>
+            <p:cNvSpPr/>
+            <p:nvPr/>
+          </p:nvSpPr>
+          <p:spPr>
+            <a:xfrm>
+              <a:off x="7828725" y="9933124"/>
+              <a:ext cx="2090057" cy="2090057"/>
+            </a:xfrm>
+            <a:prstGeom prst="roundRect">
+              <a:avLst/>
+            </a:prstGeom>
+            <a:solidFill>
+              <a:schemeClr val="tx1">
+                <a:lumMod val="65000"/>
+                <a:lumOff val="35000"/>
+              </a:schemeClr>
+            </a:solidFill>
+          </p:spPr>
+          <p:style>
+            <a:lnRef idx="0">
+              <a:schemeClr val="accent3"/>
+            </a:lnRef>
+            <a:fillRef idx="3">
+              <a:schemeClr val="accent3"/>
+            </a:fillRef>
+            <a:effectRef idx="3">
+              <a:schemeClr val="accent3"/>
+            </a:effectRef>
+            <a:fontRef idx="minor">
+              <a:schemeClr val="lt1"/>
+            </a:fontRef>
+          </p:style>
+          <p:txBody>
+            <a:bodyPr rot="0" spcFirstLastPara="0" vertOverflow="overflow" horzOverflow="overflow" vert="horz" wrap="square" lIns="96775" tIns="48386" rIns="96775" bIns="48386" numCol="1" spcCol="0" rtlCol="0" fromWordArt="0" anchor="ctr" anchorCtr="0" forceAA="0" compatLnSpc="1">
+              <a:prstTxWarp prst="textNoShape">
+                <a:avLst/>
+              </a:prstTxWarp>
+              <a:noAutofit/>
+            </a:bodyPr>
+            <a:lstStyle/>
+            <a:p>
+              <a:pPr algn="ctr"/>
+              <a:endParaRPr lang="zh-TW" altLang="en-US" sz="2700" dirty="0"/>
+            </a:p>
+          </p:txBody>
+        </p:sp>
+        <p:sp>
+          <p:nvSpPr>
+            <p:cNvPr id="269" name="箭號: 向右 268">
+              <a:extLst>
+                <a:ext uri="{FF2B5EF4-FFF2-40B4-BE49-F238E27FC236}">
+                  <a16:creationId xmlns:a16="http://schemas.microsoft.com/office/drawing/2014/main" id="{EF97A19E-CDC2-4C59-8E31-DE12F1049C44}"/>
+                </a:ext>
+              </a:extLst>
+            </p:cNvPr>
+            <p:cNvSpPr/>
+            <p:nvPr/>
+          </p:nvSpPr>
+          <p:spPr>
+            <a:xfrm rot="10800000">
+              <a:off x="8656625" y="10205813"/>
+              <a:ext cx="432000" cy="219600"/>
+            </a:xfrm>
+            <a:prstGeom prst="rightArrow">
+              <a:avLst>
+                <a:gd name="adj1" fmla="val 41325"/>
+                <a:gd name="adj2" fmla="val 50000"/>
+              </a:avLst>
+            </a:prstGeom>
+            <a:solidFill>
+              <a:srgbClr val="00B0F0"/>
+            </a:solidFill>
+          </p:spPr>
+          <p:style>
+            <a:lnRef idx="0">
+              <a:schemeClr val="accent2"/>
+            </a:lnRef>
+            <a:fillRef idx="3">
+              <a:schemeClr val="accent2"/>
+            </a:fillRef>
+            <a:effectRef idx="3">
+              <a:schemeClr val="accent2"/>
+            </a:effectRef>
+            <a:fontRef idx="minor">
+              <a:schemeClr val="lt1"/>
+            </a:fontRef>
+          </p:style>
+          <p:txBody>
+            <a:bodyPr rot="0" spcFirstLastPara="0" vertOverflow="overflow" horzOverflow="overflow" vert="horz" wrap="square" lIns="96775" tIns="48386" rIns="96775" bIns="48386" numCol="1" spcCol="0" rtlCol="0" fromWordArt="0" anchor="ctr" anchorCtr="0" forceAA="0" compatLnSpc="1">
+              <a:prstTxWarp prst="textNoShape">
+                <a:avLst/>
+              </a:prstTxWarp>
+              <a:noAutofit/>
+            </a:bodyPr>
+            <a:lstStyle/>
+            <a:p>
+              <a:pPr algn="ctr"/>
+              <a:endParaRPr lang="zh-TW" altLang="en-US" sz="2700"/>
+            </a:p>
+          </p:txBody>
+        </p:sp>
+        <p:sp>
+          <p:nvSpPr>
+            <p:cNvPr id="270" name="箭號: 向右 269">
+              <a:extLst>
+                <a:ext uri="{FF2B5EF4-FFF2-40B4-BE49-F238E27FC236}">
+                  <a16:creationId xmlns:a16="http://schemas.microsoft.com/office/drawing/2014/main" id="{D42EEE51-CAA3-4A4C-90CB-1249AD7A8681}"/>
+                </a:ext>
+              </a:extLst>
+            </p:cNvPr>
+            <p:cNvSpPr/>
+            <p:nvPr/>
+          </p:nvSpPr>
+          <p:spPr>
+            <a:xfrm rot="13500000">
+              <a:off x="9102038" y="10464695"/>
+              <a:ext cx="432000" cy="219600"/>
+            </a:xfrm>
+            <a:prstGeom prst="rightArrow">
+              <a:avLst>
+                <a:gd name="adj1" fmla="val 41325"/>
+                <a:gd name="adj2" fmla="val 50000"/>
+              </a:avLst>
+            </a:prstGeom>
+            <a:solidFill>
+              <a:srgbClr val="00B0F0"/>
+            </a:solidFill>
+          </p:spPr>
+          <p:style>
+            <a:lnRef idx="0">
+              <a:schemeClr val="accent2"/>
+            </a:lnRef>
+            <a:fillRef idx="3">
+              <a:schemeClr val="accent2"/>
+            </a:fillRef>
+            <a:effectRef idx="3">
+              <a:schemeClr val="accent2"/>
+            </a:effectRef>
+            <a:fontRef idx="minor">
+              <a:schemeClr val="lt1"/>
+            </a:fontRef>
+          </p:style>
+          <p:txBody>
+            <a:bodyPr rot="0" spcFirstLastPara="0" vertOverflow="overflow" horzOverflow="overflow" vert="horz" wrap="square" lIns="96775" tIns="48386" rIns="96775" bIns="48386" numCol="1" spcCol="0" rtlCol="0" fromWordArt="0" anchor="ctr" anchorCtr="0" forceAA="0" compatLnSpc="1">
+              <a:prstTxWarp prst="textNoShape">
+                <a:avLst/>
+              </a:prstTxWarp>
+              <a:noAutofit/>
+            </a:bodyPr>
+            <a:lstStyle/>
+            <a:p>
+              <a:pPr algn="ctr"/>
+              <a:endParaRPr lang="zh-TW" altLang="en-US" sz="2700"/>
+            </a:p>
+          </p:txBody>
+        </p:sp>
+        <p:sp>
+          <p:nvSpPr>
+            <p:cNvPr id="271" name="箭號: 向右 270">
+              <a:extLst>
+                <a:ext uri="{FF2B5EF4-FFF2-40B4-BE49-F238E27FC236}">
+                  <a16:creationId xmlns:a16="http://schemas.microsoft.com/office/drawing/2014/main" id="{4D3094F5-5CB1-4D39-97E5-1D4335E553C6}"/>
+                </a:ext>
+              </a:extLst>
+            </p:cNvPr>
+            <p:cNvSpPr/>
+            <p:nvPr/>
+          </p:nvSpPr>
+          <p:spPr>
+            <a:xfrm rot="8100000">
+              <a:off x="8221364" y="10464695"/>
+              <a:ext cx="432000" cy="219600"/>
+            </a:xfrm>
+            <a:prstGeom prst="rightArrow">
+              <a:avLst>
+                <a:gd name="adj1" fmla="val 41325"/>
+                <a:gd name="adj2" fmla="val 50000"/>
+              </a:avLst>
+            </a:prstGeom>
+            <a:solidFill>
+              <a:srgbClr val="00B0F0"/>
+            </a:solidFill>
+          </p:spPr>
+          <p:style>
+            <a:lnRef idx="0">
+              <a:schemeClr val="accent2"/>
+            </a:lnRef>
+            <a:fillRef idx="3">
+              <a:schemeClr val="accent2"/>
+            </a:fillRef>
+            <a:effectRef idx="3">
+              <a:schemeClr val="accent2"/>
+            </a:effectRef>
+            <a:fontRef idx="minor">
+              <a:schemeClr val="lt1"/>
+            </a:fontRef>
+          </p:style>
+          <p:txBody>
+            <a:bodyPr rot="0" spcFirstLastPara="0" vertOverflow="overflow" horzOverflow="overflow" vert="horz" wrap="square" lIns="96775" tIns="48386" rIns="96775" bIns="48386" numCol="1" spcCol="0" rtlCol="0" fromWordArt="0" anchor="ctr" anchorCtr="0" forceAA="0" compatLnSpc="1">
+              <a:prstTxWarp prst="textNoShape">
+                <a:avLst/>
+              </a:prstTxWarp>
+              <a:noAutofit/>
+            </a:bodyPr>
+            <a:lstStyle/>
+            <a:p>
+              <a:pPr algn="ctr"/>
+              <a:endParaRPr lang="zh-TW" altLang="en-US" sz="2700"/>
+            </a:p>
+          </p:txBody>
+        </p:sp>
+        <p:sp>
+          <p:nvSpPr>
+            <p:cNvPr id="272" name="箭號: 向右 271">
+              <a:extLst>
+                <a:ext uri="{FF2B5EF4-FFF2-40B4-BE49-F238E27FC236}">
+                  <a16:creationId xmlns:a16="http://schemas.microsoft.com/office/drawing/2014/main" id="{4A349619-6630-4085-AFC4-78038F772713}"/>
+                </a:ext>
+              </a:extLst>
+            </p:cNvPr>
+            <p:cNvSpPr/>
+            <p:nvPr/>
+          </p:nvSpPr>
+          <p:spPr>
+            <a:xfrm rot="-5400000">
+              <a:off x="9296611" y="10871700"/>
+              <a:ext cx="432000" cy="219600"/>
+            </a:xfrm>
+            <a:prstGeom prst="rightArrow">
+              <a:avLst>
+                <a:gd name="adj1" fmla="val 41325"/>
+                <a:gd name="adj2" fmla="val 50000"/>
+              </a:avLst>
+            </a:prstGeom>
+            <a:solidFill>
+              <a:srgbClr val="00B0F0"/>
+            </a:solidFill>
+          </p:spPr>
+          <p:style>
+            <a:lnRef idx="0">
+              <a:schemeClr val="accent2"/>
+            </a:lnRef>
+            <a:fillRef idx="3">
+              <a:schemeClr val="accent2"/>
+            </a:fillRef>
+            <a:effectRef idx="3">
+              <a:schemeClr val="accent2"/>
+            </a:effectRef>
+            <a:fontRef idx="minor">
+              <a:schemeClr val="lt1"/>
+            </a:fontRef>
+          </p:style>
+          <p:txBody>
+            <a:bodyPr rot="0" spcFirstLastPara="0" vertOverflow="overflow" horzOverflow="overflow" vert="horz" wrap="square" lIns="96775" tIns="48386" rIns="96775" bIns="48386" numCol="1" spcCol="0" rtlCol="0" fromWordArt="0" anchor="ctr" anchorCtr="0" forceAA="0" compatLnSpc="1">
+              <a:prstTxWarp prst="textNoShape">
+                <a:avLst/>
+              </a:prstTxWarp>
+              <a:noAutofit/>
+            </a:bodyPr>
+            <a:lstStyle/>
+            <a:p>
+              <a:pPr algn="ctr"/>
+              <a:endParaRPr lang="zh-TW" altLang="en-US" sz="2700"/>
+            </a:p>
+          </p:txBody>
+        </p:sp>
+        <p:sp>
+          <p:nvSpPr>
+            <p:cNvPr id="273" name="箭號: 向右 272">
+              <a:extLst>
+                <a:ext uri="{FF2B5EF4-FFF2-40B4-BE49-F238E27FC236}">
+                  <a16:creationId xmlns:a16="http://schemas.microsoft.com/office/drawing/2014/main" id="{874C6C61-BFE5-440E-8D7D-61479CDA6E14}"/>
+                </a:ext>
+              </a:extLst>
+            </p:cNvPr>
+            <p:cNvSpPr/>
+            <p:nvPr/>
+          </p:nvSpPr>
+          <p:spPr>
+            <a:xfrm rot="5400000">
+              <a:off x="8020817" y="10871700"/>
+              <a:ext cx="432000" cy="219600"/>
+            </a:xfrm>
+            <a:prstGeom prst="rightArrow">
+              <a:avLst>
+                <a:gd name="adj1" fmla="val 41325"/>
+                <a:gd name="adj2" fmla="val 50000"/>
+              </a:avLst>
+            </a:prstGeom>
+            <a:solidFill>
+              <a:srgbClr val="00B0F0"/>
+            </a:solidFill>
+          </p:spPr>
+          <p:style>
+            <a:lnRef idx="0">
+              <a:schemeClr val="accent2"/>
+            </a:lnRef>
+            <a:fillRef idx="3">
+              <a:schemeClr val="accent2"/>
+            </a:fillRef>
+            <a:effectRef idx="3">
+              <a:schemeClr val="accent2"/>
+            </a:effectRef>
+            <a:fontRef idx="minor">
+              <a:schemeClr val="lt1"/>
+            </a:fontRef>
+          </p:style>
+          <p:txBody>
+            <a:bodyPr rot="0" spcFirstLastPara="0" vertOverflow="overflow" horzOverflow="overflow" vert="horz" wrap="square" lIns="96775" tIns="48386" rIns="96775" bIns="48386" numCol="1" spcCol="0" rtlCol="0" fromWordArt="0" anchor="ctr" anchorCtr="0" forceAA="0" compatLnSpc="1">
+              <a:prstTxWarp prst="textNoShape">
+                <a:avLst/>
+              </a:prstTxWarp>
+              <a:noAutofit/>
+            </a:bodyPr>
+            <a:lstStyle/>
+            <a:p>
+              <a:pPr algn="ctr"/>
+              <a:endParaRPr lang="zh-TW" altLang="en-US" sz="2700"/>
+            </a:p>
+          </p:txBody>
+        </p:sp>
+        <p:sp>
+          <p:nvSpPr>
+            <p:cNvPr id="274" name="箭號: 向右 273">
+              <a:extLst>
+                <a:ext uri="{FF2B5EF4-FFF2-40B4-BE49-F238E27FC236}">
+                  <a16:creationId xmlns:a16="http://schemas.microsoft.com/office/drawing/2014/main" id="{3A2C227A-1B82-41C9-8CB1-FFAAFEFF1132}"/>
+                </a:ext>
+              </a:extLst>
+            </p:cNvPr>
+            <p:cNvSpPr/>
+            <p:nvPr/>
+          </p:nvSpPr>
+          <p:spPr>
+            <a:xfrm rot="-2700000">
+              <a:off x="9102038" y="11313674"/>
+              <a:ext cx="432000" cy="219600"/>
+            </a:xfrm>
+            <a:prstGeom prst="rightArrow">
+              <a:avLst>
+                <a:gd name="adj1" fmla="val 41325"/>
+                <a:gd name="adj2" fmla="val 50000"/>
+              </a:avLst>
+            </a:prstGeom>
+            <a:solidFill>
+              <a:srgbClr val="00B0F0"/>
+            </a:solidFill>
+          </p:spPr>
+          <p:style>
+            <a:lnRef idx="0">
+              <a:schemeClr val="accent2"/>
+            </a:lnRef>
+            <a:fillRef idx="3">
+              <a:schemeClr val="accent2"/>
+            </a:fillRef>
+            <a:effectRef idx="3">
+              <a:schemeClr val="accent2"/>
+            </a:effectRef>
+            <a:fontRef idx="minor">
+              <a:schemeClr val="lt1"/>
+            </a:fontRef>
+          </p:style>
+          <p:txBody>
+            <a:bodyPr rot="0" spcFirstLastPara="0" vertOverflow="overflow" horzOverflow="overflow" vert="horz" wrap="square" lIns="96775" tIns="48386" rIns="96775" bIns="48386" numCol="1" spcCol="0" rtlCol="0" fromWordArt="0" anchor="ctr" anchorCtr="0" forceAA="0" compatLnSpc="1">
+              <a:prstTxWarp prst="textNoShape">
+                <a:avLst/>
+              </a:prstTxWarp>
+              <a:noAutofit/>
+            </a:bodyPr>
+            <a:lstStyle/>
+            <a:p>
+              <a:pPr algn="ctr"/>
+              <a:endParaRPr lang="zh-TW" altLang="en-US" sz="2700"/>
+            </a:p>
+          </p:txBody>
+        </p:sp>
+        <p:sp>
+          <p:nvSpPr>
+            <p:cNvPr id="275" name="箭號: 向右 274">
+              <a:extLst>
+                <a:ext uri="{FF2B5EF4-FFF2-40B4-BE49-F238E27FC236}">
+                  <a16:creationId xmlns:a16="http://schemas.microsoft.com/office/drawing/2014/main" id="{B9507FAC-E6D2-4C84-8199-30EB5CDE8D0B}"/>
+                </a:ext>
+              </a:extLst>
+            </p:cNvPr>
+            <p:cNvSpPr/>
+            <p:nvPr/>
+          </p:nvSpPr>
+          <p:spPr>
+            <a:xfrm rot="2700000">
+              <a:off x="8221364" y="11313674"/>
+              <a:ext cx="432000" cy="219600"/>
+            </a:xfrm>
+            <a:prstGeom prst="rightArrow">
+              <a:avLst>
+                <a:gd name="adj1" fmla="val 41325"/>
+                <a:gd name="adj2" fmla="val 50000"/>
+              </a:avLst>
+            </a:prstGeom>
+            <a:solidFill>
+              <a:srgbClr val="00B0F0"/>
+            </a:solidFill>
+          </p:spPr>
+          <p:style>
+            <a:lnRef idx="0">
+              <a:schemeClr val="accent2"/>
+            </a:lnRef>
+            <a:fillRef idx="3">
+              <a:schemeClr val="accent2"/>
+            </a:fillRef>
+            <a:effectRef idx="3">
+              <a:schemeClr val="accent2"/>
+            </a:effectRef>
+            <a:fontRef idx="minor">
+              <a:schemeClr val="lt1"/>
+            </a:fontRef>
+          </p:style>
+          <p:txBody>
+            <a:bodyPr rot="0" spcFirstLastPara="0" vertOverflow="overflow" horzOverflow="overflow" vert="horz" wrap="square" lIns="96775" tIns="48386" rIns="96775" bIns="48386" numCol="1" spcCol="0" rtlCol="0" fromWordArt="0" anchor="ctr" anchorCtr="0" forceAA="0" compatLnSpc="1">
+              <a:prstTxWarp prst="textNoShape">
+                <a:avLst/>
+              </a:prstTxWarp>
+              <a:noAutofit/>
+            </a:bodyPr>
+            <a:lstStyle/>
+            <a:p>
+              <a:pPr algn="ctr"/>
+              <a:endParaRPr lang="zh-TW" altLang="en-US" sz="2700" dirty="0"/>
+            </a:p>
+          </p:txBody>
+        </p:sp>
+        <p:sp>
+          <p:nvSpPr>
+            <p:cNvPr id="276" name="箭號: 向右 275">
+              <a:extLst>
+                <a:ext uri="{FF2B5EF4-FFF2-40B4-BE49-F238E27FC236}">
+                  <a16:creationId xmlns:a16="http://schemas.microsoft.com/office/drawing/2014/main" id="{573DE253-1E87-49DE-A969-39B6BDF1DECE}"/>
+                </a:ext>
+              </a:extLst>
+            </p:cNvPr>
+            <p:cNvSpPr/>
+            <p:nvPr/>
+          </p:nvSpPr>
+          <p:spPr>
+            <a:xfrm>
+              <a:off x="8656624" y="11537760"/>
+              <a:ext cx="432000" cy="219600"/>
+            </a:xfrm>
+            <a:prstGeom prst="rightArrow">
+              <a:avLst>
+                <a:gd name="adj1" fmla="val 41325"/>
+                <a:gd name="adj2" fmla="val 50000"/>
+              </a:avLst>
+            </a:prstGeom>
+            <a:solidFill>
+              <a:srgbClr val="00B0F0"/>
+            </a:solidFill>
+          </p:spPr>
+          <p:style>
+            <a:lnRef idx="0">
+              <a:schemeClr val="accent2"/>
+            </a:lnRef>
+            <a:fillRef idx="3">
+              <a:schemeClr val="accent2"/>
+            </a:fillRef>
+            <a:effectRef idx="3">
+              <a:schemeClr val="accent2"/>
+            </a:effectRef>
+            <a:fontRef idx="minor">
+              <a:schemeClr val="lt1"/>
+            </a:fontRef>
+          </p:style>
+          <p:txBody>
+            <a:bodyPr rot="0" spcFirstLastPara="0" vertOverflow="overflow" horzOverflow="overflow" vert="horz" wrap="square" lIns="96775" tIns="48386" rIns="96775" bIns="48386" numCol="1" spcCol="0" rtlCol="0" fromWordArt="0" anchor="ctr" anchorCtr="0" forceAA="0" compatLnSpc="1">
+              <a:prstTxWarp prst="textNoShape">
+                <a:avLst/>
+              </a:prstTxWarp>
+              <a:noAutofit/>
+            </a:bodyPr>
+            <a:lstStyle/>
+            <a:p>
+              <a:pPr algn="ctr"/>
+              <a:endParaRPr lang="zh-TW" altLang="en-US" sz="2700"/>
+            </a:p>
+          </p:txBody>
+        </p:sp>
+      </p:grpSp>
+      <p:grpSp>
+        <p:nvGrpSpPr>
+          <p:cNvPr id="250" name="群組 249">
+            <a:extLst>
+              <a:ext uri="{FF2B5EF4-FFF2-40B4-BE49-F238E27FC236}">
+                <a16:creationId xmlns:a16="http://schemas.microsoft.com/office/drawing/2014/main" id="{C05FF975-6382-4D4E-9063-230DD0335D92}"/>
+              </a:ext>
+            </a:extLst>
+          </p:cNvPr>
+          <p:cNvGrpSpPr/>
+          <p:nvPr/>
+        </p:nvGrpSpPr>
+        <p:grpSpPr>
+          <a:xfrm>
+            <a:off x="6864312" y="3559769"/>
+            <a:ext cx="644641" cy="689099"/>
+            <a:chOff x="6583394" y="1501875"/>
+            <a:chExt cx="1650681" cy="1764520"/>
+          </a:xfrm>
+        </p:grpSpPr>
+        <p:grpSp>
+          <p:nvGrpSpPr>
+            <p:cNvPr id="263" name="群組 262">
+              <a:extLst>
+                <a:ext uri="{FF2B5EF4-FFF2-40B4-BE49-F238E27FC236}">
+                  <a16:creationId xmlns:a16="http://schemas.microsoft.com/office/drawing/2014/main" id="{F96BD9EB-9D9F-45C4-AD53-A49384797523}"/>
+                </a:ext>
+              </a:extLst>
+            </p:cNvPr>
+            <p:cNvGrpSpPr/>
+            <p:nvPr/>
+          </p:nvGrpSpPr>
+          <p:grpSpPr>
+            <a:xfrm>
+              <a:off x="6929132" y="2420541"/>
+              <a:ext cx="361452" cy="346736"/>
+              <a:chOff x="1373392" y="2391862"/>
+              <a:chExt cx="479433" cy="476535"/>
+            </a:xfrm>
+          </p:grpSpPr>
+          <p:sp>
+            <p:nvSpPr>
+              <p:cNvPr id="266" name="箭號: 向右 265">
+                <a:extLst>
+                  <a:ext uri="{FF2B5EF4-FFF2-40B4-BE49-F238E27FC236}">
+                    <a16:creationId xmlns:a16="http://schemas.microsoft.com/office/drawing/2014/main" id="{86F0B9CA-CD17-4182-BF6A-DD855915BEF0}"/>
+                  </a:ext>
+                </a:extLst>
+              </p:cNvPr>
+              <p:cNvSpPr/>
+              <p:nvPr/>
+            </p:nvSpPr>
+            <p:spPr>
+              <a:xfrm>
+                <a:off x="1411244" y="2735868"/>
+                <a:ext cx="441581" cy="132529"/>
+              </a:xfrm>
+              <a:prstGeom prst="rightArrow">
+                <a:avLst>
+                  <a:gd name="adj1" fmla="val 50000"/>
+                  <a:gd name="adj2" fmla="val 99023"/>
+                </a:avLst>
+              </a:prstGeom>
+              <a:solidFill>
+                <a:schemeClr val="bg1"/>
+              </a:solidFill>
+              <a:ln>
+                <a:solidFill>
+                  <a:schemeClr val="bg1"/>
+                </a:solidFill>
+              </a:ln>
+            </p:spPr>
+            <p:style>
+              <a:lnRef idx="2">
+                <a:schemeClr val="dk1">
+                  <a:shade val="50000"/>
+                </a:schemeClr>
+              </a:lnRef>
+              <a:fillRef idx="1">
+                <a:schemeClr val="dk1"/>
+              </a:fillRef>
+              <a:effectRef idx="0">
+                <a:schemeClr val="dk1"/>
+              </a:effectRef>
+              <a:fontRef idx="minor">
+                <a:schemeClr val="lt1"/>
+              </a:fontRef>
+            </p:style>
+            <p:txBody>
+              <a:bodyPr rtlCol="0" anchor="ctr"/>
+              <a:lstStyle/>
+              <a:p>
+                <a:pPr algn="ctr"/>
+                <a:endParaRPr lang="zh-TW" altLang="en-US" sz="2000">
+                  <a:solidFill>
+                    <a:schemeClr val="bg1"/>
+                  </a:solidFill>
+                </a:endParaRPr>
+              </a:p>
+            </p:txBody>
+          </p:sp>
+          <p:sp>
+            <p:nvSpPr>
+              <p:cNvPr id="267" name="箭號: 向右 266">
+                <a:extLst>
+                  <a:ext uri="{FF2B5EF4-FFF2-40B4-BE49-F238E27FC236}">
+                    <a16:creationId xmlns:a16="http://schemas.microsoft.com/office/drawing/2014/main" id="{BEF516D3-4820-4759-89A2-54AFCBA38970}"/>
+                  </a:ext>
+                </a:extLst>
+              </p:cNvPr>
+              <p:cNvSpPr/>
+              <p:nvPr/>
+            </p:nvSpPr>
+            <p:spPr>
+              <a:xfrm rot="16200000">
+                <a:off x="1218866" y="2546388"/>
+                <a:ext cx="441581" cy="132529"/>
+              </a:xfrm>
+              <a:prstGeom prst="rightArrow">
+                <a:avLst>
+                  <a:gd name="adj1" fmla="val 50000"/>
+                  <a:gd name="adj2" fmla="val 99023"/>
+                </a:avLst>
+              </a:prstGeom>
+              <a:solidFill>
+                <a:schemeClr val="bg1"/>
+              </a:solidFill>
+              <a:ln>
+                <a:solidFill>
+                  <a:schemeClr val="bg1"/>
+                </a:solidFill>
+              </a:ln>
+            </p:spPr>
+            <p:style>
+              <a:lnRef idx="2">
+                <a:schemeClr val="dk1">
+                  <a:shade val="50000"/>
+                </a:schemeClr>
+              </a:lnRef>
+              <a:fillRef idx="1">
+                <a:schemeClr val="dk1"/>
+              </a:fillRef>
+              <a:effectRef idx="0">
+                <a:schemeClr val="dk1"/>
+              </a:effectRef>
+              <a:fontRef idx="minor">
+                <a:schemeClr val="lt1"/>
+              </a:fontRef>
+            </p:style>
+            <p:txBody>
+              <a:bodyPr rtlCol="0" anchor="ctr"/>
+              <a:lstStyle/>
+              <a:p>
+                <a:pPr algn="ctr"/>
+                <a:endParaRPr lang="zh-TW" altLang="en-US" sz="2000" dirty="0">
+                  <a:solidFill>
+                    <a:schemeClr val="bg1"/>
+                  </a:solidFill>
+                </a:endParaRPr>
+              </a:p>
+            </p:txBody>
+          </p:sp>
+        </p:grpSp>
+        <mc:AlternateContent xmlns:mc="http://schemas.openxmlformats.org/markup-compatibility/2006" xmlns:a14="http://schemas.microsoft.com/office/drawing/2010/main">
+          <mc:Choice Requires="a14">
+            <p:sp>
+              <p:nvSpPr>
+                <p:cNvPr id="264" name="文字方塊 263">
+                  <a:extLst>
+                    <a:ext uri="{FF2B5EF4-FFF2-40B4-BE49-F238E27FC236}">
+                      <a16:creationId xmlns:a16="http://schemas.microsoft.com/office/drawing/2014/main" id="{8FED2E2D-4866-4D98-87B1-D497068FBACA}"/>
+                    </a:ext>
+                  </a:extLst>
+                </p:cNvPr>
+                <p:cNvSpPr txBox="1"/>
+                <p:nvPr/>
+              </p:nvSpPr>
+              <p:spPr>
+                <a:xfrm>
+                  <a:off x="6583394" y="1501875"/>
+                  <a:ext cx="416137" cy="1086427"/>
+                </a:xfrm>
+                <a:prstGeom prst="rect">
+                  <a:avLst/>
+                </a:prstGeom>
+                <a:noFill/>
+              </p:spPr>
+              <p:txBody>
+                <a:bodyPr wrap="square" rtlCol="0">
+                  <a:spAutoFit/>
+                </a:bodyPr>
+                <a:lstStyle/>
+                <a:p>
+                  <a:pPr/>
+                  <a14:m>
+                    <m:oMathPara xmlns:m="http://schemas.openxmlformats.org/officeDocument/2006/math">
+                      <m:oMathParaPr>
+                        <m:jc m:val="centerGroup"/>
+                      </m:oMathParaPr>
+                      <m:oMath xmlns:m="http://schemas.openxmlformats.org/officeDocument/2006/math">
+                        <m:sSub>
+                          <m:sSubPr>
+                            <m:ctrlPr>
+                              <a:rPr lang="en-US" altLang="zh-TW" sz="2000" i="1">
+                                <a:solidFill>
+                                  <a:schemeClr val="bg1"/>
+                                </a:solidFill>
+                                <a:latin typeface="Cambria Math" panose="02040503050406030204" pitchFamily="18" charset="0"/>
+                              </a:rPr>
+                            </m:ctrlPr>
+                          </m:sSubPr>
+                          <m:e>
+                            <m:r>
+                              <a:rPr lang="en-US" altLang="zh-TW" sz="2000" i="1">
+                                <a:solidFill>
+                                  <a:schemeClr val="bg1"/>
+                                </a:solidFill>
+                                <a:latin typeface="Cambria Math" panose="02040503050406030204" pitchFamily="18" charset="0"/>
+                              </a:rPr>
+                              <m:t>𝑄</m:t>
+                            </m:r>
+                          </m:e>
+                          <m:sub>
+                            <m:r>
+                              <a:rPr lang="en-US" altLang="zh-TW" sz="2000" i="1">
+                                <a:solidFill>
+                                  <a:schemeClr val="bg1"/>
+                                </a:solidFill>
+                                <a:latin typeface="Cambria Math" panose="02040503050406030204" pitchFamily="18" charset="0"/>
+                              </a:rPr>
+                              <m:t>𝑦</m:t>
+                            </m:r>
+                          </m:sub>
+                        </m:sSub>
+                      </m:oMath>
+                    </m:oMathPara>
+                  </a14:m>
+                  <a:endParaRPr lang="en-US" altLang="zh-TW" sz="2000" dirty="0">
+                    <a:solidFill>
+                      <a:schemeClr val="bg1"/>
+                    </a:solidFill>
+                  </a:endParaRPr>
+                </a:p>
+              </p:txBody>
+            </p:sp>
+          </mc:Choice>
+          <mc:Fallback xmlns="">
+            <p:sp>
+              <p:nvSpPr>
+                <p:cNvPr id="264" name="文字方塊 263">
+                  <a:extLst>
+                    <a:ext uri="{FF2B5EF4-FFF2-40B4-BE49-F238E27FC236}">
+                      <a16:creationId xmlns:a16="http://schemas.microsoft.com/office/drawing/2014/main" id="{8FED2E2D-4866-4D98-87B1-D497068FBACA}"/>
+                    </a:ext>
+                  </a:extLst>
+                </p:cNvPr>
+                <p:cNvSpPr txBox="1">
+                  <a:spLocks noRot="1" noChangeAspect="1" noMove="1" noResize="1" noEditPoints="1" noAdjustHandles="1" noChangeArrowheads="1" noChangeShapeType="1" noTextEdit="1"/>
+                </p:cNvSpPr>
+                <p:nvPr/>
+              </p:nvSpPr>
+              <p:spPr>
+                <a:xfrm>
+                  <a:off x="6583394" y="1501875"/>
+                  <a:ext cx="416137" cy="1086427"/>
+                </a:xfrm>
+                <a:prstGeom prst="rect">
+                  <a:avLst/>
+                </a:prstGeom>
+                <a:blipFill>
+                  <a:blip r:embed="rId7"/>
+                  <a:stretch>
+                    <a:fillRect l="-14815" r="-166667" b="-4286"/>
+                  </a:stretch>
+                </a:blipFill>
+              </p:spPr>
+              <p:txBody>
+                <a:bodyPr/>
+                <a:lstStyle/>
+                <a:p>
+                  <a:r>
+                    <a:rPr lang="zh-TW" altLang="en-US">
+                      <a:noFill/>
+                    </a:rPr>
+                    <a:t> </a:t>
+                  </a:r>
+                </a:p>
+              </p:txBody>
+            </p:sp>
+          </mc:Fallback>
+        </mc:AlternateContent>
+        <mc:AlternateContent xmlns:mc="http://schemas.openxmlformats.org/markup-compatibility/2006" xmlns:a14="http://schemas.microsoft.com/office/drawing/2010/main">
+          <mc:Choice Requires="a14">
+            <p:sp>
+              <p:nvSpPr>
+                <p:cNvPr id="265" name="文字方塊 264">
+                  <a:extLst>
+                    <a:ext uri="{FF2B5EF4-FFF2-40B4-BE49-F238E27FC236}">
+                      <a16:creationId xmlns:a16="http://schemas.microsoft.com/office/drawing/2014/main" id="{2CA0C90C-717C-46E4-99CF-48354380253E}"/>
+                    </a:ext>
+                  </a:extLst>
+                </p:cNvPr>
+                <p:cNvSpPr txBox="1"/>
+                <p:nvPr/>
+              </p:nvSpPr>
+              <p:spPr>
+                <a:xfrm>
+                  <a:off x="7165989" y="2241866"/>
+                  <a:ext cx="1068086" cy="1024529"/>
+                </a:xfrm>
+                <a:prstGeom prst="rect">
+                  <a:avLst/>
+                </a:prstGeom>
+                <a:noFill/>
+              </p:spPr>
+              <p:txBody>
+                <a:bodyPr wrap="square" rtlCol="0">
+                  <a:spAutoFit/>
+                </a:bodyPr>
+                <a:lstStyle/>
+                <a:p>
+                  <a:pPr/>
+                  <a14:m>
+                    <m:oMathPara xmlns:m="http://schemas.openxmlformats.org/officeDocument/2006/math">
+                      <m:oMathParaPr>
+                        <m:jc m:val="centerGroup"/>
+                      </m:oMathParaPr>
+                      <m:oMath xmlns:m="http://schemas.openxmlformats.org/officeDocument/2006/math">
+                        <m:sSub>
+                          <m:sSubPr>
+                            <m:ctrlPr>
+                              <a:rPr lang="en-US" altLang="zh-TW" sz="2000" i="1">
+                                <a:solidFill>
+                                  <a:schemeClr val="bg1"/>
+                                </a:solidFill>
+                                <a:latin typeface="Cambria Math" panose="02040503050406030204" pitchFamily="18" charset="0"/>
+                              </a:rPr>
+                            </m:ctrlPr>
+                          </m:sSubPr>
+                          <m:e>
+                            <m:r>
+                              <a:rPr lang="en-US" altLang="zh-TW" sz="2000" i="1">
+                                <a:solidFill>
+                                  <a:schemeClr val="bg1"/>
+                                </a:solidFill>
+                                <a:latin typeface="Cambria Math" panose="02040503050406030204" pitchFamily="18" charset="0"/>
+                              </a:rPr>
+                              <m:t>𝑄</m:t>
+                            </m:r>
+                          </m:e>
+                          <m:sub>
+                            <m:r>
+                              <a:rPr lang="en-US" altLang="zh-TW" sz="2000" i="1">
+                                <a:solidFill>
+                                  <a:schemeClr val="bg1"/>
+                                </a:solidFill>
+                                <a:latin typeface="Cambria Math" panose="02040503050406030204" pitchFamily="18" charset="0"/>
+                              </a:rPr>
+                              <m:t>𝑥</m:t>
+                            </m:r>
+                          </m:sub>
+                        </m:sSub>
+                      </m:oMath>
+                    </m:oMathPara>
+                  </a14:m>
+                  <a:endParaRPr lang="en-US" altLang="zh-TW" sz="2000" dirty="0">
+                    <a:solidFill>
+                      <a:schemeClr val="bg1"/>
+                    </a:solidFill>
+                  </a:endParaRPr>
+                </a:p>
+              </p:txBody>
+            </p:sp>
+          </mc:Choice>
+          <mc:Fallback xmlns="">
+            <p:sp>
+              <p:nvSpPr>
+                <p:cNvPr id="265" name="文字方塊 264">
+                  <a:extLst>
+                    <a:ext uri="{FF2B5EF4-FFF2-40B4-BE49-F238E27FC236}">
+                      <a16:creationId xmlns:a16="http://schemas.microsoft.com/office/drawing/2014/main" id="{2CA0C90C-717C-46E4-99CF-48354380253E}"/>
+                    </a:ext>
+                  </a:extLst>
+                </p:cNvPr>
+                <p:cNvSpPr txBox="1">
+                  <a:spLocks noRot="1" noChangeAspect="1" noMove="1" noResize="1" noEditPoints="1" noAdjustHandles="1" noChangeArrowheads="1" noChangeShapeType="1" noTextEdit="1"/>
+                </p:cNvSpPr>
+                <p:nvPr/>
+              </p:nvSpPr>
+              <p:spPr>
+                <a:xfrm>
+                  <a:off x="7165989" y="2241866"/>
+                  <a:ext cx="1068086" cy="1024529"/>
+                </a:xfrm>
+                <a:prstGeom prst="rect">
+                  <a:avLst/>
+                </a:prstGeom>
+                <a:blipFill>
+                  <a:blip r:embed="rId8"/>
+                  <a:stretch>
+                    <a:fillRect l="-4412" b="-9091"/>
+                  </a:stretch>
+                </a:blipFill>
+              </p:spPr>
+              <p:txBody>
+                <a:bodyPr/>
+                <a:lstStyle/>
+                <a:p>
+                  <a:r>
+                    <a:rPr lang="zh-TW" altLang="en-US">
+                      <a:noFill/>
+                    </a:rPr>
+                    <a:t> </a:t>
+                  </a:r>
+                </a:p>
+              </p:txBody>
+            </p:sp>
+          </mc:Fallback>
+        </mc:AlternateContent>
+      </p:grpSp>
+      <p:grpSp>
+        <p:nvGrpSpPr>
+          <p:cNvPr id="251" name="群組 250">
+            <a:extLst>
+              <a:ext uri="{FF2B5EF4-FFF2-40B4-BE49-F238E27FC236}">
+                <a16:creationId xmlns:a16="http://schemas.microsoft.com/office/drawing/2014/main" id="{14DDCB11-35C7-4C50-8C96-C8F4CFB08025}"/>
+              </a:ext>
+            </a:extLst>
+          </p:cNvPr>
+          <p:cNvGrpSpPr/>
+          <p:nvPr/>
+        </p:nvGrpSpPr>
+        <p:grpSpPr>
+          <a:xfrm>
+            <a:off x="4900493" y="1224937"/>
+            <a:ext cx="644641" cy="689099"/>
+            <a:chOff x="6583394" y="1501875"/>
+            <a:chExt cx="1650681" cy="1764520"/>
+          </a:xfrm>
+        </p:grpSpPr>
+        <p:grpSp>
+          <p:nvGrpSpPr>
+            <p:cNvPr id="258" name="群組 257">
+              <a:extLst>
+                <a:ext uri="{FF2B5EF4-FFF2-40B4-BE49-F238E27FC236}">
+                  <a16:creationId xmlns:a16="http://schemas.microsoft.com/office/drawing/2014/main" id="{4C77B2CA-4219-450C-9161-C45907F2234C}"/>
+                </a:ext>
+              </a:extLst>
+            </p:cNvPr>
+            <p:cNvGrpSpPr/>
+            <p:nvPr/>
+          </p:nvGrpSpPr>
+          <p:grpSpPr>
+            <a:xfrm>
+              <a:off x="6929132" y="2420541"/>
+              <a:ext cx="361452" cy="346736"/>
+              <a:chOff x="1373392" y="2391862"/>
+              <a:chExt cx="479433" cy="476535"/>
+            </a:xfrm>
+          </p:grpSpPr>
+          <p:sp>
+            <p:nvSpPr>
+              <p:cNvPr id="261" name="箭號: 向右 260">
+                <a:extLst>
+                  <a:ext uri="{FF2B5EF4-FFF2-40B4-BE49-F238E27FC236}">
+                    <a16:creationId xmlns:a16="http://schemas.microsoft.com/office/drawing/2014/main" id="{9CA7E83D-3F16-4F9D-B998-9A91F3033ADF}"/>
+                  </a:ext>
+                </a:extLst>
+              </p:cNvPr>
+              <p:cNvSpPr/>
+              <p:nvPr/>
+            </p:nvSpPr>
+            <p:spPr>
+              <a:xfrm>
+                <a:off x="1411244" y="2735868"/>
+                <a:ext cx="441581" cy="132529"/>
+              </a:xfrm>
+              <a:prstGeom prst="rightArrow">
+                <a:avLst>
+                  <a:gd name="adj1" fmla="val 50000"/>
+                  <a:gd name="adj2" fmla="val 99023"/>
+                </a:avLst>
+              </a:prstGeom>
+              <a:solidFill>
+                <a:schemeClr val="bg1"/>
+              </a:solidFill>
+              <a:ln>
+                <a:solidFill>
+                  <a:schemeClr val="bg1"/>
+                </a:solidFill>
+              </a:ln>
+            </p:spPr>
+            <p:style>
+              <a:lnRef idx="2">
+                <a:schemeClr val="dk1">
+                  <a:shade val="50000"/>
+                </a:schemeClr>
+              </a:lnRef>
+              <a:fillRef idx="1">
+                <a:schemeClr val="dk1"/>
+              </a:fillRef>
+              <a:effectRef idx="0">
+                <a:schemeClr val="dk1"/>
+              </a:effectRef>
+              <a:fontRef idx="minor">
+                <a:schemeClr val="lt1"/>
+              </a:fontRef>
+            </p:style>
+            <p:txBody>
+              <a:bodyPr rtlCol="0" anchor="ctr"/>
+              <a:lstStyle/>
+              <a:p>
+                <a:pPr algn="ctr"/>
+                <a:endParaRPr lang="zh-TW" altLang="en-US" sz="2000">
+                  <a:solidFill>
+                    <a:schemeClr val="bg1"/>
+                  </a:solidFill>
+                </a:endParaRPr>
+              </a:p>
+            </p:txBody>
+          </p:sp>
+          <p:sp>
+            <p:nvSpPr>
+              <p:cNvPr id="262" name="箭號: 向右 261">
+                <a:extLst>
+                  <a:ext uri="{FF2B5EF4-FFF2-40B4-BE49-F238E27FC236}">
+                    <a16:creationId xmlns:a16="http://schemas.microsoft.com/office/drawing/2014/main" id="{1598C4F9-7060-45FF-AAA7-F25841BD5848}"/>
+                  </a:ext>
+                </a:extLst>
+              </p:cNvPr>
+              <p:cNvSpPr/>
+              <p:nvPr/>
+            </p:nvSpPr>
+            <p:spPr>
+              <a:xfrm rot="16200000">
+                <a:off x="1218866" y="2546388"/>
+                <a:ext cx="441581" cy="132529"/>
+              </a:xfrm>
+              <a:prstGeom prst="rightArrow">
+                <a:avLst>
+                  <a:gd name="adj1" fmla="val 50000"/>
+                  <a:gd name="adj2" fmla="val 99023"/>
+                </a:avLst>
+              </a:prstGeom>
+              <a:solidFill>
+                <a:schemeClr val="bg1"/>
+              </a:solidFill>
+              <a:ln>
+                <a:solidFill>
+                  <a:schemeClr val="bg1"/>
+                </a:solidFill>
+              </a:ln>
+            </p:spPr>
+            <p:style>
+              <a:lnRef idx="2">
+                <a:schemeClr val="dk1">
+                  <a:shade val="50000"/>
+                </a:schemeClr>
+              </a:lnRef>
+              <a:fillRef idx="1">
+                <a:schemeClr val="dk1"/>
+              </a:fillRef>
+              <a:effectRef idx="0">
+                <a:schemeClr val="dk1"/>
+              </a:effectRef>
+              <a:fontRef idx="minor">
+                <a:schemeClr val="lt1"/>
+              </a:fontRef>
+            </p:style>
+            <p:txBody>
+              <a:bodyPr rtlCol="0" anchor="ctr"/>
+              <a:lstStyle/>
+              <a:p>
+                <a:pPr algn="ctr"/>
+                <a:endParaRPr lang="zh-TW" altLang="en-US" sz="2000" dirty="0">
+                  <a:solidFill>
+                    <a:schemeClr val="bg1"/>
+                  </a:solidFill>
+                </a:endParaRPr>
+              </a:p>
+            </p:txBody>
+          </p:sp>
+        </p:grpSp>
+        <mc:AlternateContent xmlns:mc="http://schemas.openxmlformats.org/markup-compatibility/2006" xmlns:a14="http://schemas.microsoft.com/office/drawing/2010/main">
+          <mc:Choice Requires="a14">
+            <p:sp>
+              <p:nvSpPr>
+                <p:cNvPr id="259" name="文字方塊 258">
+                  <a:extLst>
+                    <a:ext uri="{FF2B5EF4-FFF2-40B4-BE49-F238E27FC236}">
+                      <a16:creationId xmlns:a16="http://schemas.microsoft.com/office/drawing/2014/main" id="{292E9A6D-4AE0-4CD4-9EA0-3173D219E896}"/>
+                    </a:ext>
+                  </a:extLst>
+                </p:cNvPr>
+                <p:cNvSpPr txBox="1"/>
+                <p:nvPr/>
+              </p:nvSpPr>
+              <p:spPr>
+                <a:xfrm>
+                  <a:off x="6583394" y="1501875"/>
+                  <a:ext cx="416137" cy="1086427"/>
+                </a:xfrm>
+                <a:prstGeom prst="rect">
+                  <a:avLst/>
+                </a:prstGeom>
+                <a:noFill/>
+              </p:spPr>
+              <p:txBody>
+                <a:bodyPr wrap="square" rtlCol="0">
+                  <a:spAutoFit/>
+                </a:bodyPr>
+                <a:lstStyle/>
+                <a:p>
+                  <a:pPr/>
+                  <a14:m>
+                    <m:oMathPara xmlns:m="http://schemas.openxmlformats.org/officeDocument/2006/math">
+                      <m:oMathParaPr>
+                        <m:jc m:val="centerGroup"/>
+                      </m:oMathParaPr>
+                      <m:oMath xmlns:m="http://schemas.openxmlformats.org/officeDocument/2006/math">
+                        <m:sSub>
+                          <m:sSubPr>
+                            <m:ctrlPr>
+                              <a:rPr lang="en-US" altLang="zh-TW" sz="2000" i="1">
+                                <a:solidFill>
+                                  <a:schemeClr val="bg1"/>
+                                </a:solidFill>
+                                <a:latin typeface="Cambria Math" panose="02040503050406030204" pitchFamily="18" charset="0"/>
+                              </a:rPr>
+                            </m:ctrlPr>
+                          </m:sSubPr>
+                          <m:e>
+                            <m:r>
+                              <a:rPr lang="en-US" altLang="zh-TW" sz="2000" i="1">
+                                <a:solidFill>
+                                  <a:schemeClr val="bg1"/>
+                                </a:solidFill>
+                                <a:latin typeface="Cambria Math" panose="02040503050406030204" pitchFamily="18" charset="0"/>
+                              </a:rPr>
+                              <m:t>𝑄</m:t>
+                            </m:r>
+                          </m:e>
+                          <m:sub>
+                            <m:r>
+                              <a:rPr lang="en-US" altLang="zh-TW" sz="2000" i="1">
+                                <a:solidFill>
+                                  <a:schemeClr val="bg1"/>
+                                </a:solidFill>
+                                <a:latin typeface="Cambria Math" panose="02040503050406030204" pitchFamily="18" charset="0"/>
+                              </a:rPr>
+                              <m:t>𝑦</m:t>
+                            </m:r>
+                          </m:sub>
+                        </m:sSub>
+                      </m:oMath>
+                    </m:oMathPara>
+                  </a14:m>
+                  <a:endParaRPr lang="en-US" altLang="zh-TW" sz="2000" dirty="0">
+                    <a:solidFill>
+                      <a:schemeClr val="bg1"/>
+                    </a:solidFill>
+                  </a:endParaRPr>
+                </a:p>
+              </p:txBody>
+            </p:sp>
+          </mc:Choice>
+          <mc:Fallback xmlns="">
+            <p:sp>
+              <p:nvSpPr>
+                <p:cNvPr id="259" name="文字方塊 258">
+                  <a:extLst>
+                    <a:ext uri="{FF2B5EF4-FFF2-40B4-BE49-F238E27FC236}">
+                      <a16:creationId xmlns:a16="http://schemas.microsoft.com/office/drawing/2014/main" id="{292E9A6D-4AE0-4CD4-9EA0-3173D219E896}"/>
+                    </a:ext>
+                  </a:extLst>
+                </p:cNvPr>
+                <p:cNvSpPr txBox="1">
+                  <a:spLocks noRot="1" noChangeAspect="1" noMove="1" noResize="1" noEditPoints="1" noAdjustHandles="1" noChangeArrowheads="1" noChangeShapeType="1" noTextEdit="1"/>
+                </p:cNvSpPr>
+                <p:nvPr/>
+              </p:nvSpPr>
+              <p:spPr>
+                <a:xfrm>
+                  <a:off x="6583394" y="1501875"/>
+                  <a:ext cx="416137" cy="1086427"/>
+                </a:xfrm>
+                <a:prstGeom prst="rect">
+                  <a:avLst/>
+                </a:prstGeom>
+                <a:blipFill>
+                  <a:blip r:embed="rId9"/>
+                  <a:stretch>
+                    <a:fillRect l="-14815" r="-166667" b="-4286"/>
+                  </a:stretch>
+                </a:blipFill>
+              </p:spPr>
+              <p:txBody>
+                <a:bodyPr/>
+                <a:lstStyle/>
+                <a:p>
+                  <a:r>
+                    <a:rPr lang="zh-TW" altLang="en-US">
+                      <a:noFill/>
+                    </a:rPr>
+                    <a:t> </a:t>
+                  </a:r>
+                </a:p>
+              </p:txBody>
+            </p:sp>
+          </mc:Fallback>
+        </mc:AlternateContent>
+        <mc:AlternateContent xmlns:mc="http://schemas.openxmlformats.org/markup-compatibility/2006" xmlns:a14="http://schemas.microsoft.com/office/drawing/2010/main">
+          <mc:Choice Requires="a14">
+            <p:sp>
+              <p:nvSpPr>
+                <p:cNvPr id="260" name="文字方塊 259">
+                  <a:extLst>
+                    <a:ext uri="{FF2B5EF4-FFF2-40B4-BE49-F238E27FC236}">
+                      <a16:creationId xmlns:a16="http://schemas.microsoft.com/office/drawing/2014/main" id="{8D6AA90E-8E54-4F85-8069-79A6B681A2B3}"/>
+                    </a:ext>
+                  </a:extLst>
+                </p:cNvPr>
+                <p:cNvSpPr txBox="1"/>
+                <p:nvPr/>
+              </p:nvSpPr>
+              <p:spPr>
+                <a:xfrm>
+                  <a:off x="7165989" y="2241866"/>
+                  <a:ext cx="1068086" cy="1024529"/>
+                </a:xfrm>
+                <a:prstGeom prst="rect">
+                  <a:avLst/>
+                </a:prstGeom>
+                <a:noFill/>
+              </p:spPr>
+              <p:txBody>
+                <a:bodyPr wrap="square" rtlCol="0">
+                  <a:spAutoFit/>
+                </a:bodyPr>
+                <a:lstStyle/>
+                <a:p>
+                  <a:pPr/>
+                  <a14:m>
+                    <m:oMathPara xmlns:m="http://schemas.openxmlformats.org/officeDocument/2006/math">
+                      <m:oMathParaPr>
+                        <m:jc m:val="centerGroup"/>
+                      </m:oMathParaPr>
+                      <m:oMath xmlns:m="http://schemas.openxmlformats.org/officeDocument/2006/math">
+                        <m:sSub>
+                          <m:sSubPr>
+                            <m:ctrlPr>
+                              <a:rPr lang="en-US" altLang="zh-TW" sz="2000" i="1">
+                                <a:solidFill>
+                                  <a:schemeClr val="bg1"/>
+                                </a:solidFill>
+                                <a:latin typeface="Cambria Math" panose="02040503050406030204" pitchFamily="18" charset="0"/>
+                              </a:rPr>
+                            </m:ctrlPr>
+                          </m:sSubPr>
+                          <m:e>
+                            <m:r>
+                              <a:rPr lang="en-US" altLang="zh-TW" sz="2000" i="1">
+                                <a:solidFill>
+                                  <a:schemeClr val="bg1"/>
+                                </a:solidFill>
+                                <a:latin typeface="Cambria Math" panose="02040503050406030204" pitchFamily="18" charset="0"/>
+                              </a:rPr>
+                              <m:t>𝑄</m:t>
+                            </m:r>
+                          </m:e>
+                          <m:sub>
+                            <m:r>
+                              <a:rPr lang="en-US" altLang="zh-TW" sz="2000" i="1">
+                                <a:solidFill>
+                                  <a:schemeClr val="bg1"/>
+                                </a:solidFill>
+                                <a:latin typeface="Cambria Math" panose="02040503050406030204" pitchFamily="18" charset="0"/>
+                              </a:rPr>
+                              <m:t>𝑥</m:t>
+                            </m:r>
+                          </m:sub>
+                        </m:sSub>
+                      </m:oMath>
+                    </m:oMathPara>
+                  </a14:m>
+                  <a:endParaRPr lang="en-US" altLang="zh-TW" sz="2000" dirty="0">
+                    <a:solidFill>
+                      <a:schemeClr val="bg1"/>
+                    </a:solidFill>
+                  </a:endParaRPr>
+                </a:p>
+              </p:txBody>
+            </p:sp>
+          </mc:Choice>
+          <mc:Fallback xmlns="">
+            <p:sp>
+              <p:nvSpPr>
+                <p:cNvPr id="260" name="文字方塊 259">
+                  <a:extLst>
+                    <a:ext uri="{FF2B5EF4-FFF2-40B4-BE49-F238E27FC236}">
+                      <a16:creationId xmlns:a16="http://schemas.microsoft.com/office/drawing/2014/main" id="{8D6AA90E-8E54-4F85-8069-79A6B681A2B3}"/>
+                    </a:ext>
+                  </a:extLst>
+                </p:cNvPr>
+                <p:cNvSpPr txBox="1">
+                  <a:spLocks noRot="1" noChangeAspect="1" noMove="1" noResize="1" noEditPoints="1" noAdjustHandles="1" noChangeArrowheads="1" noChangeShapeType="1" noTextEdit="1"/>
+                </p:cNvSpPr>
+                <p:nvPr/>
+              </p:nvSpPr>
+              <p:spPr>
+                <a:xfrm>
+                  <a:off x="7165989" y="2241866"/>
+                  <a:ext cx="1068086" cy="1024529"/>
+                </a:xfrm>
+                <a:prstGeom prst="rect">
+                  <a:avLst/>
+                </a:prstGeom>
+                <a:blipFill>
+                  <a:blip r:embed="rId10"/>
+                  <a:stretch>
+                    <a:fillRect l="-4412" b="-9091"/>
+                  </a:stretch>
+                </a:blipFill>
+              </p:spPr>
+              <p:txBody>
+                <a:bodyPr/>
+                <a:lstStyle/>
+                <a:p>
+                  <a:r>
+                    <a:rPr lang="zh-TW" altLang="en-US">
+                      <a:noFill/>
+                    </a:rPr>
+                    <a:t> </a:t>
+                  </a:r>
+                </a:p>
+              </p:txBody>
+            </p:sp>
+          </mc:Fallback>
+        </mc:AlternateContent>
+      </p:grpSp>
+      <p:grpSp>
+        <p:nvGrpSpPr>
+          <p:cNvPr id="252" name="群組 251">
+            <a:extLst>
+              <a:ext uri="{FF2B5EF4-FFF2-40B4-BE49-F238E27FC236}">
+                <a16:creationId xmlns:a16="http://schemas.microsoft.com/office/drawing/2014/main" id="{A591FB36-B7A7-42AE-80E7-EDF353484EA6}"/>
+              </a:ext>
+            </a:extLst>
+          </p:cNvPr>
+          <p:cNvGrpSpPr/>
+          <p:nvPr/>
+        </p:nvGrpSpPr>
+        <p:grpSpPr>
+          <a:xfrm>
+            <a:off x="6864312" y="1224937"/>
+            <a:ext cx="644641" cy="689099"/>
+            <a:chOff x="6583394" y="1501875"/>
+            <a:chExt cx="1650681" cy="1764520"/>
+          </a:xfrm>
+        </p:grpSpPr>
+        <p:grpSp>
+          <p:nvGrpSpPr>
+            <p:cNvPr id="253" name="群組 252">
+              <a:extLst>
+                <a:ext uri="{FF2B5EF4-FFF2-40B4-BE49-F238E27FC236}">
+                  <a16:creationId xmlns:a16="http://schemas.microsoft.com/office/drawing/2014/main" id="{62D89D06-43D4-4F08-8E21-76907DF78595}"/>
+                </a:ext>
+              </a:extLst>
+            </p:cNvPr>
+            <p:cNvGrpSpPr/>
+            <p:nvPr/>
+          </p:nvGrpSpPr>
+          <p:grpSpPr>
+            <a:xfrm>
+              <a:off x="6929132" y="2420541"/>
+              <a:ext cx="361452" cy="346736"/>
+              <a:chOff x="1373392" y="2391862"/>
+              <a:chExt cx="479433" cy="476535"/>
+            </a:xfrm>
+          </p:grpSpPr>
+          <p:sp>
+            <p:nvSpPr>
+              <p:cNvPr id="256" name="箭號: 向右 255">
+                <a:extLst>
+                  <a:ext uri="{FF2B5EF4-FFF2-40B4-BE49-F238E27FC236}">
+                    <a16:creationId xmlns:a16="http://schemas.microsoft.com/office/drawing/2014/main" id="{9903DA95-1A41-4EE6-BD54-31299C78B37E}"/>
+                  </a:ext>
+                </a:extLst>
+              </p:cNvPr>
+              <p:cNvSpPr/>
+              <p:nvPr/>
+            </p:nvSpPr>
+            <p:spPr>
+              <a:xfrm>
+                <a:off x="1411244" y="2735868"/>
+                <a:ext cx="441581" cy="132529"/>
+              </a:xfrm>
+              <a:prstGeom prst="rightArrow">
+                <a:avLst>
+                  <a:gd name="adj1" fmla="val 50000"/>
+                  <a:gd name="adj2" fmla="val 99023"/>
+                </a:avLst>
+              </a:prstGeom>
+              <a:solidFill>
+                <a:schemeClr val="bg1"/>
+              </a:solidFill>
+              <a:ln>
+                <a:solidFill>
+                  <a:schemeClr val="bg1"/>
+                </a:solidFill>
+              </a:ln>
+            </p:spPr>
+            <p:style>
+              <a:lnRef idx="2">
+                <a:schemeClr val="dk1">
+                  <a:shade val="50000"/>
+                </a:schemeClr>
+              </a:lnRef>
+              <a:fillRef idx="1">
+                <a:schemeClr val="dk1"/>
+              </a:fillRef>
+              <a:effectRef idx="0">
+                <a:schemeClr val="dk1"/>
+              </a:effectRef>
+              <a:fontRef idx="minor">
+                <a:schemeClr val="lt1"/>
+              </a:fontRef>
+            </p:style>
+            <p:txBody>
+              <a:bodyPr rtlCol="0" anchor="ctr"/>
+              <a:lstStyle/>
+              <a:p>
+                <a:pPr algn="ctr"/>
+                <a:endParaRPr lang="zh-TW" altLang="en-US" sz="2000">
+                  <a:solidFill>
+                    <a:schemeClr val="bg1"/>
+                  </a:solidFill>
+                </a:endParaRPr>
+              </a:p>
+            </p:txBody>
+          </p:sp>
+          <p:sp>
+            <p:nvSpPr>
+              <p:cNvPr id="257" name="箭號: 向右 256">
+                <a:extLst>
+                  <a:ext uri="{FF2B5EF4-FFF2-40B4-BE49-F238E27FC236}">
+                    <a16:creationId xmlns:a16="http://schemas.microsoft.com/office/drawing/2014/main" id="{031D0AFE-D964-4AF2-A069-A475F0E9CB46}"/>
+                  </a:ext>
+                </a:extLst>
+              </p:cNvPr>
+              <p:cNvSpPr/>
+              <p:nvPr/>
+            </p:nvSpPr>
+            <p:spPr>
+              <a:xfrm rot="16200000">
+                <a:off x="1218866" y="2546388"/>
+                <a:ext cx="441581" cy="132529"/>
+              </a:xfrm>
+              <a:prstGeom prst="rightArrow">
+                <a:avLst>
+                  <a:gd name="adj1" fmla="val 50000"/>
+                  <a:gd name="adj2" fmla="val 99023"/>
+                </a:avLst>
+              </a:prstGeom>
+              <a:solidFill>
+                <a:schemeClr val="bg1"/>
+              </a:solidFill>
+              <a:ln>
+                <a:solidFill>
+                  <a:schemeClr val="bg1"/>
+                </a:solidFill>
+              </a:ln>
+            </p:spPr>
+            <p:style>
+              <a:lnRef idx="2">
+                <a:schemeClr val="dk1">
+                  <a:shade val="50000"/>
+                </a:schemeClr>
+              </a:lnRef>
+              <a:fillRef idx="1">
+                <a:schemeClr val="dk1"/>
+              </a:fillRef>
+              <a:effectRef idx="0">
+                <a:schemeClr val="dk1"/>
+              </a:effectRef>
+              <a:fontRef idx="minor">
+                <a:schemeClr val="lt1"/>
+              </a:fontRef>
+            </p:style>
+            <p:txBody>
+              <a:bodyPr rtlCol="0" anchor="ctr"/>
+              <a:lstStyle/>
+              <a:p>
+                <a:pPr algn="ctr"/>
+                <a:endParaRPr lang="zh-TW" altLang="en-US" sz="2000" dirty="0">
+                  <a:solidFill>
+                    <a:schemeClr val="bg1"/>
+                  </a:solidFill>
+                </a:endParaRPr>
+              </a:p>
+            </p:txBody>
+          </p:sp>
+        </p:grpSp>
+        <mc:AlternateContent xmlns:mc="http://schemas.openxmlformats.org/markup-compatibility/2006" xmlns:a14="http://schemas.microsoft.com/office/drawing/2010/main">
+          <mc:Choice Requires="a14">
+            <p:sp>
+              <p:nvSpPr>
+                <p:cNvPr id="254" name="文字方塊 253">
+                  <a:extLst>
+                    <a:ext uri="{FF2B5EF4-FFF2-40B4-BE49-F238E27FC236}">
+                      <a16:creationId xmlns:a16="http://schemas.microsoft.com/office/drawing/2014/main" id="{99FB71F3-162E-4E1A-AB76-DD1BD9DAE1E5}"/>
+                    </a:ext>
+                  </a:extLst>
+                </p:cNvPr>
+                <p:cNvSpPr txBox="1"/>
+                <p:nvPr/>
+              </p:nvSpPr>
+              <p:spPr>
+                <a:xfrm>
+                  <a:off x="6583394" y="1501875"/>
+                  <a:ext cx="416137" cy="1086427"/>
+                </a:xfrm>
+                <a:prstGeom prst="rect">
+                  <a:avLst/>
+                </a:prstGeom>
+                <a:noFill/>
+              </p:spPr>
+              <p:txBody>
+                <a:bodyPr wrap="square" rtlCol="0">
+                  <a:spAutoFit/>
+                </a:bodyPr>
+                <a:lstStyle/>
+                <a:p>
+                  <a:pPr/>
+                  <a14:m>
+                    <m:oMathPara xmlns:m="http://schemas.openxmlformats.org/officeDocument/2006/math">
+                      <m:oMathParaPr>
+                        <m:jc m:val="centerGroup"/>
+                      </m:oMathParaPr>
+                      <m:oMath xmlns:m="http://schemas.openxmlformats.org/officeDocument/2006/math">
+                        <m:sSub>
+                          <m:sSubPr>
+                            <m:ctrlPr>
+                              <a:rPr lang="en-US" altLang="zh-TW" sz="2000" i="1">
+                                <a:solidFill>
+                                  <a:schemeClr val="bg1"/>
+                                </a:solidFill>
+                                <a:latin typeface="Cambria Math" panose="02040503050406030204" pitchFamily="18" charset="0"/>
+                              </a:rPr>
+                            </m:ctrlPr>
+                          </m:sSubPr>
+                          <m:e>
+                            <m:r>
+                              <a:rPr lang="en-US" altLang="zh-TW" sz="2000" i="1">
+                                <a:solidFill>
+                                  <a:schemeClr val="bg1"/>
+                                </a:solidFill>
+                                <a:latin typeface="Cambria Math" panose="02040503050406030204" pitchFamily="18" charset="0"/>
+                              </a:rPr>
+                              <m:t>𝑄</m:t>
+                            </m:r>
+                          </m:e>
+                          <m:sub>
+                            <m:r>
+                              <a:rPr lang="en-US" altLang="zh-TW" sz="2000" i="1">
+                                <a:solidFill>
+                                  <a:schemeClr val="bg1"/>
+                                </a:solidFill>
+                                <a:latin typeface="Cambria Math" panose="02040503050406030204" pitchFamily="18" charset="0"/>
+                              </a:rPr>
+                              <m:t>𝑦</m:t>
+                            </m:r>
+                          </m:sub>
+                        </m:sSub>
+                      </m:oMath>
+                    </m:oMathPara>
+                  </a14:m>
+                  <a:endParaRPr lang="en-US" altLang="zh-TW" sz="2000" dirty="0">
+                    <a:solidFill>
+                      <a:schemeClr val="bg1"/>
+                    </a:solidFill>
+                  </a:endParaRPr>
+                </a:p>
+              </p:txBody>
+            </p:sp>
+          </mc:Choice>
+          <mc:Fallback xmlns="">
+            <p:sp>
+              <p:nvSpPr>
+                <p:cNvPr id="254" name="文字方塊 253">
+                  <a:extLst>
+                    <a:ext uri="{FF2B5EF4-FFF2-40B4-BE49-F238E27FC236}">
+                      <a16:creationId xmlns:a16="http://schemas.microsoft.com/office/drawing/2014/main" id="{99FB71F3-162E-4E1A-AB76-DD1BD9DAE1E5}"/>
+                    </a:ext>
+                  </a:extLst>
+                </p:cNvPr>
+                <p:cNvSpPr txBox="1">
+                  <a:spLocks noRot="1" noChangeAspect="1" noMove="1" noResize="1" noEditPoints="1" noAdjustHandles="1" noChangeArrowheads="1" noChangeShapeType="1" noTextEdit="1"/>
+                </p:cNvSpPr>
+                <p:nvPr/>
+              </p:nvSpPr>
+              <p:spPr>
+                <a:xfrm>
+                  <a:off x="6583394" y="1501875"/>
+                  <a:ext cx="416137" cy="1086427"/>
+                </a:xfrm>
+                <a:prstGeom prst="rect">
+                  <a:avLst/>
+                </a:prstGeom>
+                <a:blipFill>
+                  <a:blip r:embed="rId11"/>
+                  <a:stretch>
+                    <a:fillRect l="-14815" r="-166667" b="-4286"/>
+                  </a:stretch>
+                </a:blipFill>
+              </p:spPr>
+              <p:txBody>
+                <a:bodyPr/>
+                <a:lstStyle/>
+                <a:p>
+                  <a:r>
+                    <a:rPr lang="zh-TW" altLang="en-US">
+                      <a:noFill/>
+                    </a:rPr>
+                    <a:t> </a:t>
+                  </a:r>
+                </a:p>
+              </p:txBody>
+            </p:sp>
+          </mc:Fallback>
+        </mc:AlternateContent>
+        <mc:AlternateContent xmlns:mc="http://schemas.openxmlformats.org/markup-compatibility/2006" xmlns:a14="http://schemas.microsoft.com/office/drawing/2010/main">
+          <mc:Choice Requires="a14">
+            <p:sp>
+              <p:nvSpPr>
+                <p:cNvPr id="255" name="文字方塊 254">
+                  <a:extLst>
+                    <a:ext uri="{FF2B5EF4-FFF2-40B4-BE49-F238E27FC236}">
+                      <a16:creationId xmlns:a16="http://schemas.microsoft.com/office/drawing/2014/main" id="{76658871-F9EA-4467-A10F-DFE1A7D200DC}"/>
+                    </a:ext>
+                  </a:extLst>
+                </p:cNvPr>
+                <p:cNvSpPr txBox="1"/>
+                <p:nvPr/>
+              </p:nvSpPr>
+              <p:spPr>
+                <a:xfrm>
+                  <a:off x="7165989" y="2241866"/>
+                  <a:ext cx="1068086" cy="1024529"/>
+                </a:xfrm>
+                <a:prstGeom prst="rect">
+                  <a:avLst/>
+                </a:prstGeom>
+                <a:noFill/>
+              </p:spPr>
+              <p:txBody>
+                <a:bodyPr wrap="square" rtlCol="0">
+                  <a:spAutoFit/>
+                </a:bodyPr>
+                <a:lstStyle/>
+                <a:p>
+                  <a:pPr/>
+                  <a14:m>
+                    <m:oMathPara xmlns:m="http://schemas.openxmlformats.org/officeDocument/2006/math">
+                      <m:oMathParaPr>
+                        <m:jc m:val="centerGroup"/>
+                      </m:oMathParaPr>
+                      <m:oMath xmlns:m="http://schemas.openxmlformats.org/officeDocument/2006/math">
+                        <m:sSub>
+                          <m:sSubPr>
+                            <m:ctrlPr>
+                              <a:rPr lang="en-US" altLang="zh-TW" sz="2000" i="1">
+                                <a:solidFill>
+                                  <a:schemeClr val="bg1"/>
+                                </a:solidFill>
+                                <a:latin typeface="Cambria Math" panose="02040503050406030204" pitchFamily="18" charset="0"/>
+                              </a:rPr>
+                            </m:ctrlPr>
+                          </m:sSubPr>
+                          <m:e>
+                            <m:r>
+                              <a:rPr lang="en-US" altLang="zh-TW" sz="2000" i="1">
+                                <a:solidFill>
+                                  <a:schemeClr val="bg1"/>
+                                </a:solidFill>
+                                <a:latin typeface="Cambria Math" panose="02040503050406030204" pitchFamily="18" charset="0"/>
+                              </a:rPr>
+                              <m:t>𝑄</m:t>
+                            </m:r>
+                          </m:e>
+                          <m:sub>
+                            <m:r>
+                              <a:rPr lang="en-US" altLang="zh-TW" sz="2000" i="1">
+                                <a:solidFill>
+                                  <a:schemeClr val="bg1"/>
+                                </a:solidFill>
+                                <a:latin typeface="Cambria Math" panose="02040503050406030204" pitchFamily="18" charset="0"/>
+                              </a:rPr>
+                              <m:t>𝑥</m:t>
+                            </m:r>
+                          </m:sub>
+                        </m:sSub>
+                      </m:oMath>
+                    </m:oMathPara>
+                  </a14:m>
+                  <a:endParaRPr lang="en-US" altLang="zh-TW" sz="2000" dirty="0">
+                    <a:solidFill>
+                      <a:schemeClr val="bg1"/>
+                    </a:solidFill>
+                  </a:endParaRPr>
+                </a:p>
+              </p:txBody>
+            </p:sp>
+          </mc:Choice>
+          <mc:Fallback xmlns="">
+            <p:sp>
+              <p:nvSpPr>
+                <p:cNvPr id="255" name="文字方塊 254">
+                  <a:extLst>
+                    <a:ext uri="{FF2B5EF4-FFF2-40B4-BE49-F238E27FC236}">
+                      <a16:creationId xmlns:a16="http://schemas.microsoft.com/office/drawing/2014/main" id="{76658871-F9EA-4467-A10F-DFE1A7D200DC}"/>
+                    </a:ext>
+                  </a:extLst>
+                </p:cNvPr>
+                <p:cNvSpPr txBox="1">
+                  <a:spLocks noRot="1" noChangeAspect="1" noMove="1" noResize="1" noEditPoints="1" noAdjustHandles="1" noChangeArrowheads="1" noChangeShapeType="1" noTextEdit="1"/>
+                </p:cNvSpPr>
+                <p:nvPr/>
+              </p:nvSpPr>
+              <p:spPr>
+                <a:xfrm>
+                  <a:off x="7165989" y="2241866"/>
+                  <a:ext cx="1068086" cy="1024529"/>
+                </a:xfrm>
+                <a:prstGeom prst="rect">
+                  <a:avLst/>
+                </a:prstGeom>
+                <a:blipFill>
+                  <a:blip r:embed="rId12"/>
+                  <a:stretch>
+                    <a:fillRect l="-4412" b="-9091"/>
+                  </a:stretch>
+                </a:blipFill>
+              </p:spPr>
+              <p:txBody>
+                <a:bodyPr/>
+                <a:lstStyle/>
+                <a:p>
+                  <a:r>
+                    <a:rPr lang="zh-TW" altLang="en-US">
+                      <a:noFill/>
+                    </a:rPr>
+                    <a:t> </a:t>
+                  </a:r>
+                </a:p>
+              </p:txBody>
+            </p:sp>
+          </mc:Fallback>
+        </mc:AlternateContent>
+      </p:grpSp>
+      <p:pic>
+        <p:nvPicPr>
+          <p:cNvPr id="2" name="圖片 1">
+            <a:extLst>
+              <a:ext uri="{FF2B5EF4-FFF2-40B4-BE49-F238E27FC236}">
+                <a16:creationId xmlns:a16="http://schemas.microsoft.com/office/drawing/2014/main" id="{6CF8991A-8115-470B-BE1B-5BBE22FEAAF2}"/>
+              </a:ext>
+            </a:extLst>
+          </p:cNvPr>
+          <p:cNvPicPr>
+            <a:picLocks noChangeAspect="1"/>
+          </p:cNvPicPr>
+          <p:nvPr/>
+        </p:nvPicPr>
+        <p:blipFill rotWithShape="1">
+          <a:blip r:embed="rId13">
+            <a:clrChange>
+              <a:clrFrom>
+                <a:srgbClr val="FFFFFF"/>
+              </a:clrFrom>
+              <a:clrTo>
+                <a:srgbClr val="FFFFFF">
+                  <a:alpha val="0"/>
+                </a:srgbClr>
+              </a:clrTo>
+            </a:clrChange>
+          </a:blip>
+          <a:srcRect t="77364"/>
+          <a:stretch/>
+        </p:blipFill>
+        <p:spPr>
+          <a:xfrm>
+            <a:off x="345570" y="3846606"/>
+            <a:ext cx="3565320" cy="553662"/>
+          </a:xfrm>
+          <a:prstGeom prst="rect">
+            <a:avLst/>
+          </a:prstGeom>
+        </p:spPr>
+      </p:pic>
+    </p:spTree>
+    <p:extLst>
+      <p:ext uri="{BB962C8B-B14F-4D97-AF65-F5344CB8AC3E}">
+        <p14:creationId xmlns:p14="http://schemas.microsoft.com/office/powerpoint/2010/main" val="4153734242"/>
+      </p:ext>
+    </p:extLst>
+  </p:cSld>
+  <p:clrMapOvr>
+    <a:masterClrMapping/>
+  </p:clrMapOvr>
+</p:sld>
+</file>
+
+<file path=ppt/slides/slide4.xml><?xml version="1.0" encoding="utf-8"?>
 <p:sld xmlns:a="http://schemas.openxmlformats.org/drawingml/2006/main" xmlns:r="http://schemas.openxmlformats.org/officeDocument/2006/relationships" xmlns:p="http://schemas.openxmlformats.org/presentationml/2006/main">
   <p:cSld>
     <p:spTree>
@@ -11654,10 +15890,10 @@
       </p:grpSpPr>
       <p:grpSp>
         <p:nvGrpSpPr>
-          <p:cNvPr id="5" name="群組 4">
+          <p:cNvPr id="2" name="群組 1">
             <a:extLst>
               <a:ext uri="{FF2B5EF4-FFF2-40B4-BE49-F238E27FC236}">
-                <a16:creationId xmlns:a16="http://schemas.microsoft.com/office/drawing/2014/main" id="{5A6F3EA4-88A7-4E1B-9C6F-2BA263CD50A3}"/>
+                <a16:creationId xmlns:a16="http://schemas.microsoft.com/office/drawing/2014/main" id="{E5F1CFE0-B657-4252-8741-715ACD1D7158}"/>
               </a:ext>
             </a:extLst>
           </p:cNvPr>
@@ -11666,9 +15902,9 @@
         </p:nvGrpSpPr>
         <p:grpSpPr>
           <a:xfrm>
-            <a:off x="863405" y="36970"/>
+            <a:off x="32353" y="36975"/>
             <a:ext cx="8179203" cy="5326743"/>
-            <a:chOff x="569686" y="765629"/>
+            <a:chOff x="32353" y="36975"/>
             <a:chExt cx="8179203" cy="5326743"/>
           </a:xfrm>
         </p:grpSpPr>
@@ -11686,7 +15922,7 @@
           </p:nvSpPr>
           <p:spPr>
             <a:xfrm>
-              <a:off x="569686" y="765629"/>
+              <a:off x="32353" y="36975"/>
               <a:ext cx="8179203" cy="5326743"/>
             </a:xfrm>
             <a:prstGeom prst="roundRect">
@@ -11753,7 +15989,7 @@
           </p:nvGrpSpPr>
           <p:grpSpPr>
             <a:xfrm>
-              <a:off x="6625755" y="3874077"/>
+              <a:off x="6088418" y="3145418"/>
               <a:ext cx="1825190" cy="1825188"/>
               <a:chOff x="8631015" y="5186974"/>
               <a:chExt cx="2090057" cy="2090057"/>
@@ -12245,7 +16481,7 @@
           </p:nvGrpSpPr>
           <p:grpSpPr>
             <a:xfrm>
-              <a:off x="4663050" y="3874077"/>
+              <a:off x="4125713" y="3145418"/>
               <a:ext cx="1825190" cy="1825188"/>
               <a:chOff x="-756975" y="5254023"/>
               <a:chExt cx="2090057" cy="2090057"/>
@@ -12739,7 +16975,7 @@
               </p:nvSpPr>
               <p:spPr>
                 <a:xfrm>
-                  <a:off x="6673640" y="3405310"/>
+                  <a:off x="6136308" y="2676656"/>
                   <a:ext cx="1766845" cy="507831"/>
                 </a:xfrm>
                 <a:prstGeom prst="rect">
@@ -12803,7 +17039,7 @@
               </p:nvSpPr>
               <p:spPr>
                 <a:xfrm>
-                  <a:off x="6673640" y="3405310"/>
+                  <a:off x="6136308" y="2676656"/>
                   <a:ext cx="1766845" cy="507831"/>
                 </a:xfrm>
                 <a:prstGeom prst="rect">
@@ -12845,7 +17081,7 @@
           </p:nvSpPr>
           <p:spPr>
             <a:xfrm>
-              <a:off x="745409" y="4096652"/>
+              <a:off x="208072" y="3367998"/>
               <a:ext cx="3840316" cy="507831"/>
             </a:xfrm>
             <a:prstGeom prst="rect">
@@ -12902,7 +17138,7 @@
           </p:nvSpPr>
           <p:spPr>
             <a:xfrm>
-              <a:off x="745409" y="2123767"/>
+              <a:off x="208072" y="1395113"/>
               <a:ext cx="3840316" cy="507831"/>
             </a:xfrm>
             <a:prstGeom prst="rect">
@@ -12959,7 +17195,7 @@
           </p:nvGrpSpPr>
           <p:grpSpPr>
             <a:xfrm>
-              <a:off x="5437825" y="4288423"/>
+              <a:off x="4900493" y="3559769"/>
               <a:ext cx="644641" cy="689099"/>
               <a:chOff x="6583394" y="1501875"/>
               <a:chExt cx="1650681" cy="1764520"/>
@@ -13108,8 +17344,8 @@
               </p:txBody>
             </p:sp>
           </p:grpSp>
-          <mc:AlternateContent xmlns:mc="http://schemas.openxmlformats.org/markup-compatibility/2006">
-            <mc:Choice xmlns:a14="http://schemas.microsoft.com/office/drawing/2010/main" Requires="a14">
+          <mc:AlternateContent xmlns:mc="http://schemas.openxmlformats.org/markup-compatibility/2006" xmlns:a14="http://schemas.microsoft.com/office/drawing/2010/main">
+            <mc:Choice Requires="a14">
               <p:sp>
                 <p:nvSpPr>
                   <p:cNvPr id="287" name="文字方塊 286">
@@ -13191,7 +17427,7 @@
                 </p:txBody>
               </p:sp>
             </mc:Choice>
-            <mc:Fallback>
+            <mc:Fallback xmlns="">
               <p:sp>
                 <p:nvSpPr>
                   <p:cNvPr id="287" name="文字方塊 286">
@@ -13236,8 +17472,8 @@
               </p:sp>
             </mc:Fallback>
           </mc:AlternateContent>
-          <mc:AlternateContent xmlns:mc="http://schemas.openxmlformats.org/markup-compatibility/2006">
-            <mc:Choice xmlns:a14="http://schemas.microsoft.com/office/drawing/2010/main" Requires="a14">
+          <mc:AlternateContent xmlns:mc="http://schemas.openxmlformats.org/markup-compatibility/2006" xmlns:a14="http://schemas.microsoft.com/office/drawing/2010/main">
+            <mc:Choice Requires="a14">
               <p:sp>
                 <p:nvSpPr>
                   <p:cNvPr id="288" name="文字方塊 287">
@@ -13319,7 +17555,7 @@
                 </p:txBody>
               </p:sp>
             </mc:Choice>
-            <mc:Fallback>
+            <mc:Fallback xmlns="">
               <p:sp>
                 <p:nvSpPr>
                   <p:cNvPr id="288" name="文字方塊 287">
@@ -13381,7 +17617,7 @@
               </p:nvSpPr>
               <p:spPr>
                 <a:xfrm>
-                  <a:off x="4587114" y="3405310"/>
+                  <a:off x="4049777" y="2676656"/>
                   <a:ext cx="2067276" cy="507831"/>
                 </a:xfrm>
                 <a:prstGeom prst="rect">
@@ -13439,7 +17675,7 @@
               </p:nvSpPr>
               <p:spPr>
                 <a:xfrm>
-                  <a:off x="4587114" y="3405310"/>
+                  <a:off x="4049777" y="2676656"/>
                   <a:ext cx="2067276" cy="507831"/>
                 </a:xfrm>
                 <a:prstGeom prst="rect">
@@ -13499,7 +17735,7 @@
           </p:blipFill>
           <p:spPr>
             <a:xfrm>
-              <a:off x="5131151" y="1095541"/>
+              <a:off x="4593819" y="366887"/>
               <a:ext cx="885827" cy="444781"/>
             </a:xfrm>
             <a:prstGeom prst="rect">
@@ -13539,7 +17775,7 @@
           </p:blipFill>
           <p:spPr>
             <a:xfrm>
-              <a:off x="7047015" y="1115876"/>
+              <a:off x="6509683" y="387222"/>
               <a:ext cx="885825" cy="426121"/>
             </a:xfrm>
             <a:prstGeom prst="rect">
@@ -13561,7 +17797,7 @@
           </p:nvGrpSpPr>
           <p:grpSpPr>
             <a:xfrm>
-              <a:off x="4663050" y="1541963"/>
+              <a:off x="4125713" y="813304"/>
               <a:ext cx="1825190" cy="1825188"/>
               <a:chOff x="5094694" y="9823325"/>
               <a:chExt cx="2090057" cy="2090057"/>
@@ -14077,7 +18313,7 @@
           </p:nvGrpSpPr>
           <p:grpSpPr>
             <a:xfrm>
-              <a:off x="6625755" y="1541963"/>
+              <a:off x="6088418" y="813304"/>
               <a:ext cx="1825190" cy="1825188"/>
               <a:chOff x="7828725" y="9933124"/>
               <a:chExt cx="2090057" cy="2090057"/>
@@ -14593,7 +18829,7 @@
           </p:nvGrpSpPr>
           <p:grpSpPr>
             <a:xfrm>
-              <a:off x="7401644" y="4288423"/>
+              <a:off x="6864312" y="3559769"/>
               <a:ext cx="644641" cy="689099"/>
               <a:chOff x="6583394" y="1501875"/>
               <a:chExt cx="1650681" cy="1764520"/>
@@ -14742,8 +18978,8 @@
               </p:txBody>
             </p:sp>
           </p:grpSp>
-          <mc:AlternateContent xmlns:mc="http://schemas.openxmlformats.org/markup-compatibility/2006">
-            <mc:Choice xmlns:a14="http://schemas.microsoft.com/office/drawing/2010/main" Requires="a14">
+          <mc:AlternateContent xmlns:mc="http://schemas.openxmlformats.org/markup-compatibility/2006" xmlns:a14="http://schemas.microsoft.com/office/drawing/2010/main">
+            <mc:Choice Requires="a14">
               <p:sp>
                 <p:nvSpPr>
                   <p:cNvPr id="264" name="文字方塊 263">
@@ -14825,7 +19061,7 @@
                 </p:txBody>
               </p:sp>
             </mc:Choice>
-            <mc:Fallback>
+            <mc:Fallback xmlns="">
               <p:sp>
                 <p:nvSpPr>
                   <p:cNvPr id="264" name="文字方塊 263">
@@ -14870,8 +19106,8 @@
               </p:sp>
             </mc:Fallback>
           </mc:AlternateContent>
-          <mc:AlternateContent xmlns:mc="http://schemas.openxmlformats.org/markup-compatibility/2006">
-            <mc:Choice xmlns:a14="http://schemas.microsoft.com/office/drawing/2010/main" Requires="a14">
+          <mc:AlternateContent xmlns:mc="http://schemas.openxmlformats.org/markup-compatibility/2006" xmlns:a14="http://schemas.microsoft.com/office/drawing/2010/main">
+            <mc:Choice Requires="a14">
               <p:sp>
                 <p:nvSpPr>
                   <p:cNvPr id="265" name="文字方塊 264">
@@ -14953,7 +19189,7 @@
                 </p:txBody>
               </p:sp>
             </mc:Choice>
-            <mc:Fallback>
+            <mc:Fallback xmlns="">
               <p:sp>
                 <p:nvSpPr>
                   <p:cNvPr id="265" name="文字方塊 264">
@@ -15013,7 +19249,7 @@
           </p:nvGrpSpPr>
           <p:grpSpPr>
             <a:xfrm>
-              <a:off x="5437825" y="1953591"/>
+              <a:off x="4900493" y="1224937"/>
               <a:ext cx="644641" cy="689099"/>
               <a:chOff x="6583394" y="1501875"/>
               <a:chExt cx="1650681" cy="1764520"/>
@@ -15162,8 +19398,8 @@
               </p:txBody>
             </p:sp>
           </p:grpSp>
-          <mc:AlternateContent xmlns:mc="http://schemas.openxmlformats.org/markup-compatibility/2006">
-            <mc:Choice xmlns:a14="http://schemas.microsoft.com/office/drawing/2010/main" Requires="a14">
+          <mc:AlternateContent xmlns:mc="http://schemas.openxmlformats.org/markup-compatibility/2006" xmlns:a14="http://schemas.microsoft.com/office/drawing/2010/main">
+            <mc:Choice Requires="a14">
               <p:sp>
                 <p:nvSpPr>
                   <p:cNvPr id="259" name="文字方塊 258">
@@ -15245,7 +19481,7 @@
                 </p:txBody>
               </p:sp>
             </mc:Choice>
-            <mc:Fallback>
+            <mc:Fallback xmlns="">
               <p:sp>
                 <p:nvSpPr>
                   <p:cNvPr id="259" name="文字方塊 258">
@@ -15290,8 +19526,8 @@
               </p:sp>
             </mc:Fallback>
           </mc:AlternateContent>
-          <mc:AlternateContent xmlns:mc="http://schemas.openxmlformats.org/markup-compatibility/2006">
-            <mc:Choice xmlns:a14="http://schemas.microsoft.com/office/drawing/2010/main" Requires="a14">
+          <mc:AlternateContent xmlns:mc="http://schemas.openxmlformats.org/markup-compatibility/2006" xmlns:a14="http://schemas.microsoft.com/office/drawing/2010/main">
+            <mc:Choice Requires="a14">
               <p:sp>
                 <p:nvSpPr>
                   <p:cNvPr id="260" name="文字方塊 259">
@@ -15373,7 +19609,7 @@
                 </p:txBody>
               </p:sp>
             </mc:Choice>
-            <mc:Fallback>
+            <mc:Fallback xmlns="">
               <p:sp>
                 <p:nvSpPr>
                   <p:cNvPr id="260" name="文字方塊 259">
@@ -15433,7 +19669,7 @@
           </p:nvGrpSpPr>
           <p:grpSpPr>
             <a:xfrm>
-              <a:off x="7401644" y="1953591"/>
+              <a:off x="6864312" y="1224937"/>
               <a:ext cx="644641" cy="689099"/>
               <a:chOff x="6583394" y="1501875"/>
               <a:chExt cx="1650681" cy="1764520"/>
@@ -15582,8 +19818,8 @@
               </p:txBody>
             </p:sp>
           </p:grpSp>
-          <mc:AlternateContent xmlns:mc="http://schemas.openxmlformats.org/markup-compatibility/2006">
-            <mc:Choice xmlns:a14="http://schemas.microsoft.com/office/drawing/2010/main" Requires="a14">
+          <mc:AlternateContent xmlns:mc="http://schemas.openxmlformats.org/markup-compatibility/2006" xmlns:a14="http://schemas.microsoft.com/office/drawing/2010/main">
+            <mc:Choice Requires="a14">
               <p:sp>
                 <p:nvSpPr>
                   <p:cNvPr id="254" name="文字方塊 253">
@@ -15665,7 +19901,7 @@
                 </p:txBody>
               </p:sp>
             </mc:Choice>
-            <mc:Fallback>
+            <mc:Fallback xmlns="">
               <p:sp>
                 <p:nvSpPr>
                   <p:cNvPr id="254" name="文字方塊 253">
@@ -15710,8 +19946,8 @@
               </p:sp>
             </mc:Fallback>
           </mc:AlternateContent>
-          <mc:AlternateContent xmlns:mc="http://schemas.openxmlformats.org/markup-compatibility/2006">
-            <mc:Choice xmlns:a14="http://schemas.microsoft.com/office/drawing/2010/main" Requires="a14">
+          <mc:AlternateContent xmlns:mc="http://schemas.openxmlformats.org/markup-compatibility/2006" xmlns:a14="http://schemas.microsoft.com/office/drawing/2010/main">
+            <mc:Choice Requires="a14">
               <p:sp>
                 <p:nvSpPr>
                   <p:cNvPr id="255" name="文字方塊 254">
@@ -15793,7 +20029,7 @@
                 </p:txBody>
               </p:sp>
             </mc:Choice>
-            <mc:Fallback>
+            <mc:Fallback xmlns="">
               <p:sp>
                 <p:nvSpPr>
                   <p:cNvPr id="255" name="文字方塊 254">
@@ -15841,10 +20077,10 @@
         </p:grpSp>
         <p:pic>
           <p:nvPicPr>
-            <p:cNvPr id="2" name="圖片 1">
+            <p:cNvPr id="3" name="圖片 2">
               <a:extLst>
                 <a:ext uri="{FF2B5EF4-FFF2-40B4-BE49-F238E27FC236}">
-                  <a16:creationId xmlns:a16="http://schemas.microsoft.com/office/drawing/2014/main" id="{6CF8991A-8115-470B-BE1B-5BBE22FEAAF2}"/>
+                  <a16:creationId xmlns:a16="http://schemas.microsoft.com/office/drawing/2014/main" id="{1A3FECD0-A8C4-4868-9A24-604494E3817A}"/>
                 </a:ext>
               </a:extLst>
             </p:cNvPr>
@@ -15866,13 +20102,13 @@
                 </a:clrTo>
               </a:clrChange>
             </a:blip>
-            <a:srcRect t="77364"/>
+            <a:srcRect l="1959" r="5941"/>
             <a:stretch/>
           </p:blipFill>
           <p:spPr>
             <a:xfrm>
-              <a:off x="882907" y="4575265"/>
-              <a:ext cx="3565320" cy="553662"/>
+              <a:off x="572933" y="3775053"/>
+              <a:ext cx="3099435" cy="689962"/>
             </a:xfrm>
             <a:prstGeom prst="rect">
               <a:avLst/>
@@ -15883,7 +20119,7 @@
     </p:spTree>
     <p:extLst>
       <p:ext uri="{BB962C8B-B14F-4D97-AF65-F5344CB8AC3E}">
-        <p14:creationId xmlns:p14="http://schemas.microsoft.com/office/powerpoint/2010/main" val="4153734242"/>
+        <p14:creationId xmlns:p14="http://schemas.microsoft.com/office/powerpoint/2010/main" val="2300675540"/>
       </p:ext>
     </p:extLst>
   </p:cSld>
